--- a/项目汇报PPT.pptx
+++ b/项目汇报PPT.pptx
@@ -29558,7 +29558,7 @@
             <a:avLst/>
           </a:prstGeom>
           <a:solidFill>
-            <a:srgbClr val="6E6862"/>
+            <a:srgbClr val="B9B1A9"/>
           </a:solidFill>
           <a:ln>
             <a:noFill/>
@@ -29587,7 +29587,7 @@
             <a:avLst/>
           </a:prstGeom>
           <a:solidFill>
-            <a:srgbClr val="8C857E"/>
+            <a:srgbClr val="C9C2BB"/>
           </a:solidFill>
           <a:ln>
             <a:noFill/>
@@ -29616,7 +29616,7 @@
             <a:avLst/>
           </a:prstGeom>
           <a:solidFill>
-            <a:srgbClr val="AAA39C"/>
+            <a:srgbClr val="D8D2CC"/>
           </a:solidFill>
           <a:ln>
             <a:noFill/>
@@ -29645,7 +29645,7 @@
             <a:avLst/>
           </a:prstGeom>
           <a:solidFill>
-            <a:srgbClr val="C6C0BA"/>
+            <a:srgbClr val="E6E1DC"/>
           </a:solidFill>
           <a:ln>
             <a:noFill/>
@@ -31734,7 +31734,7 @@
             <a:avLst/>
           </a:prstGeom>
           <a:solidFill>
-            <a:srgbClr val="6E6862"/>
+            <a:srgbClr val="B9B1A9"/>
           </a:solidFill>
           <a:ln>
             <a:noFill/>
@@ -31763,7 +31763,7 @@
             <a:avLst/>
           </a:prstGeom>
           <a:solidFill>
-            <a:srgbClr val="6E6862"/>
+            <a:srgbClr val="B9B1A9"/>
           </a:solidFill>
           <a:ln>
             <a:noFill/>
@@ -31792,7 +31792,7 @@
             <a:avLst/>
           </a:prstGeom>
           <a:solidFill>
-            <a:srgbClr val="8C857E"/>
+            <a:srgbClr val="C9C2BB"/>
           </a:solidFill>
           <a:ln>
             <a:noFill/>
@@ -31821,7 +31821,7 @@
             <a:avLst/>
           </a:prstGeom>
           <a:solidFill>
-            <a:srgbClr val="8C857E"/>
+            <a:srgbClr val="C9C2BB"/>
           </a:solidFill>
           <a:ln>
             <a:noFill/>
@@ -31850,7 +31850,7 @@
             <a:avLst/>
           </a:prstGeom>
           <a:solidFill>
-            <a:srgbClr val="AAA39C"/>
+            <a:srgbClr val="D8D2CC"/>
           </a:solidFill>
           <a:ln>
             <a:noFill/>
@@ -31879,7 +31879,7 @@
             <a:avLst/>
           </a:prstGeom>
           <a:solidFill>
-            <a:srgbClr val="AAA39C"/>
+            <a:srgbClr val="D8D2CC"/>
           </a:solidFill>
           <a:ln>
             <a:noFill/>
@@ -31908,7 +31908,7 @@
             <a:avLst/>
           </a:prstGeom>
           <a:solidFill>
-            <a:srgbClr val="C6C0BA"/>
+            <a:srgbClr val="E6E1DC"/>
           </a:solidFill>
           <a:ln>
             <a:noFill/>
@@ -31937,7 +31937,7 @@
             <a:avLst/>
           </a:prstGeom>
           <a:solidFill>
-            <a:srgbClr val="C6C0BA"/>
+            <a:srgbClr val="E6E1DC"/>
           </a:solidFill>
           <a:ln>
             <a:noFill/>
@@ -45384,36 +45384,7 @@
       </p:cxnSp>
       <p:sp>
         <p:nvSpPr>
-          <p:cNvPr id="11" name="Rectangle 10"/>
-          <p:cNvSpPr/>
-          <p:nvPr/>
-        </p:nvSpPr>
-        <p:spPr>
-          <a:xfrm>
-            <a:off x="406400" y="1625600"/>
-            <a:ext cx="609600" cy="444500"/>
-          </a:xfrm>
-          <a:prstGeom prst="rect">
-            <a:avLst/>
-          </a:prstGeom>
-          <a:solidFill>
-            <a:srgbClr val="F6F4F1"/>
-          </a:solidFill>
-          <a:ln>
-            <a:noFill/>
-          </a:ln>
-        </p:spPr>
-        <p:txBody>
-          <a:bodyPr rtlCol="0" anchor="ctr" lIns="0" rIns="0" tIns="0" bIns="0"/>
-          <a:lstStyle/>
-          <a:p>
-            <a:pPr algn="ctr"/>
-          </a:p>
-        </p:txBody>
-      </p:sp>
-      <p:sp>
-        <p:nvSpPr>
-          <p:cNvPr id="12" name="TextBox 11"/>
+          <p:cNvPr id="11" name="TextBox 10"/>
           <p:cNvSpPr txBox="1"/>
           <p:nvPr/>
         </p:nvSpPr>
@@ -45455,7 +45426,7 @@
       </p:sp>
       <p:sp>
         <p:nvSpPr>
-          <p:cNvPr id="13" name="TextBox 12"/>
+          <p:cNvPr id="12" name="TextBox 11"/>
           <p:cNvSpPr txBox="1"/>
           <p:nvPr/>
         </p:nvSpPr>
@@ -45511,36 +45482,7 @@
       </p:sp>
       <p:sp>
         <p:nvSpPr>
-          <p:cNvPr id="14" name="Rectangle 13"/>
-          <p:cNvSpPr/>
-          <p:nvPr/>
-        </p:nvSpPr>
-        <p:spPr>
-          <a:xfrm>
-            <a:off x="2781300" y="1625600"/>
-            <a:ext cx="711200" cy="444500"/>
-          </a:xfrm>
-          <a:prstGeom prst="rect">
-            <a:avLst/>
-          </a:prstGeom>
-          <a:solidFill>
-            <a:srgbClr val="F6F4F1"/>
-          </a:solidFill>
-          <a:ln>
-            <a:noFill/>
-          </a:ln>
-        </p:spPr>
-        <p:txBody>
-          <a:bodyPr rtlCol="0" anchor="ctr" lIns="0" rIns="0" tIns="0" bIns="0"/>
-          <a:lstStyle/>
-          <a:p>
-            <a:pPr algn="ctr"/>
-          </a:p>
-        </p:txBody>
-      </p:sp>
-      <p:sp>
-        <p:nvSpPr>
-          <p:cNvPr id="15" name="TextBox 14"/>
+          <p:cNvPr id="13" name="TextBox 12"/>
           <p:cNvSpPr txBox="1"/>
           <p:nvPr/>
         </p:nvSpPr>
@@ -45582,7 +45524,7 @@
       </p:sp>
       <p:sp>
         <p:nvSpPr>
-          <p:cNvPr id="16" name="TextBox 15"/>
+          <p:cNvPr id="14" name="TextBox 13"/>
           <p:cNvSpPr txBox="1"/>
           <p:nvPr/>
         </p:nvSpPr>
@@ -45638,7 +45580,7 @@
       </p:sp>
       <p:cxnSp>
         <p:nvCxnSpPr>
-          <p:cNvPr id="17" name="Connector 16"/>
+          <p:cNvPr id="15" name="Connector 14"/>
           <p:cNvCxnSpPr/>
           <p:nvPr/>
         </p:nvCxnSpPr>
@@ -45660,36 +45602,7 @@
       </p:cxnSp>
       <p:sp>
         <p:nvSpPr>
-          <p:cNvPr id="18" name="Rectangle 17"/>
-          <p:cNvSpPr/>
-          <p:nvPr/>
-        </p:nvSpPr>
-        <p:spPr>
-          <a:xfrm>
-            <a:off x="406400" y="2070100"/>
-            <a:ext cx="609600" cy="273050"/>
-          </a:xfrm>
-          <a:prstGeom prst="rect">
-            <a:avLst/>
-          </a:prstGeom>
-          <a:solidFill>
-            <a:srgbClr val="F6F4F1"/>
-          </a:solidFill>
-          <a:ln>
-            <a:noFill/>
-          </a:ln>
-        </p:spPr>
-        <p:txBody>
-          <a:bodyPr rtlCol="0" anchor="ctr" lIns="0" rIns="0" tIns="0" bIns="0"/>
-          <a:lstStyle/>
-          <a:p>
-            <a:pPr algn="ctr"/>
-          </a:p>
-        </p:txBody>
-      </p:sp>
-      <p:sp>
-        <p:nvSpPr>
-          <p:cNvPr id="19" name="TextBox 18"/>
+          <p:cNvPr id="16" name="TextBox 15"/>
           <p:cNvSpPr txBox="1"/>
           <p:nvPr/>
         </p:nvSpPr>
@@ -45731,7 +45644,7 @@
       </p:sp>
       <p:sp>
         <p:nvSpPr>
-          <p:cNvPr id="20" name="TextBox 19"/>
+          <p:cNvPr id="17" name="TextBox 16"/>
           <p:cNvSpPr txBox="1"/>
           <p:nvPr/>
         </p:nvSpPr>
@@ -45773,36 +45686,7 @@
       </p:sp>
       <p:sp>
         <p:nvSpPr>
-          <p:cNvPr id="21" name="Rectangle 20"/>
-          <p:cNvSpPr/>
-          <p:nvPr/>
-        </p:nvSpPr>
-        <p:spPr>
-          <a:xfrm>
-            <a:off x="2781300" y="2070100"/>
-            <a:ext cx="711200" cy="273050"/>
-          </a:xfrm>
-          <a:prstGeom prst="rect">
-            <a:avLst/>
-          </a:prstGeom>
-          <a:solidFill>
-            <a:srgbClr val="F6F4F1"/>
-          </a:solidFill>
-          <a:ln>
-            <a:noFill/>
-          </a:ln>
-        </p:spPr>
-        <p:txBody>
-          <a:bodyPr rtlCol="0" anchor="ctr" lIns="0" rIns="0" tIns="0" bIns="0"/>
-          <a:lstStyle/>
-          <a:p>
-            <a:pPr algn="ctr"/>
-          </a:p>
-        </p:txBody>
-      </p:sp>
-      <p:sp>
-        <p:nvSpPr>
-          <p:cNvPr id="22" name="TextBox 21"/>
+          <p:cNvPr id="18" name="TextBox 17"/>
           <p:cNvSpPr txBox="1"/>
           <p:nvPr/>
         </p:nvSpPr>
@@ -45844,7 +45728,7 @@
       </p:sp>
       <p:sp>
         <p:nvSpPr>
-          <p:cNvPr id="23" name="TextBox 22"/>
+          <p:cNvPr id="19" name="TextBox 18"/>
           <p:cNvSpPr txBox="1"/>
           <p:nvPr/>
         </p:nvSpPr>
@@ -45886,7 +45770,7 @@
       </p:sp>
       <p:cxnSp>
         <p:nvCxnSpPr>
-          <p:cNvPr id="24" name="Connector 23"/>
+          <p:cNvPr id="20" name="Connector 19"/>
           <p:cNvCxnSpPr/>
           <p:nvPr/>
         </p:nvCxnSpPr>
@@ -45908,36 +45792,7 @@
       </p:cxnSp>
       <p:sp>
         <p:nvSpPr>
-          <p:cNvPr id="25" name="Rectangle 24"/>
-          <p:cNvSpPr/>
-          <p:nvPr/>
-        </p:nvSpPr>
-        <p:spPr>
-          <a:xfrm>
-            <a:off x="406400" y="2343150"/>
-            <a:ext cx="609600" cy="273050"/>
-          </a:xfrm>
-          <a:prstGeom prst="rect">
-            <a:avLst/>
-          </a:prstGeom>
-          <a:solidFill>
-            <a:srgbClr val="F6F4F1"/>
-          </a:solidFill>
-          <a:ln>
-            <a:noFill/>
-          </a:ln>
-        </p:spPr>
-        <p:txBody>
-          <a:bodyPr rtlCol="0" anchor="ctr" lIns="0" rIns="0" tIns="0" bIns="0"/>
-          <a:lstStyle/>
-          <a:p>
-            <a:pPr algn="ctr"/>
-          </a:p>
-        </p:txBody>
-      </p:sp>
-      <p:sp>
-        <p:nvSpPr>
-          <p:cNvPr id="26" name="TextBox 25"/>
+          <p:cNvPr id="21" name="TextBox 20"/>
           <p:cNvSpPr txBox="1"/>
           <p:nvPr/>
         </p:nvSpPr>
@@ -45979,7 +45834,7 @@
       </p:sp>
       <p:sp>
         <p:nvSpPr>
-          <p:cNvPr id="27" name="TextBox 26"/>
+          <p:cNvPr id="22" name="TextBox 21"/>
           <p:cNvSpPr txBox="1"/>
           <p:nvPr/>
         </p:nvSpPr>
@@ -46021,36 +45876,7 @@
       </p:sp>
       <p:sp>
         <p:nvSpPr>
-          <p:cNvPr id="28" name="Rectangle 27"/>
-          <p:cNvSpPr/>
-          <p:nvPr/>
-        </p:nvSpPr>
-        <p:spPr>
-          <a:xfrm>
-            <a:off x="2781300" y="2343150"/>
-            <a:ext cx="711200" cy="273050"/>
-          </a:xfrm>
-          <a:prstGeom prst="rect">
-            <a:avLst/>
-          </a:prstGeom>
-          <a:solidFill>
-            <a:srgbClr val="F6F4F1"/>
-          </a:solidFill>
-          <a:ln>
-            <a:noFill/>
-          </a:ln>
-        </p:spPr>
-        <p:txBody>
-          <a:bodyPr rtlCol="0" anchor="ctr" lIns="0" rIns="0" tIns="0" bIns="0"/>
-          <a:lstStyle/>
-          <a:p>
-            <a:pPr algn="ctr"/>
-          </a:p>
-        </p:txBody>
-      </p:sp>
-      <p:sp>
-        <p:nvSpPr>
-          <p:cNvPr id="29" name="TextBox 28"/>
+          <p:cNvPr id="23" name="TextBox 22"/>
           <p:cNvSpPr txBox="1"/>
           <p:nvPr/>
         </p:nvSpPr>
@@ -46092,7 +45918,7 @@
       </p:sp>
       <p:sp>
         <p:nvSpPr>
-          <p:cNvPr id="30" name="TextBox 29"/>
+          <p:cNvPr id="24" name="TextBox 23"/>
           <p:cNvSpPr txBox="1"/>
           <p:nvPr/>
         </p:nvSpPr>
@@ -46134,7 +45960,7 @@
       </p:sp>
       <p:cxnSp>
         <p:nvCxnSpPr>
-          <p:cNvPr id="31" name="Connector 30"/>
+          <p:cNvPr id="25" name="Connector 24"/>
           <p:cNvCxnSpPr/>
           <p:nvPr/>
         </p:nvCxnSpPr>
@@ -46156,36 +45982,7 @@
       </p:cxnSp>
       <p:sp>
         <p:nvSpPr>
-          <p:cNvPr id="32" name="Rectangle 31"/>
-          <p:cNvSpPr/>
-          <p:nvPr/>
-        </p:nvSpPr>
-        <p:spPr>
-          <a:xfrm>
-            <a:off x="406400" y="2616200"/>
-            <a:ext cx="609600" cy="273050"/>
-          </a:xfrm>
-          <a:prstGeom prst="rect">
-            <a:avLst/>
-          </a:prstGeom>
-          <a:solidFill>
-            <a:srgbClr val="F6F4F1"/>
-          </a:solidFill>
-          <a:ln>
-            <a:noFill/>
-          </a:ln>
-        </p:spPr>
-        <p:txBody>
-          <a:bodyPr rtlCol="0" anchor="ctr" lIns="0" rIns="0" tIns="0" bIns="0"/>
-          <a:lstStyle/>
-          <a:p>
-            <a:pPr algn="ctr"/>
-          </a:p>
-        </p:txBody>
-      </p:sp>
-      <p:sp>
-        <p:nvSpPr>
-          <p:cNvPr id="33" name="TextBox 32"/>
+          <p:cNvPr id="26" name="TextBox 25"/>
           <p:cNvSpPr txBox="1"/>
           <p:nvPr/>
         </p:nvSpPr>
@@ -46227,7 +46024,7 @@
       </p:sp>
       <p:sp>
         <p:nvSpPr>
-          <p:cNvPr id="34" name="TextBox 33"/>
+          <p:cNvPr id="27" name="TextBox 26"/>
           <p:cNvSpPr txBox="1"/>
           <p:nvPr/>
         </p:nvSpPr>
@@ -46269,36 +46066,7 @@
       </p:sp>
       <p:sp>
         <p:nvSpPr>
-          <p:cNvPr id="35" name="Rectangle 34"/>
-          <p:cNvSpPr/>
-          <p:nvPr/>
-        </p:nvSpPr>
-        <p:spPr>
-          <a:xfrm>
-            <a:off x="2781300" y="2616200"/>
-            <a:ext cx="711200" cy="273050"/>
-          </a:xfrm>
-          <a:prstGeom prst="rect">
-            <a:avLst/>
-          </a:prstGeom>
-          <a:solidFill>
-            <a:srgbClr val="F6F4F1"/>
-          </a:solidFill>
-          <a:ln>
-            <a:noFill/>
-          </a:ln>
-        </p:spPr>
-        <p:txBody>
-          <a:bodyPr rtlCol="0" anchor="ctr" lIns="0" rIns="0" tIns="0" bIns="0"/>
-          <a:lstStyle/>
-          <a:p>
-            <a:pPr algn="ctr"/>
-          </a:p>
-        </p:txBody>
-      </p:sp>
-      <p:sp>
-        <p:nvSpPr>
-          <p:cNvPr id="36" name="TextBox 35"/>
+          <p:cNvPr id="28" name="TextBox 27"/>
           <p:cNvSpPr txBox="1"/>
           <p:nvPr/>
         </p:nvSpPr>
@@ -46340,7 +46108,7 @@
       </p:sp>
       <p:sp>
         <p:nvSpPr>
-          <p:cNvPr id="37" name="TextBox 36"/>
+          <p:cNvPr id="29" name="TextBox 28"/>
           <p:cNvSpPr txBox="1"/>
           <p:nvPr/>
         </p:nvSpPr>
@@ -46382,7 +46150,7 @@
       </p:sp>
       <p:cxnSp>
         <p:nvCxnSpPr>
-          <p:cNvPr id="38" name="Connector 37"/>
+          <p:cNvPr id="30" name="Connector 29"/>
           <p:cNvCxnSpPr/>
           <p:nvPr/>
         </p:nvCxnSpPr>
@@ -46404,36 +46172,7 @@
       </p:cxnSp>
       <p:sp>
         <p:nvSpPr>
-          <p:cNvPr id="39" name="Rectangle 38"/>
-          <p:cNvSpPr/>
-          <p:nvPr/>
-        </p:nvSpPr>
-        <p:spPr>
-          <a:xfrm>
-            <a:off x="406400" y="2889250"/>
-            <a:ext cx="609600" cy="273050"/>
-          </a:xfrm>
-          <a:prstGeom prst="rect">
-            <a:avLst/>
-          </a:prstGeom>
-          <a:solidFill>
-            <a:srgbClr val="F6F4F1"/>
-          </a:solidFill>
-          <a:ln>
-            <a:noFill/>
-          </a:ln>
-        </p:spPr>
-        <p:txBody>
-          <a:bodyPr rtlCol="0" anchor="ctr" lIns="0" rIns="0" tIns="0" bIns="0"/>
-          <a:lstStyle/>
-          <a:p>
-            <a:pPr algn="ctr"/>
-          </a:p>
-        </p:txBody>
-      </p:sp>
-      <p:sp>
-        <p:nvSpPr>
-          <p:cNvPr id="40" name="TextBox 39"/>
+          <p:cNvPr id="31" name="TextBox 30"/>
           <p:cNvSpPr txBox="1"/>
           <p:nvPr/>
         </p:nvSpPr>
@@ -46475,7 +46214,7 @@
       </p:sp>
       <p:sp>
         <p:nvSpPr>
-          <p:cNvPr id="41" name="TextBox 40"/>
+          <p:cNvPr id="32" name="TextBox 31"/>
           <p:cNvSpPr txBox="1"/>
           <p:nvPr/>
         </p:nvSpPr>
@@ -46517,36 +46256,7 @@
       </p:sp>
       <p:sp>
         <p:nvSpPr>
-          <p:cNvPr id="42" name="Rectangle 41"/>
-          <p:cNvSpPr/>
-          <p:nvPr/>
-        </p:nvSpPr>
-        <p:spPr>
-          <a:xfrm>
-            <a:off x="2781300" y="2889250"/>
-            <a:ext cx="711200" cy="273050"/>
-          </a:xfrm>
-          <a:prstGeom prst="rect">
-            <a:avLst/>
-          </a:prstGeom>
-          <a:solidFill>
-            <a:srgbClr val="F6F4F1"/>
-          </a:solidFill>
-          <a:ln>
-            <a:noFill/>
-          </a:ln>
-        </p:spPr>
-        <p:txBody>
-          <a:bodyPr rtlCol="0" anchor="ctr" lIns="0" rIns="0" tIns="0" bIns="0"/>
-          <a:lstStyle/>
-          <a:p>
-            <a:pPr algn="ctr"/>
-          </a:p>
-        </p:txBody>
-      </p:sp>
-      <p:sp>
-        <p:nvSpPr>
-          <p:cNvPr id="43" name="TextBox 42"/>
+          <p:cNvPr id="33" name="TextBox 32"/>
           <p:cNvSpPr txBox="1"/>
           <p:nvPr/>
         </p:nvSpPr>
@@ -46588,7 +46298,7 @@
       </p:sp>
       <p:sp>
         <p:nvSpPr>
-          <p:cNvPr id="44" name="TextBox 43"/>
+          <p:cNvPr id="34" name="TextBox 33"/>
           <p:cNvSpPr txBox="1"/>
           <p:nvPr/>
         </p:nvSpPr>
@@ -46630,7 +46340,7 @@
       </p:sp>
       <p:cxnSp>
         <p:nvCxnSpPr>
-          <p:cNvPr id="45" name="Connector 44"/>
+          <p:cNvPr id="35" name="Connector 34"/>
           <p:cNvCxnSpPr/>
           <p:nvPr/>
         </p:nvCxnSpPr>
@@ -46652,7 +46362,7 @@
       </p:cxnSp>
       <p:sp>
         <p:nvSpPr>
-          <p:cNvPr id="46" name="TextBox 45"/>
+          <p:cNvPr id="36" name="TextBox 35"/>
           <p:cNvSpPr txBox="1"/>
           <p:nvPr/>
         </p:nvSpPr>
@@ -46694,7 +46404,7 @@
       </p:sp>
       <p:sp>
         <p:nvSpPr>
-          <p:cNvPr id="47" name="TextBox 46"/>
+          <p:cNvPr id="37" name="TextBox 36"/>
           <p:cNvSpPr txBox="1"/>
           <p:nvPr/>
         </p:nvSpPr>
@@ -46736,7 +46446,7 @@
       </p:sp>
       <p:sp>
         <p:nvSpPr>
-          <p:cNvPr id="48" name="Rectangle 47"/>
+          <p:cNvPr id="38" name="Rectangle 37"/>
           <p:cNvSpPr/>
           <p:nvPr/>
         </p:nvSpPr>
@@ -46768,7 +46478,7 @@
       </p:sp>
       <p:sp>
         <p:nvSpPr>
-          <p:cNvPr id="49" name="Rectangle 48"/>
+          <p:cNvPr id="39" name="Rectangle 38"/>
           <p:cNvSpPr/>
           <p:nvPr/>
         </p:nvSpPr>
@@ -46797,7 +46507,7 @@
       </p:sp>
       <p:pic>
         <p:nvPicPr>
-          <p:cNvPr id="50" name="Picture 49" descr="settings-automation-A61C22-1_6.png"/>
+          <p:cNvPr id="40" name="Picture 39" descr="settings-automation-A61C22-1_6.png"/>
           <p:cNvPicPr>
             <a:picLocks noChangeAspect="1"/>
           </p:cNvPicPr>
@@ -46821,7 +46531,7 @@
       </p:pic>
       <p:sp>
         <p:nvSpPr>
-          <p:cNvPr id="51" name="Rectangle 50"/>
+          <p:cNvPr id="41" name="Rectangle 40"/>
           <p:cNvSpPr/>
           <p:nvPr/>
         </p:nvSpPr>
@@ -46868,7 +46578,7 @@
       </p:sp>
       <p:sp>
         <p:nvSpPr>
-          <p:cNvPr id="52" name="TextBox 51"/>
+          <p:cNvPr id="42" name="TextBox 41"/>
           <p:cNvSpPr txBox="1"/>
           <p:nvPr/>
         </p:nvSpPr>
@@ -46910,7 +46620,7 @@
       </p:sp>
       <p:sp>
         <p:nvSpPr>
-          <p:cNvPr id="53" name="Rectangle 52"/>
+          <p:cNvPr id="43" name="Rectangle 42"/>
           <p:cNvSpPr/>
           <p:nvPr/>
         </p:nvSpPr>
@@ -46942,7 +46652,7 @@
       </p:sp>
       <p:sp>
         <p:nvSpPr>
-          <p:cNvPr id="54" name="Rectangle 53"/>
+          <p:cNvPr id="44" name="Rectangle 43"/>
           <p:cNvSpPr/>
           <p:nvPr/>
         </p:nvSpPr>
@@ -46971,7 +46681,7 @@
       </p:sp>
       <p:pic>
         <p:nvPicPr>
-          <p:cNvPr id="55" name="Picture 54" descr="robot-A61C22-1_6.png"/>
+          <p:cNvPr id="45" name="Picture 44" descr="robot-A61C22-1_6.png"/>
           <p:cNvPicPr>
             <a:picLocks noChangeAspect="1"/>
           </p:cNvPicPr>
@@ -46995,7 +46705,7 @@
       </p:pic>
       <p:sp>
         <p:nvSpPr>
-          <p:cNvPr id="56" name="Rectangle 55"/>
+          <p:cNvPr id="46" name="Rectangle 45"/>
           <p:cNvSpPr/>
           <p:nvPr/>
         </p:nvSpPr>
@@ -47042,7 +46752,7 @@
       </p:sp>
       <p:sp>
         <p:nvSpPr>
-          <p:cNvPr id="57" name="TextBox 56"/>
+          <p:cNvPr id="47" name="TextBox 46"/>
           <p:cNvSpPr txBox="1"/>
           <p:nvPr/>
         </p:nvSpPr>
@@ -47098,7 +46808,7 @@
       </p:sp>
       <p:sp>
         <p:nvSpPr>
-          <p:cNvPr id="58" name="Rectangle 57"/>
+          <p:cNvPr id="48" name="Rectangle 47"/>
           <p:cNvSpPr/>
           <p:nvPr/>
         </p:nvSpPr>
@@ -47130,7 +46840,7 @@
       </p:sp>
       <p:sp>
         <p:nvSpPr>
-          <p:cNvPr id="59" name="Rectangle 58"/>
+          <p:cNvPr id="49" name="Rectangle 48"/>
           <p:cNvSpPr/>
           <p:nvPr/>
         </p:nvSpPr>
@@ -47159,7 +46869,7 @@
       </p:sp>
       <p:pic>
         <p:nvPicPr>
-          <p:cNvPr id="60" name="Picture 59" descr="train-A61C22-1_6.png"/>
+          <p:cNvPr id="50" name="Picture 49" descr="train-A61C22-1_6.png"/>
           <p:cNvPicPr>
             <a:picLocks noChangeAspect="1"/>
           </p:cNvPicPr>
@@ -47183,7 +46893,7 @@
       </p:pic>
       <p:sp>
         <p:nvSpPr>
-          <p:cNvPr id="61" name="Rectangle 60"/>
+          <p:cNvPr id="51" name="Rectangle 50"/>
           <p:cNvSpPr/>
           <p:nvPr/>
         </p:nvSpPr>
@@ -47230,7 +46940,7 @@
       </p:sp>
       <p:sp>
         <p:nvSpPr>
-          <p:cNvPr id="62" name="TextBox 61"/>
+          <p:cNvPr id="52" name="TextBox 51"/>
           <p:cNvSpPr txBox="1"/>
           <p:nvPr/>
         </p:nvSpPr>
@@ -47272,7 +46982,7 @@
       </p:sp>
       <p:sp>
         <p:nvSpPr>
-          <p:cNvPr id="63" name="Rectangle 62"/>
+          <p:cNvPr id="53" name="Rectangle 52"/>
           <p:cNvSpPr/>
           <p:nvPr/>
         </p:nvSpPr>
@@ -47304,7 +47014,7 @@
       </p:sp>
       <p:sp>
         <p:nvSpPr>
-          <p:cNvPr id="64" name="Rectangle 63"/>
+          <p:cNvPr id="54" name="Rectangle 53"/>
           <p:cNvSpPr/>
           <p:nvPr/>
         </p:nvSpPr>
@@ -47333,7 +47043,7 @@
       </p:sp>
       <p:pic>
         <p:nvPicPr>
-          <p:cNvPr id="65" name="Picture 64" descr="file-certificate-A61C22-1_6.png"/>
+          <p:cNvPr id="55" name="Picture 54" descr="file-certificate-A61C22-1_6.png"/>
           <p:cNvPicPr>
             <a:picLocks noChangeAspect="1"/>
           </p:cNvPicPr>
@@ -47357,7 +47067,7 @@
       </p:pic>
       <p:sp>
         <p:nvSpPr>
-          <p:cNvPr id="66" name="Rectangle 65"/>
+          <p:cNvPr id="56" name="Rectangle 55"/>
           <p:cNvSpPr/>
           <p:nvPr/>
         </p:nvSpPr>
@@ -47404,7 +47114,7 @@
       </p:sp>
       <p:sp>
         <p:nvSpPr>
-          <p:cNvPr id="67" name="TextBox 66"/>
+          <p:cNvPr id="57" name="TextBox 56"/>
           <p:cNvSpPr txBox="1"/>
           <p:nvPr/>
         </p:nvSpPr>
@@ -47446,7 +47156,7 @@
       </p:sp>
       <p:sp>
         <p:nvSpPr>
-          <p:cNvPr id="68" name="Rectangle 67"/>
+          <p:cNvPr id="58" name="Rectangle 57"/>
           <p:cNvSpPr/>
           <p:nvPr/>
         </p:nvSpPr>
@@ -47478,7 +47188,7 @@
       </p:sp>
       <p:sp>
         <p:nvSpPr>
-          <p:cNvPr id="69" name="Rectangle 68"/>
+          <p:cNvPr id="59" name="Rectangle 58"/>
           <p:cNvSpPr/>
           <p:nvPr/>
         </p:nvSpPr>
@@ -47507,7 +47217,7 @@
       </p:sp>
       <p:pic>
         <p:nvPicPr>
-          <p:cNvPr id="70" name="Picture 69" descr="report-analytics-A61C22-1_6.png"/>
+          <p:cNvPr id="60" name="Picture 59" descr="report-analytics-A61C22-1_6.png"/>
           <p:cNvPicPr>
             <a:picLocks noChangeAspect="1"/>
           </p:cNvPicPr>
@@ -47531,7 +47241,7 @@
       </p:pic>
       <p:sp>
         <p:nvSpPr>
-          <p:cNvPr id="71" name="Rectangle 70"/>
+          <p:cNvPr id="61" name="Rectangle 60"/>
           <p:cNvSpPr/>
           <p:nvPr/>
         </p:nvSpPr>
@@ -47578,7 +47288,7 @@
       </p:sp>
       <p:sp>
         <p:nvSpPr>
-          <p:cNvPr id="72" name="TextBox 71"/>
+          <p:cNvPr id="62" name="TextBox 61"/>
           <p:cNvSpPr txBox="1"/>
           <p:nvPr/>
         </p:nvSpPr>
@@ -47620,7 +47330,7 @@
       </p:sp>
       <p:sp>
         <p:nvSpPr>
-          <p:cNvPr id="73" name="Rectangle 72"/>
+          <p:cNvPr id="63" name="Rectangle 62"/>
           <p:cNvSpPr/>
           <p:nvPr/>
         </p:nvSpPr>
@@ -47652,7 +47362,7 @@
       </p:sp>
       <p:sp>
         <p:nvSpPr>
-          <p:cNvPr id="74" name="Rectangle 73"/>
+          <p:cNvPr id="64" name="Rectangle 63"/>
           <p:cNvSpPr/>
           <p:nvPr/>
         </p:nvSpPr>
@@ -47681,7 +47391,7 @@
       </p:sp>
       <p:pic>
         <p:nvPicPr>
-          <p:cNvPr id="75" name="Picture 74" descr="certificate-A61C22-1_6.png"/>
+          <p:cNvPr id="65" name="Picture 64" descr="certificate-A61C22-1_6.png"/>
           <p:cNvPicPr>
             <a:picLocks noChangeAspect="1"/>
           </p:cNvPicPr>
@@ -47705,7 +47415,7 @@
       </p:pic>
       <p:sp>
         <p:nvSpPr>
-          <p:cNvPr id="76" name="Rectangle 75"/>
+          <p:cNvPr id="66" name="Rectangle 65"/>
           <p:cNvSpPr/>
           <p:nvPr/>
         </p:nvSpPr>
@@ -47752,7 +47462,7 @@
       </p:sp>
       <p:sp>
         <p:nvSpPr>
-          <p:cNvPr id="77" name="TextBox 76"/>
+          <p:cNvPr id="67" name="TextBox 66"/>
           <p:cNvSpPr txBox="1"/>
           <p:nvPr/>
         </p:nvSpPr>
@@ -47808,7 +47518,7 @@
       </p:sp>
       <p:sp>
         <p:nvSpPr>
-          <p:cNvPr id="78" name="TextBox 77"/>
+          <p:cNvPr id="68" name="TextBox 67"/>
           <p:cNvSpPr txBox="1"/>
           <p:nvPr/>
         </p:nvSpPr>
@@ -47850,7 +47560,7 @@
       </p:sp>
       <p:sp>
         <p:nvSpPr>
-          <p:cNvPr id="79" name="TextBox 78"/>
+          <p:cNvPr id="69" name="TextBox 68"/>
           <p:cNvSpPr txBox="1"/>
           <p:nvPr/>
         </p:nvSpPr>
@@ -47892,7 +47602,7 @@
       </p:sp>
       <p:sp>
         <p:nvSpPr>
-          <p:cNvPr id="80" name="Rectangle 79"/>
+          <p:cNvPr id="70" name="Rectangle 69"/>
           <p:cNvSpPr/>
           <p:nvPr/>
         </p:nvSpPr>
@@ -47939,7 +47649,7 @@
       </p:sp>
       <p:sp>
         <p:nvSpPr>
-          <p:cNvPr id="81" name="Rectangle 80"/>
+          <p:cNvPr id="71" name="Rectangle 70"/>
           <p:cNvSpPr/>
           <p:nvPr/>
         </p:nvSpPr>
@@ -47986,7 +47696,7 @@
       </p:sp>
       <p:sp>
         <p:nvSpPr>
-          <p:cNvPr id="82" name="Rectangle 81"/>
+          <p:cNvPr id="72" name="Rectangle 71"/>
           <p:cNvSpPr/>
           <p:nvPr/>
         </p:nvSpPr>
@@ -47999,7 +47709,7 @@
             <a:avLst/>
           </a:prstGeom>
           <a:solidFill>
-            <a:srgbClr val="6E6862"/>
+            <a:srgbClr val="B9B1A9"/>
           </a:solidFill>
           <a:ln>
             <a:noFill/>
@@ -48015,7 +47725,7 @@
       </p:sp>
       <p:sp>
         <p:nvSpPr>
-          <p:cNvPr id="83" name="Rectangle 82"/>
+          <p:cNvPr id="73" name="Rectangle 72"/>
           <p:cNvSpPr/>
           <p:nvPr/>
         </p:nvSpPr>
@@ -48028,7 +47738,7 @@
             <a:avLst/>
           </a:prstGeom>
           <a:solidFill>
-            <a:srgbClr val="8C857E"/>
+            <a:srgbClr val="C9C2BB"/>
           </a:solidFill>
           <a:ln>
             <a:noFill/>
@@ -48044,7 +47754,7 @@
       </p:sp>
       <p:sp>
         <p:nvSpPr>
-          <p:cNvPr id="84" name="Rectangle 83"/>
+          <p:cNvPr id="74" name="Rectangle 73"/>
           <p:cNvSpPr/>
           <p:nvPr/>
         </p:nvSpPr>
@@ -48057,7 +47767,7 @@
             <a:avLst/>
           </a:prstGeom>
           <a:solidFill>
-            <a:srgbClr val="AAA39C"/>
+            <a:srgbClr val="D8D2CC"/>
           </a:solidFill>
           <a:ln>
             <a:noFill/>
@@ -48073,7 +47783,7 @@
       </p:sp>
       <p:sp>
         <p:nvSpPr>
-          <p:cNvPr id="85" name="Rectangle 84"/>
+          <p:cNvPr id="75" name="Rectangle 74"/>
           <p:cNvSpPr/>
           <p:nvPr/>
         </p:nvSpPr>
@@ -48086,7 +47796,7 @@
             <a:avLst/>
           </a:prstGeom>
           <a:solidFill>
-            <a:srgbClr val="C6C0BA"/>
+            <a:srgbClr val="E6E1DC"/>
           </a:solidFill>
           <a:ln>
             <a:noFill/>
@@ -48102,7 +47812,7 @@
       </p:sp>
       <p:sp>
         <p:nvSpPr>
-          <p:cNvPr id="86" name="TextBox 85"/>
+          <p:cNvPr id="76" name="TextBox 75"/>
           <p:cNvSpPr txBox="1"/>
           <p:nvPr/>
         </p:nvSpPr>
@@ -48144,7 +47854,7 @@
       </p:sp>
       <p:sp>
         <p:nvSpPr>
-          <p:cNvPr id="87" name="TextBox 86"/>
+          <p:cNvPr id="77" name="TextBox 76"/>
           <p:cNvSpPr txBox="1"/>
           <p:nvPr/>
         </p:nvSpPr>
@@ -48186,7 +47896,7 @@
       </p:sp>
       <p:sp>
         <p:nvSpPr>
-          <p:cNvPr id="88" name="TextBox 87"/>
+          <p:cNvPr id="78" name="TextBox 77"/>
           <p:cNvSpPr txBox="1"/>
           <p:nvPr/>
         </p:nvSpPr>
@@ -48228,7 +47938,7 @@
       </p:sp>
       <p:sp>
         <p:nvSpPr>
-          <p:cNvPr id="89" name="TextBox 88"/>
+          <p:cNvPr id="79" name="TextBox 78"/>
           <p:cNvSpPr txBox="1"/>
           <p:nvPr/>
         </p:nvSpPr>
@@ -48270,7 +47980,7 @@
       </p:sp>
       <p:sp>
         <p:nvSpPr>
-          <p:cNvPr id="90" name="Rectangle 89"/>
+          <p:cNvPr id="80" name="Rectangle 79"/>
           <p:cNvSpPr/>
           <p:nvPr/>
         </p:nvSpPr>
@@ -48302,7 +48012,7 @@
       </p:sp>
       <p:sp>
         <p:nvSpPr>
-          <p:cNvPr id="91" name="Rectangle 90"/>
+          <p:cNvPr id="81" name="Rectangle 80"/>
           <p:cNvSpPr/>
           <p:nvPr/>
         </p:nvSpPr>
@@ -48315,7 +48025,7 @@
             <a:avLst/>
           </a:prstGeom>
           <a:solidFill>
-            <a:srgbClr val="F6F4F1"/>
+            <a:srgbClr val="FFFFFF"/>
           </a:solidFill>
           <a:ln>
             <a:noFill/>
@@ -48347,9 +48057,31 @@
           </a:p>
         </p:txBody>
       </p:sp>
-      <p:sp>
-        <p:nvSpPr>
-          <p:cNvPr id="92" name="TextBox 91"/>
+      <p:cxnSp>
+        <p:nvCxnSpPr>
+          <p:cNvPr id="82" name="Connector 81"/>
+          <p:cNvCxnSpPr/>
+          <p:nvPr/>
+        </p:nvCxnSpPr>
+        <p:spPr>
+          <a:xfrm>
+            <a:off x="6477000" y="1701800"/>
+            <a:ext cx="0" cy="495300"/>
+          </a:xfrm>
+          <a:prstGeom prst="line">
+            <a:avLst/>
+          </a:prstGeom>
+          <a:ln w="6350">
+            <a:solidFill>
+              <a:srgbClr val="ECE8E3"/>
+            </a:solidFill>
+            <a:round/>
+          </a:ln>
+        </p:spPr>
+      </p:cxnSp>
+      <p:sp>
+        <p:nvSpPr>
+          <p:cNvPr id="83" name="TextBox 82"/>
           <p:cNvSpPr txBox="1"/>
           <p:nvPr/>
         </p:nvSpPr>
@@ -48391,7 +48123,7 @@
       </p:sp>
       <p:sp>
         <p:nvSpPr>
-          <p:cNvPr id="93" name="TextBox 92"/>
+          <p:cNvPr id="84" name="TextBox 83"/>
           <p:cNvSpPr txBox="1"/>
           <p:nvPr/>
         </p:nvSpPr>
@@ -48433,7 +48165,7 @@
       </p:sp>
       <p:sp>
         <p:nvSpPr>
-          <p:cNvPr id="94" name="Rectangle 93"/>
+          <p:cNvPr id="85" name="Rectangle 84"/>
           <p:cNvSpPr/>
           <p:nvPr/>
         </p:nvSpPr>
@@ -48465,7 +48197,7 @@
       </p:sp>
       <p:sp>
         <p:nvSpPr>
-          <p:cNvPr id="95" name="Rectangle 94"/>
+          <p:cNvPr id="86" name="Rectangle 85"/>
           <p:cNvSpPr/>
           <p:nvPr/>
         </p:nvSpPr>
@@ -48478,7 +48210,7 @@
             <a:avLst/>
           </a:prstGeom>
           <a:solidFill>
-            <a:srgbClr val="F6F4F1"/>
+            <a:srgbClr val="FFFFFF"/>
           </a:solidFill>
           <a:ln>
             <a:noFill/>
@@ -48510,9 +48242,31 @@
           </a:p>
         </p:txBody>
       </p:sp>
-      <p:sp>
-        <p:nvSpPr>
-          <p:cNvPr id="96" name="TextBox 95"/>
+      <p:cxnSp>
+        <p:nvCxnSpPr>
+          <p:cNvPr id="87" name="Connector 86"/>
+          <p:cNvCxnSpPr/>
+          <p:nvPr/>
+        </p:nvCxnSpPr>
+        <p:spPr>
+          <a:xfrm>
+            <a:off x="6477000" y="2413000"/>
+            <a:ext cx="0" cy="495300"/>
+          </a:xfrm>
+          <a:prstGeom prst="line">
+            <a:avLst/>
+          </a:prstGeom>
+          <a:ln w="6350">
+            <a:solidFill>
+              <a:srgbClr val="ECE8E3"/>
+            </a:solidFill>
+            <a:round/>
+          </a:ln>
+        </p:spPr>
+      </p:cxnSp>
+      <p:sp>
+        <p:nvSpPr>
+          <p:cNvPr id="88" name="TextBox 87"/>
           <p:cNvSpPr txBox="1"/>
           <p:nvPr/>
         </p:nvSpPr>
@@ -48554,7 +48308,7 @@
       </p:sp>
       <p:sp>
         <p:nvSpPr>
-          <p:cNvPr id="97" name="TextBox 96"/>
+          <p:cNvPr id="89" name="TextBox 88"/>
           <p:cNvSpPr txBox="1"/>
           <p:nvPr/>
         </p:nvSpPr>
@@ -48596,7 +48350,7 @@
       </p:sp>
       <p:sp>
         <p:nvSpPr>
-          <p:cNvPr id="98" name="Rectangle 97"/>
+          <p:cNvPr id="90" name="Rectangle 89"/>
           <p:cNvSpPr/>
           <p:nvPr/>
         </p:nvSpPr>
@@ -48628,7 +48382,7 @@
       </p:sp>
       <p:sp>
         <p:nvSpPr>
-          <p:cNvPr id="99" name="Rectangle 98"/>
+          <p:cNvPr id="91" name="Rectangle 90"/>
           <p:cNvSpPr/>
           <p:nvPr/>
         </p:nvSpPr>
@@ -48675,7 +48429,7 @@
       </p:sp>
       <p:sp>
         <p:nvSpPr>
-          <p:cNvPr id="100" name="TextBox 99"/>
+          <p:cNvPr id="92" name="TextBox 91"/>
           <p:cNvSpPr txBox="1"/>
           <p:nvPr/>
         </p:nvSpPr>
@@ -48717,7 +48471,7 @@
       </p:sp>
       <p:sp>
         <p:nvSpPr>
-          <p:cNvPr id="101" name="Rectangle 100"/>
+          <p:cNvPr id="93" name="Rectangle 92"/>
           <p:cNvSpPr/>
           <p:nvPr/>
         </p:nvSpPr>
@@ -48767,7 +48521,7 @@
       </p:sp>
       <p:sp>
         <p:nvSpPr>
-          <p:cNvPr id="102" name="TextBox 101"/>
+          <p:cNvPr id="94" name="TextBox 93"/>
           <p:cNvSpPr txBox="1"/>
           <p:nvPr/>
         </p:nvSpPr>
@@ -48856,7 +48610,7 @@
       </p:sp>
       <p:sp>
         <p:nvSpPr>
-          <p:cNvPr id="103" name="Rectangle 102"/>
+          <p:cNvPr id="95" name="Rectangle 94"/>
           <p:cNvSpPr/>
           <p:nvPr/>
         </p:nvSpPr>
@@ -48888,7 +48642,7 @@
       </p:sp>
       <p:sp>
         <p:nvSpPr>
-          <p:cNvPr id="104" name="Rectangle 103"/>
+          <p:cNvPr id="96" name="Rectangle 95"/>
           <p:cNvSpPr/>
           <p:nvPr/>
         </p:nvSpPr>
@@ -48901,7 +48655,7 @@
             <a:avLst/>
           </a:prstGeom>
           <a:solidFill>
-            <a:srgbClr val="F6F4F1"/>
+            <a:srgbClr val="FFFFFF"/>
           </a:solidFill>
           <a:ln>
             <a:noFill/>
@@ -48933,9 +48687,31 @@
           </a:p>
         </p:txBody>
       </p:sp>
-      <p:sp>
-        <p:nvSpPr>
-          <p:cNvPr id="105" name="TextBox 104"/>
+      <p:cxnSp>
+        <p:nvCxnSpPr>
+          <p:cNvPr id="97" name="Connector 96"/>
+          <p:cNvCxnSpPr/>
+          <p:nvPr/>
+        </p:nvCxnSpPr>
+        <p:spPr>
+          <a:xfrm>
+            <a:off x="6477000" y="4203700"/>
+            <a:ext cx="0" cy="495300"/>
+          </a:xfrm>
+          <a:prstGeom prst="line">
+            <a:avLst/>
+          </a:prstGeom>
+          <a:ln w="6350">
+            <a:solidFill>
+              <a:srgbClr val="ECE8E3"/>
+            </a:solidFill>
+            <a:round/>
+          </a:ln>
+        </p:spPr>
+      </p:cxnSp>
+      <p:sp>
+        <p:nvSpPr>
+          <p:cNvPr id="98" name="TextBox 97"/>
           <p:cNvSpPr txBox="1"/>
           <p:nvPr/>
         </p:nvSpPr>
@@ -48977,7 +48753,7 @@
       </p:sp>
       <p:sp>
         <p:nvSpPr>
-          <p:cNvPr id="106" name="TextBox 105"/>
+          <p:cNvPr id="99" name="TextBox 98"/>
           <p:cNvSpPr txBox="1"/>
           <p:nvPr/>
         </p:nvSpPr>
@@ -49019,7 +48795,7 @@
       </p:sp>
       <p:sp>
         <p:nvSpPr>
-          <p:cNvPr id="107" name="Rectangle 106"/>
+          <p:cNvPr id="100" name="Rectangle 99"/>
           <p:cNvSpPr/>
           <p:nvPr/>
         </p:nvSpPr>
@@ -49051,7 +48827,7 @@
       </p:sp>
       <p:sp>
         <p:nvSpPr>
-          <p:cNvPr id="108" name="Rectangle 107"/>
+          <p:cNvPr id="101" name="Rectangle 100"/>
           <p:cNvSpPr/>
           <p:nvPr/>
         </p:nvSpPr>
@@ -49064,7 +48840,7 @@
             <a:avLst/>
           </a:prstGeom>
           <a:solidFill>
-            <a:srgbClr val="F6F4F1"/>
+            <a:srgbClr val="FFFFFF"/>
           </a:solidFill>
           <a:ln>
             <a:noFill/>
@@ -49096,9 +48872,31 @@
           </a:p>
         </p:txBody>
       </p:sp>
-      <p:sp>
-        <p:nvSpPr>
-          <p:cNvPr id="109" name="TextBox 108"/>
+      <p:cxnSp>
+        <p:nvCxnSpPr>
+          <p:cNvPr id="102" name="Connector 101"/>
+          <p:cNvCxnSpPr/>
+          <p:nvPr/>
+        </p:nvCxnSpPr>
+        <p:spPr>
+          <a:xfrm>
+            <a:off x="6477000" y="4914900"/>
+            <a:ext cx="0" cy="495300"/>
+          </a:xfrm>
+          <a:prstGeom prst="line">
+            <a:avLst/>
+          </a:prstGeom>
+          <a:ln w="6350">
+            <a:solidFill>
+              <a:srgbClr val="ECE8E3"/>
+            </a:solidFill>
+            <a:round/>
+          </a:ln>
+        </p:spPr>
+      </p:cxnSp>
+      <p:sp>
+        <p:nvSpPr>
+          <p:cNvPr id="103" name="TextBox 102"/>
           <p:cNvSpPr txBox="1"/>
           <p:nvPr/>
         </p:nvSpPr>
@@ -49140,7 +48938,7 @@
       </p:sp>
       <p:sp>
         <p:nvSpPr>
-          <p:cNvPr id="110" name="TextBox 109"/>
+          <p:cNvPr id="104" name="TextBox 103"/>
           <p:cNvSpPr txBox="1"/>
           <p:nvPr/>
         </p:nvSpPr>
@@ -49182,7 +48980,7 @@
       </p:sp>
       <p:cxnSp>
         <p:nvCxnSpPr>
-          <p:cNvPr id="111" name="Connector 110"/>
+          <p:cNvPr id="105" name="Connector 104"/>
           <p:cNvCxnSpPr/>
           <p:nvPr/>
         </p:nvCxnSpPr>
@@ -49205,7 +49003,7 @@
       </p:cxnSp>
       <p:sp>
         <p:nvSpPr>
-          <p:cNvPr id="112" name="Rectangle 111"/>
+          <p:cNvPr id="106" name="Rectangle 105"/>
           <p:cNvSpPr/>
           <p:nvPr/>
         </p:nvSpPr>
@@ -49238,7 +49036,7 @@
       </p:sp>
       <p:sp>
         <p:nvSpPr>
-          <p:cNvPr id="113" name="Rectangle 112"/>
+          <p:cNvPr id="107" name="Rectangle 106"/>
           <p:cNvSpPr/>
           <p:nvPr/>
         </p:nvSpPr>
@@ -49251,7 +49049,7 @@
             <a:avLst/>
           </a:prstGeom>
           <a:solidFill>
-            <a:srgbClr val="FAF9F7"/>
+            <a:srgbClr val="FFFFFF"/>
           </a:solidFill>
           <a:ln>
             <a:noFill/>
@@ -49283,9 +49081,31 @@
           </a:p>
         </p:txBody>
       </p:sp>
-      <p:sp>
-        <p:nvSpPr>
-          <p:cNvPr id="114" name="TextBox 113"/>
+      <p:cxnSp>
+        <p:nvCxnSpPr>
+          <p:cNvPr id="108" name="Connector 107"/>
+          <p:cNvCxnSpPr/>
+          <p:nvPr/>
+        </p:nvCxnSpPr>
+        <p:spPr>
+          <a:xfrm>
+            <a:off x="6477000" y="5753100"/>
+            <a:ext cx="0" cy="495300"/>
+          </a:xfrm>
+          <a:prstGeom prst="line">
+            <a:avLst/>
+          </a:prstGeom>
+          <a:ln w="6350">
+            <a:solidFill>
+              <a:srgbClr val="ECE8E3"/>
+            </a:solidFill>
+            <a:round/>
+          </a:ln>
+        </p:spPr>
+      </p:cxnSp>
+      <p:sp>
+        <p:nvSpPr>
+          <p:cNvPr id="109" name="TextBox 108"/>
           <p:cNvSpPr txBox="1"/>
           <p:nvPr/>
         </p:nvSpPr>
@@ -49327,7 +49147,7 @@
       </p:sp>
       <p:sp>
         <p:nvSpPr>
-          <p:cNvPr id="115" name="Rectangle 114"/>
+          <p:cNvPr id="110" name="Rectangle 109"/>
           <p:cNvSpPr/>
           <p:nvPr/>
         </p:nvSpPr>
@@ -49374,7 +49194,7 @@
       </p:sp>
       <p:sp>
         <p:nvSpPr>
-          <p:cNvPr id="116" name="TextBox 115"/>
+          <p:cNvPr id="111" name="TextBox 110"/>
           <p:cNvSpPr txBox="1"/>
           <p:nvPr/>
         </p:nvSpPr>

--- a/项目汇报PPT.pptx
+++ b/项目汇报PPT.pptx
@@ -8361,7 +8361,7 @@
         <p:spPr>
           <a:xfrm>
             <a:off x="2260600" y="1358900"/>
-            <a:ext cx="9525000" cy="711200"/>
+            <a:ext cx="9525000" cy="673100"/>
           </a:xfrm>
           <a:prstGeom prst="rect">
             <a:avLst/>
@@ -8390,7 +8390,7 @@
         <p:spPr>
           <a:xfrm>
             <a:off x="2260600" y="1358900"/>
-            <a:ext cx="19050" cy="711200"/>
+            <a:ext cx="19050" cy="673100"/>
           </a:xfrm>
           <a:prstGeom prst="rect">
             <a:avLst/>
@@ -8418,7 +8418,7 @@
         </p:nvSpPr>
         <p:spPr>
           <a:xfrm>
-            <a:off x="2413000" y="1447800"/>
+            <a:off x="2413000" y="1435100"/>
             <a:ext cx="635000" cy="177800"/>
           </a:xfrm>
           <a:prstGeom prst="rect">
@@ -8468,8 +8468,8 @@
         </p:nvSpPr>
         <p:spPr>
           <a:xfrm>
-            <a:off x="2413000" y="1676400"/>
-            <a:ext cx="5384800" cy="368300"/>
+            <a:off x="2413000" y="1651000"/>
+            <a:ext cx="5384800" cy="355600"/>
           </a:xfrm>
           <a:prstGeom prst="rect">
             <a:avLst/>
@@ -8510,8 +8510,8 @@
         </p:nvCxnSpPr>
         <p:spPr>
           <a:xfrm>
-            <a:off x="7975600" y="1473200"/>
-            <a:ext cx="0" cy="482600"/>
+            <a:off x="7975600" y="1460500"/>
+            <a:ext cx="0" cy="469900"/>
           </a:xfrm>
           <a:prstGeom prst="line">
             <a:avLst/>
@@ -8532,7 +8532,7 @@
         </p:nvSpPr>
         <p:spPr>
           <a:xfrm>
-            <a:off x="8153400" y="1447800"/>
+            <a:off x="8153400" y="1435100"/>
             <a:ext cx="1524000" cy="177800"/>
           </a:xfrm>
           <a:prstGeom prst="rect">
@@ -8574,8 +8574,8 @@
         </p:nvSpPr>
         <p:spPr>
           <a:xfrm>
-            <a:off x="8153400" y="1676400"/>
-            <a:ext cx="3454400" cy="368300"/>
+            <a:off x="8153400" y="1651000"/>
+            <a:ext cx="3454400" cy="355600"/>
           </a:xfrm>
           <a:prstGeom prst="rect">
             <a:avLst/>
@@ -8627,8 +8627,8 @@
         </p:nvSpPr>
         <p:spPr>
           <a:xfrm>
-            <a:off x="2260600" y="2171700"/>
-            <a:ext cx="2266950" cy="1270000"/>
+            <a:off x="2260600" y="2095500"/>
+            <a:ext cx="2266950" cy="1308100"/>
           </a:xfrm>
           <a:prstGeom prst="rect">
             <a:avLst/>
@@ -8659,7 +8659,7 @@
         </p:nvSpPr>
         <p:spPr>
           <a:xfrm>
-            <a:off x="2260600" y="2171700"/>
+            <a:off x="2260600" y="2095500"/>
             <a:ext cx="2266950" cy="19050"/>
           </a:xfrm>
           <a:prstGeom prst="rect">
@@ -8688,7 +8688,7 @@
         </p:nvSpPr>
         <p:spPr>
           <a:xfrm>
-            <a:off x="2400300" y="2273300"/>
+            <a:off x="2400300" y="2197100"/>
             <a:ext cx="1987550" cy="203200"/>
           </a:xfrm>
           <a:prstGeom prst="rect">
@@ -8741,7 +8741,7 @@
         </p:nvSpPr>
         <p:spPr>
           <a:xfrm>
-            <a:off x="2400300" y="2514600"/>
+            <a:off x="2400300" y="2438400"/>
             <a:ext cx="1987550" cy="152400"/>
           </a:xfrm>
           <a:prstGeom prst="rect">
@@ -8783,8 +8783,8 @@
         </p:nvSpPr>
         <p:spPr>
           <a:xfrm>
-            <a:off x="2400300" y="2705100"/>
-            <a:ext cx="1987550" cy="685800"/>
+            <a:off x="2400300" y="2628900"/>
+            <a:ext cx="1987550" cy="723900"/>
           </a:xfrm>
           <a:prstGeom prst="rect">
             <a:avLst/>
@@ -8836,7 +8836,7 @@
         </p:nvSpPr>
         <p:spPr>
           <a:xfrm rot="5400000">
-            <a:off x="4540250" y="2762250"/>
+            <a:off x="4540250" y="2705100"/>
             <a:ext cx="127000" cy="88900"/>
           </a:xfrm>
           <a:prstGeom prst="triangle">
@@ -8865,8 +8865,8 @@
         </p:nvSpPr>
         <p:spPr>
           <a:xfrm>
-            <a:off x="4679950" y="2171700"/>
-            <a:ext cx="2266950" cy="1270000"/>
+            <a:off x="4679950" y="2095500"/>
+            <a:ext cx="2266950" cy="1308100"/>
           </a:xfrm>
           <a:prstGeom prst="rect">
             <a:avLst/>
@@ -8897,7 +8897,7 @@
         </p:nvSpPr>
         <p:spPr>
           <a:xfrm>
-            <a:off x="4679950" y="2171700"/>
+            <a:off x="4679950" y="2095500"/>
             <a:ext cx="2266950" cy="19050"/>
           </a:xfrm>
           <a:prstGeom prst="rect">
@@ -8926,7 +8926,7 @@
         </p:nvSpPr>
         <p:spPr>
           <a:xfrm>
-            <a:off x="4819650" y="2273300"/>
+            <a:off x="4819650" y="2197100"/>
             <a:ext cx="1987550" cy="203200"/>
           </a:xfrm>
           <a:prstGeom prst="rect">
@@ -8979,7 +8979,7 @@
         </p:nvSpPr>
         <p:spPr>
           <a:xfrm>
-            <a:off x="4819650" y="2514600"/>
+            <a:off x="4819650" y="2438400"/>
             <a:ext cx="1987550" cy="152400"/>
           </a:xfrm>
           <a:prstGeom prst="rect">
@@ -9021,8 +9021,8 @@
         </p:nvSpPr>
         <p:spPr>
           <a:xfrm>
-            <a:off x="4819650" y="2705100"/>
-            <a:ext cx="1987550" cy="685800"/>
+            <a:off x="4819650" y="2628900"/>
+            <a:ext cx="1987550" cy="723900"/>
           </a:xfrm>
           <a:prstGeom prst="rect">
             <a:avLst/>
@@ -9063,7 +9063,7 @@
         </p:nvSpPr>
         <p:spPr>
           <a:xfrm rot="5400000">
-            <a:off x="6959600" y="2762250"/>
+            <a:off x="6959600" y="2705100"/>
             <a:ext cx="127000" cy="88900"/>
           </a:xfrm>
           <a:prstGeom prst="triangle">
@@ -9092,8 +9092,8 @@
         </p:nvSpPr>
         <p:spPr>
           <a:xfrm>
-            <a:off x="7099300" y="2171700"/>
-            <a:ext cx="2266950" cy="1270000"/>
+            <a:off x="7099300" y="2095500"/>
+            <a:ext cx="2266950" cy="1308100"/>
           </a:xfrm>
           <a:prstGeom prst="rect">
             <a:avLst/>
@@ -9124,7 +9124,7 @@
         </p:nvSpPr>
         <p:spPr>
           <a:xfrm>
-            <a:off x="7099300" y="2171700"/>
+            <a:off x="7099300" y="2095500"/>
             <a:ext cx="2266950" cy="19050"/>
           </a:xfrm>
           <a:prstGeom prst="rect">
@@ -9153,7 +9153,7 @@
         </p:nvSpPr>
         <p:spPr>
           <a:xfrm>
-            <a:off x="7239000" y="2273300"/>
+            <a:off x="7239000" y="2197100"/>
             <a:ext cx="1987550" cy="203200"/>
           </a:xfrm>
           <a:prstGeom prst="rect">
@@ -9206,7 +9206,7 @@
         </p:nvSpPr>
         <p:spPr>
           <a:xfrm>
-            <a:off x="7239000" y="2514600"/>
+            <a:off x="7239000" y="2438400"/>
             <a:ext cx="1987550" cy="152400"/>
           </a:xfrm>
           <a:prstGeom prst="rect">
@@ -9248,8 +9248,8 @@
         </p:nvSpPr>
         <p:spPr>
           <a:xfrm>
-            <a:off x="7239000" y="2705100"/>
-            <a:ext cx="1987550" cy="685800"/>
+            <a:off x="7239000" y="2628900"/>
+            <a:ext cx="1987550" cy="723900"/>
           </a:xfrm>
           <a:prstGeom prst="rect">
             <a:avLst/>
@@ -9312,7 +9312,7 @@
         </p:nvSpPr>
         <p:spPr>
           <a:xfrm rot="5400000">
-            <a:off x="9378950" y="2762250"/>
+            <a:off x="9378950" y="2705100"/>
             <a:ext cx="127000" cy="88900"/>
           </a:xfrm>
           <a:prstGeom prst="triangle">
@@ -9341,8 +9341,8 @@
         </p:nvSpPr>
         <p:spPr>
           <a:xfrm>
-            <a:off x="9518650" y="2171700"/>
-            <a:ext cx="2266950" cy="1270000"/>
+            <a:off x="9518650" y="2095500"/>
+            <a:ext cx="2266950" cy="1308100"/>
           </a:xfrm>
           <a:prstGeom prst="rect">
             <a:avLst/>
@@ -9373,7 +9373,7 @@
         </p:nvSpPr>
         <p:spPr>
           <a:xfrm>
-            <a:off x="9518650" y="2171700"/>
+            <a:off x="9518650" y="2095500"/>
             <a:ext cx="2266950" cy="19050"/>
           </a:xfrm>
           <a:prstGeom prst="rect">
@@ -9402,7 +9402,7 @@
         </p:nvSpPr>
         <p:spPr>
           <a:xfrm>
-            <a:off x="9658350" y="2273300"/>
+            <a:off x="9658350" y="2197100"/>
             <a:ext cx="1987550" cy="203200"/>
           </a:xfrm>
           <a:prstGeom prst="rect">
@@ -9455,7 +9455,7 @@
         </p:nvSpPr>
         <p:spPr>
           <a:xfrm>
-            <a:off x="9658350" y="2514600"/>
+            <a:off x="9658350" y="2438400"/>
             <a:ext cx="1987550" cy="152400"/>
           </a:xfrm>
           <a:prstGeom prst="rect">
@@ -9497,8 +9497,8 @@
         </p:nvSpPr>
         <p:spPr>
           <a:xfrm>
-            <a:off x="9658350" y="2705100"/>
-            <a:ext cx="1987550" cy="685800"/>
+            <a:off x="9658350" y="2628900"/>
+            <a:ext cx="1987550" cy="723900"/>
           </a:xfrm>
           <a:prstGeom prst="rect">
             <a:avLst/>
@@ -9550,7 +9550,7 @@
         </p:nvSpPr>
         <p:spPr>
           <a:xfrm>
-            <a:off x="3390900" y="3441700"/>
+            <a:off x="3390900" y="3403600"/>
             <a:ext cx="7264400" cy="139700"/>
           </a:xfrm>
           <a:custGeom>
@@ -9601,7 +9601,7 @@
         </p:nvSpPr>
         <p:spPr>
           <a:xfrm>
-            <a:off x="5234734" y="3505200"/>
+            <a:off x="5234734" y="3467100"/>
             <a:ext cx="3576733" cy="152400"/>
           </a:xfrm>
           <a:prstGeom prst="rect">
@@ -9630,7 +9630,7 @@
         </p:nvSpPr>
         <p:spPr>
           <a:xfrm>
-            <a:off x="5234734" y="3505200"/>
+            <a:off x="5234734" y="3467100"/>
             <a:ext cx="3576733" cy="152400"/>
           </a:xfrm>
           <a:prstGeom prst="rect">
@@ -9672,7 +9672,7 @@
         </p:nvSpPr>
         <p:spPr>
           <a:xfrm>
-            <a:off x="2260600" y="3733800"/>
+            <a:off x="2260600" y="3708400"/>
             <a:ext cx="9525000" cy="228600"/>
           </a:xfrm>
           <a:prstGeom prst="rect">
@@ -9714,7 +9714,7 @@
         </p:nvSpPr>
         <p:spPr>
           <a:xfrm>
-            <a:off x="6807200" y="3733800"/>
+            <a:off x="6807200" y="3708400"/>
             <a:ext cx="4978400" cy="228600"/>
           </a:xfrm>
           <a:prstGeom prst="rect">
@@ -9756,10 +9756,10 @@
         </p:nvGrpSpPr>
         <p:grpSpPr>
           <a:xfrm>
-            <a:off x="2260600" y="4025900"/>
-            <a:ext cx="9525000" cy="2260600"/>
-            <a:chOff x="2260600" y="4025900"/>
-            <a:chExt cx="9525000" cy="2260600"/>
+            <a:off x="2260600" y="4000500"/>
+            <a:ext cx="9525000" cy="2286000"/>
+            <a:chOff x="2260600" y="4000500"/>
+            <a:chExt cx="9525000" cy="2286000"/>
           </a:xfrm>
         </p:grpSpPr>
         <p:sp>
@@ -9770,8 +9770,8 @@
           </p:nvSpPr>
           <p:spPr>
             <a:xfrm>
-              <a:off x="2260600" y="4025900"/>
-              <a:ext cx="9525000" cy="2260600"/>
+              <a:off x="2260600" y="4000500"/>
+              <a:ext cx="9525000" cy="2286000"/>
             </a:xfrm>
             <a:prstGeom prst="rect">
               <a:avLst/>
@@ -9799,7 +9799,7 @@
           </p:nvSpPr>
           <p:spPr>
             <a:xfrm>
-              <a:off x="6177915" y="4267200"/>
+              <a:off x="6177915" y="4241800"/>
               <a:ext cx="1950085" cy="1193800"/>
             </a:xfrm>
             <a:prstGeom prst="rect">
@@ -9840,7 +9840,7 @@
           </p:blipFill>
           <p:spPr>
             <a:xfrm>
-              <a:off x="6241415" y="4864523"/>
+              <a:off x="6241415" y="4839123"/>
               <a:ext cx="114300" cy="114300"/>
             </a:xfrm>
             <a:prstGeom prst="rect">
@@ -9856,7 +9856,7 @@
           </p:nvSpPr>
           <p:spPr>
             <a:xfrm>
-              <a:off x="6381115" y="4851823"/>
+              <a:off x="6381115" y="4826423"/>
               <a:ext cx="1708785" cy="139700"/>
             </a:xfrm>
             <a:prstGeom prst="rect">
@@ -9898,7 +9898,7 @@
           </p:nvCxnSpPr>
           <p:spPr>
             <a:xfrm>
-              <a:off x="2857500" y="5383953"/>
+              <a:off x="2857500" y="5358553"/>
               <a:ext cx="5270500" cy="0"/>
             </a:xfrm>
             <a:prstGeom prst="line">
@@ -9921,7 +9921,7 @@
           </p:nvSpPr>
           <p:spPr>
             <a:xfrm>
-              <a:off x="2908300" y="5244253"/>
+              <a:off x="2908300" y="5218853"/>
               <a:ext cx="1270000" cy="127000"/>
             </a:xfrm>
             <a:prstGeom prst="rect">
@@ -9963,7 +9963,7 @@
           </p:nvCxnSpPr>
           <p:spPr>
             <a:xfrm>
-              <a:off x="3911600" y="4254500"/>
+              <a:off x="3911600" y="4229100"/>
               <a:ext cx="0" cy="1206500"/>
             </a:xfrm>
             <a:prstGeom prst="line">
@@ -9986,7 +9986,7 @@
           </p:nvSpPr>
           <p:spPr>
             <a:xfrm>
-              <a:off x="3949700" y="4254500"/>
+              <a:off x="3949700" y="4229100"/>
               <a:ext cx="571500" cy="127000"/>
             </a:xfrm>
             <a:prstGeom prst="rect">
@@ -10028,7 +10028,7 @@
           </p:nvSpPr>
           <p:spPr>
             <a:xfrm>
-              <a:off x="2857500" y="4432300"/>
+              <a:off x="2857500" y="4406900"/>
               <a:ext cx="5270500" cy="25400"/>
             </a:xfrm>
             <a:custGeom>
@@ -10237,7 +10237,7 @@
           </p:nvSpPr>
           <p:spPr>
             <a:xfrm>
-              <a:off x="2857500" y="5130800"/>
+              <a:off x="2857500" y="5105400"/>
               <a:ext cx="5270500" cy="330200"/>
             </a:xfrm>
             <a:custGeom>
@@ -10494,7 +10494,7 @@
           </p:nvSpPr>
           <p:spPr>
             <a:xfrm>
-              <a:off x="4438650" y="4294293"/>
+              <a:off x="4438650" y="4268893"/>
               <a:ext cx="1270000" cy="139700"/>
             </a:xfrm>
             <a:prstGeom prst="rect">
@@ -10536,7 +10536,7 @@
           </p:nvSpPr>
           <p:spPr>
             <a:xfrm>
-              <a:off x="4502150" y="5012972"/>
+              <a:off x="4502150" y="4987572"/>
               <a:ext cx="1270000" cy="139700"/>
             </a:xfrm>
             <a:prstGeom prst="rect">
@@ -10578,7 +10578,7 @@
           </p:nvSpPr>
           <p:spPr>
             <a:xfrm>
-              <a:off x="2501900" y="4395893"/>
+              <a:off x="2501900" y="4370493"/>
               <a:ext cx="304800" cy="127000"/>
             </a:xfrm>
             <a:prstGeom prst="rect">
@@ -10620,7 +10620,7 @@
           </p:nvSpPr>
           <p:spPr>
             <a:xfrm>
-              <a:off x="2501900" y="5076472"/>
+              <a:off x="2501900" y="5051072"/>
               <a:ext cx="304800" cy="127000"/>
             </a:xfrm>
             <a:prstGeom prst="rect">
@@ -10662,7 +10662,7 @@
           </p:nvSpPr>
           <p:spPr>
             <a:xfrm>
-              <a:off x="2501900" y="5397500"/>
+              <a:off x="2501900" y="5372100"/>
               <a:ext cx="304800" cy="127000"/>
             </a:xfrm>
             <a:prstGeom prst="rect">
@@ -10704,7 +10704,7 @@
           </p:nvCxnSpPr>
           <p:spPr>
             <a:xfrm>
-              <a:off x="2857500" y="5461000"/>
+              <a:off x="2857500" y="5435600"/>
               <a:ext cx="5410200" cy="0"/>
             </a:xfrm>
             <a:prstGeom prst="line">
@@ -10727,7 +10727,7 @@
           </p:nvCxnSpPr>
           <p:spPr>
             <a:xfrm flipV="1">
-              <a:off x="2857500" y="4165600"/>
+              <a:off x="2857500" y="4140200"/>
               <a:ext cx="0" cy="1295400"/>
             </a:xfrm>
             <a:prstGeom prst="line">
@@ -10750,7 +10750,7 @@
           </p:nvSpPr>
           <p:spPr>
             <a:xfrm>
-              <a:off x="2476500" y="4114800"/>
+              <a:off x="2476500" y="4089400"/>
               <a:ext cx="330200" cy="127000"/>
             </a:xfrm>
             <a:prstGeom prst="rect">
@@ -10792,7 +10792,7 @@
           </p:nvSpPr>
           <p:spPr>
             <a:xfrm>
-              <a:off x="7937500" y="5308600"/>
+              <a:off x="7937500" y="5283200"/>
               <a:ext cx="330200" cy="127000"/>
             </a:xfrm>
             <a:prstGeom prst="rect">
@@ -10834,7 +10834,7 @@
           </p:nvSpPr>
           <p:spPr>
             <a:xfrm>
-              <a:off x="2413000" y="5524500"/>
+              <a:off x="2413000" y="5499100"/>
               <a:ext cx="381000" cy="165100"/>
             </a:xfrm>
             <a:prstGeom prst="rect">
@@ -10876,7 +10876,7 @@
           </p:nvSpPr>
           <p:spPr>
             <a:xfrm>
-              <a:off x="2863850" y="5524500"/>
+              <a:off x="2863850" y="5499100"/>
               <a:ext cx="1041400" cy="165100"/>
             </a:xfrm>
             <a:prstGeom prst="rect">
@@ -10908,7 +10908,7 @@
           </p:nvSpPr>
           <p:spPr>
             <a:xfrm>
-              <a:off x="2863850" y="5524500"/>
+              <a:off x="2863850" y="5499100"/>
               <a:ext cx="1041400" cy="165100"/>
             </a:xfrm>
             <a:prstGeom prst="rect">
@@ -10950,7 +10950,7 @@
           </p:nvSpPr>
           <p:spPr>
             <a:xfrm>
-              <a:off x="3917950" y="5524500"/>
+              <a:off x="3917950" y="5499100"/>
               <a:ext cx="4203700" cy="165100"/>
             </a:xfrm>
             <a:prstGeom prst="rect">
@@ -10982,7 +10982,7 @@
           </p:nvSpPr>
           <p:spPr>
             <a:xfrm>
-              <a:off x="3917950" y="5524500"/>
+              <a:off x="3917950" y="5499100"/>
               <a:ext cx="4203700" cy="165100"/>
             </a:xfrm>
             <a:prstGeom prst="rect">
@@ -11024,7 +11024,7 @@
           </p:nvSpPr>
           <p:spPr>
             <a:xfrm>
-              <a:off x="2413000" y="5715000"/>
+              <a:off x="2413000" y="5689600"/>
               <a:ext cx="381000" cy="165100"/>
             </a:xfrm>
             <a:prstGeom prst="rect">
@@ -11066,7 +11066,7 @@
           </p:nvSpPr>
           <p:spPr>
             <a:xfrm>
-              <a:off x="2863850" y="5715000"/>
+              <a:off x="2863850" y="5689600"/>
               <a:ext cx="1041400" cy="165100"/>
             </a:xfrm>
             <a:prstGeom prst="rect">
@@ -11098,7 +11098,7 @@
           </p:nvSpPr>
           <p:spPr>
             <a:xfrm>
-              <a:off x="3917950" y="5715000"/>
+              <a:off x="3917950" y="5689600"/>
               <a:ext cx="4203700" cy="165100"/>
             </a:xfrm>
             <a:prstGeom prst="rect">
@@ -11130,7 +11130,7 @@
           </p:nvSpPr>
           <p:spPr>
             <a:xfrm>
-              <a:off x="3917950" y="5715000"/>
+              <a:off x="3917950" y="5689600"/>
               <a:ext cx="4203700" cy="165100"/>
             </a:xfrm>
             <a:prstGeom prst="rect">
@@ -11172,7 +11172,7 @@
           </p:nvSpPr>
           <p:spPr>
             <a:xfrm>
-              <a:off x="2413000" y="5905500"/>
+              <a:off x="2413000" y="5880100"/>
               <a:ext cx="381000" cy="165100"/>
             </a:xfrm>
             <a:prstGeom prst="rect">
@@ -11214,7 +11214,7 @@
           </p:nvSpPr>
           <p:spPr>
             <a:xfrm>
-              <a:off x="2863850" y="5905500"/>
+              <a:off x="2863850" y="5880100"/>
               <a:ext cx="5257800" cy="165100"/>
             </a:xfrm>
             <a:prstGeom prst="rect">
@@ -11246,7 +11246,7 @@
           </p:nvSpPr>
           <p:spPr>
             <a:xfrm>
-              <a:off x="2863850" y="5905500"/>
+              <a:off x="2863850" y="5880100"/>
               <a:ext cx="5257800" cy="165100"/>
             </a:xfrm>
             <a:prstGeom prst="rect">
@@ -11288,7 +11288,7 @@
           </p:nvSpPr>
           <p:spPr>
             <a:xfrm>
-              <a:off x="8648700" y="4102100"/>
+              <a:off x="8648700" y="4076700"/>
               <a:ext cx="2984500" cy="177800"/>
             </a:xfrm>
             <a:prstGeom prst="rect">
@@ -11330,7 +11330,7 @@
           </p:nvSpPr>
           <p:spPr>
             <a:xfrm>
-              <a:off x="8712200" y="4318000"/>
+              <a:off x="8712200" y="4292600"/>
               <a:ext cx="1016000" cy="152400"/>
             </a:xfrm>
             <a:prstGeom prst="rect">
@@ -11372,7 +11372,7 @@
           </p:nvSpPr>
           <p:spPr>
             <a:xfrm>
-              <a:off x="9791700" y="4318000"/>
+              <a:off x="9791700" y="4292600"/>
               <a:ext cx="889000" cy="152400"/>
             </a:xfrm>
             <a:prstGeom prst="rect">
@@ -11414,7 +11414,7 @@
           </p:nvSpPr>
           <p:spPr>
             <a:xfrm>
-              <a:off x="10744200" y="4318000"/>
+              <a:off x="10744200" y="4292600"/>
               <a:ext cx="889000" cy="152400"/>
             </a:xfrm>
             <a:prstGeom prst="rect">
@@ -11456,7 +11456,7 @@
           </p:nvCxnSpPr>
           <p:spPr>
             <a:xfrm>
-              <a:off x="8648700" y="4483100"/>
+              <a:off x="8648700" y="4457700"/>
               <a:ext cx="2984500" cy="0"/>
             </a:xfrm>
             <a:prstGeom prst="line">
@@ -11478,7 +11478,7 @@
           </p:nvSpPr>
           <p:spPr>
             <a:xfrm>
-              <a:off x="8712200" y="4495800"/>
+              <a:off x="8712200" y="4470400"/>
               <a:ext cx="1016000" cy="228600"/>
             </a:xfrm>
             <a:prstGeom prst="rect">
@@ -11520,7 +11520,7 @@
           </p:nvSpPr>
           <p:spPr>
             <a:xfrm>
-              <a:off x="9791700" y="4495800"/>
+              <a:off x="9791700" y="4470400"/>
               <a:ext cx="889000" cy="228600"/>
             </a:xfrm>
             <a:prstGeom prst="rect">
@@ -11562,7 +11562,7 @@
           </p:nvSpPr>
           <p:spPr>
             <a:xfrm>
-              <a:off x="10744200" y="4495800"/>
+              <a:off x="10744200" y="4470400"/>
               <a:ext cx="889000" cy="228600"/>
             </a:xfrm>
             <a:prstGeom prst="rect">
@@ -11604,7 +11604,7 @@
           </p:nvCxnSpPr>
           <p:spPr>
             <a:xfrm>
-              <a:off x="8648700" y="4724400"/>
+              <a:off x="8648700" y="4699000"/>
               <a:ext cx="2984500" cy="0"/>
             </a:xfrm>
             <a:prstGeom prst="line">
@@ -11626,7 +11626,7 @@
           </p:nvSpPr>
           <p:spPr>
             <a:xfrm>
-              <a:off x="8648700" y="4724400"/>
+              <a:off x="8648700" y="4699000"/>
               <a:ext cx="2984500" cy="228600"/>
             </a:xfrm>
             <a:prstGeom prst="rect">
@@ -11655,7 +11655,7 @@
           </p:nvSpPr>
           <p:spPr>
             <a:xfrm>
-              <a:off x="8712200" y="4724400"/>
+              <a:off x="8712200" y="4699000"/>
               <a:ext cx="1016000" cy="228600"/>
             </a:xfrm>
             <a:prstGeom prst="rect">
@@ -11697,7 +11697,7 @@
           </p:nvSpPr>
           <p:spPr>
             <a:xfrm>
-              <a:off x="9791700" y="4724400"/>
+              <a:off x="9791700" y="4699000"/>
               <a:ext cx="889000" cy="228600"/>
             </a:xfrm>
             <a:prstGeom prst="rect">
@@ -11739,7 +11739,7 @@
           </p:nvSpPr>
           <p:spPr>
             <a:xfrm>
-              <a:off x="10744200" y="4724400"/>
+              <a:off x="10744200" y="4699000"/>
               <a:ext cx="889000" cy="228600"/>
             </a:xfrm>
             <a:prstGeom prst="rect">
@@ -11781,7 +11781,7 @@
           </p:nvCxnSpPr>
           <p:spPr>
             <a:xfrm>
-              <a:off x="8648700" y="4953000"/>
+              <a:off x="8648700" y="4927600"/>
               <a:ext cx="2984500" cy="0"/>
             </a:xfrm>
             <a:prstGeom prst="line">
@@ -11803,7 +11803,7 @@
           </p:nvSpPr>
           <p:spPr>
             <a:xfrm>
-              <a:off x="8712200" y="4953000"/>
+              <a:off x="8712200" y="4927600"/>
               <a:ext cx="1016000" cy="228600"/>
             </a:xfrm>
             <a:prstGeom prst="rect">
@@ -11845,7 +11845,7 @@
           </p:nvSpPr>
           <p:spPr>
             <a:xfrm>
-              <a:off x="9791700" y="4953000"/>
+              <a:off x="9791700" y="4927600"/>
               <a:ext cx="889000" cy="228600"/>
             </a:xfrm>
             <a:prstGeom prst="rect">
@@ -11887,7 +11887,7 @@
           </p:nvSpPr>
           <p:spPr>
             <a:xfrm>
-              <a:off x="10744200" y="4953000"/>
+              <a:off x="10744200" y="4927600"/>
               <a:ext cx="889000" cy="228600"/>
             </a:xfrm>
             <a:prstGeom prst="rect">
@@ -11929,7 +11929,7 @@
           </p:nvCxnSpPr>
           <p:spPr>
             <a:xfrm>
-              <a:off x="8648700" y="5181600"/>
+              <a:off x="8648700" y="5156200"/>
               <a:ext cx="2984500" cy="0"/>
             </a:xfrm>
             <a:prstGeom prst="line">
@@ -11951,7 +11951,7 @@
           </p:nvSpPr>
           <p:spPr>
             <a:xfrm>
-              <a:off x="8648700" y="5270500"/>
+              <a:off x="8648700" y="5245100"/>
               <a:ext cx="2984500" cy="533400"/>
             </a:xfrm>
             <a:prstGeom prst="rect">
@@ -11983,7 +11983,7 @@
           </p:nvSpPr>
           <p:spPr>
             <a:xfrm>
-              <a:off x="8750300" y="5321300"/>
+              <a:off x="8750300" y="5295900"/>
               <a:ext cx="2781300" cy="139700"/>
             </a:xfrm>
             <a:prstGeom prst="rect">
@@ -12025,7 +12025,7 @@
           </p:nvSpPr>
           <p:spPr>
             <a:xfrm>
-              <a:off x="8750300" y="5473700"/>
+              <a:off x="8750300" y="5448300"/>
               <a:ext cx="2781300" cy="304800"/>
             </a:xfrm>
             <a:prstGeom prst="rect">
@@ -12067,7 +12067,7 @@
           </p:nvSpPr>
           <p:spPr>
             <a:xfrm>
-              <a:off x="8648700" y="5880100"/>
+              <a:off x="8648700" y="5854700"/>
               <a:ext cx="2984500" cy="139700"/>
             </a:xfrm>
             <a:prstGeom prst="rect">
@@ -13355,7 +13355,7 @@
         <p:spPr>
           <a:xfrm>
             <a:off x="2260600" y="1358900"/>
-            <a:ext cx="9525000" cy="711200"/>
+            <a:ext cx="9525000" cy="673100"/>
           </a:xfrm>
           <a:prstGeom prst="rect">
             <a:avLst/>
@@ -13384,7 +13384,7 @@
         <p:spPr>
           <a:xfrm>
             <a:off x="2260600" y="1358900"/>
-            <a:ext cx="19050" cy="711200"/>
+            <a:ext cx="19050" cy="673100"/>
           </a:xfrm>
           <a:prstGeom prst="rect">
             <a:avLst/>
@@ -13412,7 +13412,7 @@
         </p:nvSpPr>
         <p:spPr>
           <a:xfrm>
-            <a:off x="2413000" y="1447800"/>
+            <a:off x="2413000" y="1435100"/>
             <a:ext cx="635000" cy="177800"/>
           </a:xfrm>
           <a:prstGeom prst="rect">
@@ -13462,8 +13462,8 @@
         </p:nvSpPr>
         <p:spPr>
           <a:xfrm>
-            <a:off x="2413000" y="1676400"/>
-            <a:ext cx="5384800" cy="368300"/>
+            <a:off x="2413000" y="1651000"/>
+            <a:ext cx="5384800" cy="355600"/>
           </a:xfrm>
           <a:prstGeom prst="rect">
             <a:avLst/>
@@ -13504,8 +13504,8 @@
         </p:nvCxnSpPr>
         <p:spPr>
           <a:xfrm>
-            <a:off x="7975600" y="1473200"/>
-            <a:ext cx="0" cy="482600"/>
+            <a:off x="7975600" y="1460500"/>
+            <a:ext cx="0" cy="469900"/>
           </a:xfrm>
           <a:prstGeom prst="line">
             <a:avLst/>
@@ -13526,7 +13526,7 @@
         </p:nvSpPr>
         <p:spPr>
           <a:xfrm>
-            <a:off x="8153400" y="1447800"/>
+            <a:off x="8153400" y="1435100"/>
             <a:ext cx="1524000" cy="177800"/>
           </a:xfrm>
           <a:prstGeom prst="rect">
@@ -13568,8 +13568,8 @@
         </p:nvSpPr>
         <p:spPr>
           <a:xfrm>
-            <a:off x="8153400" y="1676400"/>
-            <a:ext cx="3454400" cy="368300"/>
+            <a:off x="8153400" y="1651000"/>
+            <a:ext cx="3454400" cy="355600"/>
           </a:xfrm>
           <a:prstGeom prst="rect">
             <a:avLst/>
@@ -13621,7 +13621,7 @@
         </p:nvSpPr>
         <p:spPr>
           <a:xfrm>
-            <a:off x="2260600" y="2171700"/>
+            <a:off x="2260600" y="2095500"/>
             <a:ext cx="2286000" cy="952500"/>
           </a:xfrm>
           <a:prstGeom prst="rect">
@@ -13653,7 +13653,7 @@
         </p:nvSpPr>
         <p:spPr>
           <a:xfrm>
-            <a:off x="2260600" y="2171700"/>
+            <a:off x="2260600" y="2095500"/>
             <a:ext cx="2286000" cy="19050"/>
           </a:xfrm>
           <a:prstGeom prst="rect">
@@ -13682,7 +13682,7 @@
         </p:nvSpPr>
         <p:spPr>
           <a:xfrm>
-            <a:off x="2400300" y="2273300"/>
+            <a:off x="2400300" y="2197100"/>
             <a:ext cx="2006600" cy="203200"/>
           </a:xfrm>
           <a:prstGeom prst="rect">
@@ -13735,7 +13735,7 @@
         </p:nvSpPr>
         <p:spPr>
           <a:xfrm>
-            <a:off x="2400300" y="2540000"/>
+            <a:off x="2400300" y="2463800"/>
             <a:ext cx="2006600" cy="533400"/>
           </a:xfrm>
           <a:prstGeom prst="rect">
@@ -13799,7 +13799,7 @@
         </p:nvSpPr>
         <p:spPr>
           <a:xfrm>
-            <a:off x="4673600" y="2171700"/>
+            <a:off x="4673600" y="2095500"/>
             <a:ext cx="2286000" cy="952500"/>
           </a:xfrm>
           <a:prstGeom prst="rect">
@@ -13831,7 +13831,7 @@
         </p:nvSpPr>
         <p:spPr>
           <a:xfrm>
-            <a:off x="4673600" y="2171700"/>
+            <a:off x="4673600" y="2095500"/>
             <a:ext cx="2286000" cy="19050"/>
           </a:xfrm>
           <a:prstGeom prst="rect">
@@ -13860,7 +13860,7 @@
         </p:nvSpPr>
         <p:spPr>
           <a:xfrm>
-            <a:off x="4813300" y="2273300"/>
+            <a:off x="4813300" y="2197100"/>
             <a:ext cx="2006600" cy="203200"/>
           </a:xfrm>
           <a:prstGeom prst="rect">
@@ -13913,7 +13913,7 @@
         </p:nvSpPr>
         <p:spPr>
           <a:xfrm>
-            <a:off x="4813300" y="2540000"/>
+            <a:off x="4813300" y="2463800"/>
             <a:ext cx="2006600" cy="533400"/>
           </a:xfrm>
           <a:prstGeom prst="rect">
@@ -13966,7 +13966,7 @@
         </p:nvSpPr>
         <p:spPr>
           <a:xfrm>
-            <a:off x="7086600" y="2171700"/>
+            <a:off x="7086600" y="2095500"/>
             <a:ext cx="2286000" cy="952500"/>
           </a:xfrm>
           <a:prstGeom prst="rect">
@@ -13998,7 +13998,7 @@
         </p:nvSpPr>
         <p:spPr>
           <a:xfrm>
-            <a:off x="7086600" y="2171700"/>
+            <a:off x="7086600" y="2095500"/>
             <a:ext cx="2286000" cy="19050"/>
           </a:xfrm>
           <a:prstGeom prst="rect">
@@ -14027,7 +14027,7 @@
         </p:nvSpPr>
         <p:spPr>
           <a:xfrm>
-            <a:off x="7226300" y="2273300"/>
+            <a:off x="7226300" y="2197100"/>
             <a:ext cx="2006600" cy="203200"/>
           </a:xfrm>
           <a:prstGeom prst="rect">
@@ -14080,7 +14080,7 @@
         </p:nvSpPr>
         <p:spPr>
           <a:xfrm>
-            <a:off x="7226300" y="2540000"/>
+            <a:off x="7226300" y="2463800"/>
             <a:ext cx="2006600" cy="533400"/>
           </a:xfrm>
           <a:prstGeom prst="rect">
@@ -14177,7 +14177,7 @@
         </p:nvSpPr>
         <p:spPr>
           <a:xfrm>
-            <a:off x="9499600" y="2171700"/>
+            <a:off x="9499600" y="2095500"/>
             <a:ext cx="2286000" cy="952500"/>
           </a:xfrm>
           <a:prstGeom prst="rect">
@@ -14209,7 +14209,7 @@
         </p:nvSpPr>
         <p:spPr>
           <a:xfrm>
-            <a:off x="9499600" y="2171700"/>
+            <a:off x="9499600" y="2095500"/>
             <a:ext cx="2286000" cy="19050"/>
           </a:xfrm>
           <a:prstGeom prst="rect">
@@ -14238,7 +14238,7 @@
         </p:nvSpPr>
         <p:spPr>
           <a:xfrm>
-            <a:off x="9639300" y="2273300"/>
+            <a:off x="9639300" y="2197100"/>
             <a:ext cx="2006600" cy="203200"/>
           </a:xfrm>
           <a:prstGeom prst="rect">
@@ -14291,7 +14291,7 @@
         </p:nvSpPr>
         <p:spPr>
           <a:xfrm>
-            <a:off x="9639300" y="2540000"/>
+            <a:off x="9639300" y="2463800"/>
             <a:ext cx="2006600" cy="533400"/>
           </a:xfrm>
           <a:prstGeom prst="rect">
@@ -14355,7 +14355,7 @@
         </p:nvSpPr>
         <p:spPr>
           <a:xfrm>
-            <a:off x="2260600" y="3225800"/>
+            <a:off x="2260600" y="3149600"/>
             <a:ext cx="9525000" cy="228600"/>
           </a:xfrm>
           <a:prstGeom prst="rect">
@@ -14397,7 +14397,7 @@
         </p:nvSpPr>
         <p:spPr>
           <a:xfrm>
-            <a:off x="7874000" y="3225800"/>
+            <a:off x="7874000" y="3149600"/>
             <a:ext cx="3911600" cy="228600"/>
           </a:xfrm>
           <a:prstGeom prst="rect">
@@ -14439,10 +14439,10 @@
         </p:nvGrpSpPr>
         <p:grpSpPr>
           <a:xfrm>
-            <a:off x="2260600" y="3517900"/>
-            <a:ext cx="9525000" cy="2768600"/>
-            <a:chOff x="2260600" y="3517900"/>
-            <a:chExt cx="9525000" cy="2768600"/>
+            <a:off x="2260600" y="3441700"/>
+            <a:ext cx="9525000" cy="2844800"/>
+            <a:chOff x="2260600" y="3441700"/>
+            <a:chExt cx="9525000" cy="2844800"/>
           </a:xfrm>
         </p:grpSpPr>
         <p:sp>
@@ -14453,8 +14453,8 @@
           </p:nvSpPr>
           <p:spPr>
             <a:xfrm>
-              <a:off x="2260600" y="3517900"/>
-              <a:ext cx="9525000" cy="2768600"/>
+              <a:off x="2260600" y="3441700"/>
+              <a:ext cx="9525000" cy="2844800"/>
             </a:xfrm>
             <a:prstGeom prst="rect">
               <a:avLst/>
@@ -14482,7 +14482,7 @@
           </p:nvSpPr>
           <p:spPr>
             <a:xfrm>
-              <a:off x="2413000" y="3733800"/>
+              <a:off x="2413000" y="3657600"/>
               <a:ext cx="6807200" cy="2438400"/>
             </a:xfrm>
             <a:prstGeom prst="rect">
@@ -14513,7 +14513,7 @@
           </p:nvSpPr>
           <p:spPr>
             <a:xfrm>
-              <a:off x="2565400" y="3619500"/>
+              <a:off x="2565400" y="3543300"/>
               <a:ext cx="1886220" cy="228600"/>
             </a:xfrm>
             <a:prstGeom prst="roundRect">
@@ -14562,7 +14562,7 @@
           </p:nvSpPr>
           <p:spPr>
             <a:xfrm>
-              <a:off x="2565400" y="3975100"/>
+              <a:off x="2565400" y="3898900"/>
               <a:ext cx="1020233" cy="355600"/>
             </a:xfrm>
             <a:prstGeom prst="rect">
@@ -14594,7 +14594,7 @@
           </p:nvSpPr>
           <p:spPr>
             <a:xfrm>
-              <a:off x="2565400" y="3975100"/>
+              <a:off x="2565400" y="3898900"/>
               <a:ext cx="1020233" cy="355600"/>
             </a:xfrm>
             <a:prstGeom prst="rect">
@@ -14650,7 +14650,7 @@
           </p:nvCxnSpPr>
           <p:spPr>
             <a:xfrm>
-              <a:off x="3075517" y="4330700"/>
+              <a:off x="3075517" y="4254500"/>
               <a:ext cx="0" cy="177800"/>
             </a:xfrm>
             <a:prstGeom prst="line">
@@ -14672,7 +14672,7 @@
           </p:nvSpPr>
           <p:spPr>
             <a:xfrm>
-              <a:off x="3043767" y="4508500"/>
+              <a:off x="3043767" y="4432300"/>
               <a:ext cx="63500" cy="63500"/>
             </a:xfrm>
             <a:prstGeom prst="rect">
@@ -14701,7 +14701,7 @@
           </p:nvSpPr>
           <p:spPr>
             <a:xfrm>
-              <a:off x="3661833" y="3975100"/>
+              <a:off x="3661833" y="3898900"/>
               <a:ext cx="1020233" cy="355600"/>
             </a:xfrm>
             <a:prstGeom prst="rect">
@@ -14733,7 +14733,7 @@
           </p:nvSpPr>
           <p:spPr>
             <a:xfrm>
-              <a:off x="3661833" y="3975100"/>
+              <a:off x="3661833" y="3898900"/>
               <a:ext cx="1020233" cy="355600"/>
             </a:xfrm>
             <a:prstGeom prst="rect">
@@ -14789,7 +14789,7 @@
           </p:nvCxnSpPr>
           <p:spPr>
             <a:xfrm>
-              <a:off x="4171950" y="4330700"/>
+              <a:off x="4171950" y="4254500"/>
               <a:ext cx="0" cy="177800"/>
             </a:xfrm>
             <a:prstGeom prst="line">
@@ -14811,7 +14811,7 @@
           </p:nvSpPr>
           <p:spPr>
             <a:xfrm>
-              <a:off x="4140200" y="4508500"/>
+              <a:off x="4140200" y="4432300"/>
               <a:ext cx="63500" cy="63500"/>
             </a:xfrm>
             <a:prstGeom prst="rect">
@@ -14840,7 +14840,7 @@
           </p:nvSpPr>
           <p:spPr>
             <a:xfrm>
-              <a:off x="4758267" y="3975100"/>
+              <a:off x="4758267" y="3898900"/>
               <a:ext cx="1020233" cy="355600"/>
             </a:xfrm>
             <a:prstGeom prst="rect">
@@ -14872,7 +14872,7 @@
           </p:nvSpPr>
           <p:spPr>
             <a:xfrm>
-              <a:off x="4758267" y="3975100"/>
+              <a:off x="4758267" y="3898900"/>
               <a:ext cx="1020233" cy="355600"/>
             </a:xfrm>
             <a:prstGeom prst="rect">
@@ -14928,7 +14928,7 @@
           </p:nvCxnSpPr>
           <p:spPr>
             <a:xfrm>
-              <a:off x="5268383" y="4330700"/>
+              <a:off x="5268383" y="4254500"/>
               <a:ext cx="0" cy="177800"/>
             </a:xfrm>
             <a:prstGeom prst="line">
@@ -14950,7 +14950,7 @@
           </p:nvSpPr>
           <p:spPr>
             <a:xfrm>
-              <a:off x="5236633" y="4508500"/>
+              <a:off x="5236633" y="4432300"/>
               <a:ext cx="63500" cy="63500"/>
             </a:xfrm>
             <a:prstGeom prst="rect">
@@ -14979,7 +14979,7 @@
           </p:nvSpPr>
           <p:spPr>
             <a:xfrm>
-              <a:off x="5854700" y="3975100"/>
+              <a:off x="5854700" y="3898900"/>
               <a:ext cx="1020233" cy="355600"/>
             </a:xfrm>
             <a:prstGeom prst="rect">
@@ -15012,7 +15012,7 @@
           </p:nvSpPr>
           <p:spPr>
             <a:xfrm>
-              <a:off x="5854700" y="3975100"/>
+              <a:off x="5854700" y="3898900"/>
               <a:ext cx="1020233" cy="355600"/>
             </a:xfrm>
             <a:prstGeom prst="rect">
@@ -15068,7 +15068,7 @@
           </p:nvCxnSpPr>
           <p:spPr>
             <a:xfrm>
-              <a:off x="6364817" y="4330700"/>
+              <a:off x="6364817" y="4254500"/>
               <a:ext cx="0" cy="177800"/>
             </a:xfrm>
             <a:prstGeom prst="line">
@@ -15091,7 +15091,7 @@
           </p:nvSpPr>
           <p:spPr>
             <a:xfrm>
-              <a:off x="6333067" y="4508500"/>
+              <a:off x="6333067" y="4432300"/>
               <a:ext cx="63500" cy="63500"/>
             </a:xfrm>
             <a:prstGeom prst="rect">
@@ -15120,7 +15120,7 @@
           </p:nvSpPr>
           <p:spPr>
             <a:xfrm>
-              <a:off x="6951133" y="3975100"/>
+              <a:off x="6951133" y="3898900"/>
               <a:ext cx="1020233" cy="355600"/>
             </a:xfrm>
             <a:prstGeom prst="rect">
@@ -15153,7 +15153,7 @@
           </p:nvSpPr>
           <p:spPr>
             <a:xfrm>
-              <a:off x="6951133" y="3975100"/>
+              <a:off x="6951133" y="3898900"/>
               <a:ext cx="1020233" cy="355600"/>
             </a:xfrm>
             <a:prstGeom prst="rect">
@@ -15209,7 +15209,7 @@
           </p:nvCxnSpPr>
           <p:spPr>
             <a:xfrm>
-              <a:off x="7461250" y="4330700"/>
+              <a:off x="7461250" y="4254500"/>
               <a:ext cx="0" cy="177800"/>
             </a:xfrm>
             <a:prstGeom prst="line">
@@ -15232,7 +15232,7 @@
           </p:nvSpPr>
           <p:spPr>
             <a:xfrm>
-              <a:off x="7429500" y="4508500"/>
+              <a:off x="7429500" y="4432300"/>
               <a:ext cx="63500" cy="63500"/>
             </a:xfrm>
             <a:prstGeom prst="rect">
@@ -15261,7 +15261,7 @@
           </p:nvSpPr>
           <p:spPr>
             <a:xfrm>
-              <a:off x="8047567" y="3975100"/>
+              <a:off x="8047567" y="3898900"/>
               <a:ext cx="1020233" cy="355600"/>
             </a:xfrm>
             <a:prstGeom prst="rect">
@@ -15294,7 +15294,7 @@
           </p:nvSpPr>
           <p:spPr>
             <a:xfrm>
-              <a:off x="8047567" y="3975100"/>
+              <a:off x="8047567" y="3898900"/>
               <a:ext cx="1020233" cy="355600"/>
             </a:xfrm>
             <a:prstGeom prst="rect">
@@ -15350,7 +15350,7 @@
           </p:nvCxnSpPr>
           <p:spPr>
             <a:xfrm>
-              <a:off x="8557683" y="4330700"/>
+              <a:off x="8557683" y="4254500"/>
               <a:ext cx="0" cy="177800"/>
             </a:xfrm>
             <a:prstGeom prst="line">
@@ -15373,7 +15373,7 @@
           </p:nvSpPr>
           <p:spPr>
             <a:xfrm>
-              <a:off x="8525933" y="4508500"/>
+              <a:off x="8525933" y="4432300"/>
               <a:ext cx="63500" cy="63500"/>
             </a:xfrm>
             <a:prstGeom prst="rect">
@@ -15402,7 +15402,7 @@
           </p:nvSpPr>
           <p:spPr>
             <a:xfrm>
-              <a:off x="2565400" y="4572000"/>
+              <a:off x="2565400" y="4495800"/>
               <a:ext cx="6502400" cy="393700"/>
             </a:xfrm>
             <a:prstGeom prst="rect">
@@ -15431,7 +15431,7 @@
           </p:nvSpPr>
           <p:spPr>
             <a:xfrm>
-              <a:off x="2565400" y="4572000"/>
+              <a:off x="2565400" y="4495800"/>
               <a:ext cx="6502400" cy="393700"/>
             </a:xfrm>
             <a:prstGeom prst="rect">
@@ -15492,7 +15492,7 @@
           </p:nvCxnSpPr>
           <p:spPr>
             <a:xfrm>
-              <a:off x="5816600" y="4978400"/>
+              <a:off x="5816600" y="4902200"/>
               <a:ext cx="0" cy="292100"/>
             </a:xfrm>
             <a:prstGeom prst="line">
@@ -15515,7 +15515,7 @@
           </p:nvSpPr>
           <p:spPr>
             <a:xfrm>
-              <a:off x="5880100" y="5003800"/>
+              <a:off x="5880100" y="4927600"/>
               <a:ext cx="508000" cy="139700"/>
             </a:xfrm>
             <a:prstGeom prst="rect">
@@ -15557,7 +15557,7 @@
           </p:nvSpPr>
           <p:spPr>
             <a:xfrm>
-              <a:off x="2565400" y="6070600"/>
+              <a:off x="2565400" y="5994400"/>
               <a:ext cx="6502400" cy="12700"/>
             </a:xfrm>
             <a:prstGeom prst="rect">
@@ -15586,7 +15586,7 @@
           </p:nvSpPr>
           <p:spPr>
             <a:xfrm>
-              <a:off x="2565400" y="6083300"/>
+              <a:off x="2565400" y="6007100"/>
               <a:ext cx="12700" cy="50800"/>
             </a:xfrm>
             <a:prstGeom prst="rect">
@@ -15615,7 +15615,7 @@
           </p:nvSpPr>
           <p:spPr>
             <a:xfrm>
-              <a:off x="2794000" y="6083300"/>
+              <a:off x="2794000" y="6007100"/>
               <a:ext cx="12700" cy="50800"/>
             </a:xfrm>
             <a:prstGeom prst="rect">
@@ -15644,7 +15644,7 @@
           </p:nvSpPr>
           <p:spPr>
             <a:xfrm>
-              <a:off x="3022600" y="6083300"/>
+              <a:off x="3022600" y="6007100"/>
               <a:ext cx="12700" cy="50800"/>
             </a:xfrm>
             <a:prstGeom prst="rect">
@@ -15673,7 +15673,7 @@
           </p:nvSpPr>
           <p:spPr>
             <a:xfrm>
-              <a:off x="3251200" y="6083300"/>
+              <a:off x="3251200" y="6007100"/>
               <a:ext cx="12700" cy="50800"/>
             </a:xfrm>
             <a:prstGeom prst="rect">
@@ -15702,7 +15702,7 @@
           </p:nvSpPr>
           <p:spPr>
             <a:xfrm>
-              <a:off x="3479800" y="6083300"/>
+              <a:off x="3479800" y="6007100"/>
               <a:ext cx="12700" cy="50800"/>
             </a:xfrm>
             <a:prstGeom prst="rect">
@@ -15731,7 +15731,7 @@
           </p:nvSpPr>
           <p:spPr>
             <a:xfrm>
-              <a:off x="3708400" y="6083300"/>
+              <a:off x="3708400" y="6007100"/>
               <a:ext cx="12700" cy="50800"/>
             </a:xfrm>
             <a:prstGeom prst="rect">
@@ -15760,7 +15760,7 @@
           </p:nvSpPr>
           <p:spPr>
             <a:xfrm>
-              <a:off x="3937000" y="6083300"/>
+              <a:off x="3937000" y="6007100"/>
               <a:ext cx="12700" cy="50800"/>
             </a:xfrm>
             <a:prstGeom prst="rect">
@@ -15789,7 +15789,7 @@
           </p:nvSpPr>
           <p:spPr>
             <a:xfrm>
-              <a:off x="4165600" y="6083300"/>
+              <a:off x="4165600" y="6007100"/>
               <a:ext cx="12700" cy="50800"/>
             </a:xfrm>
             <a:prstGeom prst="rect">
@@ -15818,7 +15818,7 @@
           </p:nvSpPr>
           <p:spPr>
             <a:xfrm>
-              <a:off x="4394200" y="6083300"/>
+              <a:off x="4394200" y="6007100"/>
               <a:ext cx="12700" cy="50800"/>
             </a:xfrm>
             <a:prstGeom prst="rect">
@@ -15847,7 +15847,7 @@
           </p:nvSpPr>
           <p:spPr>
             <a:xfrm>
-              <a:off x="4622800" y="6083300"/>
+              <a:off x="4622800" y="6007100"/>
               <a:ext cx="12700" cy="50800"/>
             </a:xfrm>
             <a:prstGeom prst="rect">
@@ -15876,7 +15876,7 @@
           </p:nvSpPr>
           <p:spPr>
             <a:xfrm>
-              <a:off x="4851400" y="6083300"/>
+              <a:off x="4851400" y="6007100"/>
               <a:ext cx="12700" cy="50800"/>
             </a:xfrm>
             <a:prstGeom prst="rect">
@@ -15905,7 +15905,7 @@
           </p:nvSpPr>
           <p:spPr>
             <a:xfrm>
-              <a:off x="5080000" y="6083300"/>
+              <a:off x="5080000" y="6007100"/>
               <a:ext cx="12700" cy="50800"/>
             </a:xfrm>
             <a:prstGeom prst="rect">
@@ -15934,7 +15934,7 @@
           </p:nvSpPr>
           <p:spPr>
             <a:xfrm>
-              <a:off x="5308600" y="6083300"/>
+              <a:off x="5308600" y="6007100"/>
               <a:ext cx="12700" cy="50800"/>
             </a:xfrm>
             <a:prstGeom prst="rect">
@@ -15963,7 +15963,7 @@
           </p:nvSpPr>
           <p:spPr>
             <a:xfrm>
-              <a:off x="5537200" y="6083300"/>
+              <a:off x="5537200" y="6007100"/>
               <a:ext cx="12700" cy="50800"/>
             </a:xfrm>
             <a:prstGeom prst="rect">
@@ -15992,7 +15992,7 @@
           </p:nvSpPr>
           <p:spPr>
             <a:xfrm>
-              <a:off x="5765800" y="6083300"/>
+              <a:off x="5765800" y="6007100"/>
               <a:ext cx="12700" cy="50800"/>
             </a:xfrm>
             <a:prstGeom prst="rect">
@@ -16021,7 +16021,7 @@
           </p:nvSpPr>
           <p:spPr>
             <a:xfrm>
-              <a:off x="5994400" y="6083300"/>
+              <a:off x="5994400" y="6007100"/>
               <a:ext cx="12700" cy="50800"/>
             </a:xfrm>
             <a:prstGeom prst="rect">
@@ -16050,7 +16050,7 @@
           </p:nvSpPr>
           <p:spPr>
             <a:xfrm>
-              <a:off x="6223000" y="6083300"/>
+              <a:off x="6223000" y="6007100"/>
               <a:ext cx="12700" cy="50800"/>
             </a:xfrm>
             <a:prstGeom prst="rect">
@@ -16079,7 +16079,7 @@
           </p:nvSpPr>
           <p:spPr>
             <a:xfrm>
-              <a:off x="6451600" y="6083300"/>
+              <a:off x="6451600" y="6007100"/>
               <a:ext cx="12700" cy="50800"/>
             </a:xfrm>
             <a:prstGeom prst="rect">
@@ -16108,7 +16108,7 @@
           </p:nvSpPr>
           <p:spPr>
             <a:xfrm>
-              <a:off x="6680200" y="6083300"/>
+              <a:off x="6680200" y="6007100"/>
               <a:ext cx="12700" cy="50800"/>
             </a:xfrm>
             <a:prstGeom prst="rect">
@@ -16137,7 +16137,7 @@
           </p:nvSpPr>
           <p:spPr>
             <a:xfrm>
-              <a:off x="6908800" y="6083300"/>
+              <a:off x="6908800" y="6007100"/>
               <a:ext cx="12700" cy="50800"/>
             </a:xfrm>
             <a:prstGeom prst="rect">
@@ -16166,7 +16166,7 @@
           </p:nvSpPr>
           <p:spPr>
             <a:xfrm>
-              <a:off x="7137400" y="6083300"/>
+              <a:off x="7137400" y="6007100"/>
               <a:ext cx="12700" cy="50800"/>
             </a:xfrm>
             <a:prstGeom prst="rect">
@@ -16195,7 +16195,7 @@
           </p:nvSpPr>
           <p:spPr>
             <a:xfrm>
-              <a:off x="7366000" y="6083300"/>
+              <a:off x="7366000" y="6007100"/>
               <a:ext cx="12700" cy="50800"/>
             </a:xfrm>
             <a:prstGeom prst="rect">
@@ -16224,7 +16224,7 @@
           </p:nvSpPr>
           <p:spPr>
             <a:xfrm>
-              <a:off x="7594600" y="6083300"/>
+              <a:off x="7594600" y="6007100"/>
               <a:ext cx="12700" cy="50800"/>
             </a:xfrm>
             <a:prstGeom prst="rect">
@@ -16253,7 +16253,7 @@
           </p:nvSpPr>
           <p:spPr>
             <a:xfrm>
-              <a:off x="7823200" y="6083300"/>
+              <a:off x="7823200" y="6007100"/>
               <a:ext cx="12700" cy="50800"/>
             </a:xfrm>
             <a:prstGeom prst="rect">
@@ -16282,7 +16282,7 @@
           </p:nvSpPr>
           <p:spPr>
             <a:xfrm>
-              <a:off x="8051800" y="6083300"/>
+              <a:off x="8051800" y="6007100"/>
               <a:ext cx="12700" cy="50800"/>
             </a:xfrm>
             <a:prstGeom prst="rect">
@@ -16311,7 +16311,7 @@
           </p:nvSpPr>
           <p:spPr>
             <a:xfrm>
-              <a:off x="8280400" y="6083300"/>
+              <a:off x="8280400" y="6007100"/>
               <a:ext cx="12700" cy="50800"/>
             </a:xfrm>
             <a:prstGeom prst="rect">
@@ -16340,7 +16340,7 @@
           </p:nvSpPr>
           <p:spPr>
             <a:xfrm>
-              <a:off x="8509000" y="6083300"/>
+              <a:off x="8509000" y="6007100"/>
               <a:ext cx="12700" cy="50800"/>
             </a:xfrm>
             <a:prstGeom prst="rect">
@@ -16369,7 +16369,7 @@
           </p:nvSpPr>
           <p:spPr>
             <a:xfrm>
-              <a:off x="8737600" y="6083300"/>
+              <a:off x="8737600" y="6007100"/>
               <a:ext cx="12700" cy="50800"/>
             </a:xfrm>
             <a:prstGeom prst="rect">
@@ -16398,7 +16398,7 @@
           </p:nvSpPr>
           <p:spPr>
             <a:xfrm>
-              <a:off x="8966200" y="6083300"/>
+              <a:off x="8966200" y="6007100"/>
               <a:ext cx="12700" cy="50800"/>
             </a:xfrm>
             <a:prstGeom prst="rect">
@@ -16435,7 +16435,7 @@
           </p:blipFill>
           <p:spPr>
             <a:xfrm>
-              <a:off x="4673600" y="5314696"/>
+              <a:off x="4673600" y="5238496"/>
               <a:ext cx="3048000" cy="762000"/>
             </a:xfrm>
             <a:prstGeom prst="rect">
@@ -16451,7 +16451,7 @@
           </p:nvSpPr>
           <p:spPr>
             <a:xfrm>
-              <a:off x="2565400" y="5334000"/>
+              <a:off x="2565400" y="5257800"/>
               <a:ext cx="1587500" cy="190500"/>
             </a:xfrm>
             <a:prstGeom prst="rect">
@@ -16493,7 +16493,7 @@
           </p:nvSpPr>
           <p:spPr>
             <a:xfrm>
-              <a:off x="2565400" y="5562600"/>
+              <a:off x="2565400" y="5486400"/>
               <a:ext cx="1524000" cy="304800"/>
             </a:xfrm>
             <a:prstGeom prst="rect">
@@ -16535,7 +16535,7 @@
           </p:nvSpPr>
           <p:spPr>
             <a:xfrm>
-              <a:off x="9474200" y="4381500"/>
+              <a:off x="9474200" y="4305300"/>
               <a:ext cx="2159000" cy="139700"/>
             </a:xfrm>
             <a:prstGeom prst="rect">
@@ -16577,7 +16577,7 @@
           </p:nvSpPr>
           <p:spPr>
             <a:xfrm>
-              <a:off x="9474200" y="4546600"/>
+              <a:off x="9474200" y="4470400"/>
               <a:ext cx="2159000" cy="444500"/>
             </a:xfrm>
             <a:prstGeom prst="rect">
@@ -16609,7 +16609,7 @@
           </p:nvSpPr>
           <p:spPr>
             <a:xfrm>
-              <a:off x="9474200" y="4546600"/>
+              <a:off x="9474200" y="4470400"/>
               <a:ext cx="19050" cy="444500"/>
             </a:xfrm>
             <a:prstGeom prst="rect">
@@ -16638,7 +16638,7 @@
           </p:nvSpPr>
           <p:spPr>
             <a:xfrm>
-              <a:off x="9601200" y="4597400"/>
+              <a:off x="9601200" y="4521200"/>
               <a:ext cx="1930400" cy="165100"/>
             </a:xfrm>
             <a:prstGeom prst="rect">
@@ -16680,7 +16680,7 @@
           </p:nvSpPr>
           <p:spPr>
             <a:xfrm>
-              <a:off x="9601200" y="4787900"/>
+              <a:off x="9601200" y="4711700"/>
               <a:ext cx="1930400" cy="152400"/>
             </a:xfrm>
             <a:prstGeom prst="rect">
@@ -16722,7 +16722,7 @@
           </p:nvCxnSpPr>
           <p:spPr>
             <a:xfrm flipH="1">
-              <a:off x="9105900" y="4768850"/>
+              <a:off x="9105900" y="4692650"/>
               <a:ext cx="342900" cy="0"/>
             </a:xfrm>
             <a:prstGeom prst="line">
@@ -16746,7 +16746,7 @@
           </p:nvSpPr>
           <p:spPr>
             <a:xfrm>
-              <a:off x="9474200" y="5029200"/>
+              <a:off x="9474200" y="4953000"/>
               <a:ext cx="2159000" cy="139700"/>
             </a:xfrm>
             <a:prstGeom prst="rect">
@@ -16788,7 +16788,7 @@
           </p:nvSpPr>
           <p:spPr>
             <a:xfrm>
-              <a:off x="9474200" y="5219700"/>
+              <a:off x="9474200" y="5143500"/>
               <a:ext cx="2159000" cy="952500"/>
             </a:xfrm>
             <a:prstGeom prst="rect">
@@ -16820,7 +16820,7 @@
           </p:nvSpPr>
           <p:spPr>
             <a:xfrm>
-              <a:off x="9474200" y="5219700"/>
+              <a:off x="9474200" y="5143500"/>
               <a:ext cx="19050" cy="952500"/>
             </a:xfrm>
             <a:prstGeom prst="rect">
@@ -16849,7 +16849,7 @@
           </p:nvSpPr>
           <p:spPr>
             <a:xfrm>
-              <a:off x="9601200" y="5295900"/>
+              <a:off x="9601200" y="5219700"/>
               <a:ext cx="1930400" cy="165100"/>
             </a:xfrm>
             <a:prstGeom prst="rect">
@@ -16891,7 +16891,7 @@
           </p:nvSpPr>
           <p:spPr>
             <a:xfrm>
-              <a:off x="9601200" y="5486400"/>
+              <a:off x="9601200" y="5410200"/>
               <a:ext cx="1930400" cy="152400"/>
             </a:xfrm>
             <a:prstGeom prst="rect">
@@ -16933,7 +16933,7 @@
           </p:nvCxnSpPr>
           <p:spPr>
             <a:xfrm>
-              <a:off x="9601200" y="5702300"/>
+              <a:off x="9601200" y="5626100"/>
               <a:ext cx="1905000" cy="0"/>
             </a:xfrm>
             <a:prstGeom prst="line">
@@ -16955,7 +16955,7 @@
           </p:nvSpPr>
           <p:spPr>
             <a:xfrm>
-              <a:off x="9601200" y="5765800"/>
+              <a:off x="9601200" y="5689600"/>
               <a:ext cx="1930400" cy="165100"/>
             </a:xfrm>
             <a:prstGeom prst="rect">
@@ -16997,7 +16997,7 @@
           </p:nvSpPr>
           <p:spPr>
             <a:xfrm>
-              <a:off x="9601200" y="5956300"/>
+              <a:off x="9601200" y="5880100"/>
               <a:ext cx="1930400" cy="152400"/>
             </a:xfrm>
             <a:prstGeom prst="rect">
@@ -17039,7 +17039,7 @@
           </p:nvCxnSpPr>
           <p:spPr>
             <a:xfrm>
-              <a:off x="9245600" y="5695950"/>
+              <a:off x="9245600" y="5619750"/>
               <a:ext cx="190500" cy="0"/>
             </a:xfrm>
             <a:prstGeom prst="line">
@@ -27481,7 +27481,7 @@
         <p:spPr>
           <a:xfrm>
             <a:off x="508000" y="1905000"/>
-            <a:ext cx="1892300" cy="412750"/>
+            <a:ext cx="1892300" cy="558800"/>
           </a:xfrm>
           <a:prstGeom prst="rect">
             <a:avLst/>
@@ -27496,7 +27496,7 @@
           <a:p>
             <a:pPr algn="l" marL="0" indent="0">
               <a:lnSpc>
-                <a:spcPts val="1450"/>
+                <a:spcPts val="1500"/>
               </a:lnSpc>
               <a:buNone/>
             </a:pPr>
@@ -27523,7 +27523,7 @@
         <p:spPr>
           <a:xfrm>
             <a:off x="2603500" y="1905000"/>
-            <a:ext cx="1384300" cy="412750"/>
+            <a:ext cx="1384300" cy="558800"/>
           </a:xfrm>
           <a:prstGeom prst="rect">
             <a:avLst/>
@@ -27538,7 +27538,7 @@
           <a:p>
             <a:pPr algn="l" marL="0" indent="0">
               <a:lnSpc>
-                <a:spcPts val="1450"/>
+                <a:spcPts val="1500"/>
               </a:lnSpc>
               <a:buNone/>
             </a:pPr>
@@ -27565,7 +27565,7 @@
         <p:spPr>
           <a:xfrm>
             <a:off x="4191000" y="1905000"/>
-            <a:ext cx="1651000" cy="412750"/>
+            <a:ext cx="1651000" cy="558800"/>
           </a:xfrm>
           <a:prstGeom prst="rect">
             <a:avLst/>
@@ -27580,7 +27580,7 @@
           <a:p>
             <a:pPr algn="l" marL="0" indent="0">
               <a:lnSpc>
-                <a:spcPts val="1450"/>
+                <a:spcPts val="1500"/>
               </a:lnSpc>
               <a:buNone/>
             </a:pPr>
@@ -27628,7 +27628,7 @@
         </p:nvCxnSpPr>
         <p:spPr>
           <a:xfrm>
-            <a:off x="406400" y="2317750"/>
+            <a:off x="406400" y="2463800"/>
             <a:ext cx="5537200" cy="0"/>
           </a:xfrm>
           <a:prstGeom prst="line">
@@ -27650,8 +27650,8 @@
         </p:nvSpPr>
         <p:spPr>
           <a:xfrm>
-            <a:off x="508000" y="2317750"/>
-            <a:ext cx="1892300" cy="412750"/>
+            <a:off x="508000" y="2463800"/>
+            <a:ext cx="1892300" cy="558800"/>
           </a:xfrm>
           <a:prstGeom prst="rect">
             <a:avLst/>
@@ -27666,7 +27666,7 @@
           <a:p>
             <a:pPr algn="l" marL="0" indent="0">
               <a:lnSpc>
-                <a:spcPts val="1450"/>
+                <a:spcPts val="1500"/>
               </a:lnSpc>
               <a:buNone/>
             </a:pPr>
@@ -27692,8 +27692,8 @@
         </p:nvSpPr>
         <p:spPr>
           <a:xfrm>
-            <a:off x="2603500" y="2317750"/>
-            <a:ext cx="1384300" cy="412750"/>
+            <a:off x="2603500" y="2463800"/>
+            <a:ext cx="1384300" cy="558800"/>
           </a:xfrm>
           <a:prstGeom prst="rect">
             <a:avLst/>
@@ -27708,7 +27708,7 @@
           <a:p>
             <a:pPr algn="l" marL="0" indent="0">
               <a:lnSpc>
-                <a:spcPts val="1450"/>
+                <a:spcPts val="1500"/>
               </a:lnSpc>
               <a:buNone/>
             </a:pPr>
@@ -27734,8 +27734,8 @@
         </p:nvSpPr>
         <p:spPr>
           <a:xfrm>
-            <a:off x="4191000" y="2317750"/>
-            <a:ext cx="1651000" cy="412750"/>
+            <a:off x="4191000" y="2463800"/>
+            <a:ext cx="1651000" cy="558800"/>
           </a:xfrm>
           <a:prstGeom prst="rect">
             <a:avLst/>
@@ -27750,7 +27750,7 @@
           <a:p>
             <a:pPr algn="l" marL="0" indent="0">
               <a:lnSpc>
-                <a:spcPts val="1450"/>
+                <a:spcPts val="1500"/>
               </a:lnSpc>
               <a:buNone/>
             </a:pPr>
@@ -27798,7 +27798,7 @@
         </p:nvCxnSpPr>
         <p:spPr>
           <a:xfrm>
-            <a:off x="406400" y="2730500"/>
+            <a:off x="406400" y="3022600"/>
             <a:ext cx="5537200" cy="0"/>
           </a:xfrm>
           <a:prstGeom prst="line">
@@ -27820,8 +27820,8 @@
         </p:nvSpPr>
         <p:spPr>
           <a:xfrm>
-            <a:off x="508000" y="2730500"/>
-            <a:ext cx="1892300" cy="412750"/>
+            <a:off x="508000" y="3022600"/>
+            <a:ext cx="1892300" cy="558800"/>
           </a:xfrm>
           <a:prstGeom prst="rect">
             <a:avLst/>
@@ -27836,7 +27836,7 @@
           <a:p>
             <a:pPr algn="l" marL="0" indent="0">
               <a:lnSpc>
-                <a:spcPts val="1450"/>
+                <a:spcPts val="1500"/>
               </a:lnSpc>
               <a:buNone/>
             </a:pPr>
@@ -27862,8 +27862,8 @@
         </p:nvSpPr>
         <p:spPr>
           <a:xfrm>
-            <a:off x="2603500" y="2730500"/>
-            <a:ext cx="1384300" cy="412750"/>
+            <a:off x="2603500" y="3022600"/>
+            <a:ext cx="1384300" cy="558800"/>
           </a:xfrm>
           <a:prstGeom prst="rect">
             <a:avLst/>
@@ -27878,7 +27878,7 @@
           <a:p>
             <a:pPr algn="l" marL="0" indent="0">
               <a:lnSpc>
-                <a:spcPts val="1450"/>
+                <a:spcPts val="1500"/>
               </a:lnSpc>
               <a:buNone/>
             </a:pPr>
@@ -27904,8 +27904,8 @@
         </p:nvSpPr>
         <p:spPr>
           <a:xfrm>
-            <a:off x="4191000" y="2730500"/>
-            <a:ext cx="1651000" cy="412750"/>
+            <a:off x="4191000" y="3022600"/>
+            <a:ext cx="1651000" cy="558800"/>
           </a:xfrm>
           <a:prstGeom prst="rect">
             <a:avLst/>
@@ -27920,7 +27920,7 @@
           <a:p>
             <a:pPr algn="l" marL="0" indent="0">
               <a:lnSpc>
-                <a:spcPts val="1450"/>
+                <a:spcPts val="1500"/>
               </a:lnSpc>
               <a:buNone/>
             </a:pPr>
@@ -27968,7 +27968,7 @@
         </p:nvCxnSpPr>
         <p:spPr>
           <a:xfrm>
-            <a:off x="406400" y="3143250"/>
+            <a:off x="406400" y="3581400"/>
             <a:ext cx="5537200" cy="0"/>
           </a:xfrm>
           <a:prstGeom prst="line">
@@ -27990,8 +27990,8 @@
         </p:nvSpPr>
         <p:spPr>
           <a:xfrm>
-            <a:off x="508000" y="3143250"/>
-            <a:ext cx="1892300" cy="412750"/>
+            <a:off x="508000" y="3581400"/>
+            <a:ext cx="1892300" cy="558800"/>
           </a:xfrm>
           <a:prstGeom prst="rect">
             <a:avLst/>
@@ -28006,7 +28006,7 @@
           <a:p>
             <a:pPr algn="l" marL="0" indent="0">
               <a:lnSpc>
-                <a:spcPts val="1450"/>
+                <a:spcPts val="1500"/>
               </a:lnSpc>
               <a:buNone/>
             </a:pPr>
@@ -28032,8 +28032,8 @@
         </p:nvSpPr>
         <p:spPr>
           <a:xfrm>
-            <a:off x="2603500" y="3143250"/>
-            <a:ext cx="1384300" cy="412750"/>
+            <a:off x="2603500" y="3581400"/>
+            <a:ext cx="1384300" cy="558800"/>
           </a:xfrm>
           <a:prstGeom prst="rect">
             <a:avLst/>
@@ -28048,7 +28048,7 @@
           <a:p>
             <a:pPr algn="l" marL="0" indent="0">
               <a:lnSpc>
-                <a:spcPts val="1450"/>
+                <a:spcPts val="1500"/>
               </a:lnSpc>
               <a:buNone/>
             </a:pPr>
@@ -28074,8 +28074,8 @@
         </p:nvSpPr>
         <p:spPr>
           <a:xfrm>
-            <a:off x="4191000" y="3143250"/>
-            <a:ext cx="1651000" cy="412750"/>
+            <a:off x="4191000" y="3581400"/>
+            <a:ext cx="1651000" cy="558800"/>
           </a:xfrm>
           <a:prstGeom prst="rect">
             <a:avLst/>
@@ -28090,7 +28090,7 @@
           <a:p>
             <a:pPr algn="l" marL="0" indent="0">
               <a:lnSpc>
-                <a:spcPts val="1450"/>
+                <a:spcPts val="1500"/>
               </a:lnSpc>
               <a:buNone/>
             </a:pPr>
@@ -28138,7 +28138,7 @@
         </p:nvCxnSpPr>
         <p:spPr>
           <a:xfrm>
-            <a:off x="406400" y="3556000"/>
+            <a:off x="406400" y="4140200"/>
             <a:ext cx="5537200" cy="0"/>
           </a:xfrm>
           <a:prstGeom prst="line">
@@ -28160,8 +28160,8 @@
         </p:nvSpPr>
         <p:spPr>
           <a:xfrm>
-            <a:off x="508000" y="3556000"/>
-            <a:ext cx="1892300" cy="412750"/>
+            <a:off x="508000" y="4140200"/>
+            <a:ext cx="1892300" cy="558800"/>
           </a:xfrm>
           <a:prstGeom prst="rect">
             <a:avLst/>
@@ -28176,7 +28176,7 @@
           <a:p>
             <a:pPr algn="l" marL="0" indent="0">
               <a:lnSpc>
-                <a:spcPts val="1450"/>
+                <a:spcPts val="1500"/>
               </a:lnSpc>
               <a:buNone/>
             </a:pPr>
@@ -28202,8 +28202,8 @@
         </p:nvSpPr>
         <p:spPr>
           <a:xfrm>
-            <a:off x="2603500" y="3556000"/>
-            <a:ext cx="1384300" cy="412750"/>
+            <a:off x="2603500" y="4140200"/>
+            <a:ext cx="1384300" cy="558800"/>
           </a:xfrm>
           <a:prstGeom prst="rect">
             <a:avLst/>
@@ -28218,7 +28218,7 @@
           <a:p>
             <a:pPr algn="l" marL="0" indent="0">
               <a:lnSpc>
-                <a:spcPts val="1450"/>
+                <a:spcPts val="1500"/>
               </a:lnSpc>
               <a:buNone/>
             </a:pPr>
@@ -28244,8 +28244,8 @@
         </p:nvSpPr>
         <p:spPr>
           <a:xfrm>
-            <a:off x="4191000" y="3556000"/>
-            <a:ext cx="1651000" cy="412750"/>
+            <a:off x="4191000" y="4140200"/>
+            <a:ext cx="1651000" cy="558800"/>
           </a:xfrm>
           <a:prstGeom prst="rect">
             <a:avLst/>
@@ -28260,7 +28260,7 @@
           <a:p>
             <a:pPr algn="l" marL="0" indent="0">
               <a:lnSpc>
-                <a:spcPts val="1450"/>
+                <a:spcPts val="1500"/>
               </a:lnSpc>
               <a:buNone/>
             </a:pPr>
@@ -28308,7 +28308,7 @@
         </p:nvCxnSpPr>
         <p:spPr>
           <a:xfrm>
-            <a:off x="406400" y="3968750"/>
+            <a:off x="406400" y="4699000"/>
             <a:ext cx="5537200" cy="0"/>
           </a:xfrm>
           <a:prstGeom prst="line">
@@ -28415,7 +28415,7 @@
         <p:spPr>
           <a:xfrm>
             <a:off x="6197600" y="1625600"/>
-            <a:ext cx="5588000" cy="889000"/>
+            <a:ext cx="5588000" cy="876300"/>
           </a:xfrm>
           <a:prstGeom prst="rect">
             <a:avLst/>
@@ -28447,7 +28447,7 @@
         <p:spPr>
           <a:xfrm>
             <a:off x="6197600" y="1625600"/>
-            <a:ext cx="19050" cy="889000"/>
+            <a:ext cx="19050" cy="876300"/>
           </a:xfrm>
           <a:prstGeom prst="rect">
             <a:avLst/>
@@ -28583,8 +28583,8 @@
         </p:nvSpPr>
         <p:spPr>
           <a:xfrm>
-            <a:off x="6197600" y="2603500"/>
-            <a:ext cx="5588000" cy="1130300"/>
+            <a:off x="6197600" y="2590800"/>
+            <a:ext cx="5588000" cy="1143000"/>
           </a:xfrm>
           <a:prstGeom prst="rect">
             <a:avLst/>
@@ -28615,8 +28615,8 @@
         </p:nvSpPr>
         <p:spPr>
           <a:xfrm>
-            <a:off x="6197600" y="2603500"/>
-            <a:ext cx="19050" cy="1130300"/>
+            <a:off x="6197600" y="2590800"/>
+            <a:ext cx="19050" cy="1143000"/>
           </a:xfrm>
           <a:prstGeom prst="rect">
             <a:avLst/>
@@ -28652,7 +28652,7 @@
         </p:blipFill>
         <p:spPr>
           <a:xfrm>
-            <a:off x="6362700" y="2743200"/>
+            <a:off x="6362700" y="2730500"/>
             <a:ext cx="203200" cy="203200"/>
           </a:xfrm>
           <a:prstGeom prst="rect">
@@ -28668,7 +28668,7 @@
         </p:nvSpPr>
         <p:spPr>
           <a:xfrm>
-            <a:off x="6642100" y="2717800"/>
+            <a:off x="6642100" y="2705100"/>
             <a:ext cx="1905000" cy="254000"/>
           </a:xfrm>
           <a:prstGeom prst="rect">
@@ -28710,7 +28710,7 @@
         </p:nvSpPr>
         <p:spPr>
           <a:xfrm>
-            <a:off x="6362700" y="3022600"/>
+            <a:off x="6362700" y="3009900"/>
             <a:ext cx="5257800" cy="381000"/>
           </a:xfrm>
           <a:prstGeom prst="rect">
@@ -28752,7 +28752,7 @@
         </p:nvSpPr>
         <p:spPr>
           <a:xfrm>
-            <a:off x="6362700" y="3403600"/>
+            <a:off x="6362700" y="3390900"/>
             <a:ext cx="1705480" cy="215900"/>
           </a:xfrm>
           <a:prstGeom prst="rect">
@@ -28814,7 +28814,7 @@
         </p:nvSpPr>
         <p:spPr>
           <a:xfrm>
-            <a:off x="8131680" y="3403600"/>
+            <a:off x="8131680" y="3390900"/>
             <a:ext cx="1597530" cy="215900"/>
           </a:xfrm>
           <a:prstGeom prst="rect">
@@ -28877,7 +28877,7 @@
         <p:spPr>
           <a:xfrm>
             <a:off x="6197600" y="3822700"/>
-            <a:ext cx="5588000" cy="889000"/>
+            <a:ext cx="5588000" cy="876300"/>
           </a:xfrm>
           <a:prstGeom prst="rect">
             <a:avLst/>
@@ -28909,7 +28909,7 @@
         <p:spPr>
           <a:xfrm>
             <a:off x="6197600" y="3822700"/>
-            <a:ext cx="19050" cy="889000"/>
+            <a:ext cx="19050" cy="876300"/>
           </a:xfrm>
           <a:prstGeom prst="rect">
             <a:avLst/>
@@ -33270,8 +33270,8 @@
         </p:nvSpPr>
         <p:spPr>
           <a:xfrm>
-            <a:off x="508000" y="3124200"/>
-            <a:ext cx="2527300" cy="292100"/>
+            <a:off x="546100" y="3111500"/>
+            <a:ext cx="2451100" cy="292100"/>
           </a:xfrm>
           <a:prstGeom prst="rect">
             <a:avLst/>
@@ -33299,7 +33299,7 @@
         </p:nvSpPr>
         <p:spPr>
           <a:xfrm>
-            <a:off x="508000" y="3124200"/>
+            <a:off x="546100" y="3111500"/>
             <a:ext cx="19050" cy="292100"/>
           </a:xfrm>
           <a:prstGeom prst="rect">
@@ -33328,8 +33328,8 @@
         </p:nvSpPr>
         <p:spPr>
           <a:xfrm>
-            <a:off x="603250" y="3124200"/>
-            <a:ext cx="2355850" cy="292100"/>
+            <a:off x="641350" y="3111500"/>
+            <a:ext cx="2279650" cy="292100"/>
           </a:xfrm>
           <a:prstGeom prst="rect">
             <a:avLst/>
@@ -33672,8 +33672,8 @@
         </p:nvSpPr>
         <p:spPr>
           <a:xfrm>
-            <a:off x="3390900" y="3124200"/>
-            <a:ext cx="2527300" cy="292100"/>
+            <a:off x="3429000" y="3111500"/>
+            <a:ext cx="2451100" cy="292100"/>
           </a:xfrm>
           <a:prstGeom prst="rect">
             <a:avLst/>
@@ -33701,7 +33701,7 @@
         </p:nvSpPr>
         <p:spPr>
           <a:xfrm>
-            <a:off x="3390900" y="3124200"/>
+            <a:off x="3429000" y="3111500"/>
             <a:ext cx="19050" cy="292100"/>
           </a:xfrm>
           <a:prstGeom prst="rect">
@@ -33730,8 +33730,8 @@
         </p:nvSpPr>
         <p:spPr>
           <a:xfrm>
-            <a:off x="3486150" y="3124200"/>
-            <a:ext cx="2355850" cy="292100"/>
+            <a:off x="3524250" y="3111500"/>
+            <a:ext cx="2279650" cy="292100"/>
           </a:xfrm>
           <a:prstGeom prst="rect">
             <a:avLst/>
@@ -34074,8 +34074,8 @@
         </p:nvSpPr>
         <p:spPr>
           <a:xfrm>
-            <a:off x="6273800" y="3124200"/>
-            <a:ext cx="2527300" cy="292100"/>
+            <a:off x="6311900" y="3111500"/>
+            <a:ext cx="2451100" cy="292100"/>
           </a:xfrm>
           <a:prstGeom prst="rect">
             <a:avLst/>
@@ -34103,7 +34103,7 @@
         </p:nvSpPr>
         <p:spPr>
           <a:xfrm>
-            <a:off x="6273800" y="3124200"/>
+            <a:off x="6311900" y="3111500"/>
             <a:ext cx="19050" cy="292100"/>
           </a:xfrm>
           <a:prstGeom prst="rect">
@@ -34132,8 +34132,8 @@
         </p:nvSpPr>
         <p:spPr>
           <a:xfrm>
-            <a:off x="6369050" y="3124200"/>
-            <a:ext cx="2355850" cy="292100"/>
+            <a:off x="6407150" y="3111500"/>
+            <a:ext cx="2279650" cy="292100"/>
           </a:xfrm>
           <a:prstGeom prst="rect">
             <a:avLst/>
@@ -34476,8 +34476,8 @@
         </p:nvSpPr>
         <p:spPr>
           <a:xfrm>
-            <a:off x="9156700" y="3124200"/>
-            <a:ext cx="2527300" cy="292100"/>
+            <a:off x="9194800" y="3111500"/>
+            <a:ext cx="2451100" cy="292100"/>
           </a:xfrm>
           <a:prstGeom prst="rect">
             <a:avLst/>
@@ -34505,7 +34505,7 @@
         </p:nvSpPr>
         <p:spPr>
           <a:xfrm>
-            <a:off x="9156700" y="3124200"/>
+            <a:off x="9194800" y="3111500"/>
             <a:ext cx="19050" cy="292100"/>
           </a:xfrm>
           <a:prstGeom prst="rect">
@@ -34534,8 +34534,8 @@
         </p:nvSpPr>
         <p:spPr>
           <a:xfrm>
-            <a:off x="9251950" y="3124200"/>
-            <a:ext cx="2355850" cy="292100"/>
+            <a:off x="9290050" y="3111500"/>
+            <a:ext cx="2279650" cy="292100"/>
           </a:xfrm>
           <a:prstGeom prst="rect">
             <a:avLst/>
@@ -34577,7 +34577,7 @@
         <p:spPr>
           <a:xfrm>
             <a:off x="406400" y="3695700"/>
-            <a:ext cx="5562600" cy="228600"/>
+            <a:ext cx="5613400" cy="228600"/>
           </a:xfrm>
           <a:prstGeom prst="rect">
             <a:avLst/>
@@ -34619,7 +34619,7 @@
         <p:spPr>
           <a:xfrm>
             <a:off x="1447800" y="3695700"/>
-            <a:ext cx="4521200" cy="228600"/>
+            <a:ext cx="4572000" cy="228600"/>
           </a:xfrm>
           <a:prstGeom prst="rect">
             <a:avLst/>
@@ -34661,7 +34661,7 @@
         <p:spPr>
           <a:xfrm>
             <a:off x="406400" y="4851400"/>
-            <a:ext cx="1333500" cy="1435100"/>
+            <a:ext cx="1289050" cy="1435100"/>
           </a:xfrm>
           <a:prstGeom prst="rect">
             <a:avLst/>
@@ -34693,7 +34693,7 @@
         <p:spPr>
           <a:xfrm>
             <a:off x="406400" y="4851400"/>
-            <a:ext cx="1333500" cy="19050"/>
+            <a:ext cx="1289050" cy="19050"/>
           </a:xfrm>
           <a:prstGeom prst="rect">
             <a:avLst/>
@@ -34721,7 +34721,7 @@
         </p:nvSpPr>
         <p:spPr>
           <a:xfrm>
-            <a:off x="533400" y="5003800"/>
+            <a:off x="546100" y="5003800"/>
             <a:ext cx="381000" cy="381000"/>
           </a:xfrm>
           <a:prstGeom prst="ellipse">
@@ -34750,7 +34750,7 @@
         </p:nvSpPr>
         <p:spPr>
           <a:xfrm>
-            <a:off x="533400" y="5003800"/>
+            <a:off x="546100" y="5003800"/>
             <a:ext cx="381000" cy="381000"/>
           </a:xfrm>
           <a:prstGeom prst="rect">
@@ -34792,8 +34792,8 @@
         </p:nvSpPr>
         <p:spPr>
           <a:xfrm>
-            <a:off x="533400" y="5473700"/>
-            <a:ext cx="1079500" cy="215900"/>
+            <a:off x="546100" y="5473700"/>
+            <a:ext cx="1009650" cy="215900"/>
           </a:xfrm>
           <a:prstGeom prst="rect">
             <a:avLst/>
@@ -34834,8 +34834,8 @@
         </p:nvSpPr>
         <p:spPr>
           <a:xfrm>
-            <a:off x="533400" y="5727700"/>
-            <a:ext cx="1104900" cy="508000"/>
+            <a:off x="546100" y="5727700"/>
+            <a:ext cx="1035050" cy="508000"/>
           </a:xfrm>
           <a:prstGeom prst="rect">
             <a:avLst/>
@@ -34876,8 +34876,8 @@
         </p:nvSpPr>
         <p:spPr>
           <a:xfrm>
-            <a:off x="1816100" y="4597400"/>
-            <a:ext cx="1333500" cy="1689100"/>
+            <a:off x="1847850" y="4597400"/>
+            <a:ext cx="1289050" cy="1689100"/>
           </a:xfrm>
           <a:prstGeom prst="rect">
             <a:avLst/>
@@ -34908,8 +34908,8 @@
         </p:nvSpPr>
         <p:spPr>
           <a:xfrm>
-            <a:off x="1816100" y="4597400"/>
-            <a:ext cx="1333500" cy="19050"/>
+            <a:off x="1847850" y="4597400"/>
+            <a:ext cx="1289050" cy="19050"/>
           </a:xfrm>
           <a:prstGeom prst="rect">
             <a:avLst/>
@@ -34937,7 +34937,7 @@
         </p:nvSpPr>
         <p:spPr>
           <a:xfrm>
-            <a:off x="1943100" y="4749800"/>
+            <a:off x="1987550" y="4749800"/>
             <a:ext cx="381000" cy="381000"/>
           </a:xfrm>
           <a:prstGeom prst="ellipse">
@@ -34966,7 +34966,7 @@
         </p:nvSpPr>
         <p:spPr>
           <a:xfrm>
-            <a:off x="1943100" y="4749800"/>
+            <a:off x="1987550" y="4749800"/>
             <a:ext cx="381000" cy="381000"/>
           </a:xfrm>
           <a:prstGeom prst="rect">
@@ -35008,8 +35008,8 @@
         </p:nvSpPr>
         <p:spPr>
           <a:xfrm>
-            <a:off x="1943100" y="5219700"/>
-            <a:ext cx="1079500" cy="215900"/>
+            <a:off x="1987550" y="5219700"/>
+            <a:ext cx="1009650" cy="215900"/>
           </a:xfrm>
           <a:prstGeom prst="rect">
             <a:avLst/>
@@ -35050,16 +35050,16 @@
         </p:nvSpPr>
         <p:spPr>
           <a:xfrm>
-            <a:off x="1943100" y="5473700"/>
-            <a:ext cx="1104900" cy="508000"/>
-          </a:xfrm>
-          <a:prstGeom prst="rect">
-            <a:avLst/>
-          </a:prstGeom>
-          <a:noFill/>
-        </p:spPr>
-        <p:txBody>
-          <a:bodyPr wrap="square" anchor="t" lIns="0" tIns="0" rIns="180975" bIns="0">
+            <a:off x="1987550" y="5473700"/>
+            <a:ext cx="1035050" cy="508000"/>
+          </a:xfrm>
+          <a:prstGeom prst="rect">
+            <a:avLst/>
+          </a:prstGeom>
+          <a:noFill/>
+        </p:spPr>
+        <p:txBody>
+          <a:bodyPr wrap="square" anchor="t" lIns="0" tIns="0" rIns="120650" bIns="0">
             <a:noAutofit/>
           </a:bodyPr>
           <a:lstStyle/>
@@ -35092,8 +35092,8 @@
         </p:nvSpPr>
         <p:spPr>
           <a:xfrm>
-            <a:off x="3225800" y="4343400"/>
-            <a:ext cx="1333500" cy="1943100"/>
+            <a:off x="3289300" y="4343400"/>
+            <a:ext cx="1289050" cy="1943100"/>
           </a:xfrm>
           <a:prstGeom prst="rect">
             <a:avLst/>
@@ -35124,8 +35124,8 @@
         </p:nvSpPr>
         <p:spPr>
           <a:xfrm>
-            <a:off x="3225800" y="4343400"/>
-            <a:ext cx="1333500" cy="19050"/>
+            <a:off x="3289300" y="4343400"/>
+            <a:ext cx="1289050" cy="19050"/>
           </a:xfrm>
           <a:prstGeom prst="rect">
             <a:avLst/>
@@ -35153,7 +35153,7 @@
         </p:nvSpPr>
         <p:spPr>
           <a:xfrm>
-            <a:off x="3352800" y="4495800"/>
+            <a:off x="3429000" y="4495800"/>
             <a:ext cx="381000" cy="381000"/>
           </a:xfrm>
           <a:prstGeom prst="ellipse">
@@ -35182,7 +35182,7 @@
         </p:nvSpPr>
         <p:spPr>
           <a:xfrm>
-            <a:off x="3352800" y="4495800"/>
+            <a:off x="3429000" y="4495800"/>
             <a:ext cx="381000" cy="381000"/>
           </a:xfrm>
           <a:prstGeom prst="rect">
@@ -35224,8 +35224,8 @@
         </p:nvSpPr>
         <p:spPr>
           <a:xfrm>
-            <a:off x="3352800" y="4965700"/>
-            <a:ext cx="1079500" cy="215900"/>
+            <a:off x="3429000" y="4965700"/>
+            <a:ext cx="1009650" cy="215900"/>
           </a:xfrm>
           <a:prstGeom prst="rect">
             <a:avLst/>
@@ -35266,8 +35266,8 @@
         </p:nvSpPr>
         <p:spPr>
           <a:xfrm>
-            <a:off x="3352800" y="5219700"/>
-            <a:ext cx="1104900" cy="508000"/>
+            <a:off x="3429000" y="5219700"/>
+            <a:ext cx="1035050" cy="508000"/>
           </a:xfrm>
           <a:prstGeom prst="rect">
             <a:avLst/>
@@ -35308,8 +35308,8 @@
         </p:nvSpPr>
         <p:spPr>
           <a:xfrm>
-            <a:off x="4635500" y="4089400"/>
-            <a:ext cx="1333500" cy="2197100"/>
+            <a:off x="4730750" y="4089400"/>
+            <a:ext cx="1289050" cy="2197100"/>
           </a:xfrm>
           <a:prstGeom prst="rect">
             <a:avLst/>
@@ -35340,8 +35340,8 @@
         </p:nvSpPr>
         <p:spPr>
           <a:xfrm>
-            <a:off x="4635500" y="4089400"/>
-            <a:ext cx="1333500" cy="19050"/>
+            <a:off x="4730750" y="4089400"/>
+            <a:ext cx="1289050" cy="19050"/>
           </a:xfrm>
           <a:prstGeom prst="rect">
             <a:avLst/>
@@ -35369,7 +35369,7 @@
         </p:nvSpPr>
         <p:spPr>
           <a:xfrm>
-            <a:off x="4762500" y="4241800"/>
+            <a:off x="4870450" y="4241800"/>
             <a:ext cx="381000" cy="381000"/>
           </a:xfrm>
           <a:prstGeom prst="ellipse">
@@ -35398,7 +35398,7 @@
         </p:nvSpPr>
         <p:spPr>
           <a:xfrm>
-            <a:off x="4762500" y="4241800"/>
+            <a:off x="4870450" y="4241800"/>
             <a:ext cx="381000" cy="381000"/>
           </a:xfrm>
           <a:prstGeom prst="rect">
@@ -35440,8 +35440,8 @@
         </p:nvSpPr>
         <p:spPr>
           <a:xfrm>
-            <a:off x="4762500" y="4711700"/>
-            <a:ext cx="1079500" cy="215900"/>
+            <a:off x="4870450" y="4711700"/>
+            <a:ext cx="1009650" cy="215900"/>
           </a:xfrm>
           <a:prstGeom prst="rect">
             <a:avLst/>
@@ -35482,8 +35482,8 @@
         </p:nvSpPr>
         <p:spPr>
           <a:xfrm>
-            <a:off x="4762500" y="4965700"/>
-            <a:ext cx="1104900" cy="508000"/>
+            <a:off x="4870450" y="4965700"/>
+            <a:ext cx="1035050" cy="508000"/>
           </a:xfrm>
           <a:prstGeom prst="rect">
             <a:avLst/>
@@ -35524,8 +35524,8 @@
         </p:nvSpPr>
         <p:spPr>
           <a:xfrm>
-            <a:off x="6223000" y="3695700"/>
-            <a:ext cx="5562600" cy="228600"/>
+            <a:off x="6172200" y="3695700"/>
+            <a:ext cx="5613400" cy="228600"/>
           </a:xfrm>
           <a:prstGeom prst="rect">
             <a:avLst/>
@@ -35566,8 +35566,8 @@
         </p:nvSpPr>
         <p:spPr>
           <a:xfrm>
-            <a:off x="7721600" y="3695700"/>
-            <a:ext cx="4064000" cy="228600"/>
+            <a:off x="7670800" y="3695700"/>
+            <a:ext cx="4114800" cy="228600"/>
           </a:xfrm>
           <a:prstGeom prst="rect">
             <a:avLst/>
@@ -35608,8 +35608,8 @@
         </p:nvSpPr>
         <p:spPr>
           <a:xfrm>
-            <a:off x="6223000" y="4013200"/>
-            <a:ext cx="1384300" cy="368300"/>
+            <a:off x="6172200" y="4089400"/>
+            <a:ext cx="1397000" cy="368300"/>
           </a:xfrm>
           <a:prstGeom prst="rect">
             <a:avLst/>
@@ -35637,8 +35637,8 @@
         </p:nvSpPr>
         <p:spPr>
           <a:xfrm>
-            <a:off x="6223000" y="4013200"/>
-            <a:ext cx="1384300" cy="368300"/>
+            <a:off x="6172200" y="4089400"/>
+            <a:ext cx="1397000" cy="368300"/>
           </a:xfrm>
           <a:prstGeom prst="rect">
             <a:avLst/>
@@ -35698,7 +35698,7 @@
         </p:nvSpPr>
         <p:spPr>
           <a:xfrm>
-            <a:off x="6407150" y="4457700"/>
+            <a:off x="6362700" y="4533900"/>
             <a:ext cx="1016000" cy="165100"/>
           </a:xfrm>
           <a:prstGeom prst="rect">
@@ -35740,7 +35740,7 @@
         </p:nvSpPr>
         <p:spPr>
           <a:xfrm>
-            <a:off x="6407150" y="4635500"/>
+            <a:off x="6362700" y="4711700"/>
             <a:ext cx="1016000" cy="152400"/>
           </a:xfrm>
           <a:prstGeom prst="rect">
@@ -35782,8 +35782,8 @@
         </p:nvSpPr>
         <p:spPr>
           <a:xfrm>
-            <a:off x="7620000" y="4013200"/>
-            <a:ext cx="2073275" cy="368300"/>
+            <a:off x="7581900" y="4089400"/>
+            <a:ext cx="2092325" cy="368300"/>
           </a:xfrm>
           <a:prstGeom prst="rect">
             <a:avLst/>
@@ -35811,8 +35811,8 @@
         </p:nvSpPr>
         <p:spPr>
           <a:xfrm>
-            <a:off x="7620000" y="4013200"/>
-            <a:ext cx="2073275" cy="368300"/>
+            <a:off x="7581900" y="4089400"/>
+            <a:ext cx="2092325" cy="368300"/>
           </a:xfrm>
           <a:prstGeom prst="rect">
             <a:avLst/>
@@ -35872,7 +35872,7 @@
         </p:nvSpPr>
         <p:spPr>
           <a:xfrm>
-            <a:off x="8148638" y="4457700"/>
+            <a:off x="8120062" y="4533900"/>
             <a:ext cx="1016000" cy="165100"/>
           </a:xfrm>
           <a:prstGeom prst="rect">
@@ -35914,7 +35914,7 @@
         </p:nvSpPr>
         <p:spPr>
           <a:xfrm>
-            <a:off x="8148638" y="4635500"/>
+            <a:off x="8120062" y="4711700"/>
             <a:ext cx="1016000" cy="152400"/>
           </a:xfrm>
           <a:prstGeom prst="rect">
@@ -35956,8 +35956,8 @@
         </p:nvSpPr>
         <p:spPr>
           <a:xfrm>
-            <a:off x="9705975" y="4013200"/>
-            <a:ext cx="1377950" cy="368300"/>
+            <a:off x="9686925" y="4089400"/>
+            <a:ext cx="1390650" cy="368300"/>
           </a:xfrm>
           <a:prstGeom prst="rect">
             <a:avLst/>
@@ -35985,8 +35985,8 @@
         </p:nvSpPr>
         <p:spPr>
           <a:xfrm>
-            <a:off x="9705975" y="4013200"/>
-            <a:ext cx="1377950" cy="368300"/>
+            <a:off x="9686925" y="4089400"/>
+            <a:ext cx="1390650" cy="368300"/>
           </a:xfrm>
           <a:prstGeom prst="rect">
             <a:avLst/>
@@ -36046,7 +36046,7 @@
         </p:nvSpPr>
         <p:spPr>
           <a:xfrm>
-            <a:off x="9886950" y="4457700"/>
+            <a:off x="9874250" y="4533900"/>
             <a:ext cx="1016000" cy="165100"/>
           </a:xfrm>
           <a:prstGeom prst="rect">
@@ -36088,7 +36088,7 @@
         </p:nvSpPr>
         <p:spPr>
           <a:xfrm>
-            <a:off x="9886950" y="4635500"/>
+            <a:off x="9874250" y="4711700"/>
             <a:ext cx="1016000" cy="152400"/>
           </a:xfrm>
           <a:prstGeom prst="rect">
@@ -36130,8 +36130,8 @@
         </p:nvSpPr>
         <p:spPr>
           <a:xfrm>
-            <a:off x="11096625" y="4013200"/>
-            <a:ext cx="688975" cy="368300"/>
+            <a:off x="11090275" y="4089400"/>
+            <a:ext cx="695325" cy="368300"/>
           </a:xfrm>
           <a:prstGeom prst="rect">
             <a:avLst/>
@@ -36159,8 +36159,8 @@
         </p:nvSpPr>
         <p:spPr>
           <a:xfrm>
-            <a:off x="11096625" y="4013200"/>
-            <a:ext cx="688975" cy="368300"/>
+            <a:off x="11090275" y="4089400"/>
+            <a:ext cx="695325" cy="368300"/>
           </a:xfrm>
           <a:prstGeom prst="rect">
             <a:avLst/>
@@ -36220,7 +36220,7 @@
         </p:nvSpPr>
         <p:spPr>
           <a:xfrm>
-            <a:off x="10887219" y="4457700"/>
+            <a:off x="10887219" y="4533900"/>
             <a:ext cx="1016000" cy="165100"/>
           </a:xfrm>
           <a:prstGeom prst="rect">
@@ -36262,7 +36262,7 @@
         </p:nvSpPr>
         <p:spPr>
           <a:xfrm>
-            <a:off x="10887219" y="4635500"/>
+            <a:off x="10887219" y="4711700"/>
             <a:ext cx="1016000" cy="152400"/>
           </a:xfrm>
           <a:prstGeom prst="rect">
@@ -36304,8 +36304,8 @@
         </p:nvCxnSpPr>
         <p:spPr>
           <a:xfrm>
-            <a:off x="6223000" y="4914900"/>
-            <a:ext cx="5562600" cy="0"/>
+            <a:off x="6172200" y="4991100"/>
+            <a:ext cx="5613400" cy="0"/>
           </a:xfrm>
           <a:prstGeom prst="line">
             <a:avLst/>
@@ -36334,7 +36334,7 @@
         </p:blipFill>
         <p:spPr>
           <a:xfrm>
-            <a:off x="6223000" y="4991100"/>
+            <a:off x="6172200" y="5067300"/>
             <a:ext cx="177800" cy="177800"/>
           </a:xfrm>
           <a:prstGeom prst="rect">
@@ -36350,7 +36350,7 @@
         </p:nvSpPr>
         <p:spPr>
           <a:xfrm>
-            <a:off x="6477000" y="4965700"/>
+            <a:off x="6426200" y="5041900"/>
             <a:ext cx="1270000" cy="228600"/>
           </a:xfrm>
           <a:prstGeom prst="rect">
@@ -36392,8 +36392,8 @@
         </p:nvSpPr>
         <p:spPr>
           <a:xfrm>
-            <a:off x="7683500" y="4978400"/>
-            <a:ext cx="4102100" cy="254000"/>
+            <a:off x="7632700" y="5054600"/>
+            <a:ext cx="4152900" cy="254000"/>
           </a:xfrm>
           <a:prstGeom prst="rect">
             <a:avLst/>
@@ -36434,8 +36434,8 @@
         </p:nvCxnSpPr>
         <p:spPr>
           <a:xfrm>
-            <a:off x="6223000" y="5283200"/>
-            <a:ext cx="5562600" cy="0"/>
+            <a:off x="6172200" y="5359400"/>
+            <a:ext cx="5613400" cy="0"/>
           </a:xfrm>
           <a:prstGeom prst="line">
             <a:avLst/>
@@ -36464,7 +36464,7 @@
         </p:blipFill>
         <p:spPr>
           <a:xfrm>
-            <a:off x="6223000" y="5359400"/>
+            <a:off x="6172200" y="5435600"/>
             <a:ext cx="177800" cy="177800"/>
           </a:xfrm>
           <a:prstGeom prst="rect">
@@ -36480,7 +36480,7 @@
         </p:nvSpPr>
         <p:spPr>
           <a:xfrm>
-            <a:off x="6477000" y="5334000"/>
+            <a:off x="6426200" y="5410200"/>
             <a:ext cx="1270000" cy="228600"/>
           </a:xfrm>
           <a:prstGeom prst="rect">
@@ -36522,8 +36522,8 @@
         </p:nvSpPr>
         <p:spPr>
           <a:xfrm>
-            <a:off x="7683500" y="5346700"/>
-            <a:ext cx="4102100" cy="635000"/>
+            <a:off x="7632700" y="5422900"/>
+            <a:ext cx="4152900" cy="635000"/>
           </a:xfrm>
           <a:prstGeom prst="rect">
             <a:avLst/>
@@ -36564,8 +36564,8 @@
         </p:nvCxnSpPr>
         <p:spPr>
           <a:xfrm>
-            <a:off x="6223000" y="6032500"/>
-            <a:ext cx="5562600" cy="0"/>
+            <a:off x="6172200" y="6108700"/>
+            <a:ext cx="5613400" cy="0"/>
           </a:xfrm>
           <a:prstGeom prst="line">
             <a:avLst/>
@@ -36594,7 +36594,7 @@
         </p:blipFill>
         <p:spPr>
           <a:xfrm>
-            <a:off x="6223000" y="6108700"/>
+            <a:off x="6172200" y="6184900"/>
             <a:ext cx="177800" cy="177800"/>
           </a:xfrm>
           <a:prstGeom prst="rect">
@@ -36610,7 +36610,7 @@
         </p:nvSpPr>
         <p:spPr>
           <a:xfrm>
-            <a:off x="6477000" y="6083300"/>
+            <a:off x="6426200" y="6159500"/>
             <a:ext cx="1270000" cy="228600"/>
           </a:xfrm>
           <a:prstGeom prst="rect">
@@ -36652,8 +36652,8 @@
         </p:nvSpPr>
         <p:spPr>
           <a:xfrm>
-            <a:off x="7683500" y="6096000"/>
-            <a:ext cx="4102100" cy="254000"/>
+            <a:off x="7632700" y="6172200"/>
+            <a:ext cx="4152900" cy="254000"/>
           </a:xfrm>
           <a:prstGeom prst="rect">
             <a:avLst/>
@@ -36694,8 +36694,8 @@
         </p:nvCxnSpPr>
         <p:spPr>
           <a:xfrm>
-            <a:off x="6223000" y="6362700"/>
-            <a:ext cx="5562600" cy="0"/>
+            <a:off x="6172200" y="6438900"/>
+            <a:ext cx="5613400" cy="0"/>
           </a:xfrm>
           <a:prstGeom prst="line">
             <a:avLst/>
@@ -37167,7 +37167,7 @@
         <p:spPr>
           <a:xfrm>
             <a:off x="406400" y="2159000"/>
-            <a:ext cx="3691467" cy="1905000"/>
+            <a:ext cx="3691467" cy="1987550"/>
           </a:xfrm>
           <a:prstGeom prst="rect">
             <a:avLst/>
@@ -37294,7 +37294,7 @@
         <p:spPr>
           <a:xfrm>
             <a:off x="571500" y="2844800"/>
-            <a:ext cx="3361267" cy="1066800"/>
+            <a:ext cx="3361267" cy="1149350"/>
           </a:xfrm>
           <a:prstGeom prst="rect">
             <a:avLst/>
@@ -37327,7 +37327,7 @@
         <p:spPr>
           <a:xfrm>
             <a:off x="698500" y="2844800"/>
-            <a:ext cx="3107267" cy="1066800"/>
+            <a:ext cx="3107267" cy="1149350"/>
           </a:xfrm>
           <a:prstGeom prst="rect">
             <a:avLst/>
@@ -37369,7 +37369,7 @@
         <p:spPr>
           <a:xfrm>
             <a:off x="4250267" y="2159000"/>
-            <a:ext cx="3691467" cy="1905000"/>
+            <a:ext cx="3691467" cy="1987550"/>
           </a:xfrm>
           <a:prstGeom prst="rect">
             <a:avLst/>
@@ -37496,7 +37496,7 @@
         <p:spPr>
           <a:xfrm>
             <a:off x="4415367" y="2844800"/>
-            <a:ext cx="3361267" cy="1066800"/>
+            <a:ext cx="3361267" cy="1149350"/>
           </a:xfrm>
           <a:prstGeom prst="rect">
             <a:avLst/>
@@ -37529,7 +37529,7 @@
         <p:spPr>
           <a:xfrm>
             <a:off x="4542367" y="2844800"/>
-            <a:ext cx="3107267" cy="1066800"/>
+            <a:ext cx="3107267" cy="1149350"/>
           </a:xfrm>
           <a:prstGeom prst="rect">
             <a:avLst/>
@@ -37571,7 +37571,7 @@
         <p:spPr>
           <a:xfrm>
             <a:off x="8094133" y="2159000"/>
-            <a:ext cx="3691467" cy="1905000"/>
+            <a:ext cx="3691467" cy="1987550"/>
           </a:xfrm>
           <a:prstGeom prst="rect">
             <a:avLst/>
@@ -37698,7 +37698,7 @@
         <p:spPr>
           <a:xfrm>
             <a:off x="8259233" y="2844800"/>
-            <a:ext cx="3361267" cy="1066800"/>
+            <a:ext cx="3361267" cy="1149350"/>
           </a:xfrm>
           <a:prstGeom prst="rect">
             <a:avLst/>
@@ -37731,7 +37731,7 @@
         <p:spPr>
           <a:xfrm>
             <a:off x="8386233" y="2844800"/>
-            <a:ext cx="3107267" cy="1066800"/>
+            <a:ext cx="3107267" cy="1149350"/>
           </a:xfrm>
           <a:prstGeom prst="rect">
             <a:avLst/>
@@ -37772,8 +37772,8 @@
         </p:nvSpPr>
         <p:spPr>
           <a:xfrm>
-            <a:off x="406400" y="4216400"/>
-            <a:ext cx="3691467" cy="1905000"/>
+            <a:off x="406400" y="4298950"/>
+            <a:ext cx="3691467" cy="1987550"/>
           </a:xfrm>
           <a:prstGeom prst="rect">
             <a:avLst/>
@@ -37804,7 +37804,7 @@
         </p:nvSpPr>
         <p:spPr>
           <a:xfrm>
-            <a:off x="571500" y="4368800"/>
+            <a:off x="571500" y="4451350"/>
             <a:ext cx="406400" cy="406400"/>
           </a:xfrm>
           <a:prstGeom prst="ellipse">
@@ -37841,7 +37841,7 @@
         </p:blipFill>
         <p:spPr>
           <a:xfrm>
-            <a:off x="663575" y="4460875"/>
+            <a:off x="663575" y="4543425"/>
             <a:ext cx="222250" cy="222250"/>
           </a:xfrm>
           <a:prstGeom prst="rect">
@@ -37857,7 +37857,7 @@
         </p:nvSpPr>
         <p:spPr>
           <a:xfrm>
-            <a:off x="1092200" y="4368800"/>
+            <a:off x="1092200" y="4451350"/>
             <a:ext cx="2865967" cy="406400"/>
           </a:xfrm>
           <a:prstGeom prst="rect">
@@ -37899,8 +37899,8 @@
         </p:nvSpPr>
         <p:spPr>
           <a:xfrm>
-            <a:off x="571500" y="4902200"/>
-            <a:ext cx="3361267" cy="1066800"/>
+            <a:off x="571500" y="4984750"/>
+            <a:ext cx="3361267" cy="1149350"/>
           </a:xfrm>
           <a:prstGeom prst="rect">
             <a:avLst/>
@@ -37932,8 +37932,8 @@
         </p:nvSpPr>
         <p:spPr>
           <a:xfrm>
-            <a:off x="698500" y="4902200"/>
-            <a:ext cx="3107267" cy="1066800"/>
+            <a:off x="698500" y="4984750"/>
+            <a:ext cx="3107267" cy="1149350"/>
           </a:xfrm>
           <a:prstGeom prst="rect">
             <a:avLst/>
@@ -37974,8 +37974,8 @@
         </p:nvSpPr>
         <p:spPr>
           <a:xfrm>
-            <a:off x="4250267" y="4216400"/>
-            <a:ext cx="3691467" cy="1905000"/>
+            <a:off x="4250267" y="4298950"/>
+            <a:ext cx="3691467" cy="1987550"/>
           </a:xfrm>
           <a:prstGeom prst="rect">
             <a:avLst/>
@@ -38006,7 +38006,7 @@
         </p:nvSpPr>
         <p:spPr>
           <a:xfrm>
-            <a:off x="4415367" y="4368800"/>
+            <a:off x="4415367" y="4451350"/>
             <a:ext cx="406400" cy="406400"/>
           </a:xfrm>
           <a:prstGeom prst="ellipse">
@@ -38043,7 +38043,7 @@
         </p:blipFill>
         <p:spPr>
           <a:xfrm>
-            <a:off x="4507442" y="4460875"/>
+            <a:off x="4507442" y="4543425"/>
             <a:ext cx="222250" cy="222250"/>
           </a:xfrm>
           <a:prstGeom prst="rect">
@@ -38059,7 +38059,7 @@
         </p:nvSpPr>
         <p:spPr>
           <a:xfrm>
-            <a:off x="4936067" y="4368800"/>
+            <a:off x="4936067" y="4451350"/>
             <a:ext cx="2865967" cy="406400"/>
           </a:xfrm>
           <a:prstGeom prst="rect">
@@ -38101,8 +38101,8 @@
         </p:nvSpPr>
         <p:spPr>
           <a:xfrm>
-            <a:off x="4415367" y="4902200"/>
-            <a:ext cx="3361267" cy="1066800"/>
+            <a:off x="4415367" y="4984750"/>
+            <a:ext cx="3361267" cy="1149350"/>
           </a:xfrm>
           <a:prstGeom prst="rect">
             <a:avLst/>
@@ -38134,8 +38134,8 @@
         </p:nvSpPr>
         <p:spPr>
           <a:xfrm>
-            <a:off x="4542367" y="4902200"/>
-            <a:ext cx="3107267" cy="1066800"/>
+            <a:off x="4542367" y="4984750"/>
+            <a:ext cx="3107267" cy="1149350"/>
           </a:xfrm>
           <a:prstGeom prst="rect">
             <a:avLst/>
@@ -38176,8 +38176,8 @@
         </p:nvSpPr>
         <p:spPr>
           <a:xfrm>
-            <a:off x="8094133" y="4216400"/>
-            <a:ext cx="3691467" cy="1905000"/>
+            <a:off x="8094133" y="4298950"/>
+            <a:ext cx="3691467" cy="1987550"/>
           </a:xfrm>
           <a:prstGeom prst="rect">
             <a:avLst/>
@@ -38208,7 +38208,7 @@
         </p:nvSpPr>
         <p:spPr>
           <a:xfrm>
-            <a:off x="8259233" y="4368800"/>
+            <a:off x="8259233" y="4451350"/>
             <a:ext cx="406400" cy="406400"/>
           </a:xfrm>
           <a:prstGeom prst="ellipse">
@@ -38245,7 +38245,7 @@
         </p:blipFill>
         <p:spPr>
           <a:xfrm>
-            <a:off x="8351308" y="4460875"/>
+            <a:off x="8351308" y="4543425"/>
             <a:ext cx="222250" cy="222250"/>
           </a:xfrm>
           <a:prstGeom prst="rect">
@@ -38261,7 +38261,7 @@
         </p:nvSpPr>
         <p:spPr>
           <a:xfrm>
-            <a:off x="8779933" y="4368800"/>
+            <a:off x="8779933" y="4451350"/>
             <a:ext cx="2865967" cy="406400"/>
           </a:xfrm>
           <a:prstGeom prst="rect">
@@ -38303,8 +38303,8 @@
         </p:nvSpPr>
         <p:spPr>
           <a:xfrm>
-            <a:off x="8259233" y="4902200"/>
-            <a:ext cx="3361267" cy="1066800"/>
+            <a:off x="8259233" y="4984750"/>
+            <a:ext cx="3361267" cy="1149350"/>
           </a:xfrm>
           <a:prstGeom prst="rect">
             <a:avLst/>
@@ -38336,8 +38336,8 @@
         </p:nvSpPr>
         <p:spPr>
           <a:xfrm>
-            <a:off x="8386233" y="4902200"/>
-            <a:ext cx="3107267" cy="1066800"/>
+            <a:off x="8386233" y="4984750"/>
+            <a:ext cx="3107267" cy="1149350"/>
           </a:xfrm>
           <a:prstGeom prst="rect">
             <a:avLst/>
@@ -42310,7 +42310,7 @@
         <p:spPr>
           <a:xfrm>
             <a:off x="406400" y="4483100"/>
-            <a:ext cx="5842000" cy="876300"/>
+            <a:ext cx="5842000" cy="857250"/>
           </a:xfrm>
           <a:prstGeom prst="rect">
             <a:avLst/>
@@ -42342,7 +42342,7 @@
         <p:spPr>
           <a:xfrm>
             <a:off x="406400" y="4483100"/>
-            <a:ext cx="19050" cy="876300"/>
+            <a:ext cx="19050" cy="857250"/>
           </a:xfrm>
           <a:prstGeom prst="rect">
             <a:avLst/>
@@ -42370,7 +42370,7 @@
         </p:nvSpPr>
         <p:spPr>
           <a:xfrm>
-            <a:off x="571500" y="4730750"/>
+            <a:off x="571500" y="4721225"/>
             <a:ext cx="381000" cy="381000"/>
           </a:xfrm>
           <a:prstGeom prst="ellipse">
@@ -42407,7 +42407,7 @@
         </p:blipFill>
         <p:spPr>
           <a:xfrm>
-            <a:off x="660400" y="4819650"/>
+            <a:off x="660400" y="4810125"/>
             <a:ext cx="203200" cy="203200"/>
           </a:xfrm>
           <a:prstGeom prst="rect">
@@ -42423,7 +42423,7 @@
         </p:nvSpPr>
         <p:spPr>
           <a:xfrm>
-            <a:off x="1092200" y="4705350"/>
+            <a:off x="1092200" y="4695825"/>
             <a:ext cx="4572000" cy="215900"/>
           </a:xfrm>
           <a:prstGeom prst="rect">
@@ -42487,7 +42487,7 @@
         </p:nvSpPr>
         <p:spPr>
           <a:xfrm>
-            <a:off x="1092200" y="4959350"/>
+            <a:off x="1092200" y="4949825"/>
             <a:ext cx="4572000" cy="203200"/>
           </a:xfrm>
           <a:prstGeom prst="rect">
@@ -42529,8 +42529,8 @@
         </p:nvSpPr>
         <p:spPr>
           <a:xfrm>
-            <a:off x="406400" y="5448300"/>
-            <a:ext cx="5842000" cy="876300"/>
+            <a:off x="406400" y="5429250"/>
+            <a:ext cx="5842000" cy="857250"/>
           </a:xfrm>
           <a:prstGeom prst="rect">
             <a:avLst/>
@@ -42561,8 +42561,8 @@
         </p:nvSpPr>
         <p:spPr>
           <a:xfrm>
-            <a:off x="406400" y="5448300"/>
-            <a:ext cx="19050" cy="876300"/>
+            <a:off x="406400" y="5429250"/>
+            <a:ext cx="19050" cy="857250"/>
           </a:xfrm>
           <a:prstGeom prst="rect">
             <a:avLst/>
@@ -42590,7 +42590,7 @@
         </p:nvSpPr>
         <p:spPr>
           <a:xfrm>
-            <a:off x="571500" y="5695950"/>
+            <a:off x="571500" y="5667375"/>
             <a:ext cx="381000" cy="381000"/>
           </a:xfrm>
           <a:prstGeom prst="ellipse">
@@ -42627,7 +42627,7 @@
         </p:blipFill>
         <p:spPr>
           <a:xfrm>
-            <a:off x="660400" y="5784850"/>
+            <a:off x="660400" y="5756275"/>
             <a:ext cx="203200" cy="203200"/>
           </a:xfrm>
           <a:prstGeom prst="rect">
@@ -42643,7 +42643,7 @@
         </p:nvSpPr>
         <p:spPr>
           <a:xfrm>
-            <a:off x="1092200" y="5670550"/>
+            <a:off x="1092200" y="5641975"/>
             <a:ext cx="4572000" cy="215900"/>
           </a:xfrm>
           <a:prstGeom prst="rect">
@@ -42707,7 +42707,7 @@
         </p:nvSpPr>
         <p:spPr>
           <a:xfrm>
-            <a:off x="1092200" y="5924550"/>
+            <a:off x="1092200" y="5895975"/>
             <a:ext cx="4572000" cy="203200"/>
           </a:xfrm>
           <a:prstGeom prst="rect">
@@ -42792,7 +42792,7 @@
         <p:spPr>
           <a:xfrm>
             <a:off x="6400800" y="4737100"/>
-            <a:ext cx="9525" cy="1587500"/>
+            <a:ext cx="9525" cy="1549400"/>
           </a:xfrm>
           <a:prstGeom prst="rect">
             <a:avLst/>
@@ -42916,7 +42916,7 @@
         <p:spPr>
           <a:xfrm>
             <a:off x="6515100" y="5461000"/>
-            <a:ext cx="1515533" cy="800100"/>
+            <a:ext cx="1515533" cy="762000"/>
           </a:xfrm>
           <a:prstGeom prst="rect">
             <a:avLst/>
@@ -42958,7 +42958,7 @@
         <p:spPr>
           <a:xfrm>
             <a:off x="8221133" y="4737100"/>
-            <a:ext cx="9525" cy="1587500"/>
+            <a:ext cx="9525" cy="1549400"/>
           </a:xfrm>
           <a:prstGeom prst="rect">
             <a:avLst/>
@@ -43082,7 +43082,7 @@
         <p:spPr>
           <a:xfrm>
             <a:off x="8335433" y="5461000"/>
-            <a:ext cx="1515533" cy="800100"/>
+            <a:ext cx="1515533" cy="762000"/>
           </a:xfrm>
           <a:prstGeom prst="rect">
             <a:avLst/>
@@ -43124,7 +43124,7 @@
         <p:spPr>
           <a:xfrm>
             <a:off x="10041467" y="4737100"/>
-            <a:ext cx="9525" cy="1587500"/>
+            <a:ext cx="9525" cy="1549400"/>
           </a:xfrm>
           <a:prstGeom prst="rect">
             <a:avLst/>
@@ -43248,7 +43248,7 @@
         <p:spPr>
           <a:xfrm>
             <a:off x="10155767" y="5461000"/>
-            <a:ext cx="1515533" cy="800100"/>
+            <a:ext cx="1515533" cy="762000"/>
           </a:xfrm>
           <a:prstGeom prst="rect">
             <a:avLst/>
@@ -46453,7 +46453,7 @@
         <p:spPr>
           <a:xfrm>
             <a:off x="406400" y="3594100"/>
-            <a:ext cx="1727200" cy="736600"/>
+            <a:ext cx="1727200" cy="850900"/>
           </a:xfrm>
           <a:prstGeom prst="rect">
             <a:avLst/>
@@ -46627,7 +46627,7 @@
         <p:spPr>
           <a:xfrm>
             <a:off x="2209800" y="3594100"/>
-            <a:ext cx="1727200" cy="736600"/>
+            <a:ext cx="1727200" cy="850900"/>
           </a:xfrm>
           <a:prstGeom prst="rect">
             <a:avLst/>
@@ -46815,7 +46815,7 @@
         <p:spPr>
           <a:xfrm>
             <a:off x="4013200" y="3594100"/>
-            <a:ext cx="1727200" cy="736600"/>
+            <a:ext cx="1727200" cy="850900"/>
           </a:xfrm>
           <a:prstGeom prst="rect">
             <a:avLst/>
@@ -46988,8 +46988,8 @@
         </p:nvSpPr>
         <p:spPr>
           <a:xfrm>
-            <a:off x="406400" y="4406900"/>
-            <a:ext cx="1727200" cy="736600"/>
+            <a:off x="406400" y="4521200"/>
+            <a:ext cx="1727200" cy="850900"/>
           </a:xfrm>
           <a:prstGeom prst="rect">
             <a:avLst/>
@@ -47020,7 +47020,7 @@
         </p:nvSpPr>
         <p:spPr>
           <a:xfrm>
-            <a:off x="406400" y="4406900"/>
+            <a:off x="406400" y="4521200"/>
             <a:ext cx="1727200" cy="19050"/>
           </a:xfrm>
           <a:prstGeom prst="rect">
@@ -47057,7 +47057,7 @@
         </p:blipFill>
         <p:spPr>
           <a:xfrm>
-            <a:off x="508000" y="4521200"/>
+            <a:off x="508000" y="4635500"/>
             <a:ext cx="190500" cy="190500"/>
           </a:xfrm>
           <a:prstGeom prst="rect">
@@ -47073,7 +47073,7 @@
         </p:nvSpPr>
         <p:spPr>
           <a:xfrm>
-            <a:off x="1540256" y="4521200"/>
+            <a:off x="1540256" y="4635500"/>
             <a:ext cx="491744" cy="177800"/>
           </a:xfrm>
           <a:prstGeom prst="rect">
@@ -47120,7 +47120,7 @@
         </p:nvSpPr>
         <p:spPr>
           <a:xfrm>
-            <a:off x="508000" y="4762500"/>
+            <a:off x="508000" y="4876800"/>
             <a:ext cx="1549400" cy="330200"/>
           </a:xfrm>
           <a:prstGeom prst="rect">
@@ -47162,8 +47162,8 @@
         </p:nvSpPr>
         <p:spPr>
           <a:xfrm>
-            <a:off x="2209800" y="4406900"/>
-            <a:ext cx="1727200" cy="736600"/>
+            <a:off x="2209800" y="4521200"/>
+            <a:ext cx="1727200" cy="850900"/>
           </a:xfrm>
           <a:prstGeom prst="rect">
             <a:avLst/>
@@ -47194,7 +47194,7 @@
         </p:nvSpPr>
         <p:spPr>
           <a:xfrm>
-            <a:off x="2209800" y="4406900"/>
+            <a:off x="2209800" y="4521200"/>
             <a:ext cx="1727200" cy="19050"/>
           </a:xfrm>
           <a:prstGeom prst="rect">
@@ -47231,7 +47231,7 @@
         </p:blipFill>
         <p:spPr>
           <a:xfrm>
-            <a:off x="2311400" y="4521200"/>
+            <a:off x="2311400" y="4635500"/>
             <a:ext cx="190500" cy="190500"/>
           </a:xfrm>
           <a:prstGeom prst="rect">
@@ -47247,7 +47247,7 @@
         </p:nvSpPr>
         <p:spPr>
           <a:xfrm>
-            <a:off x="3343656" y="4521200"/>
+            <a:off x="3343656" y="4635500"/>
             <a:ext cx="491744" cy="177800"/>
           </a:xfrm>
           <a:prstGeom prst="rect">
@@ -47294,7 +47294,7 @@
         </p:nvSpPr>
         <p:spPr>
           <a:xfrm>
-            <a:off x="2311400" y="4762500"/>
+            <a:off x="2311400" y="4876800"/>
             <a:ext cx="1549400" cy="330200"/>
           </a:xfrm>
           <a:prstGeom prst="rect">
@@ -47336,8 +47336,8 @@
         </p:nvSpPr>
         <p:spPr>
           <a:xfrm>
-            <a:off x="4013200" y="4406900"/>
-            <a:ext cx="1727200" cy="736600"/>
+            <a:off x="4013200" y="4521200"/>
+            <a:ext cx="1727200" cy="850900"/>
           </a:xfrm>
           <a:prstGeom prst="rect">
             <a:avLst/>
@@ -47368,7 +47368,7 @@
         </p:nvSpPr>
         <p:spPr>
           <a:xfrm>
-            <a:off x="4013200" y="4406900"/>
+            <a:off x="4013200" y="4521200"/>
             <a:ext cx="1727200" cy="19050"/>
           </a:xfrm>
           <a:prstGeom prst="rect">
@@ -47405,7 +47405,7 @@
         </p:blipFill>
         <p:spPr>
           <a:xfrm>
-            <a:off x="4114800" y="4521200"/>
+            <a:off x="4114800" y="4635500"/>
             <a:ext cx="190500" cy="190500"/>
           </a:xfrm>
           <a:prstGeom prst="rect">
@@ -47421,7 +47421,7 @@
         </p:nvSpPr>
         <p:spPr>
           <a:xfrm>
-            <a:off x="4823968" y="4521200"/>
+            <a:off x="4823968" y="4635500"/>
             <a:ext cx="814832" cy="177800"/>
           </a:xfrm>
           <a:prstGeom prst="rect">
@@ -47468,7 +47468,7 @@
         </p:nvSpPr>
         <p:spPr>
           <a:xfrm>
-            <a:off x="4114800" y="4762500"/>
+            <a:off x="4114800" y="4876800"/>
             <a:ext cx="1549400" cy="330200"/>
           </a:xfrm>
           <a:prstGeom prst="rect">
@@ -47524,7 +47524,7 @@
         </p:nvSpPr>
         <p:spPr>
           <a:xfrm>
-            <a:off x="406400" y="5283200"/>
+            <a:off x="406400" y="5511800"/>
             <a:ext cx="5334000" cy="228600"/>
           </a:xfrm>
           <a:prstGeom prst="rect">
@@ -47566,7 +47566,7 @@
         </p:nvSpPr>
         <p:spPr>
           <a:xfrm>
-            <a:off x="1143000" y="5283200"/>
+            <a:off x="1143000" y="5511800"/>
             <a:ext cx="4597400" cy="228600"/>
           </a:xfrm>
           <a:prstGeom prst="rect">
@@ -47608,7 +47608,7 @@
         </p:nvSpPr>
         <p:spPr>
           <a:xfrm>
-            <a:off x="406400" y="5588000"/>
+            <a:off x="406400" y="5816600"/>
             <a:ext cx="2635250" cy="254000"/>
           </a:xfrm>
           <a:prstGeom prst="rect">
@@ -47655,7 +47655,7 @@
         </p:nvSpPr>
         <p:spPr>
           <a:xfrm>
-            <a:off x="3054350" y="5588000"/>
+            <a:off x="3054350" y="5816600"/>
             <a:ext cx="1581150" cy="254000"/>
           </a:xfrm>
           <a:prstGeom prst="rect">
@@ -47702,7 +47702,7 @@
         </p:nvSpPr>
         <p:spPr>
           <a:xfrm>
-            <a:off x="4648200" y="5588000"/>
+            <a:off x="4648200" y="5816600"/>
             <a:ext cx="263525" cy="254000"/>
           </a:xfrm>
           <a:prstGeom prst="rect">
@@ -47731,7 +47731,7 @@
         </p:nvSpPr>
         <p:spPr>
           <a:xfrm>
-            <a:off x="4924425" y="5588000"/>
+            <a:off x="4924425" y="5816600"/>
             <a:ext cx="263525" cy="254000"/>
           </a:xfrm>
           <a:prstGeom prst="rect">
@@ -47760,7 +47760,7 @@
         </p:nvSpPr>
         <p:spPr>
           <a:xfrm>
-            <a:off x="5200650" y="5588000"/>
+            <a:off x="5200650" y="5816600"/>
             <a:ext cx="263525" cy="254000"/>
           </a:xfrm>
           <a:prstGeom prst="rect">
@@ -47789,7 +47789,7 @@
         </p:nvSpPr>
         <p:spPr>
           <a:xfrm>
-            <a:off x="5476875" y="5588000"/>
+            <a:off x="5476875" y="5816600"/>
             <a:ext cx="263525" cy="254000"/>
           </a:xfrm>
           <a:prstGeom prst="rect">
@@ -47818,7 +47818,7 @@
         </p:nvSpPr>
         <p:spPr>
           <a:xfrm>
-            <a:off x="406400" y="5880100"/>
+            <a:off x="406400" y="6108700"/>
             <a:ext cx="2635250" cy="177800"/>
           </a:xfrm>
           <a:prstGeom prst="rect">
@@ -47860,7 +47860,7 @@
         </p:nvSpPr>
         <p:spPr>
           <a:xfrm>
-            <a:off x="3200400" y="5880100"/>
+            <a:off x="3200400" y="6108700"/>
             <a:ext cx="2540000" cy="177800"/>
           </a:xfrm>
           <a:prstGeom prst="rect">
@@ -47987,7 +47987,7 @@
         <p:spPr>
           <a:xfrm>
             <a:off x="5994400" y="1625600"/>
-            <a:ext cx="5791200" cy="647700"/>
+            <a:ext cx="5791200" cy="641350"/>
           </a:xfrm>
           <a:prstGeom prst="rect">
             <a:avLst/>
@@ -48019,7 +48019,7 @@
         <p:spPr>
           <a:xfrm>
             <a:off x="5994400" y="1625600"/>
-            <a:ext cx="482600" cy="647700"/>
+            <a:ext cx="482600" cy="641350"/>
           </a:xfrm>
           <a:prstGeom prst="rect">
             <a:avLst/>
@@ -48066,7 +48066,7 @@
         <p:spPr>
           <a:xfrm>
             <a:off x="6477000" y="1701800"/>
-            <a:ext cx="0" cy="495300"/>
+            <a:ext cx="0" cy="488950"/>
           </a:xfrm>
           <a:prstGeom prst="line">
             <a:avLst/>
@@ -48087,7 +48087,7 @@
         </p:nvSpPr>
         <p:spPr>
           <a:xfrm>
-            <a:off x="6604000" y="1724025"/>
+            <a:off x="6604000" y="1720850"/>
             <a:ext cx="4064000" cy="215900"/>
           </a:xfrm>
           <a:prstGeom prst="rect">
@@ -48129,7 +48129,7 @@
         </p:nvSpPr>
         <p:spPr>
           <a:xfrm>
-            <a:off x="6604000" y="1990725"/>
+            <a:off x="6604000" y="1987550"/>
             <a:ext cx="5041900" cy="196850"/>
           </a:xfrm>
           <a:prstGeom prst="rect">
@@ -48171,8 +48171,8 @@
         </p:nvSpPr>
         <p:spPr>
           <a:xfrm>
-            <a:off x="5994400" y="2336800"/>
-            <a:ext cx="5791200" cy="647700"/>
+            <a:off x="5994400" y="2330450"/>
+            <a:ext cx="5791200" cy="641350"/>
           </a:xfrm>
           <a:prstGeom prst="rect">
             <a:avLst/>
@@ -48203,8 +48203,8 @@
         </p:nvSpPr>
         <p:spPr>
           <a:xfrm>
-            <a:off x="5994400" y="2336800"/>
-            <a:ext cx="482600" cy="647700"/>
+            <a:off x="5994400" y="2330450"/>
+            <a:ext cx="482600" cy="641350"/>
           </a:xfrm>
           <a:prstGeom prst="rect">
             <a:avLst/>
@@ -48250,8 +48250,8 @@
         </p:nvCxnSpPr>
         <p:spPr>
           <a:xfrm>
-            <a:off x="6477000" y="2413000"/>
-            <a:ext cx="0" cy="495300"/>
+            <a:off x="6477000" y="2406650"/>
+            <a:ext cx="0" cy="488950"/>
           </a:xfrm>
           <a:prstGeom prst="line">
             <a:avLst/>
@@ -48272,7 +48272,7 @@
         </p:nvSpPr>
         <p:spPr>
           <a:xfrm>
-            <a:off x="6604000" y="2435225"/>
+            <a:off x="6604000" y="2425700"/>
             <a:ext cx="4064000" cy="215900"/>
           </a:xfrm>
           <a:prstGeom prst="rect">
@@ -48314,7 +48314,7 @@
         </p:nvSpPr>
         <p:spPr>
           <a:xfrm>
-            <a:off x="6604000" y="2701925"/>
+            <a:off x="6604000" y="2692400"/>
             <a:ext cx="5041900" cy="196850"/>
           </a:xfrm>
           <a:prstGeom prst="rect">
@@ -48356,8 +48356,8 @@
         </p:nvSpPr>
         <p:spPr>
           <a:xfrm>
-            <a:off x="5994400" y="3048000"/>
-            <a:ext cx="5791200" cy="1016000"/>
+            <a:off x="5994400" y="3035300"/>
+            <a:ext cx="5791200" cy="1009650"/>
           </a:xfrm>
           <a:prstGeom prst="rect">
             <a:avLst/>
@@ -48388,8 +48388,8 @@
         </p:nvSpPr>
         <p:spPr>
           <a:xfrm>
-            <a:off x="5994400" y="3048000"/>
-            <a:ext cx="482600" cy="1016000"/>
+            <a:off x="5994400" y="3035300"/>
+            <a:ext cx="482600" cy="1009650"/>
           </a:xfrm>
           <a:prstGeom prst="rect">
             <a:avLst/>
@@ -48435,7 +48435,7 @@
         </p:nvSpPr>
         <p:spPr>
           <a:xfrm>
-            <a:off x="6604000" y="3146425"/>
+            <a:off x="6604000" y="3130550"/>
             <a:ext cx="4064000" cy="215900"/>
           </a:xfrm>
           <a:prstGeom prst="rect">
@@ -48477,7 +48477,7 @@
         </p:nvSpPr>
         <p:spPr>
           <a:xfrm>
-            <a:off x="8648700" y="3165475"/>
+            <a:off x="8648700" y="3149600"/>
             <a:ext cx="431800" cy="177800"/>
           </a:xfrm>
           <a:prstGeom prst="rect">
@@ -48527,7 +48527,7 @@
         </p:nvSpPr>
         <p:spPr>
           <a:xfrm>
-            <a:off x="6604000" y="3413125"/>
+            <a:off x="6604000" y="3397250"/>
             <a:ext cx="5041900" cy="565150"/>
           </a:xfrm>
           <a:prstGeom prst="rect">
@@ -48616,8 +48616,8 @@
         </p:nvSpPr>
         <p:spPr>
           <a:xfrm>
-            <a:off x="5994400" y="4127500"/>
-            <a:ext cx="5791200" cy="647700"/>
+            <a:off x="5994400" y="4108450"/>
+            <a:ext cx="5791200" cy="641350"/>
           </a:xfrm>
           <a:prstGeom prst="rect">
             <a:avLst/>
@@ -48648,8 +48648,8 @@
         </p:nvSpPr>
         <p:spPr>
           <a:xfrm>
-            <a:off x="5994400" y="4127500"/>
-            <a:ext cx="482600" cy="647700"/>
+            <a:off x="5994400" y="4108450"/>
+            <a:ext cx="482600" cy="641350"/>
           </a:xfrm>
           <a:prstGeom prst="rect">
             <a:avLst/>
@@ -48695,8 +48695,8 @@
         </p:nvCxnSpPr>
         <p:spPr>
           <a:xfrm>
-            <a:off x="6477000" y="4203700"/>
-            <a:ext cx="0" cy="495300"/>
+            <a:off x="6477000" y="4184650"/>
+            <a:ext cx="0" cy="488950"/>
           </a:xfrm>
           <a:prstGeom prst="line">
             <a:avLst/>
@@ -48717,7 +48717,7 @@
         </p:nvSpPr>
         <p:spPr>
           <a:xfrm>
-            <a:off x="6604000" y="4225925"/>
+            <a:off x="6604000" y="4203700"/>
             <a:ext cx="4064000" cy="215900"/>
           </a:xfrm>
           <a:prstGeom prst="rect">
@@ -48759,7 +48759,7 @@
         </p:nvSpPr>
         <p:spPr>
           <a:xfrm>
-            <a:off x="6604000" y="4492625"/>
+            <a:off x="6604000" y="4470400"/>
             <a:ext cx="5041900" cy="196850"/>
           </a:xfrm>
           <a:prstGeom prst="rect">
@@ -48801,8 +48801,8 @@
         </p:nvSpPr>
         <p:spPr>
           <a:xfrm>
-            <a:off x="5994400" y="4838700"/>
-            <a:ext cx="5791200" cy="647700"/>
+            <a:off x="5994400" y="4813300"/>
+            <a:ext cx="5791200" cy="641350"/>
           </a:xfrm>
           <a:prstGeom prst="rect">
             <a:avLst/>
@@ -48833,8 +48833,8 @@
         </p:nvSpPr>
         <p:spPr>
           <a:xfrm>
-            <a:off x="5994400" y="4838700"/>
-            <a:ext cx="482600" cy="647700"/>
+            <a:off x="5994400" y="4813300"/>
+            <a:ext cx="482600" cy="641350"/>
           </a:xfrm>
           <a:prstGeom prst="rect">
             <a:avLst/>
@@ -48880,8 +48880,8 @@
         </p:nvCxnSpPr>
         <p:spPr>
           <a:xfrm>
-            <a:off x="6477000" y="4914900"/>
-            <a:ext cx="0" cy="495300"/>
+            <a:off x="6477000" y="4889500"/>
+            <a:ext cx="0" cy="488950"/>
           </a:xfrm>
           <a:prstGeom prst="line">
             <a:avLst/>
@@ -48902,7 +48902,7 @@
         </p:nvSpPr>
         <p:spPr>
           <a:xfrm>
-            <a:off x="6604000" y="4937125"/>
+            <a:off x="6604000" y="4908550"/>
             <a:ext cx="4064000" cy="215900"/>
           </a:xfrm>
           <a:prstGeom prst="rect">
@@ -48944,7 +48944,7 @@
         </p:nvSpPr>
         <p:spPr>
           <a:xfrm>
-            <a:off x="6604000" y="5203825"/>
+            <a:off x="6604000" y="5175250"/>
             <a:ext cx="5041900" cy="196850"/>
           </a:xfrm>
           <a:prstGeom prst="rect">
@@ -48986,7 +48986,7 @@
         </p:nvCxnSpPr>
         <p:spPr>
           <a:xfrm>
-            <a:off x="5994400" y="5581650"/>
+            <a:off x="5994400" y="5549900"/>
             <a:ext cx="5791200" cy="0"/>
           </a:xfrm>
           <a:prstGeom prst="line">
@@ -49009,8 +49009,8 @@
         </p:nvSpPr>
         <p:spPr>
           <a:xfrm>
-            <a:off x="5994400" y="5676900"/>
-            <a:ext cx="5791200" cy="647700"/>
+            <a:off x="5994400" y="5645150"/>
+            <a:ext cx="5791200" cy="641350"/>
           </a:xfrm>
           <a:prstGeom prst="rect">
             <a:avLst/>
@@ -49042,8 +49042,8 @@
         </p:nvSpPr>
         <p:spPr>
           <a:xfrm>
-            <a:off x="5994400" y="5676900"/>
-            <a:ext cx="482600" cy="647700"/>
+            <a:off x="5994400" y="5645150"/>
+            <a:ext cx="482600" cy="641350"/>
           </a:xfrm>
           <a:prstGeom prst="rect">
             <a:avLst/>
@@ -49089,8 +49089,8 @@
         </p:nvCxnSpPr>
         <p:spPr>
           <a:xfrm>
-            <a:off x="6477000" y="5753100"/>
-            <a:ext cx="0" cy="495300"/>
+            <a:off x="6477000" y="5721350"/>
+            <a:ext cx="0" cy="488950"/>
           </a:xfrm>
           <a:prstGeom prst="line">
             <a:avLst/>
@@ -49111,7 +49111,7 @@
         </p:nvSpPr>
         <p:spPr>
           <a:xfrm>
-            <a:off x="6604000" y="5775325"/>
+            <a:off x="6604000" y="5740400"/>
             <a:ext cx="4064000" cy="215900"/>
           </a:xfrm>
           <a:prstGeom prst="rect">
@@ -49153,7 +49153,7 @@
         </p:nvSpPr>
         <p:spPr>
           <a:xfrm>
-            <a:off x="7950200" y="5794375"/>
+            <a:off x="7950200" y="5759450"/>
             <a:ext cx="533400" cy="177800"/>
           </a:xfrm>
           <a:prstGeom prst="rect">
@@ -49200,7 +49200,7 @@
         </p:nvSpPr>
         <p:spPr>
           <a:xfrm>
-            <a:off x="6604000" y="6042025"/>
+            <a:off x="6604000" y="6007100"/>
             <a:ext cx="5041900" cy="196850"/>
           </a:xfrm>
           <a:prstGeom prst="rect">
@@ -50142,7 +50142,7 @@
         <p:spPr>
           <a:xfrm>
             <a:off x="406400" y="3263900"/>
-            <a:ext cx="5537200" cy="1244600"/>
+            <a:ext cx="5537200" cy="1168400"/>
           </a:xfrm>
           <a:prstGeom prst="rect">
             <a:avLst/>
@@ -50171,7 +50171,7 @@
         <p:spPr>
           <a:xfrm>
             <a:off x="406400" y="3263900"/>
-            <a:ext cx="19050" cy="1244600"/>
+            <a:ext cx="19050" cy="1168400"/>
           </a:xfrm>
           <a:prstGeom prst="rect">
             <a:avLst/>
@@ -50224,7 +50224,7 @@
         <p:spPr>
           <a:xfrm>
             <a:off x="863600" y="3263900"/>
-            <a:ext cx="4902200" cy="1244600"/>
+            <a:ext cx="4902200" cy="1168400"/>
           </a:xfrm>
           <a:prstGeom prst="rect">
             <a:avLst/>
@@ -51279,7 +51279,7 @@
         <p:spPr>
           <a:xfrm>
             <a:off x="406400" y="1625600"/>
-            <a:ext cx="3539067" cy="1003300"/>
+            <a:ext cx="3623733" cy="1003300"/>
           </a:xfrm>
           <a:prstGeom prst="rect">
             <a:avLst/>
@@ -51311,7 +51311,7 @@
         <p:spPr>
           <a:xfrm>
             <a:off x="406400" y="1625600"/>
-            <a:ext cx="3539067" cy="19050"/>
+            <a:ext cx="3623733" cy="19050"/>
           </a:xfrm>
           <a:prstGeom prst="rect">
             <a:avLst/>
@@ -51393,7 +51393,7 @@
         <p:spPr>
           <a:xfrm>
             <a:off x="1016000" y="1778000"/>
-            <a:ext cx="2777067" cy="355600"/>
+            <a:ext cx="2861733" cy="355600"/>
           </a:xfrm>
           <a:prstGeom prst="rect">
             <a:avLst/>
@@ -51446,7 +51446,7 @@
         <p:spPr>
           <a:xfrm>
             <a:off x="558800" y="2197100"/>
-            <a:ext cx="3234267" cy="381000"/>
+            <a:ext cx="3318933" cy="381000"/>
           </a:xfrm>
           <a:prstGeom prst="rect">
             <a:avLst/>
@@ -51487,8 +51487,8 @@
         </p:nvSpPr>
         <p:spPr>
           <a:xfrm rot="5400000">
-            <a:off x="4059767" y="2044700"/>
-            <a:ext cx="152400" cy="114300"/>
+            <a:off x="4087283" y="2076450"/>
+            <a:ext cx="139700" cy="101600"/>
           </a:xfrm>
           <a:prstGeom prst="triangle">
             <a:avLst/>
@@ -51516,8 +51516,8 @@
         </p:nvSpPr>
         <p:spPr>
           <a:xfrm>
-            <a:off x="4326467" y="1625600"/>
-            <a:ext cx="3539067" cy="1003300"/>
+            <a:off x="4284133" y="1625600"/>
+            <a:ext cx="3623733" cy="1003300"/>
           </a:xfrm>
           <a:prstGeom prst="rect">
             <a:avLst/>
@@ -51548,8 +51548,8 @@
         </p:nvSpPr>
         <p:spPr>
           <a:xfrm>
-            <a:off x="4326467" y="1625600"/>
-            <a:ext cx="3539067" cy="19050"/>
+            <a:off x="4284133" y="1625600"/>
+            <a:ext cx="3623733" cy="19050"/>
           </a:xfrm>
           <a:prstGeom prst="rect">
             <a:avLst/>
@@ -51577,7 +51577,7 @@
         </p:nvSpPr>
         <p:spPr>
           <a:xfrm>
-            <a:off x="4478867" y="1778000"/>
+            <a:off x="4436533" y="1778000"/>
             <a:ext cx="355600" cy="355600"/>
           </a:xfrm>
           <a:prstGeom prst="ellipse">
@@ -51614,7 +51614,7 @@
         </p:blipFill>
         <p:spPr>
           <a:xfrm>
-            <a:off x="4561417" y="1860550"/>
+            <a:off x="4519083" y="1860550"/>
             <a:ext cx="190500" cy="190500"/>
           </a:xfrm>
           <a:prstGeom prst="rect">
@@ -51630,8 +51630,8 @@
         </p:nvSpPr>
         <p:spPr>
           <a:xfrm>
-            <a:off x="4936067" y="1778000"/>
-            <a:ext cx="2777067" cy="355600"/>
+            <a:off x="4893733" y="1778000"/>
+            <a:ext cx="2861733" cy="355600"/>
           </a:xfrm>
           <a:prstGeom prst="rect">
             <a:avLst/>
@@ -51683,16 +51683,16 @@
         </p:nvSpPr>
         <p:spPr>
           <a:xfrm>
-            <a:off x="4478867" y="2197100"/>
-            <a:ext cx="3234267" cy="381000"/>
-          </a:xfrm>
-          <a:prstGeom prst="rect">
-            <a:avLst/>
-          </a:prstGeom>
-          <a:noFill/>
-        </p:spPr>
-        <p:txBody>
-          <a:bodyPr wrap="square" anchor="t" lIns="0" tIns="0" rIns="114300" bIns="0">
+            <a:off x="4436533" y="2197100"/>
+            <a:ext cx="3318933" cy="381000"/>
+          </a:xfrm>
+          <a:prstGeom prst="rect">
+            <a:avLst/>
+          </a:prstGeom>
+          <a:noFill/>
+        </p:spPr>
+        <p:txBody>
+          <a:bodyPr wrap="square" anchor="t" lIns="0" tIns="0" rIns="228600" bIns="0">
             <a:noAutofit/>
           </a:bodyPr>
           <a:lstStyle/>
@@ -51725,8 +51725,8 @@
         </p:nvSpPr>
         <p:spPr>
           <a:xfrm rot="5400000">
-            <a:off x="7979833" y="2044700"/>
-            <a:ext cx="152400" cy="114300"/>
+            <a:off x="7965017" y="2076450"/>
+            <a:ext cx="139700" cy="101600"/>
           </a:xfrm>
           <a:prstGeom prst="triangle">
             <a:avLst/>
@@ -51754,8 +51754,8 @@
         </p:nvSpPr>
         <p:spPr>
           <a:xfrm>
-            <a:off x="8246533" y="1625600"/>
-            <a:ext cx="3539067" cy="1003300"/>
+            <a:off x="8161867" y="1625600"/>
+            <a:ext cx="3623733" cy="1003300"/>
           </a:xfrm>
           <a:prstGeom prst="rect">
             <a:avLst/>
@@ -51786,8 +51786,8 @@
         </p:nvSpPr>
         <p:spPr>
           <a:xfrm>
-            <a:off x="8246533" y="1625600"/>
-            <a:ext cx="3539067" cy="19050"/>
+            <a:off x="8161867" y="1625600"/>
+            <a:ext cx="3623733" cy="19050"/>
           </a:xfrm>
           <a:prstGeom prst="rect">
             <a:avLst/>
@@ -51815,7 +51815,7 @@
         </p:nvSpPr>
         <p:spPr>
           <a:xfrm>
-            <a:off x="8398933" y="1778000"/>
+            <a:off x="8314267" y="1778000"/>
             <a:ext cx="355600" cy="355600"/>
           </a:xfrm>
           <a:prstGeom prst="ellipse">
@@ -51852,7 +51852,7 @@
         </p:blipFill>
         <p:spPr>
           <a:xfrm>
-            <a:off x="8481483" y="1860550"/>
+            <a:off x="8396817" y="1860550"/>
             <a:ext cx="190500" cy="190500"/>
           </a:xfrm>
           <a:prstGeom prst="rect">
@@ -51868,8 +51868,8 @@
         </p:nvSpPr>
         <p:spPr>
           <a:xfrm>
-            <a:off x="8856133" y="1778000"/>
-            <a:ext cx="2777067" cy="355600"/>
+            <a:off x="8771467" y="1778000"/>
+            <a:ext cx="2861733" cy="355600"/>
           </a:xfrm>
           <a:prstGeom prst="rect">
             <a:avLst/>
@@ -51921,8 +51921,8 @@
         </p:nvSpPr>
         <p:spPr>
           <a:xfrm>
-            <a:off x="8398933" y="2197100"/>
-            <a:ext cx="3234267" cy="381000"/>
+            <a:off x="8314267" y="2197100"/>
+            <a:ext cx="3318933" cy="381000"/>
           </a:xfrm>
           <a:prstGeom prst="rect">
             <a:avLst/>
@@ -52640,7 +52640,7 @@
         <p:spPr>
           <a:xfrm>
             <a:off x="406400" y="5067300"/>
-            <a:ext cx="3691467" cy="698500"/>
+            <a:ext cx="3623733" cy="698500"/>
           </a:xfrm>
           <a:prstGeom prst="rect">
             <a:avLst/>
@@ -52735,7 +52735,7 @@
         <p:spPr>
           <a:xfrm>
             <a:off x="863600" y="5372100"/>
-            <a:ext cx="3081867" cy="342900"/>
+            <a:ext cx="3014133" cy="342900"/>
           </a:xfrm>
           <a:prstGeom prst="rect">
             <a:avLst/>
@@ -52776,8 +52776,8 @@
         </p:nvSpPr>
         <p:spPr>
           <a:xfrm>
-            <a:off x="4250267" y="5067300"/>
-            <a:ext cx="3691467" cy="698500"/>
+            <a:off x="4284133" y="5067300"/>
+            <a:ext cx="3623733" cy="698500"/>
           </a:xfrm>
           <a:prstGeom prst="rect">
             <a:avLst/>
@@ -52813,7 +52813,7 @@
         </p:blipFill>
         <p:spPr>
           <a:xfrm>
-            <a:off x="4402667" y="5219700"/>
+            <a:off x="4436533" y="5219700"/>
             <a:ext cx="203200" cy="203200"/>
           </a:xfrm>
           <a:prstGeom prst="rect">
@@ -52829,7 +52829,7 @@
         </p:nvSpPr>
         <p:spPr>
           <a:xfrm>
-            <a:off x="4707467" y="5156200"/>
+            <a:off x="4741333" y="5156200"/>
             <a:ext cx="1270000" cy="190500"/>
           </a:xfrm>
           <a:prstGeom prst="rect">
@@ -52871,8 +52871,8 @@
         </p:nvSpPr>
         <p:spPr>
           <a:xfrm>
-            <a:off x="4707467" y="5372100"/>
-            <a:ext cx="3081867" cy="342900"/>
+            <a:off x="4741333" y="5372100"/>
+            <a:ext cx="3014133" cy="342900"/>
           </a:xfrm>
           <a:prstGeom prst="rect">
             <a:avLst/>
@@ -52913,8 +52913,8 @@
         </p:nvSpPr>
         <p:spPr>
           <a:xfrm>
-            <a:off x="8094133" y="5067300"/>
-            <a:ext cx="3691467" cy="698500"/>
+            <a:off x="8161867" y="5067300"/>
+            <a:ext cx="3623733" cy="698500"/>
           </a:xfrm>
           <a:prstGeom prst="rect">
             <a:avLst/>
@@ -52950,7 +52950,7 @@
         </p:blipFill>
         <p:spPr>
           <a:xfrm>
-            <a:off x="8246533" y="5219700"/>
+            <a:off x="8314267" y="5219700"/>
             <a:ext cx="203200" cy="203200"/>
           </a:xfrm>
           <a:prstGeom prst="rect">
@@ -52966,7 +52966,7 @@
         </p:nvSpPr>
         <p:spPr>
           <a:xfrm>
-            <a:off x="8551333" y="5156200"/>
+            <a:off x="8619067" y="5156200"/>
             <a:ext cx="1270000" cy="190500"/>
           </a:xfrm>
           <a:prstGeom prst="rect">
@@ -53008,8 +53008,8 @@
         </p:nvSpPr>
         <p:spPr>
           <a:xfrm>
-            <a:off x="8551333" y="5372100"/>
-            <a:ext cx="3081867" cy="342900"/>
+            <a:off x="8619067" y="5372100"/>
+            <a:ext cx="3014133" cy="342900"/>
           </a:xfrm>
           <a:prstGeom prst="rect">
             <a:avLst/>
@@ -54701,7 +54701,7 @@
         <p:spPr>
           <a:xfrm>
             <a:off x="406400" y="1625600"/>
-            <a:ext cx="6045200" cy="736600"/>
+            <a:ext cx="6045200" cy="635000"/>
           </a:xfrm>
           <a:prstGeom prst="rect">
             <a:avLst/>
@@ -54733,7 +54733,7 @@
         <p:spPr>
           <a:xfrm>
             <a:off x="406400" y="1625600"/>
-            <a:ext cx="1587500" cy="736600"/>
+            <a:ext cx="1587500" cy="635000"/>
           </a:xfrm>
           <a:prstGeom prst="rect">
             <a:avLst/>
@@ -54762,7 +54762,7 @@
         <p:spPr>
           <a:xfrm>
             <a:off x="406400" y="1625600"/>
-            <a:ext cx="19050" cy="736600"/>
+            <a:ext cx="19050" cy="635000"/>
           </a:xfrm>
           <a:prstGeom prst="rect">
             <a:avLst/>
@@ -54790,7 +54790,7 @@
         </p:nvSpPr>
         <p:spPr>
           <a:xfrm>
-            <a:off x="571500" y="1765300"/>
+            <a:off x="571500" y="1727200"/>
             <a:ext cx="1358900" cy="215900"/>
           </a:xfrm>
           <a:prstGeom prst="rect">
@@ -54832,7 +54832,7 @@
         </p:nvSpPr>
         <p:spPr>
           <a:xfrm>
-            <a:off x="571500" y="2019300"/>
+            <a:off x="571500" y="1968500"/>
             <a:ext cx="1384300" cy="190500"/>
           </a:xfrm>
           <a:prstGeom prst="rect">
@@ -54875,7 +54875,7 @@
         <p:spPr>
           <a:xfrm>
             <a:off x="2159000" y="1625600"/>
-            <a:ext cx="4140200" cy="736600"/>
+            <a:ext cx="4140200" cy="635000"/>
           </a:xfrm>
           <a:prstGeom prst="rect">
             <a:avLst/>
@@ -54916,8 +54916,8 @@
         </p:nvSpPr>
         <p:spPr>
           <a:xfrm>
-            <a:off x="406400" y="2425700"/>
-            <a:ext cx="6045200" cy="736600"/>
+            <a:off x="406400" y="2324100"/>
+            <a:ext cx="6045200" cy="635000"/>
           </a:xfrm>
           <a:prstGeom prst="rect">
             <a:avLst/>
@@ -54948,8 +54948,8 @@
         </p:nvSpPr>
         <p:spPr>
           <a:xfrm>
-            <a:off x="406400" y="2425700"/>
-            <a:ext cx="1587500" cy="736600"/>
+            <a:off x="406400" y="2324100"/>
+            <a:ext cx="1587500" cy="635000"/>
           </a:xfrm>
           <a:prstGeom prst="rect">
             <a:avLst/>
@@ -54977,8 +54977,8 @@
         </p:nvSpPr>
         <p:spPr>
           <a:xfrm>
-            <a:off x="406400" y="2425700"/>
-            <a:ext cx="19050" cy="736600"/>
+            <a:off x="406400" y="2324100"/>
+            <a:ext cx="19050" cy="635000"/>
           </a:xfrm>
           <a:prstGeom prst="rect">
             <a:avLst/>
@@ -55006,7 +55006,7 @@
         </p:nvSpPr>
         <p:spPr>
           <a:xfrm>
-            <a:off x="571500" y="2565400"/>
+            <a:off x="571500" y="2425700"/>
             <a:ext cx="1358900" cy="215900"/>
           </a:xfrm>
           <a:prstGeom prst="rect">
@@ -55048,7 +55048,7 @@
         </p:nvSpPr>
         <p:spPr>
           <a:xfrm>
-            <a:off x="571500" y="2819400"/>
+            <a:off x="571500" y="2667000"/>
             <a:ext cx="1384300" cy="190500"/>
           </a:xfrm>
           <a:prstGeom prst="rect">
@@ -55090,8 +55090,8 @@
         </p:nvSpPr>
         <p:spPr>
           <a:xfrm>
-            <a:off x="2159000" y="2425700"/>
-            <a:ext cx="4140200" cy="736600"/>
+            <a:off x="2159000" y="2324100"/>
+            <a:ext cx="4140200" cy="635000"/>
           </a:xfrm>
           <a:prstGeom prst="rect">
             <a:avLst/>
@@ -55132,8 +55132,8 @@
         </p:nvSpPr>
         <p:spPr>
           <a:xfrm>
-            <a:off x="406400" y="3225800"/>
-            <a:ext cx="6045200" cy="736600"/>
+            <a:off x="406400" y="3022600"/>
+            <a:ext cx="6045200" cy="635000"/>
           </a:xfrm>
           <a:prstGeom prst="rect">
             <a:avLst/>
@@ -55164,8 +55164,8 @@
         </p:nvSpPr>
         <p:spPr>
           <a:xfrm>
-            <a:off x="406400" y="3225800"/>
-            <a:ext cx="1587500" cy="736600"/>
+            <a:off x="406400" y="3022600"/>
+            <a:ext cx="1587500" cy="635000"/>
           </a:xfrm>
           <a:prstGeom prst="rect">
             <a:avLst/>
@@ -55193,8 +55193,8 @@
         </p:nvSpPr>
         <p:spPr>
           <a:xfrm>
-            <a:off x="406400" y="3225800"/>
-            <a:ext cx="19050" cy="736600"/>
+            <a:off x="406400" y="3022600"/>
+            <a:ext cx="19050" cy="635000"/>
           </a:xfrm>
           <a:prstGeom prst="rect">
             <a:avLst/>
@@ -55222,8 +55222,50 @@
         </p:nvSpPr>
         <p:spPr>
           <a:xfrm>
+            <a:off x="571500" y="3124200"/>
+            <a:ext cx="1358900" cy="215900"/>
+          </a:xfrm>
+          <a:prstGeom prst="rect">
+            <a:avLst/>
+          </a:prstGeom>
+          <a:noFill/>
+        </p:spPr>
+        <p:txBody>
+          <a:bodyPr wrap="none" anchor="t" lIns="0" tIns="0" rIns="0" bIns="0">
+            <a:noAutofit/>
+          </a:bodyPr>
+          <a:lstStyle/>
+          <a:p>
+            <a:pPr algn="l" marL="0" indent="0">
+              <a:lnSpc>
+                <a:spcPts val="1700"/>
+              </a:lnSpc>
+              <a:buNone/>
+            </a:pPr>
+            <a:r>
+              <a:rPr lang="zh-CN" altLang="en-US" sz="1200" b="1">
+                <a:solidFill>
+                  <a:srgbClr val="9A3B41"/>
+                </a:solidFill>
+                <a:latin typeface="微软雅黑"/>
+                <a:ea typeface="微软雅黑"/>
+                <a:cs typeface="微软雅黑"/>
+              </a:rPr>
+              <a:t>② 决策层</a:t>
+            </a:r>
+          </a:p>
+        </p:txBody>
+      </p:sp>
+      <p:sp>
+        <p:nvSpPr>
+          <p:cNvPr id="27" name="TextBox 26"/>
+          <p:cNvSpPr txBox="1"/>
+          <p:nvPr/>
+        </p:nvSpPr>
+        <p:spPr>
+          <a:xfrm>
             <a:off x="571500" y="3365500"/>
-            <a:ext cx="1358900" cy="215900"/>
+            <a:ext cx="1384300" cy="190500"/>
           </a:xfrm>
           <a:prstGeom prst="rect">
             <a:avLst/>
@@ -55238,48 +55280,6 @@
           <a:p>
             <a:pPr algn="l" marL="0" indent="0">
               <a:lnSpc>
-                <a:spcPts val="1700"/>
-              </a:lnSpc>
-              <a:buNone/>
-            </a:pPr>
-            <a:r>
-              <a:rPr lang="zh-CN" altLang="en-US" sz="1200" b="1">
-                <a:solidFill>
-                  <a:srgbClr val="9A3B41"/>
-                </a:solidFill>
-                <a:latin typeface="微软雅黑"/>
-                <a:ea typeface="微软雅黑"/>
-                <a:cs typeface="微软雅黑"/>
-              </a:rPr>
-              <a:t>② 决策层</a:t>
-            </a:r>
-          </a:p>
-        </p:txBody>
-      </p:sp>
-      <p:sp>
-        <p:nvSpPr>
-          <p:cNvPr id="27" name="TextBox 26"/>
-          <p:cNvSpPr txBox="1"/>
-          <p:nvPr/>
-        </p:nvSpPr>
-        <p:spPr>
-          <a:xfrm>
-            <a:off x="571500" y="3619500"/>
-            <a:ext cx="1384300" cy="190500"/>
-          </a:xfrm>
-          <a:prstGeom prst="rect">
-            <a:avLst/>
-          </a:prstGeom>
-          <a:noFill/>
-        </p:spPr>
-        <p:txBody>
-          <a:bodyPr wrap="none" anchor="t" lIns="0" tIns="0" rIns="0" bIns="0">
-            <a:noAutofit/>
-          </a:bodyPr>
-          <a:lstStyle/>
-          <a:p>
-            <a:pPr algn="l" marL="0" indent="0">
-              <a:lnSpc>
                 <a:spcPts val="1300"/>
               </a:lnSpc>
               <a:buNone/>
@@ -55306,8 +55306,8 @@
         </p:nvSpPr>
         <p:spPr>
           <a:xfrm>
-            <a:off x="2159000" y="3225800"/>
-            <a:ext cx="4140200" cy="736600"/>
+            <a:off x="2159000" y="3022600"/>
+            <a:ext cx="4140200" cy="635000"/>
           </a:xfrm>
           <a:prstGeom prst="rect">
             <a:avLst/>
@@ -55348,8 +55348,8 @@
         </p:nvSpPr>
         <p:spPr>
           <a:xfrm>
-            <a:off x="406400" y="4025900"/>
-            <a:ext cx="6045200" cy="736600"/>
+            <a:off x="406400" y="3721100"/>
+            <a:ext cx="6045200" cy="635000"/>
           </a:xfrm>
           <a:prstGeom prst="rect">
             <a:avLst/>
@@ -55380,8 +55380,8 @@
         </p:nvSpPr>
         <p:spPr>
           <a:xfrm>
-            <a:off x="406400" y="4025900"/>
-            <a:ext cx="1587500" cy="736600"/>
+            <a:off x="406400" y="3721100"/>
+            <a:ext cx="1587500" cy="635000"/>
           </a:xfrm>
           <a:prstGeom prst="rect">
             <a:avLst/>
@@ -55409,8 +55409,8 @@
         </p:nvSpPr>
         <p:spPr>
           <a:xfrm>
-            <a:off x="406400" y="4025900"/>
-            <a:ext cx="19050" cy="736600"/>
+            <a:off x="406400" y="3721100"/>
+            <a:ext cx="19050" cy="635000"/>
           </a:xfrm>
           <a:prstGeom prst="rect">
             <a:avLst/>
@@ -55438,7 +55438,7 @@
         </p:nvSpPr>
         <p:spPr>
           <a:xfrm>
-            <a:off x="571500" y="4165600"/>
+            <a:off x="571500" y="3822700"/>
             <a:ext cx="1358900" cy="215900"/>
           </a:xfrm>
           <a:prstGeom prst="rect">
@@ -55480,7 +55480,7 @@
         </p:nvSpPr>
         <p:spPr>
           <a:xfrm>
-            <a:off x="571500" y="4419600"/>
+            <a:off x="571500" y="4064000"/>
             <a:ext cx="1384300" cy="190500"/>
           </a:xfrm>
           <a:prstGeom prst="rect">
@@ -55522,8 +55522,8 @@
         </p:nvSpPr>
         <p:spPr>
           <a:xfrm>
-            <a:off x="2159000" y="4025900"/>
-            <a:ext cx="4140200" cy="736600"/>
+            <a:off x="2159000" y="3721100"/>
+            <a:ext cx="4140200" cy="635000"/>
           </a:xfrm>
           <a:prstGeom prst="rect">
             <a:avLst/>
@@ -56178,7 +56178,7 @@
         </p:nvSpPr>
         <p:spPr>
           <a:xfrm>
-            <a:off x="6705600" y="3467100"/>
+            <a:off x="6705600" y="3810000"/>
             <a:ext cx="5080000" cy="228600"/>
           </a:xfrm>
           <a:prstGeom prst="rect">
@@ -56220,7 +56220,7 @@
         </p:nvSpPr>
         <p:spPr>
           <a:xfrm>
-            <a:off x="7137400" y="3467100"/>
+            <a:off x="7137400" y="3810000"/>
             <a:ext cx="4648200" cy="228600"/>
           </a:xfrm>
           <a:prstGeom prst="rect">
@@ -56262,7 +56262,7 @@
         </p:nvSpPr>
         <p:spPr>
           <a:xfrm>
-            <a:off x="6705600" y="3759200"/>
+            <a:off x="6705600" y="4102100"/>
             <a:ext cx="660400" cy="254000"/>
           </a:xfrm>
           <a:prstGeom prst="roundRect">
@@ -56314,7 +56314,7 @@
         </p:nvSpPr>
         <p:spPr>
           <a:xfrm rot="5400000">
-            <a:off x="7397750" y="3848100"/>
+            <a:off x="7397750" y="4191000"/>
             <a:ext cx="101600" cy="76200"/>
           </a:xfrm>
           <a:prstGeom prst="triangle">
@@ -56343,7 +56343,7 @@
         </p:nvSpPr>
         <p:spPr>
           <a:xfrm>
-            <a:off x="7531100" y="3759200"/>
+            <a:off x="7531100" y="4102100"/>
             <a:ext cx="660400" cy="254000"/>
           </a:xfrm>
           <a:prstGeom prst="roundRect">
@@ -56395,7 +56395,7 @@
         </p:nvSpPr>
         <p:spPr>
           <a:xfrm rot="5400000">
-            <a:off x="8223250" y="3848100"/>
+            <a:off x="8223250" y="4191000"/>
             <a:ext cx="101600" cy="76200"/>
           </a:xfrm>
           <a:prstGeom prst="triangle">
@@ -56424,7 +56424,7 @@
         </p:nvSpPr>
         <p:spPr>
           <a:xfrm>
-            <a:off x="8356600" y="3759200"/>
+            <a:off x="8356600" y="4102100"/>
             <a:ext cx="863600" cy="254000"/>
           </a:xfrm>
           <a:prstGeom prst="roundRect">
@@ -56476,7 +56476,7 @@
         </p:nvSpPr>
         <p:spPr>
           <a:xfrm rot="5400000">
-            <a:off x="9251950" y="3848100"/>
+            <a:off x="9251950" y="4191000"/>
             <a:ext cx="101600" cy="76200"/>
           </a:xfrm>
           <a:prstGeom prst="triangle">
@@ -56505,7 +56505,7 @@
         </p:nvSpPr>
         <p:spPr>
           <a:xfrm>
-            <a:off x="9385300" y="3759200"/>
+            <a:off x="9385300" y="4102100"/>
             <a:ext cx="355600" cy="254000"/>
           </a:xfrm>
           <a:prstGeom prst="roundRect">
@@ -56557,7 +56557,7 @@
         </p:nvSpPr>
         <p:spPr>
           <a:xfrm rot="5400000">
-            <a:off x="9772650" y="3848100"/>
+            <a:off x="9772650" y="4191000"/>
             <a:ext cx="101600" cy="76200"/>
           </a:xfrm>
           <a:prstGeom prst="triangle">
@@ -56586,7 +56586,7 @@
         </p:nvSpPr>
         <p:spPr>
           <a:xfrm>
-            <a:off x="9906000" y="3759200"/>
+            <a:off x="9906000" y="4102100"/>
             <a:ext cx="558800" cy="254000"/>
           </a:xfrm>
           <a:prstGeom prst="roundRect">
@@ -56638,7 +56638,7 @@
         </p:nvSpPr>
         <p:spPr>
           <a:xfrm>
-            <a:off x="406400" y="5080000"/>
+            <a:off x="406400" y="4826000"/>
             <a:ext cx="19050" cy="952500"/>
           </a:xfrm>
           <a:prstGeom prst="rect">
@@ -56667,7 +56667,7 @@
         </p:nvSpPr>
         <p:spPr>
           <a:xfrm>
-            <a:off x="584200" y="5314950"/>
+            <a:off x="584200" y="5060950"/>
             <a:ext cx="11201400" cy="222250"/>
           </a:xfrm>
           <a:prstGeom prst="rect">
@@ -56709,7 +56709,7 @@
         </p:nvSpPr>
         <p:spPr>
           <a:xfrm>
-            <a:off x="584200" y="5588000"/>
+            <a:off x="584200" y="5334000"/>
             <a:ext cx="11201400" cy="234950"/>
           </a:xfrm>
           <a:prstGeom prst="rect">
@@ -58043,7 +58043,7 @@
         <p:spPr>
           <a:xfrm>
             <a:off x="2260600" y="1358900"/>
-            <a:ext cx="9525000" cy="711200"/>
+            <a:ext cx="9525000" cy="673100"/>
           </a:xfrm>
           <a:prstGeom prst="rect">
             <a:avLst/>
@@ -58072,7 +58072,7 @@
         <p:spPr>
           <a:xfrm>
             <a:off x="2260600" y="1358900"/>
-            <a:ext cx="19050" cy="711200"/>
+            <a:ext cx="19050" cy="673100"/>
           </a:xfrm>
           <a:prstGeom prst="rect">
             <a:avLst/>
@@ -58100,7 +58100,7 @@
         </p:nvSpPr>
         <p:spPr>
           <a:xfrm>
-            <a:off x="2413000" y="1447800"/>
+            <a:off x="2413000" y="1435100"/>
             <a:ext cx="635000" cy="177800"/>
           </a:xfrm>
           <a:prstGeom prst="rect">
@@ -58150,8 +58150,8 @@
         </p:nvSpPr>
         <p:spPr>
           <a:xfrm>
-            <a:off x="2413000" y="1676400"/>
-            <a:ext cx="5384800" cy="368300"/>
+            <a:off x="2413000" y="1651000"/>
+            <a:ext cx="5384800" cy="355600"/>
           </a:xfrm>
           <a:prstGeom prst="rect">
             <a:avLst/>
@@ -58203,8 +58203,8 @@
         </p:nvCxnSpPr>
         <p:spPr>
           <a:xfrm>
-            <a:off x="7975600" y="1473200"/>
-            <a:ext cx="0" cy="482600"/>
+            <a:off x="7975600" y="1460500"/>
+            <a:ext cx="0" cy="469900"/>
           </a:xfrm>
           <a:prstGeom prst="line">
             <a:avLst/>
@@ -58225,7 +58225,7 @@
         </p:nvSpPr>
         <p:spPr>
           <a:xfrm>
-            <a:off x="8153400" y="1447800"/>
+            <a:off x="8153400" y="1435100"/>
             <a:ext cx="1524000" cy="177800"/>
           </a:xfrm>
           <a:prstGeom prst="rect">
@@ -58267,8 +58267,8 @@
         </p:nvSpPr>
         <p:spPr>
           <a:xfrm>
-            <a:off x="8153400" y="1676400"/>
-            <a:ext cx="3454400" cy="368300"/>
+            <a:off x="8153400" y="1651000"/>
+            <a:ext cx="3454400" cy="355600"/>
           </a:xfrm>
           <a:prstGeom prst="rect">
             <a:avLst/>
@@ -58320,7 +58320,7 @@
         </p:nvSpPr>
         <p:spPr>
           <a:xfrm>
-            <a:off x="2260600" y="2171700"/>
+            <a:off x="2260600" y="2095500"/>
             <a:ext cx="3073400" cy="939800"/>
           </a:xfrm>
           <a:prstGeom prst="rect">
@@ -58352,7 +58352,7 @@
         </p:nvSpPr>
         <p:spPr>
           <a:xfrm>
-            <a:off x="2260600" y="2171700"/>
+            <a:off x="2260600" y="2095500"/>
             <a:ext cx="3073400" cy="19050"/>
           </a:xfrm>
           <a:prstGeom prst="rect">
@@ -58381,7 +58381,7 @@
         </p:nvSpPr>
         <p:spPr>
           <a:xfrm>
-            <a:off x="2400300" y="2273300"/>
+            <a:off x="2400300" y="2197100"/>
             <a:ext cx="2794000" cy="203200"/>
           </a:xfrm>
           <a:prstGeom prst="rect">
@@ -58434,7 +58434,7 @@
         </p:nvSpPr>
         <p:spPr>
           <a:xfrm>
-            <a:off x="2400300" y="2540000"/>
+            <a:off x="2400300" y="2463800"/>
             <a:ext cx="2794000" cy="520700"/>
           </a:xfrm>
           <a:prstGeom prst="rect">
@@ -58498,7 +58498,7 @@
         </p:nvSpPr>
         <p:spPr>
           <a:xfrm>
-            <a:off x="5486400" y="2171700"/>
+            <a:off x="5486400" y="2095500"/>
             <a:ext cx="3073400" cy="939800"/>
           </a:xfrm>
           <a:prstGeom prst="rect">
@@ -58530,7 +58530,7 @@
         </p:nvSpPr>
         <p:spPr>
           <a:xfrm>
-            <a:off x="5486400" y="2171700"/>
+            <a:off x="5486400" y="2095500"/>
             <a:ext cx="3073400" cy="19050"/>
           </a:xfrm>
           <a:prstGeom prst="rect">
@@ -58559,7 +58559,7 @@
         </p:nvSpPr>
         <p:spPr>
           <a:xfrm>
-            <a:off x="5626100" y="2273300"/>
+            <a:off x="5626100" y="2197100"/>
             <a:ext cx="2794000" cy="203200"/>
           </a:xfrm>
           <a:prstGeom prst="rect">
@@ -58612,7 +58612,7 @@
         </p:nvSpPr>
         <p:spPr>
           <a:xfrm>
-            <a:off x="5626100" y="2540000"/>
+            <a:off x="5626100" y="2463800"/>
             <a:ext cx="2794000" cy="520700"/>
           </a:xfrm>
           <a:prstGeom prst="rect">
@@ -58676,7 +58676,7 @@
         </p:nvSpPr>
         <p:spPr>
           <a:xfrm>
-            <a:off x="8712200" y="2171700"/>
+            <a:off x="8712200" y="2095500"/>
             <a:ext cx="3073400" cy="939800"/>
           </a:xfrm>
           <a:prstGeom prst="rect">
@@ -58708,7 +58708,7 @@
         </p:nvSpPr>
         <p:spPr>
           <a:xfrm>
-            <a:off x="8712200" y="2171700"/>
+            <a:off x="8712200" y="2095500"/>
             <a:ext cx="3073400" cy="19050"/>
           </a:xfrm>
           <a:prstGeom prst="rect">
@@ -58737,7 +58737,7 @@
         </p:nvSpPr>
         <p:spPr>
           <a:xfrm>
-            <a:off x="8851900" y="2273300"/>
+            <a:off x="8851900" y="2197100"/>
             <a:ext cx="2794000" cy="203200"/>
           </a:xfrm>
           <a:prstGeom prst="rect">
@@ -58790,7 +58790,7 @@
         </p:nvSpPr>
         <p:spPr>
           <a:xfrm>
-            <a:off x="8851900" y="2540000"/>
+            <a:off x="8851900" y="2463800"/>
             <a:ext cx="2794000" cy="520700"/>
           </a:xfrm>
           <a:prstGeom prst="rect">
@@ -58832,7 +58832,7 @@
         </p:nvSpPr>
         <p:spPr>
           <a:xfrm>
-            <a:off x="2260600" y="3136900"/>
+            <a:off x="2260600" y="3149600"/>
             <a:ext cx="9525000" cy="228600"/>
           </a:xfrm>
           <a:prstGeom prst="rect">
@@ -58874,7 +58874,7 @@
         </p:nvSpPr>
         <p:spPr>
           <a:xfrm>
-            <a:off x="4521200" y="3136900"/>
+            <a:off x="4521200" y="3149600"/>
             <a:ext cx="7264400" cy="228600"/>
           </a:xfrm>
           <a:prstGeom prst="rect">
@@ -58916,10 +58916,10 @@
         </p:nvGrpSpPr>
         <p:grpSpPr>
           <a:xfrm>
-            <a:off x="2260600" y="3429000"/>
-            <a:ext cx="9525000" cy="2857500"/>
-            <a:chOff x="2260600" y="3429000"/>
-            <a:chExt cx="9525000" cy="2857500"/>
+            <a:off x="2260600" y="3441700"/>
+            <a:ext cx="9525000" cy="2844800"/>
+            <a:chOff x="2260600" y="3441700"/>
+            <a:chExt cx="9525000" cy="2844800"/>
           </a:xfrm>
         </p:grpSpPr>
         <p:sp>
@@ -58930,8 +58930,8 @@
           </p:nvSpPr>
           <p:spPr>
             <a:xfrm>
-              <a:off x="2260600" y="3429000"/>
-              <a:ext cx="9525000" cy="2857500"/>
+              <a:off x="2260600" y="3441700"/>
+              <a:ext cx="9525000" cy="2844800"/>
             </a:xfrm>
             <a:prstGeom prst="rect">
               <a:avLst/>
@@ -58959,7 +58959,7 @@
           </p:nvSpPr>
           <p:spPr>
             <a:xfrm>
-              <a:off x="2413000" y="3594100"/>
+              <a:off x="2413000" y="3606800"/>
               <a:ext cx="777954" cy="177800"/>
             </a:xfrm>
             <a:prstGeom prst="rect">
@@ -59006,7 +59006,7 @@
           </p:nvSpPr>
           <p:spPr>
             <a:xfrm>
-              <a:off x="2413000" y="3848100"/>
+              <a:off x="2413000" y="3860800"/>
               <a:ext cx="1333500" cy="330200"/>
             </a:xfrm>
             <a:prstGeom prst="rect">
@@ -59046,7 +59046,7 @@
           </p:blipFill>
           <p:spPr>
             <a:xfrm>
-              <a:off x="2489200" y="3924300"/>
+              <a:off x="2489200" y="3937000"/>
               <a:ext cx="177800" cy="177800"/>
             </a:xfrm>
             <a:prstGeom prst="rect">
@@ -59062,7 +59062,7 @@
           </p:nvSpPr>
           <p:spPr>
             <a:xfrm>
-              <a:off x="2730500" y="3879850"/>
+              <a:off x="2730500" y="3892550"/>
               <a:ext cx="952500" cy="139700"/>
             </a:xfrm>
             <a:prstGeom prst="rect">
@@ -59104,7 +59104,7 @@
           </p:nvSpPr>
           <p:spPr>
             <a:xfrm>
-              <a:off x="2730500" y="4025900"/>
+              <a:off x="2730500" y="4038600"/>
               <a:ext cx="952500" cy="127000"/>
             </a:xfrm>
             <a:prstGeom prst="rect">
@@ -59146,7 +59146,7 @@
           </p:nvSpPr>
           <p:spPr>
             <a:xfrm>
-              <a:off x="2413000" y="4229100"/>
+              <a:off x="2413000" y="4241800"/>
               <a:ext cx="1333500" cy="330200"/>
             </a:xfrm>
             <a:prstGeom prst="rect">
@@ -59186,7 +59186,7 @@
           </p:blipFill>
           <p:spPr>
             <a:xfrm>
-              <a:off x="2489200" y="4305300"/>
+              <a:off x="2489200" y="4318000"/>
               <a:ext cx="177800" cy="177800"/>
             </a:xfrm>
             <a:prstGeom prst="rect">
@@ -59202,7 +59202,7 @@
           </p:nvSpPr>
           <p:spPr>
             <a:xfrm>
-              <a:off x="2730500" y="4260850"/>
+              <a:off x="2730500" y="4273550"/>
               <a:ext cx="952500" cy="139700"/>
             </a:xfrm>
             <a:prstGeom prst="rect">
@@ -59244,7 +59244,7 @@
           </p:nvSpPr>
           <p:spPr>
             <a:xfrm>
-              <a:off x="2730500" y="4406900"/>
+              <a:off x="2730500" y="4419600"/>
               <a:ext cx="952500" cy="127000"/>
             </a:xfrm>
             <a:prstGeom prst="rect">
@@ -59286,7 +59286,7 @@
           </p:nvSpPr>
           <p:spPr>
             <a:xfrm>
-              <a:off x="2413000" y="4610100"/>
+              <a:off x="2413000" y="4622800"/>
               <a:ext cx="1333500" cy="330200"/>
             </a:xfrm>
             <a:prstGeom prst="rect">
@@ -59326,7 +59326,7 @@
           </p:blipFill>
           <p:spPr>
             <a:xfrm>
-              <a:off x="2489200" y="4686300"/>
+              <a:off x="2489200" y="4699000"/>
               <a:ext cx="177800" cy="177800"/>
             </a:xfrm>
             <a:prstGeom prst="rect">
@@ -59342,7 +59342,7 @@
           </p:nvSpPr>
           <p:spPr>
             <a:xfrm>
-              <a:off x="2730500" y="4641850"/>
+              <a:off x="2730500" y="4654550"/>
               <a:ext cx="952500" cy="139700"/>
             </a:xfrm>
             <a:prstGeom prst="rect">
@@ -59384,7 +59384,7 @@
           </p:nvSpPr>
           <p:spPr>
             <a:xfrm>
-              <a:off x="2730500" y="4787900"/>
+              <a:off x="2730500" y="4800600"/>
               <a:ext cx="952500" cy="127000"/>
             </a:xfrm>
             <a:prstGeom prst="rect">
@@ -59426,7 +59426,7 @@
           </p:nvCxnSpPr>
           <p:spPr>
             <a:xfrm>
-              <a:off x="3810000" y="4394200"/>
+              <a:off x="3810000" y="4406900"/>
               <a:ext cx="596900" cy="0"/>
             </a:xfrm>
             <a:prstGeom prst="line">
@@ -59449,7 +59449,7 @@
           </p:nvSpPr>
           <p:spPr>
             <a:xfrm>
-              <a:off x="3746500" y="4203700"/>
+              <a:off x="3746500" y="4216400"/>
               <a:ext cx="723900" cy="139700"/>
             </a:xfrm>
             <a:prstGeom prst="rect">
@@ -59491,7 +59491,7 @@
           </p:nvSpPr>
           <p:spPr>
             <a:xfrm>
-              <a:off x="4483100" y="3848100"/>
+              <a:off x="4483100" y="3860800"/>
               <a:ext cx="2489200" cy="1092200"/>
             </a:xfrm>
             <a:prstGeom prst="rect">
@@ -59523,7 +59523,7 @@
           </p:nvSpPr>
           <p:spPr>
             <a:xfrm>
-              <a:off x="4483100" y="3848100"/>
+              <a:off x="4483100" y="3860800"/>
               <a:ext cx="2489200" cy="228600"/>
             </a:xfrm>
             <a:prstGeom prst="rect">
@@ -59552,7 +59552,7 @@
           </p:nvSpPr>
           <p:spPr>
             <a:xfrm>
-              <a:off x="4572000" y="3848100"/>
+              <a:off x="4572000" y="3860800"/>
               <a:ext cx="2311400" cy="228600"/>
             </a:xfrm>
             <a:prstGeom prst="rect">
@@ -59594,7 +59594,7 @@
           </p:nvSpPr>
           <p:spPr>
             <a:xfrm>
-              <a:off x="4572000" y="4102100"/>
+              <a:off x="4572000" y="4114800"/>
               <a:ext cx="533400" cy="158750"/>
             </a:xfrm>
             <a:prstGeom prst="rect">
@@ -59636,7 +59636,7 @@
           </p:nvSpPr>
           <p:spPr>
             <a:xfrm>
-              <a:off x="5143500" y="4102100"/>
+              <a:off x="5143500" y="4114800"/>
               <a:ext cx="1739900" cy="158750"/>
             </a:xfrm>
             <a:prstGeom prst="rect">
@@ -59678,7 +59678,7 @@
           </p:nvSpPr>
           <p:spPr>
             <a:xfrm>
-              <a:off x="4572000" y="4260850"/>
+              <a:off x="4572000" y="4273550"/>
               <a:ext cx="533400" cy="158750"/>
             </a:xfrm>
             <a:prstGeom prst="rect">
@@ -59720,7 +59720,7 @@
           </p:nvSpPr>
           <p:spPr>
             <a:xfrm>
-              <a:off x="5143500" y="4260850"/>
+              <a:off x="5143500" y="4273550"/>
               <a:ext cx="1739900" cy="158750"/>
             </a:xfrm>
             <a:prstGeom prst="rect">
@@ -59762,7 +59762,7 @@
           </p:nvSpPr>
           <p:spPr>
             <a:xfrm>
-              <a:off x="4572000" y="4419600"/>
+              <a:off x="4572000" y="4432300"/>
               <a:ext cx="533400" cy="158750"/>
             </a:xfrm>
             <a:prstGeom prst="rect">
@@ -59804,7 +59804,7 @@
           </p:nvSpPr>
           <p:spPr>
             <a:xfrm>
-              <a:off x="5143500" y="4419600"/>
+              <a:off x="5143500" y="4432300"/>
               <a:ext cx="1739900" cy="158750"/>
             </a:xfrm>
             <a:prstGeom prst="rect">
@@ -59846,7 +59846,7 @@
           </p:nvSpPr>
           <p:spPr>
             <a:xfrm>
-              <a:off x="4572000" y="4578350"/>
+              <a:off x="4572000" y="4591050"/>
               <a:ext cx="533400" cy="158750"/>
             </a:xfrm>
             <a:prstGeom prst="rect">
@@ -59888,7 +59888,7 @@
           </p:nvSpPr>
           <p:spPr>
             <a:xfrm>
-              <a:off x="5143500" y="4578350"/>
+              <a:off x="5143500" y="4591050"/>
               <a:ext cx="1739900" cy="158750"/>
             </a:xfrm>
             <a:prstGeom prst="rect">
@@ -59930,7 +59930,7 @@
           </p:nvSpPr>
           <p:spPr>
             <a:xfrm>
-              <a:off x="4572000" y="4737100"/>
+              <a:off x="4572000" y="4749800"/>
               <a:ext cx="533400" cy="158750"/>
             </a:xfrm>
             <a:prstGeom prst="rect">
@@ -59972,7 +59972,7 @@
           </p:nvSpPr>
           <p:spPr>
             <a:xfrm>
-              <a:off x="5143500" y="4737100"/>
+              <a:off x="5143500" y="4749800"/>
               <a:ext cx="1739900" cy="158750"/>
             </a:xfrm>
             <a:prstGeom prst="rect">
@@ -60014,7 +60014,7 @@
           </p:nvCxnSpPr>
           <p:spPr>
             <a:xfrm>
-              <a:off x="7035800" y="4394200"/>
+              <a:off x="7035800" y="4406900"/>
               <a:ext cx="444500" cy="0"/>
             </a:xfrm>
             <a:prstGeom prst="line">
@@ -60037,7 +60037,7 @@
           </p:nvSpPr>
           <p:spPr>
             <a:xfrm>
-              <a:off x="7035800" y="4203700"/>
+              <a:off x="7035800" y="4216400"/>
               <a:ext cx="444500" cy="139700"/>
             </a:xfrm>
             <a:prstGeom prst="rect">
@@ -60079,7 +60079,7 @@
           </p:nvSpPr>
           <p:spPr>
             <a:xfrm>
-              <a:off x="7594600" y="3873500"/>
+              <a:off x="7594600" y="3886200"/>
               <a:ext cx="952500" cy="1041400"/>
             </a:xfrm>
             <a:prstGeom prst="can">
@@ -60111,7 +60111,7 @@
           </p:nvSpPr>
           <p:spPr>
             <a:xfrm>
-              <a:off x="7594600" y="4127500"/>
+              <a:off x="7594600" y="4140200"/>
               <a:ext cx="952500" cy="711200"/>
             </a:xfrm>
             <a:prstGeom prst="rect">
@@ -60167,7 +60167,7 @@
           </p:nvSpPr>
           <p:spPr>
             <a:xfrm>
-              <a:off x="8737600" y="3911600"/>
+              <a:off x="8737600" y="3924300"/>
               <a:ext cx="2895600" cy="266700"/>
             </a:xfrm>
             <a:prstGeom prst="rect">
@@ -60199,7 +60199,7 @@
           </p:nvSpPr>
           <p:spPr>
             <a:xfrm>
-              <a:off x="8737600" y="3911600"/>
+              <a:off x="8737600" y="3924300"/>
               <a:ext cx="25400" cy="266700"/>
             </a:xfrm>
             <a:prstGeom prst="rect">
@@ -60228,7 +60228,7 @@
           </p:nvSpPr>
           <p:spPr>
             <a:xfrm>
-              <a:off x="8851900" y="3911600"/>
+              <a:off x="8851900" y="3924300"/>
               <a:ext cx="2032000" cy="266700"/>
             </a:xfrm>
             <a:prstGeom prst="rect">
@@ -60281,7 +60281,7 @@
           </p:nvSpPr>
           <p:spPr>
             <a:xfrm>
-              <a:off x="8737600" y="4241800"/>
+              <a:off x="8737600" y="4254500"/>
               <a:ext cx="2895600" cy="266700"/>
             </a:xfrm>
             <a:prstGeom prst="rect">
@@ -60313,7 +60313,7 @@
           </p:nvSpPr>
           <p:spPr>
             <a:xfrm>
-              <a:off x="8737600" y="4241800"/>
+              <a:off x="8737600" y="4254500"/>
               <a:ext cx="25400" cy="266700"/>
             </a:xfrm>
             <a:prstGeom prst="rect">
@@ -60342,7 +60342,7 @@
           </p:nvSpPr>
           <p:spPr>
             <a:xfrm>
-              <a:off x="8851900" y="4241800"/>
+              <a:off x="8851900" y="4254500"/>
               <a:ext cx="2032000" cy="266700"/>
             </a:xfrm>
             <a:prstGeom prst="rect">
@@ -60395,7 +60395,7 @@
           </p:nvSpPr>
           <p:spPr>
             <a:xfrm>
-              <a:off x="8737600" y="4572000"/>
+              <a:off x="8737600" y="4584700"/>
               <a:ext cx="2895600" cy="266700"/>
             </a:xfrm>
             <a:prstGeom prst="rect">
@@ -60427,7 +60427,7 @@
           </p:nvSpPr>
           <p:spPr>
             <a:xfrm>
-              <a:off x="8737600" y="4572000"/>
+              <a:off x="8737600" y="4584700"/>
               <a:ext cx="25400" cy="266700"/>
             </a:xfrm>
             <a:prstGeom prst="rect">
@@ -60456,7 +60456,7 @@
           </p:nvSpPr>
           <p:spPr>
             <a:xfrm>
-              <a:off x="8851900" y="4572000"/>
+              <a:off x="8851900" y="4584700"/>
               <a:ext cx="2032000" cy="266700"/>
             </a:xfrm>
             <a:prstGeom prst="rect">
@@ -60509,7 +60509,7 @@
           </p:nvSpPr>
           <p:spPr>
             <a:xfrm>
-              <a:off x="2413000" y="5092700"/>
+              <a:off x="2413000" y="5105400"/>
               <a:ext cx="777954" cy="177800"/>
             </a:xfrm>
             <a:prstGeom prst="rect">
@@ -60556,7 +60556,7 @@
           </p:nvSpPr>
           <p:spPr>
             <a:xfrm>
-              <a:off x="2413000" y="5359400"/>
+              <a:off x="2413000" y="5372100"/>
               <a:ext cx="952500" cy="279400"/>
             </a:xfrm>
             <a:prstGeom prst="roundRect">
@@ -60608,7 +60608,7 @@
           </p:nvCxnSpPr>
           <p:spPr>
             <a:xfrm>
-              <a:off x="3403600" y="5499100"/>
+              <a:off x="3403600" y="5511800"/>
               <a:ext cx="266700" cy="0"/>
             </a:xfrm>
             <a:prstGeom prst="line">
@@ -60631,7 +60631,7 @@
           </p:nvSpPr>
           <p:spPr>
             <a:xfrm>
-              <a:off x="3708400" y="5359400"/>
+              <a:off x="3708400" y="5372100"/>
               <a:ext cx="952500" cy="279400"/>
             </a:xfrm>
             <a:prstGeom prst="roundRect">
@@ -60683,7 +60683,7 @@
           </p:nvCxnSpPr>
           <p:spPr>
             <a:xfrm>
-              <a:off x="4699000" y="5499100"/>
+              <a:off x="4699000" y="5511800"/>
               <a:ext cx="266700" cy="0"/>
             </a:xfrm>
             <a:prstGeom prst="line">
@@ -60706,7 +60706,7 @@
           </p:nvSpPr>
           <p:spPr>
             <a:xfrm>
-              <a:off x="5003800" y="5359400"/>
+              <a:off x="5003800" y="5372100"/>
               <a:ext cx="952500" cy="279400"/>
             </a:xfrm>
             <a:prstGeom prst="roundRect">
@@ -60758,7 +60758,7 @@
           </p:nvCxnSpPr>
           <p:spPr>
             <a:xfrm>
-              <a:off x="5994400" y="5499100"/>
+              <a:off x="5994400" y="5511800"/>
               <a:ext cx="266700" cy="0"/>
             </a:xfrm>
             <a:prstGeom prst="line">
@@ -60781,7 +60781,7 @@
           </p:nvSpPr>
           <p:spPr>
             <a:xfrm>
-              <a:off x="6299200" y="5359400"/>
+              <a:off x="6299200" y="5372100"/>
               <a:ext cx="952500" cy="279400"/>
             </a:xfrm>
             <a:prstGeom prst="roundRect">
@@ -60833,7 +60833,7 @@
           </p:nvCxnSpPr>
           <p:spPr>
             <a:xfrm>
-              <a:off x="7289800" y="5499100"/>
+              <a:off x="7289800" y="5511800"/>
               <a:ext cx="266700" cy="0"/>
             </a:xfrm>
             <a:prstGeom prst="line">
@@ -60856,7 +60856,7 @@
           </p:nvSpPr>
           <p:spPr>
             <a:xfrm>
-              <a:off x="7594600" y="5359400"/>
+              <a:off x="7594600" y="5372100"/>
               <a:ext cx="952500" cy="279400"/>
             </a:xfrm>
             <a:prstGeom prst="roundRect">
@@ -60908,7 +60908,7 @@
           </p:nvCxnSpPr>
           <p:spPr>
             <a:xfrm>
-              <a:off x="8585200" y="5499100"/>
+              <a:off x="8585200" y="5511800"/>
               <a:ext cx="266700" cy="0"/>
             </a:xfrm>
             <a:prstGeom prst="line">
@@ -60931,7 +60931,7 @@
           </p:nvSpPr>
           <p:spPr>
             <a:xfrm>
-              <a:off x="8890000" y="5359400"/>
+              <a:off x="8890000" y="5372100"/>
               <a:ext cx="952500" cy="279400"/>
             </a:xfrm>
             <a:prstGeom prst="roundRect">
@@ -60980,7 +60980,7 @@
           </p:nvSpPr>
           <p:spPr>
             <a:xfrm>
-              <a:off x="8547100" y="5321300"/>
+              <a:off x="8547100" y="5334000"/>
               <a:ext cx="342900" cy="127000"/>
             </a:xfrm>
             <a:prstGeom prst="rect">
@@ -61022,7 +61022,7 @@
           </p:nvSpPr>
           <p:spPr>
             <a:xfrm>
-              <a:off x="5480050" y="5638800"/>
+              <a:off x="5480050" y="5651500"/>
               <a:ext cx="2590800" cy="215900"/>
             </a:xfrm>
             <a:custGeom>
@@ -61073,7 +61073,7 @@
           </p:nvSpPr>
           <p:spPr>
             <a:xfrm>
-              <a:off x="5480050" y="5892800"/>
+              <a:off x="5480050" y="5905500"/>
               <a:ext cx="2590800" cy="152400"/>
             </a:xfrm>
             <a:prstGeom prst="rect">
@@ -61115,7 +61115,7 @@
           </p:nvCxnSpPr>
           <p:spPr>
             <a:xfrm>
-              <a:off x="8070850" y="4927600"/>
+              <a:off x="8070850" y="4940300"/>
               <a:ext cx="0" cy="406400"/>
             </a:xfrm>
             <a:prstGeom prst="line">
@@ -61139,7 +61139,7 @@
           </p:nvSpPr>
           <p:spPr>
             <a:xfrm>
-              <a:off x="8140700" y="5073650"/>
+              <a:off x="8140700" y="5086350"/>
               <a:ext cx="635000" cy="139700"/>
             </a:xfrm>
             <a:prstGeom prst="rect">
@@ -61181,7 +61181,7 @@
           </p:nvSpPr>
           <p:spPr>
             <a:xfrm>
-              <a:off x="9867900" y="4876800"/>
+              <a:off x="9867900" y="4889500"/>
               <a:ext cx="1663700" cy="622300"/>
             </a:xfrm>
             <a:custGeom>
@@ -61229,7 +61229,7 @@
           </p:nvSpPr>
           <p:spPr>
             <a:xfrm>
-              <a:off x="9969500" y="4978400"/>
+              <a:off x="9969500" y="4991100"/>
               <a:ext cx="676354" cy="177800"/>
             </a:xfrm>
             <a:prstGeom prst="rect">
@@ -61276,7 +61276,7 @@
           </p:nvSpPr>
           <p:spPr>
             <a:xfrm>
-              <a:off x="9969500" y="5181600"/>
+              <a:off x="9969500" y="5194300"/>
               <a:ext cx="1460500" cy="139700"/>
             </a:xfrm>
             <a:prstGeom prst="rect">
@@ -62497,7 +62497,7 @@
         <p:spPr>
           <a:xfrm>
             <a:off x="2260600" y="1358900"/>
-            <a:ext cx="9525000" cy="711200"/>
+            <a:ext cx="9525000" cy="673100"/>
           </a:xfrm>
           <a:prstGeom prst="rect">
             <a:avLst/>
@@ -62526,7 +62526,7 @@
         <p:spPr>
           <a:xfrm>
             <a:off x="2260600" y="1358900"/>
-            <a:ext cx="19050" cy="711200"/>
+            <a:ext cx="19050" cy="673100"/>
           </a:xfrm>
           <a:prstGeom prst="rect">
             <a:avLst/>
@@ -62554,7 +62554,7 @@
         </p:nvSpPr>
         <p:spPr>
           <a:xfrm>
-            <a:off x="2413000" y="1447800"/>
+            <a:off x="2413000" y="1435100"/>
             <a:ext cx="635000" cy="177800"/>
           </a:xfrm>
           <a:prstGeom prst="rect">
@@ -62604,8 +62604,8 @@
         </p:nvSpPr>
         <p:spPr>
           <a:xfrm>
-            <a:off x="2413000" y="1676400"/>
-            <a:ext cx="5384800" cy="368300"/>
+            <a:off x="2413000" y="1651000"/>
+            <a:ext cx="5384800" cy="355600"/>
           </a:xfrm>
           <a:prstGeom prst="rect">
             <a:avLst/>
@@ -62657,8 +62657,8 @@
         </p:nvCxnSpPr>
         <p:spPr>
           <a:xfrm>
-            <a:off x="7975600" y="1473200"/>
-            <a:ext cx="0" cy="482600"/>
+            <a:off x="7975600" y="1460500"/>
+            <a:ext cx="0" cy="469900"/>
           </a:xfrm>
           <a:prstGeom prst="line">
             <a:avLst/>
@@ -62679,7 +62679,7 @@
         </p:nvSpPr>
         <p:spPr>
           <a:xfrm>
-            <a:off x="8153400" y="1447800"/>
+            <a:off x="8153400" y="1435100"/>
             <a:ext cx="1524000" cy="177800"/>
           </a:xfrm>
           <a:prstGeom prst="rect">
@@ -62721,8 +62721,8 @@
         </p:nvSpPr>
         <p:spPr>
           <a:xfrm>
-            <a:off x="8153400" y="1676400"/>
-            <a:ext cx="3454400" cy="368300"/>
+            <a:off x="8153400" y="1651000"/>
+            <a:ext cx="3454400" cy="355600"/>
           </a:xfrm>
           <a:prstGeom prst="rect">
             <a:avLst/>
@@ -62774,7 +62774,7 @@
         </p:nvSpPr>
         <p:spPr>
           <a:xfrm>
-            <a:off x="2260600" y="2171700"/>
+            <a:off x="2260600" y="2095500"/>
             <a:ext cx="2286000" cy="952500"/>
           </a:xfrm>
           <a:prstGeom prst="rect">
@@ -62806,7 +62806,7 @@
         </p:nvSpPr>
         <p:spPr>
           <a:xfrm>
-            <a:off x="2260600" y="2171700"/>
+            <a:off x="2260600" y="2095500"/>
             <a:ext cx="2286000" cy="19050"/>
           </a:xfrm>
           <a:prstGeom prst="rect">
@@ -62835,7 +62835,7 @@
         </p:nvSpPr>
         <p:spPr>
           <a:xfrm>
-            <a:off x="2400300" y="2273300"/>
+            <a:off x="2400300" y="2197100"/>
             <a:ext cx="2006600" cy="203200"/>
           </a:xfrm>
           <a:prstGeom prst="rect">
@@ -62888,7 +62888,7 @@
         </p:nvSpPr>
         <p:spPr>
           <a:xfrm>
-            <a:off x="2400300" y="2540000"/>
+            <a:off x="2400300" y="2463800"/>
             <a:ext cx="2006600" cy="533400"/>
           </a:xfrm>
           <a:prstGeom prst="rect">
@@ -62930,7 +62930,7 @@
         </p:nvSpPr>
         <p:spPr>
           <a:xfrm>
-            <a:off x="4673600" y="2171700"/>
+            <a:off x="4673600" y="2095500"/>
             <a:ext cx="2286000" cy="952500"/>
           </a:xfrm>
           <a:prstGeom prst="rect">
@@ -62962,7 +62962,7 @@
         </p:nvSpPr>
         <p:spPr>
           <a:xfrm>
-            <a:off x="4673600" y="2171700"/>
+            <a:off x="4673600" y="2095500"/>
             <a:ext cx="2286000" cy="19050"/>
           </a:xfrm>
           <a:prstGeom prst="rect">
@@ -62991,7 +62991,7 @@
         </p:nvSpPr>
         <p:spPr>
           <a:xfrm>
-            <a:off x="4813300" y="2273300"/>
+            <a:off x="4813300" y="2197100"/>
             <a:ext cx="2006600" cy="203200"/>
           </a:xfrm>
           <a:prstGeom prst="rect">
@@ -63044,7 +63044,7 @@
         </p:nvSpPr>
         <p:spPr>
           <a:xfrm>
-            <a:off x="4813300" y="2540000"/>
+            <a:off x="4813300" y="2463800"/>
             <a:ext cx="2006600" cy="533400"/>
           </a:xfrm>
           <a:prstGeom prst="rect">
@@ -63086,7 +63086,7 @@
         </p:nvSpPr>
         <p:spPr>
           <a:xfrm>
-            <a:off x="7086600" y="2171700"/>
+            <a:off x="7086600" y="2095500"/>
             <a:ext cx="2286000" cy="952500"/>
           </a:xfrm>
           <a:prstGeom prst="rect">
@@ -63118,7 +63118,7 @@
         </p:nvSpPr>
         <p:spPr>
           <a:xfrm>
-            <a:off x="7086600" y="2171700"/>
+            <a:off x="7086600" y="2095500"/>
             <a:ext cx="2286000" cy="19050"/>
           </a:xfrm>
           <a:prstGeom prst="rect">
@@ -63147,7 +63147,7 @@
         </p:nvSpPr>
         <p:spPr>
           <a:xfrm>
-            <a:off x="7226300" y="2273300"/>
+            <a:off x="7226300" y="2197100"/>
             <a:ext cx="2006600" cy="203200"/>
           </a:xfrm>
           <a:prstGeom prst="rect">
@@ -63200,7 +63200,7 @@
         </p:nvSpPr>
         <p:spPr>
           <a:xfrm>
-            <a:off x="7226300" y="2540000"/>
+            <a:off x="7226300" y="2463800"/>
             <a:ext cx="2006600" cy="533400"/>
           </a:xfrm>
           <a:prstGeom prst="rect">
@@ -63242,7 +63242,7 @@
         </p:nvSpPr>
         <p:spPr>
           <a:xfrm>
-            <a:off x="9499600" y="2171700"/>
+            <a:off x="9499600" y="2095500"/>
             <a:ext cx="2286000" cy="952500"/>
           </a:xfrm>
           <a:prstGeom prst="rect">
@@ -63274,7 +63274,7 @@
         </p:nvSpPr>
         <p:spPr>
           <a:xfrm>
-            <a:off x="9499600" y="2171700"/>
+            <a:off x="9499600" y="2095500"/>
             <a:ext cx="2286000" cy="19050"/>
           </a:xfrm>
           <a:prstGeom prst="rect">
@@ -63303,7 +63303,7 @@
         </p:nvSpPr>
         <p:spPr>
           <a:xfrm>
-            <a:off x="9639300" y="2273300"/>
+            <a:off x="9639300" y="2197100"/>
             <a:ext cx="2006600" cy="203200"/>
           </a:xfrm>
           <a:prstGeom prst="rect">
@@ -63356,7 +63356,7 @@
         </p:nvSpPr>
         <p:spPr>
           <a:xfrm>
-            <a:off x="9639300" y="2540000"/>
+            <a:off x="9639300" y="2463800"/>
             <a:ext cx="2006600" cy="533400"/>
           </a:xfrm>
           <a:prstGeom prst="rect">
@@ -63398,7 +63398,7 @@
         </p:nvSpPr>
         <p:spPr>
           <a:xfrm>
-            <a:off x="2260600" y="3225800"/>
+            <a:off x="2260600" y="3149600"/>
             <a:ext cx="9525000" cy="228600"/>
           </a:xfrm>
           <a:prstGeom prst="rect">
@@ -63440,7 +63440,7 @@
         </p:nvSpPr>
         <p:spPr>
           <a:xfrm>
-            <a:off x="7112000" y="3225800"/>
+            <a:off x="7112000" y="3149600"/>
             <a:ext cx="4673600" cy="228600"/>
           </a:xfrm>
           <a:prstGeom prst="rect">
@@ -63482,10 +63482,10 @@
         </p:nvGrpSpPr>
         <p:grpSpPr>
           <a:xfrm>
-            <a:off x="2260600" y="3517900"/>
-            <a:ext cx="9525000" cy="2768600"/>
-            <a:chOff x="2260600" y="3517900"/>
-            <a:chExt cx="9525000" cy="2768600"/>
+            <a:off x="2260600" y="3441700"/>
+            <a:ext cx="9525000" cy="2844800"/>
+            <a:chOff x="2260600" y="3441700"/>
+            <a:chExt cx="9525000" cy="2844800"/>
           </a:xfrm>
         </p:grpSpPr>
         <p:sp>
@@ -63496,8 +63496,8 @@
           </p:nvSpPr>
           <p:spPr>
             <a:xfrm>
-              <a:off x="2260600" y="3517900"/>
-              <a:ext cx="9525000" cy="2768600"/>
+              <a:off x="2260600" y="3441700"/>
+              <a:ext cx="9525000" cy="2844800"/>
             </a:xfrm>
             <a:prstGeom prst="rect">
               <a:avLst/>
@@ -63525,7 +63525,7 @@
           </p:nvSpPr>
           <p:spPr>
             <a:xfrm>
-              <a:off x="2413000" y="3632200"/>
+              <a:off x="2413000" y="3556000"/>
               <a:ext cx="1671129" cy="254000"/>
             </a:xfrm>
             <a:prstGeom prst="roundRect">
@@ -63588,7 +63588,7 @@
           </p:nvSpPr>
           <p:spPr>
             <a:xfrm rot="5400000">
-              <a:off x="4173029" y="3721100"/>
+              <a:off x="4173029" y="3644900"/>
               <a:ext cx="101600" cy="76200"/>
             </a:xfrm>
             <a:prstGeom prst="triangle">
@@ -63617,7 +63617,7 @@
           </p:nvSpPr>
           <p:spPr>
             <a:xfrm>
-              <a:off x="4363530" y="3632200"/>
+              <a:off x="4363530" y="3556000"/>
               <a:ext cx="1750600" cy="254000"/>
             </a:xfrm>
             <a:prstGeom prst="roundRect">
@@ -63680,7 +63680,7 @@
           </p:nvSpPr>
           <p:spPr>
             <a:xfrm rot="5400000">
-              <a:off x="6203029" y="3721100"/>
+              <a:off x="6203029" y="3644900"/>
               <a:ext cx="101600" cy="76200"/>
             </a:xfrm>
             <a:prstGeom prst="triangle">
@@ -63709,7 +63709,7 @@
           </p:nvSpPr>
           <p:spPr>
             <a:xfrm>
-              <a:off x="6393529" y="3632200"/>
+              <a:off x="6393529" y="3556000"/>
               <a:ext cx="2563400" cy="254000"/>
             </a:xfrm>
             <a:prstGeom prst="roundRect">
@@ -63772,7 +63772,7 @@
           </p:nvSpPr>
           <p:spPr>
             <a:xfrm rot="5400000">
-              <a:off x="9045829" y="3721100"/>
+              <a:off x="9045829" y="3644900"/>
               <a:ext cx="101600" cy="76200"/>
             </a:xfrm>
             <a:prstGeom prst="triangle">
@@ -63801,7 +63801,7 @@
           </p:nvSpPr>
           <p:spPr>
             <a:xfrm>
-              <a:off x="9236329" y="3632200"/>
+              <a:off x="9236329" y="3556000"/>
               <a:ext cx="1253554" cy="254000"/>
             </a:xfrm>
             <a:prstGeom prst="roundRect">
@@ -63853,7 +63853,7 @@
           </p:nvSpPr>
           <p:spPr>
             <a:xfrm>
-              <a:off x="2413000" y="4000500"/>
+              <a:off x="2413000" y="3924300"/>
               <a:ext cx="990600" cy="254000"/>
             </a:xfrm>
             <a:prstGeom prst="rect">
@@ -63895,7 +63895,7 @@
           </p:nvSpPr>
           <p:spPr>
             <a:xfrm>
-              <a:off x="2413000" y="4305300"/>
+              <a:off x="2413000" y="4229100"/>
               <a:ext cx="990600" cy="254000"/>
             </a:xfrm>
             <a:prstGeom prst="rect">
@@ -63948,7 +63948,7 @@
           </p:nvSpPr>
           <p:spPr>
             <a:xfrm>
-              <a:off x="2413000" y="4635500"/>
+              <a:off x="2413000" y="4559300"/>
               <a:ext cx="990600" cy="355600"/>
             </a:xfrm>
             <a:prstGeom prst="rect">
@@ -64001,7 +64001,7 @@
           </p:nvSpPr>
           <p:spPr>
             <a:xfrm>
-              <a:off x="2413000" y="5067300"/>
+              <a:off x="2413000" y="4991100"/>
               <a:ext cx="990600" cy="190500"/>
             </a:xfrm>
             <a:prstGeom prst="rect">
@@ -64054,7 +64054,7 @@
           </p:nvSpPr>
           <p:spPr>
             <a:xfrm>
-              <a:off x="2413000" y="5410200"/>
+              <a:off x="2413000" y="5334000"/>
               <a:ext cx="990600" cy="254000"/>
             </a:xfrm>
             <a:prstGeom prst="rect">
@@ -64107,7 +64107,7 @@
           </p:nvCxnSpPr>
           <p:spPr>
             <a:xfrm>
-              <a:off x="4987798" y="3962400"/>
+              <a:off x="4987798" y="3886200"/>
               <a:ext cx="0" cy="1727200"/>
             </a:xfrm>
             <a:prstGeom prst="line">
@@ -64130,7 +64130,7 @@
           </p:nvCxnSpPr>
           <p:spPr>
             <a:xfrm>
-              <a:off x="6300470" y="3962400"/>
+              <a:off x="6300470" y="3886200"/>
               <a:ext cx="0" cy="1727200"/>
             </a:xfrm>
             <a:prstGeom prst="line">
@@ -64153,7 +64153,7 @@
           </p:nvCxnSpPr>
           <p:spPr>
             <a:xfrm>
-              <a:off x="7859268" y="3962400"/>
+              <a:off x="7859268" y="3886200"/>
               <a:ext cx="0" cy="1727200"/>
             </a:xfrm>
             <a:prstGeom prst="line">
@@ -64176,7 +64176,7 @@
           </p:nvCxnSpPr>
           <p:spPr>
             <a:xfrm>
-              <a:off x="10074402" y="3962400"/>
+              <a:off x="10074402" y="3886200"/>
               <a:ext cx="0" cy="1727200"/>
             </a:xfrm>
             <a:prstGeom prst="line">
@@ -64199,7 +64199,7 @@
           </p:nvSpPr>
           <p:spPr>
             <a:xfrm>
-              <a:off x="3441700" y="4000500"/>
+              <a:off x="3441700" y="3924300"/>
               <a:ext cx="1533398" cy="254000"/>
             </a:xfrm>
             <a:prstGeom prst="rect">
@@ -64231,7 +64231,7 @@
           </p:nvSpPr>
           <p:spPr>
             <a:xfrm>
-              <a:off x="3441700" y="4000500"/>
+              <a:off x="3441700" y="3924300"/>
               <a:ext cx="1533398" cy="254000"/>
             </a:xfrm>
             <a:prstGeom prst="rect">
@@ -64273,7 +64273,7 @@
           </p:nvSpPr>
           <p:spPr>
             <a:xfrm>
-              <a:off x="3441700" y="4305300"/>
+              <a:off x="3441700" y="4229100"/>
               <a:ext cx="1533398" cy="254000"/>
             </a:xfrm>
             <a:prstGeom prst="rect">
@@ -64302,7 +64302,7 @@
           </p:nvSpPr>
           <p:spPr>
             <a:xfrm>
-              <a:off x="3441700" y="4305300"/>
+              <a:off x="3441700" y="4229100"/>
               <a:ext cx="1533398" cy="254000"/>
             </a:xfrm>
             <a:prstGeom prst="rect">
@@ -64344,7 +64344,7 @@
           </p:nvSpPr>
           <p:spPr>
             <a:xfrm>
-              <a:off x="5000498" y="4000500"/>
+              <a:off x="5000498" y="3924300"/>
               <a:ext cx="1287272" cy="254000"/>
             </a:xfrm>
             <a:prstGeom prst="rect">
@@ -64376,7 +64376,7 @@
           </p:nvSpPr>
           <p:spPr>
             <a:xfrm>
-              <a:off x="5000498" y="4000500"/>
+              <a:off x="5000498" y="3924300"/>
               <a:ext cx="1287272" cy="254000"/>
             </a:xfrm>
             <a:prstGeom prst="rect">
@@ -64418,7 +64418,7 @@
           </p:nvSpPr>
           <p:spPr>
             <a:xfrm>
-              <a:off x="5000498" y="4305300"/>
+              <a:off x="5000498" y="4229100"/>
               <a:ext cx="1287272" cy="254000"/>
             </a:xfrm>
             <a:prstGeom prst="rect">
@@ -64447,7 +64447,7 @@
           </p:nvSpPr>
           <p:spPr>
             <a:xfrm>
-              <a:off x="5000498" y="4305300"/>
+              <a:off x="5000498" y="4229100"/>
               <a:ext cx="1287272" cy="254000"/>
             </a:xfrm>
             <a:prstGeom prst="rect">
@@ -64489,7 +64489,7 @@
           </p:nvSpPr>
           <p:spPr>
             <a:xfrm>
-              <a:off x="6313170" y="4000500"/>
+              <a:off x="6313170" y="3924300"/>
               <a:ext cx="1533398" cy="254000"/>
             </a:xfrm>
             <a:prstGeom prst="rect">
@@ -64521,7 +64521,7 @@
           </p:nvSpPr>
           <p:spPr>
             <a:xfrm>
-              <a:off x="6313170" y="4000500"/>
+              <a:off x="6313170" y="3924300"/>
               <a:ext cx="1533398" cy="254000"/>
             </a:xfrm>
             <a:prstGeom prst="rect">
@@ -64563,7 +64563,7 @@
           </p:nvSpPr>
           <p:spPr>
             <a:xfrm>
-              <a:off x="6313170" y="4305300"/>
+              <a:off x="6313170" y="4229100"/>
               <a:ext cx="1533398" cy="254000"/>
             </a:xfrm>
             <a:prstGeom prst="rect">
@@ -64592,7 +64592,7 @@
           </p:nvSpPr>
           <p:spPr>
             <a:xfrm>
-              <a:off x="6313170" y="4305300"/>
+              <a:off x="6313170" y="4229100"/>
               <a:ext cx="1533398" cy="254000"/>
             </a:xfrm>
             <a:prstGeom prst="rect">
@@ -64634,7 +64634,7 @@
           </p:nvSpPr>
           <p:spPr>
             <a:xfrm>
-              <a:off x="7871968" y="4000500"/>
+              <a:off x="7871968" y="3924300"/>
               <a:ext cx="2189734" cy="254000"/>
             </a:xfrm>
             <a:prstGeom prst="rect">
@@ -64666,7 +64666,7 @@
           </p:nvSpPr>
           <p:spPr>
             <a:xfrm>
-              <a:off x="7871968" y="4000500"/>
+              <a:off x="7871968" y="3924300"/>
               <a:ext cx="2189734" cy="254000"/>
             </a:xfrm>
             <a:prstGeom prst="rect">
@@ -64708,7 +64708,7 @@
           </p:nvSpPr>
           <p:spPr>
             <a:xfrm>
-              <a:off x="7871968" y="4305300"/>
+              <a:off x="7871968" y="4229100"/>
               <a:ext cx="2189734" cy="254000"/>
             </a:xfrm>
             <a:prstGeom prst="rect">
@@ -64737,7 +64737,7 @@
           </p:nvSpPr>
           <p:spPr>
             <a:xfrm>
-              <a:off x="7871968" y="4305300"/>
+              <a:off x="7871968" y="4229100"/>
               <a:ext cx="2189734" cy="254000"/>
             </a:xfrm>
             <a:prstGeom prst="rect">
@@ -64779,7 +64779,7 @@
           </p:nvSpPr>
           <p:spPr>
             <a:xfrm>
-              <a:off x="10087102" y="4000500"/>
+              <a:off x="10087102" y="3924300"/>
               <a:ext cx="1533398" cy="254000"/>
             </a:xfrm>
             <a:prstGeom prst="rect">
@@ -64811,7 +64811,7 @@
           </p:nvSpPr>
           <p:spPr>
             <a:xfrm>
-              <a:off x="10087102" y="4000500"/>
+              <a:off x="10087102" y="3924300"/>
               <a:ext cx="1533398" cy="254000"/>
             </a:xfrm>
             <a:prstGeom prst="rect">
@@ -64853,7 +64853,7 @@
           </p:nvSpPr>
           <p:spPr>
             <a:xfrm>
-              <a:off x="10087102" y="4305300"/>
+              <a:off x="10087102" y="4229100"/>
               <a:ext cx="1533398" cy="254000"/>
             </a:xfrm>
             <a:prstGeom prst="rect">
@@ -64882,7 +64882,7 @@
           </p:nvSpPr>
           <p:spPr>
             <a:xfrm>
-              <a:off x="10087102" y="4305300"/>
+              <a:off x="10087102" y="4229100"/>
               <a:ext cx="1533398" cy="254000"/>
             </a:xfrm>
             <a:prstGeom prst="rect">
@@ -64924,7 +64924,7 @@
           </p:nvSpPr>
           <p:spPr>
             <a:xfrm>
-              <a:off x="3429000" y="4699000"/>
+              <a:off x="3429000" y="4622800"/>
               <a:ext cx="8204200" cy="292100"/>
             </a:xfrm>
             <a:custGeom>
@@ -65001,7 +65001,7 @@
           </p:nvSpPr>
           <p:spPr>
             <a:xfrm>
-              <a:off x="3429000" y="5111750"/>
+              <a:off x="3429000" y="5035550"/>
               <a:ext cx="8204200" cy="146050"/>
             </a:xfrm>
             <a:custGeom>
@@ -65090,7 +65090,7 @@
           </p:nvSpPr>
           <p:spPr>
             <a:xfrm>
-              <a:off x="9728200" y="4660900"/>
+              <a:off x="9728200" y="4584700"/>
               <a:ext cx="1854200" cy="139700"/>
             </a:xfrm>
             <a:prstGeom prst="rect">
@@ -65132,7 +65132,7 @@
           </p:nvSpPr>
           <p:spPr>
             <a:xfrm>
-              <a:off x="9728200" y="5080000"/>
+              <a:off x="9728200" y="5003800"/>
               <a:ext cx="1854200" cy="127000"/>
             </a:xfrm>
             <a:prstGeom prst="rect">
@@ -65174,7 +65174,7 @@
           </p:nvCxnSpPr>
           <p:spPr>
             <a:xfrm>
-              <a:off x="3429000" y="5537200"/>
+              <a:off x="3429000" y="5461000"/>
               <a:ext cx="8204200" cy="0"/>
             </a:xfrm>
             <a:prstGeom prst="line">
@@ -65204,7 +65204,7 @@
           </p:blipFill>
           <p:spPr>
             <a:xfrm>
-              <a:off x="4138549" y="5467350"/>
+              <a:off x="4138549" y="5391150"/>
               <a:ext cx="139700" cy="139700"/>
             </a:xfrm>
             <a:prstGeom prst="rect">
@@ -65228,7 +65228,7 @@
           </p:blipFill>
           <p:spPr>
             <a:xfrm>
-              <a:off x="5574284" y="5467350"/>
+              <a:off x="5574284" y="5391150"/>
               <a:ext cx="139700" cy="139700"/>
             </a:xfrm>
             <a:prstGeom prst="rect">
@@ -65252,7 +65252,7 @@
           </p:blipFill>
           <p:spPr>
             <a:xfrm>
-              <a:off x="7010019" y="5467350"/>
+              <a:off x="7010019" y="5391150"/>
               <a:ext cx="139700" cy="139700"/>
             </a:xfrm>
             <a:prstGeom prst="rect">
@@ -65276,7 +65276,7 @@
           </p:blipFill>
           <p:spPr>
             <a:xfrm>
-              <a:off x="8343202" y="5467350"/>
+              <a:off x="8343202" y="5391150"/>
               <a:ext cx="139700" cy="139700"/>
             </a:xfrm>
             <a:prstGeom prst="rect">
@@ -65300,7 +65300,7 @@
           </p:blipFill>
           <p:spPr>
             <a:xfrm>
-              <a:off x="9150101" y="5454650"/>
+              <a:off x="9150101" y="5378450"/>
               <a:ext cx="165100" cy="165100"/>
             </a:xfrm>
             <a:prstGeom prst="rect">
@@ -65316,7 +65316,7 @@
           </p:nvSpPr>
           <p:spPr>
             <a:xfrm>
-              <a:off x="9346951" y="5346700"/>
+              <a:off x="9346951" y="5270500"/>
               <a:ext cx="762000" cy="139700"/>
             </a:xfrm>
             <a:prstGeom prst="rect">
@@ -65358,7 +65358,7 @@
           </p:nvSpPr>
           <p:spPr>
             <a:xfrm>
-              <a:off x="7962900" y="5613400"/>
+              <a:off x="7962900" y="5537200"/>
               <a:ext cx="1270000" cy="101600"/>
             </a:xfrm>
             <a:custGeom>
@@ -65409,7 +65409,7 @@
           </p:nvSpPr>
           <p:spPr>
             <a:xfrm>
-              <a:off x="7960868" y="5727700"/>
+              <a:off x="7960868" y="5651500"/>
               <a:ext cx="1271783" cy="127000"/>
             </a:xfrm>
             <a:prstGeom prst="rect">
@@ -65459,7 +65459,7 @@
           </p:blipFill>
           <p:spPr>
             <a:xfrm>
-              <a:off x="10783951" y="5467350"/>
+              <a:off x="10783951" y="5391150"/>
               <a:ext cx="139700" cy="139700"/>
             </a:xfrm>
             <a:prstGeom prst="rect">
@@ -65475,7 +65475,7 @@
           </p:nvCxnSpPr>
           <p:spPr>
             <a:xfrm>
-              <a:off x="3429000" y="6083300"/>
+              <a:off x="3429000" y="6007100"/>
               <a:ext cx="8204200" cy="0"/>
             </a:xfrm>
             <a:prstGeom prst="line">
@@ -65498,7 +65498,7 @@
           </p:nvSpPr>
           <p:spPr>
             <a:xfrm>
-              <a:off x="10109200" y="5918200"/>
+              <a:off x="10109200" y="5842000"/>
               <a:ext cx="1498600" cy="139700"/>
             </a:xfrm>
             <a:prstGeom prst="rect">

--- a/项目汇报PPT.pptx
+++ b/项目汇报PPT.pptx
@@ -8367,10 +8367,13 @@
             <a:avLst/>
           </a:prstGeom>
           <a:solidFill>
-            <a:srgbClr val="F6F6F6"/>
+            <a:srgbClr val="FFFFFF"/>
           </a:solidFill>
-          <a:ln>
-            <a:noFill/>
+          <a:ln w="6350">
+            <a:solidFill>
+              <a:srgbClr val="E9E9E9"/>
+            </a:solidFill>
+            <a:round/>
           </a:ln>
         </p:spPr>
         <p:txBody>
@@ -13361,10 +13364,13 @@
             <a:avLst/>
           </a:prstGeom>
           <a:solidFill>
-            <a:srgbClr val="F6F6F6"/>
+            <a:srgbClr val="FFFFFF"/>
           </a:solidFill>
-          <a:ln>
-            <a:noFill/>
+          <a:ln w="6350">
+            <a:solidFill>
+              <a:srgbClr val="E9E9E9"/>
+            </a:solidFill>
+            <a:round/>
           </a:ln>
         </p:spPr>
         <p:txBody>
@@ -17387,7 +17393,7 @@
             <a:avLst/>
           </a:prstGeom>
           <a:solidFill>
-            <a:srgbClr val="1A1A1A"/>
+            <a:srgbClr val="3A3A3A"/>
           </a:solidFill>
           <a:ln>
             <a:noFill/>
@@ -32050,10 +32056,13 @@
             <a:avLst/>
           </a:prstGeom>
           <a:solidFill>
-            <a:srgbClr val="F6F6F6"/>
+            <a:srgbClr val="FFFFFF"/>
           </a:solidFill>
-          <a:ln>
-            <a:noFill/>
+          <a:ln w="6350">
+            <a:solidFill>
+              <a:srgbClr val="E9E9E9"/>
+            </a:solidFill>
+            <a:round/>
           </a:ln>
         </p:spPr>
         <p:txBody>
@@ -32174,10 +32183,13 @@
             <a:avLst/>
           </a:prstGeom>
           <a:solidFill>
-            <a:srgbClr val="F6F6F6"/>
+            <a:srgbClr val="FFFFFF"/>
           </a:solidFill>
-          <a:ln>
-            <a:noFill/>
+          <a:ln w="6350">
+            <a:solidFill>
+              <a:srgbClr val="E9E9E9"/>
+            </a:solidFill>
+            <a:round/>
           </a:ln>
         </p:spPr>
         <p:txBody>
@@ -32836,7 +32848,7 @@
             <a:avLst/>
           </a:prstGeom>
           <a:solidFill>
-            <a:srgbClr val="1A1A1A"/>
+            <a:srgbClr val="3A3A3A"/>
           </a:solidFill>
           <a:ln>
             <a:noFill/>
@@ -34667,7 +34679,7 @@
             <a:avLst/>
           </a:prstGeom>
           <a:solidFill>
-            <a:srgbClr val="F9F9F9"/>
+            <a:srgbClr val="FFFFFF"/>
           </a:solidFill>
           <a:ln w="6350">
             <a:solidFill>
@@ -34883,7 +34895,7 @@
             <a:avLst/>
           </a:prstGeom>
           <a:solidFill>
-            <a:srgbClr val="F9F9F9"/>
+            <a:srgbClr val="FFFFFF"/>
           </a:solidFill>
           <a:ln w="6350">
             <a:solidFill>
@@ -35099,7 +35111,7 @@
             <a:avLst/>
           </a:prstGeom>
           <a:solidFill>
-            <a:srgbClr val="F9F9F9"/>
+            <a:srgbClr val="FFFFFF"/>
           </a:solidFill>
           <a:ln w="6350">
             <a:solidFill>
@@ -35315,7 +35327,7 @@
             <a:avLst/>
           </a:prstGeom>
           <a:solidFill>
-            <a:srgbClr val="FBF4F4"/>
+            <a:srgbClr val="FFFFFF"/>
           </a:solidFill>
           <a:ln w="6350">
             <a:solidFill>
@@ -46243,7 +46255,7 @@
             <a:r>
               <a:rPr lang="zh-CN" altLang="en-US" sz="950" b="1">
                 <a:solidFill>
-                  <a:srgbClr val="A61C22"/>
+                  <a:srgbClr val="1A1A1A"/>
                 </a:solidFill>
                 <a:latin typeface="微软雅黑"/>
                 <a:ea typeface="微软雅黑"/>
@@ -46453,7 +46465,7 @@
         <p:spPr>
           <a:xfrm>
             <a:off x="406400" y="3594100"/>
-            <a:ext cx="1727200" cy="850900"/>
+            <a:ext cx="1727200" cy="914400"/>
           </a:xfrm>
           <a:prstGeom prst="rect">
             <a:avLst/>
@@ -46507,7 +46519,7 @@
       </p:sp>
       <p:pic>
         <p:nvPicPr>
-          <p:cNvPr id="40" name="Picture 39" descr="settings-automation-A61C22-1_6.png"/>
+          <p:cNvPr id="40" name="Picture 39" descr="settings-automation-666666-1_6.png"/>
           <p:cNvPicPr>
             <a:picLocks noChangeAspect="1"/>
           </p:cNvPicPr>
@@ -46544,7 +46556,7 @@
             <a:avLst/>
           </a:prstGeom>
           <a:solidFill>
-            <a:srgbClr val="FBF4F4"/>
+            <a:srgbClr val="F5F5F5"/>
           </a:solidFill>
           <a:ln>
             <a:noFill/>
@@ -46565,7 +46577,7 @@
             <a:r>
               <a:rPr lang="zh-CN" altLang="en-US" sz="800" b="1">
                 <a:solidFill>
-                  <a:srgbClr val="A61C22"/>
+                  <a:srgbClr val="666666"/>
                 </a:solidFill>
                 <a:latin typeface="微软雅黑"/>
                 <a:ea typeface="微软雅黑"/>
@@ -46627,7 +46639,7 @@
         <p:spPr>
           <a:xfrm>
             <a:off x="2209800" y="3594100"/>
-            <a:ext cx="1727200" cy="850900"/>
+            <a:ext cx="1727200" cy="914400"/>
           </a:xfrm>
           <a:prstGeom prst="rect">
             <a:avLst/>
@@ -46681,7 +46693,7 @@
       </p:sp>
       <p:pic>
         <p:nvPicPr>
-          <p:cNvPr id="45" name="Picture 44" descr="robot-A61C22-1_6.png"/>
+          <p:cNvPr id="45" name="Picture 44" descr="robot-666666-1_6.png"/>
           <p:cNvPicPr>
             <a:picLocks noChangeAspect="1"/>
           </p:cNvPicPr>
@@ -46718,7 +46730,7 @@
             <a:avLst/>
           </a:prstGeom>
           <a:solidFill>
-            <a:srgbClr val="FBF4F4"/>
+            <a:srgbClr val="F5F5F5"/>
           </a:solidFill>
           <a:ln>
             <a:noFill/>
@@ -46739,7 +46751,7 @@
             <a:r>
               <a:rPr lang="zh-CN" altLang="en-US" sz="800" b="1">
                 <a:solidFill>
-                  <a:srgbClr val="A61C22"/>
+                  <a:srgbClr val="666666"/>
                 </a:solidFill>
                 <a:latin typeface="微软雅黑"/>
                 <a:ea typeface="微软雅黑"/>
@@ -46815,7 +46827,7 @@
         <p:spPr>
           <a:xfrm>
             <a:off x="4013200" y="3594100"/>
-            <a:ext cx="1727200" cy="850900"/>
+            <a:ext cx="1727200" cy="914400"/>
           </a:xfrm>
           <a:prstGeom prst="rect">
             <a:avLst/>
@@ -46869,7 +46881,7 @@
       </p:sp>
       <p:pic>
         <p:nvPicPr>
-          <p:cNvPr id="50" name="Picture 49" descr="train-A61C22-1_6.png"/>
+          <p:cNvPr id="50" name="Picture 49" descr="train-666666-1_6.png"/>
           <p:cNvPicPr>
             <a:picLocks noChangeAspect="1"/>
           </p:cNvPicPr>
@@ -46906,7 +46918,7 @@
             <a:avLst/>
           </a:prstGeom>
           <a:solidFill>
-            <a:srgbClr val="FBF4F4"/>
+            <a:srgbClr val="F5F5F5"/>
           </a:solidFill>
           <a:ln>
             <a:noFill/>
@@ -46927,7 +46939,7 @@
             <a:r>
               <a:rPr lang="zh-CN" altLang="en-US" sz="800" b="1">
                 <a:solidFill>
-                  <a:srgbClr val="A61C22"/>
+                  <a:srgbClr val="666666"/>
                 </a:solidFill>
                 <a:latin typeface="微软雅黑"/>
                 <a:ea typeface="微软雅黑"/>
@@ -46988,8 +47000,8 @@
         </p:nvSpPr>
         <p:spPr>
           <a:xfrm>
-            <a:off x="406400" y="4521200"/>
-            <a:ext cx="1727200" cy="850900"/>
+            <a:off x="406400" y="4584700"/>
+            <a:ext cx="1727200" cy="914400"/>
           </a:xfrm>
           <a:prstGeom prst="rect">
             <a:avLst/>
@@ -47020,7 +47032,7 @@
         </p:nvSpPr>
         <p:spPr>
           <a:xfrm>
-            <a:off x="406400" y="4521200"/>
+            <a:off x="406400" y="4584700"/>
             <a:ext cx="1727200" cy="19050"/>
           </a:xfrm>
           <a:prstGeom prst="rect">
@@ -47043,7 +47055,7 @@
       </p:sp>
       <p:pic>
         <p:nvPicPr>
-          <p:cNvPr id="55" name="Picture 54" descr="file-certificate-A61C22-1_6.png"/>
+          <p:cNvPr id="55" name="Picture 54" descr="file-certificate-666666-1_6.png"/>
           <p:cNvPicPr>
             <a:picLocks noChangeAspect="1"/>
           </p:cNvPicPr>
@@ -47057,7 +47069,7 @@
         </p:blipFill>
         <p:spPr>
           <a:xfrm>
-            <a:off x="508000" y="4635500"/>
+            <a:off x="508000" y="4699000"/>
             <a:ext cx="190500" cy="190500"/>
           </a:xfrm>
           <a:prstGeom prst="rect">
@@ -47073,14 +47085,14 @@
         </p:nvSpPr>
         <p:spPr>
           <a:xfrm>
-            <a:off x="1540256" y="4635500"/>
+            <a:off x="1540256" y="4699000"/>
             <a:ext cx="491744" cy="177800"/>
           </a:xfrm>
           <a:prstGeom prst="rect">
             <a:avLst/>
           </a:prstGeom>
           <a:solidFill>
-            <a:srgbClr val="FBF4F4"/>
+            <a:srgbClr val="F5F5F5"/>
           </a:solidFill>
           <a:ln>
             <a:noFill/>
@@ -47101,7 +47113,7 @@
             <a:r>
               <a:rPr lang="zh-CN" altLang="en-US" sz="800" b="1">
                 <a:solidFill>
-                  <a:srgbClr val="A61C22"/>
+                  <a:srgbClr val="666666"/>
                 </a:solidFill>
                 <a:latin typeface="微软雅黑"/>
                 <a:ea typeface="微软雅黑"/>
@@ -47120,7 +47132,7 @@
         </p:nvSpPr>
         <p:spPr>
           <a:xfrm>
-            <a:off x="508000" y="4876800"/>
+            <a:off x="508000" y="4940300"/>
             <a:ext cx="1549400" cy="330200"/>
           </a:xfrm>
           <a:prstGeom prst="rect">
@@ -47162,8 +47174,8 @@
         </p:nvSpPr>
         <p:spPr>
           <a:xfrm>
-            <a:off x="2209800" y="4521200"/>
-            <a:ext cx="1727200" cy="850900"/>
+            <a:off x="2209800" y="4584700"/>
+            <a:ext cx="1727200" cy="914400"/>
           </a:xfrm>
           <a:prstGeom prst="rect">
             <a:avLst/>
@@ -47194,7 +47206,7 @@
         </p:nvSpPr>
         <p:spPr>
           <a:xfrm>
-            <a:off x="2209800" y="4521200"/>
+            <a:off x="2209800" y="4584700"/>
             <a:ext cx="1727200" cy="19050"/>
           </a:xfrm>
           <a:prstGeom prst="rect">
@@ -47217,7 +47229,7 @@
       </p:sp>
       <p:pic>
         <p:nvPicPr>
-          <p:cNvPr id="60" name="Picture 59" descr="report-analytics-A61C22-1_6.png"/>
+          <p:cNvPr id="60" name="Picture 59" descr="report-analytics-666666-1_6.png"/>
           <p:cNvPicPr>
             <a:picLocks noChangeAspect="1"/>
           </p:cNvPicPr>
@@ -47231,7 +47243,7 @@
         </p:blipFill>
         <p:spPr>
           <a:xfrm>
-            <a:off x="2311400" y="4635500"/>
+            <a:off x="2311400" y="4699000"/>
             <a:ext cx="190500" cy="190500"/>
           </a:xfrm>
           <a:prstGeom prst="rect">
@@ -47247,14 +47259,14 @@
         </p:nvSpPr>
         <p:spPr>
           <a:xfrm>
-            <a:off x="3343656" y="4635500"/>
+            <a:off x="3343656" y="4699000"/>
             <a:ext cx="491744" cy="177800"/>
           </a:xfrm>
           <a:prstGeom prst="rect">
             <a:avLst/>
           </a:prstGeom>
           <a:solidFill>
-            <a:srgbClr val="FBF4F4"/>
+            <a:srgbClr val="F5F5F5"/>
           </a:solidFill>
           <a:ln>
             <a:noFill/>
@@ -47275,7 +47287,7 @@
             <a:r>
               <a:rPr lang="zh-CN" altLang="en-US" sz="800" b="1">
                 <a:solidFill>
-                  <a:srgbClr val="A61C22"/>
+                  <a:srgbClr val="666666"/>
                 </a:solidFill>
                 <a:latin typeface="微软雅黑"/>
                 <a:ea typeface="微软雅黑"/>
@@ -47294,7 +47306,7 @@
         </p:nvSpPr>
         <p:spPr>
           <a:xfrm>
-            <a:off x="2311400" y="4876800"/>
+            <a:off x="2311400" y="4940300"/>
             <a:ext cx="1549400" cy="330200"/>
           </a:xfrm>
           <a:prstGeom prst="rect">
@@ -47336,8 +47348,8 @@
         </p:nvSpPr>
         <p:spPr>
           <a:xfrm>
-            <a:off x="4013200" y="4521200"/>
-            <a:ext cx="1727200" cy="850900"/>
+            <a:off x="4013200" y="4584700"/>
+            <a:ext cx="1727200" cy="914400"/>
           </a:xfrm>
           <a:prstGeom prst="rect">
             <a:avLst/>
@@ -47368,7 +47380,7 @@
         </p:nvSpPr>
         <p:spPr>
           <a:xfrm>
-            <a:off x="4013200" y="4521200"/>
+            <a:off x="4013200" y="4584700"/>
             <a:ext cx="1727200" cy="19050"/>
           </a:xfrm>
           <a:prstGeom prst="rect">
@@ -47391,7 +47403,7 @@
       </p:sp>
       <p:pic>
         <p:nvPicPr>
-          <p:cNvPr id="65" name="Picture 64" descr="certificate-A61C22-1_6.png"/>
+          <p:cNvPr id="65" name="Picture 64" descr="certificate-666666-1_6.png"/>
           <p:cNvPicPr>
             <a:picLocks noChangeAspect="1"/>
           </p:cNvPicPr>
@@ -47405,7 +47417,7 @@
         </p:blipFill>
         <p:spPr>
           <a:xfrm>
-            <a:off x="4114800" y="4635500"/>
+            <a:off x="4114800" y="4699000"/>
             <a:ext cx="190500" cy="190500"/>
           </a:xfrm>
           <a:prstGeom prst="rect">
@@ -47421,14 +47433,14 @@
         </p:nvSpPr>
         <p:spPr>
           <a:xfrm>
-            <a:off x="4823968" y="4635500"/>
+            <a:off x="4823968" y="4699000"/>
             <a:ext cx="814832" cy="177800"/>
           </a:xfrm>
           <a:prstGeom prst="rect">
             <a:avLst/>
           </a:prstGeom>
           <a:solidFill>
-            <a:srgbClr val="FBF4F4"/>
+            <a:srgbClr val="F5F5F5"/>
           </a:solidFill>
           <a:ln>
             <a:noFill/>
@@ -47449,7 +47461,7 @@
             <a:r>
               <a:rPr lang="zh-CN" altLang="en-US" sz="800" b="1">
                 <a:solidFill>
-                  <a:srgbClr val="A61C22"/>
+                  <a:srgbClr val="666666"/>
                 </a:solidFill>
                 <a:latin typeface="微软雅黑"/>
                 <a:ea typeface="微软雅黑"/>
@@ -47468,7 +47480,7 @@
         </p:nvSpPr>
         <p:spPr>
           <a:xfrm>
-            <a:off x="4114800" y="4876800"/>
+            <a:off x="4114800" y="4940300"/>
             <a:ext cx="1549400" cy="330200"/>
           </a:xfrm>
           <a:prstGeom prst="rect">
@@ -47524,7 +47536,7 @@
         </p:nvSpPr>
         <p:spPr>
           <a:xfrm>
-            <a:off x="406400" y="5511800"/>
+            <a:off x="406400" y="5638800"/>
             <a:ext cx="5334000" cy="228600"/>
           </a:xfrm>
           <a:prstGeom prst="rect">
@@ -47566,7 +47578,7 @@
         </p:nvSpPr>
         <p:spPr>
           <a:xfrm>
-            <a:off x="1143000" y="5511800"/>
+            <a:off x="1143000" y="5638800"/>
             <a:ext cx="4597400" cy="228600"/>
           </a:xfrm>
           <a:prstGeom prst="rect">
@@ -47608,8 +47620,8 @@
         </p:nvSpPr>
         <p:spPr>
           <a:xfrm>
-            <a:off x="406400" y="5816600"/>
-            <a:ext cx="2635250" cy="254000"/>
+            <a:off x="406400" y="5943600"/>
+            <a:ext cx="2635250" cy="127000"/>
           </a:xfrm>
           <a:prstGeom prst="rect">
             <a:avLst/>
@@ -47622,28 +47634,10 @@
           </a:ln>
         </p:spPr>
         <p:txBody>
-          <a:bodyPr rtlCol="0" anchor="ctr" lIns="0" rIns="0" tIns="0" bIns="0" wrap="none">
-            <a:noAutofit/>
-          </a:bodyPr>
-          <a:lstStyle/>
-          <a:p>
-            <a:pPr algn="ctr" marL="0" indent="0">
-              <a:lnSpc>
-                <a:spcPts val="1150"/>
-              </a:lnSpc>
-              <a:buNone/>
-            </a:pPr>
-            <a:r>
-              <a:rPr lang="zh-CN" altLang="en-US" sz="900" b="1">
-                <a:solidFill>
-                  <a:srgbClr val="FFFFFF"/>
-                </a:solidFill>
-                <a:latin typeface="微软雅黑"/>
-                <a:ea typeface="微软雅黑"/>
-                <a:cs typeface="微软雅黑"/>
-              </a:rPr>
-              <a:t>直接投入 50</a:t>
-            </a:r>
+          <a:bodyPr rtlCol="0" anchor="ctr" lIns="0" rIns="0" tIns="0" bIns="0"/>
+          <a:lstStyle/>
+          <a:p>
+            <a:pPr algn="ctr"/>
           </a:p>
         </p:txBody>
       </p:sp>
@@ -47655,8 +47649,8 @@
         </p:nvSpPr>
         <p:spPr>
           <a:xfrm>
-            <a:off x="3054350" y="5816600"/>
-            <a:ext cx="1581150" cy="254000"/>
+            <a:off x="3054350" y="5943600"/>
+            <a:ext cx="1581150" cy="127000"/>
           </a:xfrm>
           <a:prstGeom prst="rect">
             <a:avLst/>
@@ -47669,28 +47663,10 @@
           </a:ln>
         </p:spPr>
         <p:txBody>
-          <a:bodyPr rtlCol="0" anchor="ctr" lIns="0" rIns="0" tIns="0" bIns="0" wrap="none">
-            <a:noAutofit/>
-          </a:bodyPr>
-          <a:lstStyle/>
-          <a:p>
-            <a:pPr algn="ctr" marL="0" indent="0">
-              <a:lnSpc>
-                <a:spcPts val="1150"/>
-              </a:lnSpc>
-              <a:buNone/>
-            </a:pPr>
-            <a:r>
-              <a:rPr lang="zh-CN" altLang="en-US" sz="900" b="1">
-                <a:solidFill>
-                  <a:srgbClr val="FFFFFF"/>
-                </a:solidFill>
-                <a:latin typeface="微软雅黑"/>
-                <a:ea typeface="微软雅黑"/>
-                <a:cs typeface="微软雅黑"/>
-              </a:rPr>
-              <a:t>人员 30</a:t>
-            </a:r>
+          <a:bodyPr rtlCol="0" anchor="ctr" lIns="0" rIns="0" tIns="0" bIns="0"/>
+          <a:lstStyle/>
+          <a:p>
+            <a:pPr algn="ctr"/>
           </a:p>
         </p:txBody>
       </p:sp>
@@ -47702,8 +47678,8 @@
         </p:nvSpPr>
         <p:spPr>
           <a:xfrm>
-            <a:off x="4648200" y="5816600"/>
-            <a:ext cx="263525" cy="254000"/>
+            <a:off x="4648200" y="5943600"/>
+            <a:ext cx="263525" cy="127000"/>
           </a:xfrm>
           <a:prstGeom prst="rect">
             <a:avLst/>
@@ -47731,8 +47707,8 @@
         </p:nvSpPr>
         <p:spPr>
           <a:xfrm>
-            <a:off x="4924425" y="5816600"/>
-            <a:ext cx="263525" cy="254000"/>
+            <a:off x="4924425" y="5943600"/>
+            <a:ext cx="263525" cy="127000"/>
           </a:xfrm>
           <a:prstGeom prst="rect">
             <a:avLst/>
@@ -47760,8 +47736,8 @@
         </p:nvSpPr>
         <p:spPr>
           <a:xfrm>
-            <a:off x="5200650" y="5816600"/>
-            <a:ext cx="263525" cy="254000"/>
+            <a:off x="5200650" y="5943600"/>
+            <a:ext cx="263525" cy="127000"/>
           </a:xfrm>
           <a:prstGeom prst="rect">
             <a:avLst/>
@@ -47789,8 +47765,8 @@
         </p:nvSpPr>
         <p:spPr>
           <a:xfrm>
-            <a:off x="5476875" y="5816600"/>
-            <a:ext cx="263525" cy="254000"/>
+            <a:off x="5476875" y="5943600"/>
+            <a:ext cx="263525" cy="127000"/>
           </a:xfrm>
           <a:prstGeom prst="rect">
             <a:avLst/>
@@ -47839,6 +47815,17 @@
               <a:buNone/>
             </a:pPr>
             <a:r>
+              <a:rPr lang="zh-CN" altLang="en-US" sz="800" b="1">
+                <a:solidFill>
+                  <a:srgbClr val="1A1A1A"/>
+                </a:solidFill>
+                <a:latin typeface="微软雅黑"/>
+                <a:ea typeface="微软雅黑"/>
+                <a:cs typeface="微软雅黑"/>
+              </a:rPr>
+              <a:t>直接投入 50</a:t>
+            </a:r>
+            <a:r>
               <a:rPr lang="zh-CN" altLang="en-US" sz="800" b="0">
                 <a:solidFill>
                   <a:srgbClr val="666666"/>
@@ -47847,7 +47834,7 @@
                 <a:ea typeface="微软雅黑"/>
                 <a:cs typeface="微软雅黑"/>
               </a:rPr>
-              <a:t>GPU+NPU 异构算力服务器 40 · 一体化工作站 10</a:t>
+              <a:t>：算力服务器 40 · 一体化工作站 10</a:t>
             </a:r>
           </a:p>
         </p:txBody>
@@ -47881,6 +47868,17 @@
               <a:buNone/>
             </a:pPr>
             <a:r>
+              <a:rPr lang="zh-CN" altLang="en-US" sz="800" b="1">
+                <a:solidFill>
+                  <a:srgbClr val="1A1A1A"/>
+                </a:solidFill>
+                <a:latin typeface="微软雅黑"/>
+                <a:ea typeface="微软雅黑"/>
+                <a:cs typeface="微软雅黑"/>
+              </a:rPr>
+              <a:t>人员 30</a:t>
+            </a:r>
+            <a:r>
               <a:rPr lang="zh-CN" altLang="en-US" sz="800" b="0">
                 <a:solidFill>
                   <a:srgbClr val="666666"/>
@@ -47889,7 +47887,7 @@
                 <a:ea typeface="微软雅黑"/>
                 <a:cs typeface="微软雅黑"/>
               </a:rPr>
-              <a:t>人员 30 · 折旧 · 外协 · 成果 · 其他 各 5</a:t>
+              <a:t> · 折旧／外协／成果／其他 各 5</a:t>
             </a:r>
           </a:p>
         </p:txBody>
@@ -48365,11 +48363,8 @@
           <a:solidFill>
             <a:srgbClr val="FBF4F4"/>
           </a:solidFill>
-          <a:ln w="12700">
-            <a:solidFill>
-              <a:srgbClr val="A61C22"/>
-            </a:solidFill>
-            <a:round/>
+          <a:ln>
+            <a:noFill/>
           </a:ln>
         </p:spPr>
         <p:txBody>
@@ -52646,7 +52641,39 @@
             <a:avLst/>
           </a:prstGeom>
           <a:solidFill>
-            <a:srgbClr val="FBF4F4"/>
+            <a:srgbClr val="FFFFFF"/>
+          </a:solidFill>
+          <a:ln w="6350">
+            <a:solidFill>
+              <a:srgbClr val="E9E9E9"/>
+            </a:solidFill>
+            <a:round/>
+          </a:ln>
+        </p:spPr>
+        <p:txBody>
+          <a:bodyPr rtlCol="0" anchor="ctr" lIns="0" rIns="0" tIns="0" bIns="0"/>
+          <a:lstStyle/>
+          <a:p>
+            <a:pPr algn="ctr"/>
+          </a:p>
+        </p:txBody>
+      </p:sp>
+      <p:sp>
+        <p:nvSpPr>
+          <p:cNvPr id="50" name="Rectangle 49"/>
+          <p:cNvSpPr/>
+          <p:nvPr/>
+        </p:nvSpPr>
+        <p:spPr>
+          <a:xfrm>
+            <a:off x="406400" y="5067300"/>
+            <a:ext cx="19050" cy="698500"/>
+          </a:xfrm>
+          <a:prstGeom prst="rect">
+            <a:avLst/>
+          </a:prstGeom>
+          <a:solidFill>
+            <a:srgbClr val="A61C22"/>
           </a:solidFill>
           <a:ln>
             <a:noFill/>
@@ -52662,7 +52689,7 @@
       </p:sp>
       <p:pic>
         <p:nvPicPr>
-          <p:cNvPr id="50" name="Picture 49" descr="coins-A61C22-1_6.png"/>
+          <p:cNvPr id="51" name="Picture 50" descr="coins-A61C22-1_6.png"/>
           <p:cNvPicPr>
             <a:picLocks noChangeAspect="1"/>
           </p:cNvPicPr>
@@ -52686,7 +52713,7 @@
       </p:pic>
       <p:sp>
         <p:nvSpPr>
-          <p:cNvPr id="51" name="TextBox 50"/>
+          <p:cNvPr id="52" name="TextBox 51"/>
           <p:cNvSpPr txBox="1"/>
           <p:nvPr/>
         </p:nvSpPr>
@@ -52728,7 +52755,7 @@
       </p:sp>
       <p:sp>
         <p:nvSpPr>
-          <p:cNvPr id="52" name="TextBox 51"/>
+          <p:cNvPr id="53" name="TextBox 52"/>
           <p:cNvSpPr txBox="1"/>
           <p:nvPr/>
         </p:nvSpPr>
@@ -52770,7 +52797,7 @@
       </p:sp>
       <p:sp>
         <p:nvSpPr>
-          <p:cNvPr id="53" name="Rectangle 52"/>
+          <p:cNvPr id="54" name="Rectangle 53"/>
           <p:cNvSpPr/>
           <p:nvPr/>
         </p:nvSpPr>
@@ -52783,7 +52810,39 @@
             <a:avLst/>
           </a:prstGeom>
           <a:solidFill>
-            <a:srgbClr val="FBF4F4"/>
+            <a:srgbClr val="FFFFFF"/>
+          </a:solidFill>
+          <a:ln w="6350">
+            <a:solidFill>
+              <a:srgbClr val="E9E9E9"/>
+            </a:solidFill>
+            <a:round/>
+          </a:ln>
+        </p:spPr>
+        <p:txBody>
+          <a:bodyPr rtlCol="0" anchor="ctr" lIns="0" rIns="0" tIns="0" bIns="0"/>
+          <a:lstStyle/>
+          <a:p>
+            <a:pPr algn="ctr"/>
+          </a:p>
+        </p:txBody>
+      </p:sp>
+      <p:sp>
+        <p:nvSpPr>
+          <p:cNvPr id="55" name="Rectangle 54"/>
+          <p:cNvSpPr/>
+          <p:nvPr/>
+        </p:nvSpPr>
+        <p:spPr>
+          <a:xfrm>
+            <a:off x="4284133" y="5067300"/>
+            <a:ext cx="19050" cy="698500"/>
+          </a:xfrm>
+          <a:prstGeom prst="rect">
+            <a:avLst/>
+          </a:prstGeom>
+          <a:solidFill>
+            <a:srgbClr val="A61C22"/>
           </a:solidFill>
           <a:ln>
             <a:noFill/>
@@ -52799,7 +52858,7 @@
       </p:sp>
       <p:pic>
         <p:nvPicPr>
-          <p:cNvPr id="54" name="Picture 53" descr="shield-check-A61C22-1_6.png"/>
+          <p:cNvPr id="56" name="Picture 55" descr="shield-check-A61C22-1_6.png"/>
           <p:cNvPicPr>
             <a:picLocks noChangeAspect="1"/>
           </p:cNvPicPr>
@@ -52823,7 +52882,7 @@
       </p:pic>
       <p:sp>
         <p:nvSpPr>
-          <p:cNvPr id="55" name="TextBox 54"/>
+          <p:cNvPr id="57" name="TextBox 56"/>
           <p:cNvSpPr txBox="1"/>
           <p:nvPr/>
         </p:nvSpPr>
@@ -52865,7 +52924,7 @@
       </p:sp>
       <p:sp>
         <p:nvSpPr>
-          <p:cNvPr id="56" name="TextBox 55"/>
+          <p:cNvPr id="58" name="TextBox 57"/>
           <p:cNvSpPr txBox="1"/>
           <p:nvPr/>
         </p:nvSpPr>
@@ -52907,7 +52966,7 @@
       </p:sp>
       <p:sp>
         <p:nvSpPr>
-          <p:cNvPr id="57" name="Rectangle 56"/>
+          <p:cNvPr id="59" name="Rectangle 58"/>
           <p:cNvSpPr/>
           <p:nvPr/>
         </p:nvSpPr>
@@ -52920,7 +52979,39 @@
             <a:avLst/>
           </a:prstGeom>
           <a:solidFill>
-            <a:srgbClr val="FBF4F4"/>
+            <a:srgbClr val="FFFFFF"/>
+          </a:solidFill>
+          <a:ln w="6350">
+            <a:solidFill>
+              <a:srgbClr val="E9E9E9"/>
+            </a:solidFill>
+            <a:round/>
+          </a:ln>
+        </p:spPr>
+        <p:txBody>
+          <a:bodyPr rtlCol="0" anchor="ctr" lIns="0" rIns="0" tIns="0" bIns="0"/>
+          <a:lstStyle/>
+          <a:p>
+            <a:pPr algn="ctr"/>
+          </a:p>
+        </p:txBody>
+      </p:sp>
+      <p:sp>
+        <p:nvSpPr>
+          <p:cNvPr id="60" name="Rectangle 59"/>
+          <p:cNvSpPr/>
+          <p:nvPr/>
+        </p:nvSpPr>
+        <p:spPr>
+          <a:xfrm>
+            <a:off x="8161867" y="5067300"/>
+            <a:ext cx="19050" cy="698500"/>
+          </a:xfrm>
+          <a:prstGeom prst="rect">
+            <a:avLst/>
+          </a:prstGeom>
+          <a:solidFill>
+            <a:srgbClr val="A61C22"/>
           </a:solidFill>
           <a:ln>
             <a:noFill/>
@@ -52936,7 +53027,7 @@
       </p:sp>
       <p:pic>
         <p:nvPicPr>
-          <p:cNvPr id="58" name="Picture 57" descr="building-factory-2-A61C22-1_6.png"/>
+          <p:cNvPr id="61" name="Picture 60" descr="building-factory-2-A61C22-1_6.png"/>
           <p:cNvPicPr>
             <a:picLocks noChangeAspect="1"/>
           </p:cNvPicPr>
@@ -52960,7 +53051,7 @@
       </p:pic>
       <p:sp>
         <p:nvSpPr>
-          <p:cNvPr id="59" name="TextBox 58"/>
+          <p:cNvPr id="62" name="TextBox 61"/>
           <p:cNvSpPr txBox="1"/>
           <p:nvPr/>
         </p:nvSpPr>
@@ -53002,7 +53093,7 @@
       </p:sp>
       <p:sp>
         <p:nvSpPr>
-          <p:cNvPr id="60" name="TextBox 59"/>
+          <p:cNvPr id="63" name="TextBox 62"/>
           <p:cNvSpPr txBox="1"/>
           <p:nvPr/>
         </p:nvSpPr>
@@ -58049,10 +58140,13 @@
             <a:avLst/>
           </a:prstGeom>
           <a:solidFill>
-            <a:srgbClr val="F6F6F6"/>
+            <a:srgbClr val="FFFFFF"/>
           </a:solidFill>
-          <a:ln>
-            <a:noFill/>
+          <a:ln w="6350">
+            <a:solidFill>
+              <a:srgbClr val="E9E9E9"/>
+            </a:solidFill>
+            <a:round/>
           </a:ln>
         </p:spPr>
         <p:txBody>
@@ -62503,10 +62597,13 @@
             <a:avLst/>
           </a:prstGeom>
           <a:solidFill>
-            <a:srgbClr val="F6F6F6"/>
+            <a:srgbClr val="FFFFFF"/>
           </a:solidFill>
-          <a:ln>
-            <a:noFill/>
+          <a:ln w="6350">
+            <a:solidFill>
+              <a:srgbClr val="E9E9E9"/>
+            </a:solidFill>
+            <a:round/>
           </a:ln>
         </p:spPr>
         <p:txBody>

--- a/项目汇报PPT.pptx
+++ b/项目汇报PPT.pptx
@@ -831,7 +831,7 @@
           </a:p>
           <a:p>
             <a:r>
-              <a:t>子任务分工——子任务1 知识库与工作流（目标 1、3）；子任务2 调度引擎（目标 1）；子任务3 智能体执行（目标 2）；子任务4 集成与示范（目标 2、3、4）。各子任务交付物逐级成为下一任务输入，验证数据回流更新判据与工作流。</a:t>
+              <a:t>子任务分工——子任务1 知识库与工作流（目标 1、3）；子任务2 调度引擎（目标 1）；子任务3 智能体执行（目标 2）；子任务4 集成与示范（目标 1、3、4）。各子任务交付物逐级成为下一任务输入，验证数据回流更新判据与工作流。</a:t>
             </a:r>
           </a:p>
         </p:txBody>
@@ -1191,12 +1191,12 @@
           <a:lstStyle/>
           <a:p>
             <a:r>
-              <a:t>备注（讲稿）：成果 1 支持异构仿真智能体统一接入；成果 2 标准接口可扩展；成果 3 由成果 2 经成果 1 集成，以 FXN5C 为对象的整车级验证环境，预留制动、辅助系统接口，支撑智能运维。</a:t>
-            </a:r>
-          </a:p>
-          <a:p>
-            <a:r>
-              <a:t>成果 1—3 中的虚线框为附图预留位置（形状组合）；选中该组合删除后插入实际图片即可。</a:t>
+              <a:t>备注（讲稿）：成果 1 为调度引擎与列车级数字样机，作为一套系统交付——引擎支持异构仿真智能体统一接入，承载成果 2 集成为以 FXN5C 为对象的整车级验证环境，预留制动、辅助系统接口，支撑智能运维；成果 2 标准接口可扩展，可单独核验、复用。</a:t>
+            </a:r>
+          </a:p>
+          <a:p>
+            <a:r>
+              <a:t>成果 1、2 中的虚线框为附图预留位置（形状组合）；选中该组合删除后插入实际图片即可。</a:t>
             </a:r>
           </a:p>
         </p:txBody>
@@ -1276,7 +1276,7 @@
           </a:p>
           <a:p>
             <a:r>
-              <a:t>数字样机由关键系统仿真智能体／智能孪生模型经调度引擎集成而成：智能体可单独核验、复用，数字样机作为整车级验证系统交付。</a:t>
+              <a:t>调度引擎与列车级数字样机合为一套系统交付：引擎承载关键系统仿真智能体／智能孪生模型，集成为数字样机；智能体／孪生模型可单独核验、复用，单列为模型 1 套。</a:t>
             </a:r>
           </a:p>
         </p:txBody>
@@ -12304,7 +12304,7 @@
                 <a:ea typeface="微软雅黑"/>
                 <a:cs typeface="微软雅黑"/>
               </a:rPr>
-              <a:t>✓ 列车级数字样机构建方法体系与集成技术规范</a:t>
+              <a:t>✓ 列车级数字样机构建方法体系与技术规范</a:t>
             </a:r>
           </a:p>
         </p:txBody>
@@ -19780,7 +19780,7 @@
         <p:spPr>
           <a:xfrm>
             <a:off x="508000" y="2362200"/>
-            <a:ext cx="5003800" cy="584200"/>
+            <a:ext cx="5003800" cy="679450"/>
           </a:xfrm>
           <a:prstGeom prst="rect">
             <a:avLst/>
@@ -19808,7 +19808,7 @@
                 <a:ea typeface="微软雅黑"/>
                 <a:cs typeface="微软雅黑"/>
               </a:rPr>
-              <a:t>1 调度引擎</a:t>
+              <a:t>1 引擎与数字样机</a:t>
             </a:r>
             <a:r>
               <a:rPr lang="zh-CN" altLang="en-US" sz="1000" b="0">
@@ -19819,7 +19819,21 @@
                 <a:ea typeface="微软雅黑"/>
                 <a:cs typeface="微软雅黑"/>
               </a:rPr>
-              <a:t>：异构智能体实时协同运行与算力动态调度</a:t>
+              <a:t>：异构智能体实时协同运行与算力动态调度；</a:t>
+            </a:r>
+            <a:br>
+              <a:rPr lang="zh-CN" altLang="en-US" sz="1000"/>
+            </a:br>
+            <a:r>
+              <a:rPr lang="zh-CN" altLang="en-US" sz="1000" b="0">
+                <a:solidFill>
+                  <a:srgbClr val="3D3D3D"/>
+                </a:solidFill>
+                <a:latin typeface="微软雅黑"/>
+                <a:ea typeface="微软雅黑"/>
+                <a:cs typeface="微软雅黑"/>
+              </a:rPr>
+              <a:t>集成为 FXN5C 列车级数字样机</a:t>
             </a:r>
           </a:p>
         </p:txBody>
@@ -19833,7 +19847,7 @@
         <p:spPr>
           <a:xfrm>
             <a:off x="5715000" y="2362200"/>
-            <a:ext cx="2971800" cy="584200"/>
+            <a:ext cx="2971800" cy="679450"/>
           </a:xfrm>
           <a:prstGeom prst="rect">
             <a:avLst/>
@@ -19861,7 +19875,21 @@
                 <a:ea typeface="微软雅黑"/>
                 <a:cs typeface="微软雅黑"/>
               </a:rPr>
-              <a:t>引擎软件 1 套</a:t>
+              <a:t>调度引擎／列车级数字样机</a:t>
+            </a:r>
+            <a:br>
+              <a:rPr lang="zh-CN" altLang="en-US" sz="1000"/>
+            </a:br>
+            <a:r>
+              <a:rPr lang="zh-CN" altLang="en-US" sz="1000" b="0">
+                <a:solidFill>
+                  <a:srgbClr val="1A1A1A"/>
+                </a:solidFill>
+                <a:latin typeface="微软雅黑"/>
+                <a:ea typeface="微软雅黑"/>
+                <a:cs typeface="微软雅黑"/>
+              </a:rPr>
+              <a:t>系统 1 套</a:t>
             </a:r>
           </a:p>
         </p:txBody>
@@ -19875,7 +19903,7 @@
         <p:spPr>
           <a:xfrm>
             <a:off x="8890000" y="2362200"/>
-            <a:ext cx="2794000" cy="584200"/>
+            <a:ext cx="2794000" cy="679450"/>
           </a:xfrm>
           <a:prstGeom prst="rect">
             <a:avLst/>
@@ -19904,6 +19932,20 @@
                 <a:cs typeface="微软雅黑"/>
               </a:rPr>
               <a:t>软件演示、功能核验</a:t>
+            </a:r>
+            <a:br>
+              <a:rPr lang="zh-CN" altLang="en-US" sz="1000"/>
+            </a:br>
+            <a:r>
+              <a:rPr lang="zh-CN" altLang="en-US" sz="1000" b="0">
+                <a:solidFill>
+                  <a:srgbClr val="3D3D3D"/>
+                </a:solidFill>
+                <a:latin typeface="微软雅黑"/>
+                <a:ea typeface="微软雅黑"/>
+                <a:cs typeface="微软雅黑"/>
+              </a:rPr>
+              <a:t>整车级协同验证</a:t>
             </a:r>
           </a:p>
         </p:txBody>
@@ -19916,7 +19958,7 @@
         </p:nvCxnSpPr>
         <p:spPr>
           <a:xfrm>
-            <a:off x="406400" y="2946400"/>
+            <a:off x="406400" y="3041650"/>
             <a:ext cx="11379200" cy="0"/>
           </a:xfrm>
           <a:prstGeom prst="line">
@@ -19938,8 +19980,8 @@
         </p:nvSpPr>
         <p:spPr>
           <a:xfrm>
-            <a:off x="508000" y="2946400"/>
-            <a:ext cx="5003800" cy="774700"/>
+            <a:off x="508000" y="3041650"/>
+            <a:ext cx="5003800" cy="679450"/>
           </a:xfrm>
           <a:prstGeom prst="rect">
             <a:avLst/>
@@ -19967,7 +20009,7 @@
                 <a:ea typeface="微软雅黑"/>
                 <a:cs typeface="微软雅黑"/>
               </a:rPr>
-              <a:t>2 数字样机与性能验证</a:t>
+              <a:t>2 仿真智能体与性能验证</a:t>
             </a:r>
             <a:r>
               <a:rPr lang="zh-CN" altLang="en-US" sz="1000" b="0">
@@ -19978,7 +20020,7 @@
                 <a:ea typeface="微软雅黑"/>
                 <a:cs typeface="微软雅黑"/>
               </a:rPr>
-              <a:t>：建成 FXN5C 数字样机，关键性能多工况协同验证</a:t>
+              <a:t>：关键系统智能体按实测标定，关键性能多工况协同验证</a:t>
             </a:r>
           </a:p>
         </p:txBody>
@@ -19991,8 +20033,8 @@
         </p:nvSpPr>
         <p:spPr>
           <a:xfrm>
-            <a:off x="5715000" y="2946400"/>
-            <a:ext cx="2971800" cy="774700"/>
+            <a:off x="5715000" y="3041650"/>
+            <a:ext cx="2971800" cy="679450"/>
           </a:xfrm>
           <a:prstGeom prst="rect">
             <a:avLst/>
@@ -20020,7 +20062,7 @@
                 <a:ea typeface="微软雅黑"/>
                 <a:cs typeface="微软雅黑"/>
               </a:rPr>
-              <a:t>智能体／孪生模型 1 套</a:t>
+              <a:t>仿真智能体／孪生模型</a:t>
             </a:r>
             <a:br>
               <a:rPr lang="zh-CN" altLang="en-US" sz="1000"/>
@@ -20034,7 +20076,7 @@
                 <a:ea typeface="微软雅黑"/>
                 <a:cs typeface="微软雅黑"/>
               </a:rPr>
-              <a:t>数字样机 1 套</a:t>
+              <a:t>模型 1 套</a:t>
             </a:r>
           </a:p>
         </p:txBody>
@@ -20047,8 +20089,8 @@
         </p:nvSpPr>
         <p:spPr>
           <a:xfrm>
-            <a:off x="8890000" y="2946400"/>
-            <a:ext cx="2794000" cy="774700"/>
+            <a:off x="8890000" y="3041650"/>
+            <a:ext cx="2794000" cy="679450"/>
           </a:xfrm>
           <a:prstGeom prst="rect">
             <a:avLst/>
@@ -20076,21 +20118,7 @@
                 <a:ea typeface="微软雅黑"/>
                 <a:cs typeface="微软雅黑"/>
               </a:rPr>
-              <a:t>智能体：与实测比对</a:t>
-            </a:r>
-            <a:br>
-              <a:rPr lang="zh-CN" altLang="en-US" sz="1000"/>
-            </a:br>
-            <a:r>
-              <a:rPr lang="zh-CN" altLang="en-US" sz="1000" b="0">
-                <a:solidFill>
-                  <a:srgbClr val="3D3D3D"/>
-                </a:solidFill>
-                <a:latin typeface="微软雅黑"/>
-                <a:ea typeface="微软雅黑"/>
-                <a:cs typeface="微软雅黑"/>
-              </a:rPr>
-              <a:t>数字样机：整车级协同验证</a:t>
+              <a:t>与实测比对</a:t>
             </a:r>
           </a:p>
         </p:txBody>
@@ -20126,7 +20154,7 @@
         <p:spPr>
           <a:xfrm>
             <a:off x="508000" y="3721100"/>
-            <a:ext cx="5003800" cy="774700"/>
+            <a:ext cx="5003800" cy="679450"/>
           </a:xfrm>
           <a:prstGeom prst="rect">
             <a:avLst/>
@@ -20179,7 +20207,7 @@
         <p:spPr>
           <a:xfrm>
             <a:off x="5715000" y="3721100"/>
-            <a:ext cx="2971800" cy="774700"/>
+            <a:ext cx="2971800" cy="679450"/>
           </a:xfrm>
           <a:prstGeom prst="rect">
             <a:avLst/>
@@ -20207,7 +20235,7 @@
                 <a:ea typeface="微软雅黑"/>
                 <a:cs typeface="微软雅黑"/>
               </a:rPr>
-              <a:t>方法体系与技术规范 1 套</a:t>
+              <a:t>方法体系与技术规范</a:t>
             </a:r>
             <a:br>
               <a:rPr lang="zh-CN" altLang="en-US" sz="1000"/>
@@ -20221,7 +20249,7 @@
                 <a:ea typeface="微软雅黑"/>
                 <a:cs typeface="微软雅黑"/>
               </a:rPr>
-              <a:t>判据知识库</a:t>
+              <a:t>规范 1 套；判据知识库</a:t>
             </a:r>
           </a:p>
         </p:txBody>
@@ -20235,7 +20263,7 @@
         <p:spPr>
           <a:xfrm>
             <a:off x="8890000" y="3721100"/>
-            <a:ext cx="2794000" cy="774700"/>
+            <a:ext cx="2794000" cy="679450"/>
           </a:xfrm>
           <a:prstGeom prst="rect">
             <a:avLst/>
@@ -20276,7 +20304,7 @@
         </p:nvCxnSpPr>
         <p:spPr>
           <a:xfrm>
-            <a:off x="406400" y="4495800"/>
+            <a:off x="406400" y="4400550"/>
             <a:ext cx="11379200" cy="0"/>
           </a:xfrm>
           <a:prstGeom prst="line">
@@ -20298,8 +20326,8 @@
         </p:nvSpPr>
         <p:spPr>
           <a:xfrm>
-            <a:off x="508000" y="4495800"/>
-            <a:ext cx="5003800" cy="584200"/>
+            <a:off x="508000" y="4400550"/>
+            <a:ext cx="5003800" cy="679450"/>
           </a:xfrm>
           <a:prstGeom prst="rect">
             <a:avLst/>
@@ -20351,8 +20379,8 @@
         </p:nvSpPr>
         <p:spPr>
           <a:xfrm>
-            <a:off x="5715000" y="4495800"/>
-            <a:ext cx="2971800" cy="584200"/>
+            <a:off x="5715000" y="4400550"/>
+            <a:ext cx="2971800" cy="679450"/>
           </a:xfrm>
           <a:prstGeom prst="rect">
             <a:avLst/>
@@ -20380,7 +20408,21 @@
                 <a:ea typeface="微软雅黑"/>
                 <a:cs typeface="微软雅黑"/>
               </a:rPr>
-              <a:t>示范应用与验证报告 1 份</a:t>
+              <a:t>示范应用与验证报告</a:t>
+            </a:r>
+            <a:br>
+              <a:rPr lang="zh-CN" altLang="en-US" sz="1000"/>
+            </a:br>
+            <a:r>
+              <a:rPr lang="zh-CN" altLang="en-US" sz="1000" b="0">
+                <a:solidFill>
+                  <a:srgbClr val="1A1A1A"/>
+                </a:solidFill>
+                <a:latin typeface="微软雅黑"/>
+                <a:ea typeface="微软雅黑"/>
+                <a:cs typeface="微软雅黑"/>
+              </a:rPr>
+              <a:t>报告 1 份</a:t>
             </a:r>
           </a:p>
         </p:txBody>
@@ -20393,8 +20435,8 @@
         </p:nvSpPr>
         <p:spPr>
           <a:xfrm>
-            <a:off x="8890000" y="4495800"/>
-            <a:ext cx="2794000" cy="584200"/>
+            <a:off x="8890000" y="4400550"/>
+            <a:ext cx="2794000" cy="679450"/>
           </a:xfrm>
           <a:prstGeom prst="rect">
             <a:avLst/>
@@ -30330,7 +30372,7 @@
                 <a:ea typeface="微软雅黑"/>
                 <a:cs typeface="微软雅黑"/>
               </a:rPr>
-              <a:t>五项成果 ＋ 知识产权与标准</a:t>
+              <a:t>四项成果 ＋ 知识产权与标准</a:t>
             </a:r>
           </a:p>
         </p:txBody>
@@ -30386,7 +30428,7 @@
         <p:spPr>
           <a:xfrm>
             <a:off x="406400" y="2082800"/>
-            <a:ext cx="3691467" cy="2222500"/>
+            <a:ext cx="7535333" cy="2222500"/>
           </a:xfrm>
           <a:prstGeom prst="rect">
             <a:avLst/>
@@ -30418,7 +30460,7 @@
         <p:spPr>
           <a:xfrm>
             <a:off x="406400" y="2082800"/>
-            <a:ext cx="3691467" cy="19050"/>
+            <a:ext cx="7535333" cy="19050"/>
           </a:xfrm>
           <a:prstGeom prst="rect">
             <a:avLst/>
@@ -30500,7 +30542,7 @@
         <p:spPr>
           <a:xfrm>
             <a:off x="977900" y="2184400"/>
-            <a:ext cx="1905000" cy="165100"/>
+            <a:ext cx="2540000" cy="165100"/>
           </a:xfrm>
           <a:prstGeom prst="rect">
             <a:avLst/>
@@ -30550,7 +30592,7 @@
                 <a:ea typeface="微软雅黑"/>
                 <a:cs typeface="微软雅黑"/>
               </a:rPr>
-              <a:t>软件1套</a:t>
+              <a:t>系统 1 套</a:t>
             </a:r>
           </a:p>
         </p:txBody>
@@ -30564,7 +30606,7 @@
         <p:spPr>
           <a:xfrm>
             <a:off x="977900" y="2349500"/>
-            <a:ext cx="2967567" cy="368300"/>
+            <a:ext cx="6811433" cy="368300"/>
           </a:xfrm>
           <a:prstGeom prst="rect">
             <a:avLst/>
@@ -30592,7 +30634,7 @@
                 <a:ea typeface="微软雅黑"/>
                 <a:cs typeface="微软雅黑"/>
               </a:rPr>
-              <a:t>多智能体协同运行与调度引擎</a:t>
+              <a:t>多智能体协同运行、调度引擎／列车级数字样机</a:t>
             </a:r>
           </a:p>
         </p:txBody>
@@ -30606,9 +30648,9 @@
         <p:grpSpPr>
           <a:xfrm>
             <a:off x="558800" y="2781300"/>
-            <a:ext cx="3386667" cy="1066800"/>
+            <a:ext cx="3539067" cy="1066800"/>
             <a:chOff x="558800" y="2781300"/>
-            <a:chExt cx="3386667" cy="1066800"/>
+            <a:chExt cx="3539067" cy="1066800"/>
           </a:xfrm>
         </p:grpSpPr>
         <p:sp>
@@ -30620,7 +30662,7 @@
           <p:spPr>
             <a:xfrm>
               <a:off x="558800" y="2781300"/>
-              <a:ext cx="3386667" cy="1066800"/>
+              <a:ext cx="3539067" cy="1066800"/>
             </a:xfrm>
             <a:prstGeom prst="rect">
               <a:avLst/>
@@ -30660,7 +30702,7 @@
           </p:blipFill>
           <p:spPr>
             <a:xfrm>
-              <a:off x="2125133" y="2971800"/>
+              <a:off x="2201333" y="2971800"/>
               <a:ext cx="254000" cy="254000"/>
             </a:xfrm>
             <a:prstGeom prst="rect">
@@ -30677,7 +30719,7 @@
           <p:spPr>
             <a:xfrm>
               <a:off x="660400" y="3276600"/>
-              <a:ext cx="3183467" cy="177800"/>
+              <a:ext cx="3335867" cy="177800"/>
             </a:xfrm>
             <a:prstGeom prst="rect">
               <a:avLst/>
@@ -30719,7 +30761,7 @@
           <p:spPr>
             <a:xfrm>
               <a:off x="660400" y="3467100"/>
-              <a:ext cx="3183467" cy="152400"/>
+              <a:ext cx="3335867" cy="152400"/>
             </a:xfrm>
             <a:prstGeom prst="rect">
               <a:avLst/>
@@ -30762,7 +30804,7 @@
         <p:spPr>
           <a:xfrm>
             <a:off x="558800" y="3924300"/>
-            <a:ext cx="3386667" cy="355600"/>
+            <a:ext cx="3539067" cy="355600"/>
           </a:xfrm>
           <a:prstGeom prst="rect">
             <a:avLst/>
@@ -30806,15 +30848,235 @@
           </a:p>
         </p:txBody>
       </p:sp>
-      <p:sp>
-        <p:nvSpPr>
-          <p:cNvPr id="18" name="Rectangle 17"/>
+      <p:grpSp>
+        <p:nvGrpSpPr>
+          <p:cNvPr id="18" name="附图位置 · 列车级数字样机"/>
+          <p:cNvGrpSpPr/>
+          <p:nvPr/>
+        </p:nvGrpSpPr>
+        <p:grpSpPr>
+          <a:xfrm>
+            <a:off x="4250267" y="2781300"/>
+            <a:ext cx="3539067" cy="1066800"/>
+            <a:chOff x="4250267" y="2781300"/>
+            <a:chExt cx="3539067" cy="1066800"/>
+          </a:xfrm>
+        </p:grpSpPr>
+        <p:sp>
+          <p:nvSpPr>
+            <p:cNvPr id="19" name="Rectangle 18"/>
+            <p:cNvSpPr/>
+            <p:nvPr/>
+          </p:nvSpPr>
+          <p:spPr>
+            <a:xfrm>
+              <a:off x="4250267" y="2781300"/>
+              <a:ext cx="3539067" cy="1066800"/>
+            </a:xfrm>
+            <a:prstGeom prst="rect">
+              <a:avLst/>
+            </a:prstGeom>
+            <a:solidFill>
+              <a:srgbClr val="FBF6EC"/>
+            </a:solidFill>
+            <a:ln w="7620">
+              <a:solidFill>
+                <a:srgbClr val="9E6F28"/>
+              </a:solidFill>
+              <a:prstDash val="dash"/>
+              <a:round/>
+            </a:ln>
+          </p:spPr>
+          <p:txBody>
+            <a:bodyPr rtlCol="0" anchor="ctr" lIns="0" rIns="0" tIns="0" bIns="0"/>
+            <a:lstStyle/>
+            <a:p>
+              <a:pPr algn="ctr"/>
+            </a:p>
+          </p:txBody>
+        </p:sp>
+        <p:pic>
+          <p:nvPicPr>
+            <p:cNvPr id="20" name="Picture 19" descr="photo-9E6F28-1_6.png"/>
+            <p:cNvPicPr>
+              <a:picLocks noChangeAspect="1"/>
+            </p:cNvPicPr>
+            <p:nvPr/>
+          </p:nvPicPr>
+          <p:blipFill>
+            <a:blip r:embed="rId3"/>
+            <a:stretch>
+              <a:fillRect/>
+            </a:stretch>
+          </p:blipFill>
+          <p:spPr>
+            <a:xfrm>
+              <a:off x="5892800" y="2971800"/>
+              <a:ext cx="254000" cy="254000"/>
+            </a:xfrm>
+            <a:prstGeom prst="rect">
+              <a:avLst/>
+            </a:prstGeom>
+          </p:spPr>
+        </p:pic>
+        <p:sp>
+          <p:nvSpPr>
+            <p:cNvPr id="21" name="TextBox 20"/>
+            <p:cNvSpPr txBox="1"/>
+            <p:nvPr/>
+          </p:nvSpPr>
+          <p:spPr>
+            <a:xfrm>
+              <a:off x="4351867" y="3276600"/>
+              <a:ext cx="3335867" cy="177800"/>
+            </a:xfrm>
+            <a:prstGeom prst="rect">
+              <a:avLst/>
+            </a:prstGeom>
+            <a:noFill/>
+          </p:spPr>
+          <p:txBody>
+            <a:bodyPr wrap="none" anchor="t" lIns="0" tIns="0" rIns="0" bIns="0">
+              <a:noAutofit/>
+            </a:bodyPr>
+            <a:lstStyle/>
+            <a:p>
+              <a:pPr algn="ctr" marL="0" indent="0">
+                <a:lnSpc>
+                  <a:spcPts val="1300"/>
+                </a:lnSpc>
+                <a:buNone/>
+              </a:pPr>
+              <a:r>
+                <a:rPr lang="zh-CN" altLang="en-US" sz="900" b="1">
+                  <a:solidFill>
+                    <a:srgbClr val="875D1C"/>
+                  </a:solidFill>
+                  <a:latin typeface="微软雅黑"/>
+                  <a:ea typeface="微软雅黑"/>
+                  <a:cs typeface="微软雅黑"/>
+                </a:rPr>
+                <a:t>附图位置 · 列车级数字样机</a:t>
+              </a:r>
+            </a:p>
+          </p:txBody>
+        </p:sp>
+        <p:sp>
+          <p:nvSpPr>
+            <p:cNvPr id="22" name="TextBox 21"/>
+            <p:cNvSpPr txBox="1"/>
+            <p:nvPr/>
+          </p:nvSpPr>
+          <p:spPr>
+            <a:xfrm>
+              <a:off x="4351867" y="3467100"/>
+              <a:ext cx="3335867" cy="152400"/>
+            </a:xfrm>
+            <a:prstGeom prst="rect">
+              <a:avLst/>
+            </a:prstGeom>
+            <a:noFill/>
+          </p:spPr>
+          <p:txBody>
+            <a:bodyPr wrap="none" anchor="t" lIns="0" tIns="0" rIns="0" bIns="0">
+              <a:noAutofit/>
+            </a:bodyPr>
+            <a:lstStyle/>
+            <a:p>
+              <a:pPr algn="ctr" marL="0" indent="0">
+                <a:lnSpc>
+                  <a:spcPts val="1100"/>
+                </a:lnSpc>
+                <a:buNone/>
+              </a:pPr>
+              <a:r>
+                <a:rPr lang="zh-CN" altLang="en-US" sz="750" b="0">
+                  <a:solidFill>
+                    <a:srgbClr val="875D1C"/>
+                  </a:solidFill>
+                  <a:latin typeface="微软雅黑"/>
+                  <a:ea typeface="微软雅黑"/>
+                  <a:cs typeface="微软雅黑"/>
+                </a:rPr>
+                <a:t>建议：数字样机三维模型或运行界面截图</a:t>
+              </a:r>
+            </a:p>
+          </p:txBody>
+        </p:sp>
+      </p:grpSp>
+      <p:sp>
+        <p:nvSpPr>
+          <p:cNvPr id="23" name="TextBox 22"/>
+          <p:cNvSpPr txBox="1"/>
+          <p:nvPr/>
+        </p:nvSpPr>
+        <p:spPr>
+          <a:xfrm>
+            <a:off x="4250267" y="3924300"/>
+            <a:ext cx="3539067" cy="355600"/>
+          </a:xfrm>
+          <a:prstGeom prst="rect">
+            <a:avLst/>
+          </a:prstGeom>
+          <a:noFill/>
+        </p:spPr>
+        <p:txBody>
+          <a:bodyPr wrap="square" anchor="t" lIns="0" tIns="0" rIns="0" bIns="0">
+            <a:noAutofit/>
+          </a:bodyPr>
+          <a:lstStyle/>
+          <a:p>
+            <a:pPr algn="l" marL="0" indent="0">
+              <a:lnSpc>
+                <a:spcPts val="1350"/>
+              </a:lnSpc>
+              <a:buNone/>
+            </a:pPr>
+            <a:r>
+              <a:rPr lang="zh-CN" altLang="en-US" sz="900" b="0">
+                <a:solidFill>
+                  <a:srgbClr val="3D3D3D"/>
+                </a:solidFill>
+                <a:latin typeface="微软雅黑"/>
+                <a:ea typeface="微软雅黑"/>
+                <a:cs typeface="微软雅黑"/>
+              </a:rPr>
+              <a:t>以 </a:t>
+            </a:r>
+            <a:r>
+              <a:rPr lang="zh-CN" altLang="en-US" sz="900" b="1">
+                <a:solidFill>
+                  <a:srgbClr val="1A1A1A"/>
+                </a:solidFill>
+                <a:latin typeface="微软雅黑"/>
+                <a:ea typeface="微软雅黑"/>
+                <a:cs typeface="微软雅黑"/>
+              </a:rPr>
+              <a:t>FXN5C</a:t>
+            </a:r>
+            <a:r>
+              <a:rPr lang="zh-CN" altLang="en-US" sz="900" b="0">
+                <a:solidFill>
+                  <a:srgbClr val="3D3D3D"/>
+                </a:solidFill>
+                <a:latin typeface="微软雅黑"/>
+                <a:ea typeface="微软雅黑"/>
+                <a:cs typeface="微软雅黑"/>
+              </a:rPr>
+              <a:t> 为对象，用于回归验证与问题复现</a:t>
+            </a:r>
+          </a:p>
+        </p:txBody>
+      </p:sp>
+      <p:sp>
+        <p:nvSpPr>
+          <p:cNvPr id="24" name="Rectangle 23"/>
           <p:cNvSpPr/>
           <p:nvPr/>
         </p:nvSpPr>
         <p:spPr>
           <a:xfrm>
-            <a:off x="4250267" y="2082800"/>
+            <a:off x="8094133" y="2082800"/>
             <a:ext cx="3691467" cy="2222500"/>
           </a:xfrm>
           <a:prstGeom prst="rect">
@@ -30840,13 +31102,13 @@
       </p:sp>
       <p:sp>
         <p:nvSpPr>
-          <p:cNvPr id="19" name="Rectangle 18"/>
+          <p:cNvPr id="25" name="Rectangle 24"/>
           <p:cNvSpPr/>
           <p:nvPr/>
         </p:nvSpPr>
         <p:spPr>
           <a:xfrm>
-            <a:off x="4250267" y="2082800"/>
+            <a:off x="8094133" y="2082800"/>
             <a:ext cx="3691467" cy="19050"/>
           </a:xfrm>
           <a:prstGeom prst="rect">
@@ -30869,13 +31131,13 @@
       </p:sp>
       <p:sp>
         <p:nvSpPr>
-          <p:cNvPr id="20" name="Oval 19"/>
+          <p:cNvPr id="26" name="Oval 25"/>
           <p:cNvSpPr/>
           <p:nvPr/>
         </p:nvSpPr>
         <p:spPr>
           <a:xfrm>
-            <a:off x="4402667" y="2222500"/>
+            <a:off x="8246533" y="2222500"/>
             <a:ext cx="330200" cy="330200"/>
           </a:xfrm>
           <a:prstGeom prst="ellipse">
@@ -30898,7 +31160,7 @@
       </p:sp>
       <p:pic>
         <p:nvPicPr>
-          <p:cNvPr id="21" name="Picture 20" descr="robot-C00000-1_6.png"/>
+          <p:cNvPr id="27" name="Picture 26" descr="robot-C00000-1_6.png"/>
           <p:cNvPicPr>
             <a:picLocks noChangeAspect="1"/>
           </p:cNvPicPr>
@@ -30912,7 +31174,7 @@
         </p:blipFill>
         <p:spPr>
           <a:xfrm>
-            <a:off x="4478867" y="2298700"/>
+            <a:off x="8322733" y="2298700"/>
             <a:ext cx="177800" cy="177800"/>
           </a:xfrm>
           <a:prstGeom prst="rect">
@@ -30922,13 +31184,13 @@
       </p:pic>
       <p:sp>
         <p:nvSpPr>
-          <p:cNvPr id="22" name="TextBox 21"/>
-          <p:cNvSpPr txBox="1"/>
-          <p:nvPr/>
-        </p:nvSpPr>
-        <p:spPr>
-          <a:xfrm>
-            <a:off x="4821767" y="2184400"/>
+          <p:cNvPr id="28" name="TextBox 27"/>
+          <p:cNvSpPr txBox="1"/>
+          <p:nvPr/>
+        </p:nvSpPr>
+        <p:spPr>
+          <a:xfrm>
+            <a:off x="8665633" y="2184400"/>
             <a:ext cx="1905000" cy="165100"/>
           </a:xfrm>
           <a:prstGeom prst="rect">
@@ -30979,20 +31241,20 @@
                 <a:ea typeface="微软雅黑"/>
                 <a:cs typeface="微软雅黑"/>
               </a:rPr>
-              <a:t>1套</a:t>
-            </a:r>
-          </a:p>
-        </p:txBody>
-      </p:sp>
-      <p:sp>
-        <p:nvSpPr>
-          <p:cNvPr id="23" name="TextBox 22"/>
-          <p:cNvSpPr txBox="1"/>
-          <p:nvPr/>
-        </p:nvSpPr>
-        <p:spPr>
-          <a:xfrm>
-            <a:off x="4821767" y="2349500"/>
+              <a:t>模型 1 套</a:t>
+            </a:r>
+          </a:p>
+        </p:txBody>
+      </p:sp>
+      <p:sp>
+        <p:nvSpPr>
+          <p:cNvPr id="29" name="TextBox 28"/>
+          <p:cNvSpPr txBox="1"/>
+          <p:nvPr/>
+        </p:nvSpPr>
+        <p:spPr>
+          <a:xfrm>
+            <a:off x="8665633" y="2349500"/>
             <a:ext cx="2967567" cy="368300"/>
           </a:xfrm>
           <a:prstGeom prst="rect">
@@ -31042,27 +31304,27 @@
       </p:sp>
       <p:grpSp>
         <p:nvGrpSpPr>
-          <p:cNvPr id="24" name="附图位置 · 仿真智能体／孪生模型"/>
+          <p:cNvPr id="30" name="附图位置 · 仿真智能体／孪生模型"/>
           <p:cNvGrpSpPr/>
           <p:nvPr/>
         </p:nvGrpSpPr>
         <p:grpSpPr>
           <a:xfrm>
-            <a:off x="4402667" y="2781300"/>
+            <a:off x="8246533" y="2781300"/>
             <a:ext cx="3386667" cy="1066800"/>
-            <a:chOff x="4402667" y="2781300"/>
+            <a:chOff x="8246533" y="2781300"/>
             <a:chExt cx="3386667" cy="1066800"/>
           </a:xfrm>
         </p:grpSpPr>
         <p:sp>
           <p:nvSpPr>
-            <p:cNvPr id="25" name="Rectangle 24"/>
+            <p:cNvPr id="31" name="Rectangle 30"/>
             <p:cNvSpPr/>
             <p:nvPr/>
           </p:nvSpPr>
           <p:spPr>
             <a:xfrm>
-              <a:off x="4402667" y="2781300"/>
+              <a:off x="8246533" y="2781300"/>
               <a:ext cx="3386667" cy="1066800"/>
             </a:xfrm>
             <a:prstGeom prst="rect">
@@ -31089,7 +31351,7 @@
         </p:sp>
         <p:pic>
           <p:nvPicPr>
-            <p:cNvPr id="26" name="Picture 25" descr="photo-9E6F28-1_6.png"/>
+            <p:cNvPr id="32" name="Picture 31" descr="photo-9E6F28-1_6.png"/>
             <p:cNvPicPr>
               <a:picLocks noChangeAspect="1"/>
             </p:cNvPicPr>
@@ -31103,7 +31365,7 @@
           </p:blipFill>
           <p:spPr>
             <a:xfrm>
-              <a:off x="5969000" y="2971800"/>
+              <a:off x="9812867" y="2971800"/>
               <a:ext cx="254000" cy="254000"/>
             </a:xfrm>
             <a:prstGeom prst="rect">
@@ -31113,13 +31375,13 @@
         </p:pic>
         <p:sp>
           <p:nvSpPr>
-            <p:cNvPr id="27" name="TextBox 26"/>
+            <p:cNvPr id="33" name="TextBox 32"/>
             <p:cNvSpPr txBox="1"/>
             <p:nvPr/>
           </p:nvSpPr>
           <p:spPr>
             <a:xfrm>
-              <a:off x="4504267" y="3276600"/>
+              <a:off x="8348133" y="3276600"/>
               <a:ext cx="3183467" cy="177800"/>
             </a:xfrm>
             <a:prstGeom prst="rect">
@@ -31155,13 +31417,13 @@
         </p:sp>
         <p:sp>
           <p:nvSpPr>
-            <p:cNvPr id="28" name="TextBox 27"/>
+            <p:cNvPr id="34" name="TextBox 33"/>
             <p:cNvSpPr txBox="1"/>
             <p:nvPr/>
           </p:nvSpPr>
           <p:spPr>
             <a:xfrm>
-              <a:off x="4504267" y="3467100"/>
+              <a:off x="8348133" y="3467100"/>
               <a:ext cx="3183467" cy="152400"/>
             </a:xfrm>
             <a:prstGeom prst="rect">
@@ -31198,13 +31460,13 @@
       </p:grpSp>
       <p:sp>
         <p:nvSpPr>
-          <p:cNvPr id="29" name="TextBox 28"/>
-          <p:cNvSpPr txBox="1"/>
-          <p:nvPr/>
-        </p:nvSpPr>
-        <p:spPr>
-          <a:xfrm>
-            <a:off x="4402667" y="3924300"/>
+          <p:cNvPr id="35" name="TextBox 34"/>
+          <p:cNvSpPr txBox="1"/>
+          <p:nvPr/>
+        </p:nvSpPr>
+        <p:spPr>
+          <a:xfrm>
+            <a:off x="8246533" y="3924300"/>
             <a:ext cx="3386667" cy="355600"/>
           </a:xfrm>
           <a:prstGeom prst="rect">
@@ -31251,14 +31513,14 @@
       </p:sp>
       <p:sp>
         <p:nvSpPr>
-          <p:cNvPr id="30" name="Rectangle 29"/>
+          <p:cNvPr id="36" name="Rectangle 35"/>
           <p:cNvSpPr/>
           <p:nvPr/>
         </p:nvSpPr>
         <p:spPr>
           <a:xfrm>
-            <a:off x="8094133" y="2082800"/>
-            <a:ext cx="3691467" cy="2222500"/>
+            <a:off x="406400" y="4432300"/>
+            <a:ext cx="5842000" cy="914400"/>
           </a:xfrm>
           <a:prstGeom prst="rect">
             <a:avLst/>
@@ -31283,14 +31545,14 @@
       </p:sp>
       <p:sp>
         <p:nvSpPr>
-          <p:cNvPr id="31" name="Rectangle 30"/>
+          <p:cNvPr id="37" name="Rectangle 36"/>
           <p:cNvSpPr/>
           <p:nvPr/>
         </p:nvSpPr>
         <p:spPr>
           <a:xfrm>
-            <a:off x="8094133" y="2082800"/>
-            <a:ext cx="3691467" cy="19050"/>
+            <a:off x="406400" y="4432300"/>
+            <a:ext cx="19050" cy="914400"/>
           </a:xfrm>
           <a:prstGeom prst="rect">
             <a:avLst/>
@@ -31312,14 +31574,14 @@
       </p:sp>
       <p:sp>
         <p:nvSpPr>
-          <p:cNvPr id="32" name="Oval 31"/>
+          <p:cNvPr id="38" name="Oval 37"/>
           <p:cNvSpPr/>
           <p:nvPr/>
         </p:nvSpPr>
         <p:spPr>
           <a:xfrm>
-            <a:off x="8246533" y="2222500"/>
-            <a:ext cx="330200" cy="330200"/>
+            <a:off x="558800" y="4711700"/>
+            <a:ext cx="355600" cy="355600"/>
           </a:xfrm>
           <a:prstGeom prst="ellipse">
             <a:avLst/>
@@ -31341,7 +31603,7 @@
       </p:sp>
       <p:pic>
         <p:nvPicPr>
-          <p:cNvPr id="33" name="Picture 32" descr="train-C00000-1_6.png"/>
+          <p:cNvPr id="39" name="Picture 38" descr="file-certificate-C00000-1_6.png"/>
           <p:cNvPicPr>
             <a:picLocks noChangeAspect="1"/>
           </p:cNvPicPr>
@@ -31355,8 +31617,8 @@
         </p:blipFill>
         <p:spPr>
           <a:xfrm>
-            <a:off x="8322733" y="2298700"/>
-            <a:ext cx="177800" cy="177800"/>
+            <a:off x="641350" y="4794250"/>
+            <a:ext cx="190500" cy="190500"/>
           </a:xfrm>
           <a:prstGeom prst="rect">
             <a:avLst/>
@@ -31365,14 +31627,14 @@
       </p:pic>
       <p:sp>
         <p:nvSpPr>
-          <p:cNvPr id="34" name="TextBox 33"/>
-          <p:cNvSpPr txBox="1"/>
-          <p:nvPr/>
-        </p:nvSpPr>
-        <p:spPr>
-          <a:xfrm>
-            <a:off x="8665633" y="2184400"/>
-            <a:ext cx="1905000" cy="165100"/>
+          <p:cNvPr id="40" name="TextBox 39"/>
+          <p:cNvSpPr txBox="1"/>
+          <p:nvPr/>
+        </p:nvSpPr>
+        <p:spPr>
+          <a:xfrm>
+            <a:off x="1066800" y="4683125"/>
+            <a:ext cx="4597400" cy="203200"/>
           </a:xfrm>
           <a:prstGeom prst="rect">
             <a:avLst/>
@@ -31387,12 +31649,12 @@
           <a:p>
             <a:pPr algn="l" marL="0" indent="0">
               <a:lnSpc>
-                <a:spcPts val="1200"/>
-              </a:lnSpc>
-              <a:buNone/>
-            </a:pPr>
-            <a:r>
-              <a:rPr lang="zh-CN" altLang="en-US" sz="850" b="1">
+                <a:spcPts val="1400"/>
+              </a:lnSpc>
+              <a:buNone/>
+            </a:pPr>
+            <a:r>
+              <a:rPr lang="zh-CN" altLang="en-US" sz="1000" b="1">
                 <a:solidFill>
                   <a:srgbClr val="C00000"/>
                 </a:solidFill>
@@ -31403,18 +31665,18 @@
               <a:t>成果3</a:t>
             </a:r>
             <a:r>
-              <a:rPr lang="zh-CN" altLang="en-US" sz="850" b="0">
-                <a:solidFill>
-                  <a:srgbClr val="C00000"/>
-                </a:solidFill>
-                <a:latin typeface="微软雅黑"/>
-                <a:ea typeface="微软雅黑"/>
-                <a:cs typeface="微软雅黑"/>
-              </a:rPr>
-              <a:t>　</a:t>
-            </a:r>
-            <a:r>
-              <a:rPr lang="zh-CN" altLang="en-US" sz="850" b="0">
+              <a:rPr lang="zh-CN" altLang="en-US" sz="1000" b="1">
+                <a:solidFill>
+                  <a:srgbClr val="1A1A1A"/>
+                </a:solidFill>
+                <a:latin typeface="微软雅黑"/>
+                <a:ea typeface="微软雅黑"/>
+                <a:cs typeface="微软雅黑"/>
+              </a:rPr>
+              <a:t>　列车级数字样机构建方法体系与技术规范　</a:t>
+            </a:r>
+            <a:r>
+              <a:rPr lang="zh-CN" altLang="en-US" sz="1000" b="1">
                 <a:solidFill>
                   <a:srgbClr val="666666"/>
                 </a:solidFill>
@@ -31422,21 +31684,21 @@
                 <a:ea typeface="微软雅黑"/>
                 <a:cs typeface="微软雅黑"/>
               </a:rPr>
-              <a:t>1套</a:t>
-            </a:r>
-          </a:p>
-        </p:txBody>
-      </p:sp>
-      <p:sp>
-        <p:nvSpPr>
-          <p:cNvPr id="35" name="TextBox 34"/>
-          <p:cNvSpPr txBox="1"/>
-          <p:nvPr/>
-        </p:nvSpPr>
-        <p:spPr>
-          <a:xfrm>
-            <a:off x="8665633" y="2349500"/>
-            <a:ext cx="2967567" cy="368300"/>
+              <a:t>规范 1 套</a:t>
+            </a:r>
+          </a:p>
+        </p:txBody>
+      </p:sp>
+      <p:sp>
+        <p:nvSpPr>
+          <p:cNvPr id="41" name="TextBox 40"/>
+          <p:cNvSpPr txBox="1"/>
+          <p:nvPr/>
+        </p:nvSpPr>
+        <p:spPr>
+          <a:xfrm>
+            <a:off x="1066800" y="4924425"/>
+            <a:ext cx="4597400" cy="196850"/>
           </a:xfrm>
           <a:prstGeom prst="rect">
             <a:avLst/>
@@ -31451,204 +31713,6 @@
           <a:p>
             <a:pPr algn="l" marL="0" indent="0">
               <a:lnSpc>
-                <a:spcPts val="1450"/>
-              </a:lnSpc>
-              <a:buNone/>
-            </a:pPr>
-            <a:r>
-              <a:rPr lang="zh-CN" altLang="en-US" sz="1100" b="1">
-                <a:solidFill>
-                  <a:srgbClr val="1A1A1A"/>
-                </a:solidFill>
-                <a:latin typeface="微软雅黑"/>
-                <a:ea typeface="微软雅黑"/>
-                <a:cs typeface="微软雅黑"/>
-              </a:rPr>
-              <a:t>列车级数字样机</a:t>
-            </a:r>
-          </a:p>
-        </p:txBody>
-      </p:sp>
-      <p:grpSp>
-        <p:nvGrpSpPr>
-          <p:cNvPr id="36" name="附图位置 · 列车级数字样机"/>
-          <p:cNvGrpSpPr/>
-          <p:nvPr/>
-        </p:nvGrpSpPr>
-        <p:grpSpPr>
-          <a:xfrm>
-            <a:off x="8246533" y="2781300"/>
-            <a:ext cx="3386667" cy="1066800"/>
-            <a:chOff x="8246533" y="2781300"/>
-            <a:chExt cx="3386667" cy="1066800"/>
-          </a:xfrm>
-        </p:grpSpPr>
-        <p:sp>
-          <p:nvSpPr>
-            <p:cNvPr id="37" name="Rectangle 36"/>
-            <p:cNvSpPr/>
-            <p:nvPr/>
-          </p:nvSpPr>
-          <p:spPr>
-            <a:xfrm>
-              <a:off x="8246533" y="2781300"/>
-              <a:ext cx="3386667" cy="1066800"/>
-            </a:xfrm>
-            <a:prstGeom prst="rect">
-              <a:avLst/>
-            </a:prstGeom>
-            <a:solidFill>
-              <a:srgbClr val="FBF6EC"/>
-            </a:solidFill>
-            <a:ln w="7620">
-              <a:solidFill>
-                <a:srgbClr val="9E6F28"/>
-              </a:solidFill>
-              <a:prstDash val="dash"/>
-              <a:round/>
-            </a:ln>
-          </p:spPr>
-          <p:txBody>
-            <a:bodyPr rtlCol="0" anchor="ctr" lIns="0" rIns="0" tIns="0" bIns="0"/>
-            <a:lstStyle/>
-            <a:p>
-              <a:pPr algn="ctr"/>
-            </a:p>
-          </p:txBody>
-        </p:sp>
-        <p:pic>
-          <p:nvPicPr>
-            <p:cNvPr id="38" name="Picture 37" descr="photo-9E6F28-1_6.png"/>
-            <p:cNvPicPr>
-              <a:picLocks noChangeAspect="1"/>
-            </p:cNvPicPr>
-            <p:nvPr/>
-          </p:nvPicPr>
-          <p:blipFill>
-            <a:blip r:embed="rId3"/>
-            <a:stretch>
-              <a:fillRect/>
-            </a:stretch>
-          </p:blipFill>
-          <p:spPr>
-            <a:xfrm>
-              <a:off x="9812867" y="2971800"/>
-              <a:ext cx="254000" cy="254000"/>
-            </a:xfrm>
-            <a:prstGeom prst="rect">
-              <a:avLst/>
-            </a:prstGeom>
-          </p:spPr>
-        </p:pic>
-        <p:sp>
-          <p:nvSpPr>
-            <p:cNvPr id="39" name="TextBox 38"/>
-            <p:cNvSpPr txBox="1"/>
-            <p:nvPr/>
-          </p:nvSpPr>
-          <p:spPr>
-            <a:xfrm>
-              <a:off x="8348133" y="3276600"/>
-              <a:ext cx="3183467" cy="177800"/>
-            </a:xfrm>
-            <a:prstGeom prst="rect">
-              <a:avLst/>
-            </a:prstGeom>
-            <a:noFill/>
-          </p:spPr>
-          <p:txBody>
-            <a:bodyPr wrap="none" anchor="t" lIns="0" tIns="0" rIns="0" bIns="0">
-              <a:noAutofit/>
-            </a:bodyPr>
-            <a:lstStyle/>
-            <a:p>
-              <a:pPr algn="ctr" marL="0" indent="0">
-                <a:lnSpc>
-                  <a:spcPts val="1300"/>
-                </a:lnSpc>
-                <a:buNone/>
-              </a:pPr>
-              <a:r>
-                <a:rPr lang="zh-CN" altLang="en-US" sz="900" b="1">
-                  <a:solidFill>
-                    <a:srgbClr val="875D1C"/>
-                  </a:solidFill>
-                  <a:latin typeface="微软雅黑"/>
-                  <a:ea typeface="微软雅黑"/>
-                  <a:cs typeface="微软雅黑"/>
-                </a:rPr>
-                <a:t>附图位置 · 列车级数字样机</a:t>
-              </a:r>
-            </a:p>
-          </p:txBody>
-        </p:sp>
-        <p:sp>
-          <p:nvSpPr>
-            <p:cNvPr id="40" name="TextBox 39"/>
-            <p:cNvSpPr txBox="1"/>
-            <p:nvPr/>
-          </p:nvSpPr>
-          <p:spPr>
-            <a:xfrm>
-              <a:off x="8348133" y="3467100"/>
-              <a:ext cx="3183467" cy="152400"/>
-            </a:xfrm>
-            <a:prstGeom prst="rect">
-              <a:avLst/>
-            </a:prstGeom>
-            <a:noFill/>
-          </p:spPr>
-          <p:txBody>
-            <a:bodyPr wrap="none" anchor="t" lIns="0" tIns="0" rIns="0" bIns="0">
-              <a:noAutofit/>
-            </a:bodyPr>
-            <a:lstStyle/>
-            <a:p>
-              <a:pPr algn="ctr" marL="0" indent="0">
-                <a:lnSpc>
-                  <a:spcPts val="1100"/>
-                </a:lnSpc>
-                <a:buNone/>
-              </a:pPr>
-              <a:r>
-                <a:rPr lang="zh-CN" altLang="en-US" sz="750" b="0">
-                  <a:solidFill>
-                    <a:srgbClr val="875D1C"/>
-                  </a:solidFill>
-                  <a:latin typeface="微软雅黑"/>
-                  <a:ea typeface="微软雅黑"/>
-                  <a:cs typeface="微软雅黑"/>
-                </a:rPr>
-                <a:t>建议：数字样机三维模型或运行界面截图</a:t>
-              </a:r>
-            </a:p>
-          </p:txBody>
-        </p:sp>
-      </p:grpSp>
-      <p:sp>
-        <p:nvSpPr>
-          <p:cNvPr id="41" name="TextBox 40"/>
-          <p:cNvSpPr txBox="1"/>
-          <p:nvPr/>
-        </p:nvSpPr>
-        <p:spPr>
-          <a:xfrm>
-            <a:off x="8246533" y="3924300"/>
-            <a:ext cx="3386667" cy="355600"/>
-          </a:xfrm>
-          <a:prstGeom prst="rect">
-            <a:avLst/>
-          </a:prstGeom>
-          <a:noFill/>
-        </p:spPr>
-        <p:txBody>
-          <a:bodyPr wrap="square" anchor="t" lIns="0" tIns="0" rIns="0" bIns="0">
-            <a:noAutofit/>
-          </a:bodyPr>
-          <a:lstStyle/>
-          <a:p>
-            <a:pPr algn="l" marL="0" indent="0">
-              <a:lnSpc>
                 <a:spcPts val="1350"/>
               </a:lnSpc>
               <a:buNone/>
@@ -31662,29 +31726,7 @@
                 <a:ea typeface="微软雅黑"/>
                 <a:cs typeface="微软雅黑"/>
               </a:rPr>
-              <a:t>以 </a:t>
-            </a:r>
-            <a:r>
-              <a:rPr lang="zh-CN" altLang="en-US" sz="900" b="1">
-                <a:solidFill>
-                  <a:srgbClr val="1A1A1A"/>
-                </a:solidFill>
-                <a:latin typeface="微软雅黑"/>
-                <a:ea typeface="微软雅黑"/>
-                <a:cs typeface="微软雅黑"/>
-              </a:rPr>
-              <a:t>FXN5C</a:t>
-            </a:r>
-            <a:r>
-              <a:rPr lang="zh-CN" altLang="en-US" sz="900" b="0">
-                <a:solidFill>
-                  <a:srgbClr val="3D3D3D"/>
-                </a:solidFill>
-                <a:latin typeface="微软雅黑"/>
-                <a:ea typeface="微软雅黑"/>
-                <a:cs typeface="微软雅黑"/>
-              </a:rPr>
-              <a:t> 为对象，用于回归验证与问题复现</a:t>
+              <a:t>构建方法、集成流程与接口规范，可在**内推广、后续课题复用</a:t>
             </a:r>
           </a:p>
         </p:txBody>
@@ -31697,7 +31739,7 @@
         </p:nvSpPr>
         <p:spPr>
           <a:xfrm>
-            <a:off x="406400" y="4432300"/>
+            <a:off x="406400" y="5435600"/>
             <a:ext cx="5842000" cy="914400"/>
           </a:xfrm>
           <a:prstGeom prst="rect">
@@ -31729,7 +31771,7 @@
         </p:nvSpPr>
         <p:spPr>
           <a:xfrm>
-            <a:off x="406400" y="4432300"/>
+            <a:off x="406400" y="5435600"/>
             <a:ext cx="19050" cy="914400"/>
           </a:xfrm>
           <a:prstGeom prst="rect">
@@ -31758,7 +31800,7 @@
         </p:nvSpPr>
         <p:spPr>
           <a:xfrm>
-            <a:off x="558800" y="4711700"/>
+            <a:off x="558800" y="5715000"/>
             <a:ext cx="355600" cy="355600"/>
           </a:xfrm>
           <a:prstGeom prst="ellipse">
@@ -31781,7 +31823,7 @@
       </p:sp>
       <p:pic>
         <p:nvPicPr>
-          <p:cNvPr id="45" name="Picture 44" descr="file-certificate-C00000-1_6.png"/>
+          <p:cNvPr id="45" name="Picture 44" descr="report-analytics-C00000-1_6.png"/>
           <p:cNvPicPr>
             <a:picLocks noChangeAspect="1"/>
           </p:cNvPicPr>
@@ -31795,226 +31837,6 @@
         </p:blipFill>
         <p:spPr>
           <a:xfrm>
-            <a:off x="641350" y="4794250"/>
-            <a:ext cx="190500" cy="190500"/>
-          </a:xfrm>
-          <a:prstGeom prst="rect">
-            <a:avLst/>
-          </a:prstGeom>
-        </p:spPr>
-      </p:pic>
-      <p:sp>
-        <p:nvSpPr>
-          <p:cNvPr id="46" name="TextBox 45"/>
-          <p:cNvSpPr txBox="1"/>
-          <p:nvPr/>
-        </p:nvSpPr>
-        <p:spPr>
-          <a:xfrm>
-            <a:off x="1066800" y="4683125"/>
-            <a:ext cx="4597400" cy="203200"/>
-          </a:xfrm>
-          <a:prstGeom prst="rect">
-            <a:avLst/>
-          </a:prstGeom>
-          <a:noFill/>
-        </p:spPr>
-        <p:txBody>
-          <a:bodyPr wrap="none" anchor="t" lIns="0" tIns="0" rIns="0" bIns="0">
-            <a:noAutofit/>
-          </a:bodyPr>
-          <a:lstStyle/>
-          <a:p>
-            <a:pPr algn="l" marL="0" indent="0">
-              <a:lnSpc>
-                <a:spcPts val="1400"/>
-              </a:lnSpc>
-              <a:buNone/>
-            </a:pPr>
-            <a:r>
-              <a:rPr lang="zh-CN" altLang="en-US" sz="1000" b="1">
-                <a:solidFill>
-                  <a:srgbClr val="C00000"/>
-                </a:solidFill>
-                <a:latin typeface="微软雅黑"/>
-                <a:ea typeface="微软雅黑"/>
-                <a:cs typeface="微软雅黑"/>
-              </a:rPr>
-              <a:t>成果4</a:t>
-            </a:r>
-            <a:r>
-              <a:rPr lang="zh-CN" altLang="en-US" sz="1000" b="1">
-                <a:solidFill>
-                  <a:srgbClr val="1A1A1A"/>
-                </a:solidFill>
-                <a:latin typeface="微软雅黑"/>
-                <a:ea typeface="微软雅黑"/>
-                <a:cs typeface="微软雅黑"/>
-              </a:rPr>
-              <a:t>　列车级数字样机构建方法体系与技术规范　</a:t>
-            </a:r>
-            <a:r>
-              <a:rPr lang="zh-CN" altLang="en-US" sz="1000" b="1">
-                <a:solidFill>
-                  <a:srgbClr val="666666"/>
-                </a:solidFill>
-                <a:latin typeface="微软雅黑"/>
-                <a:ea typeface="微软雅黑"/>
-                <a:cs typeface="微软雅黑"/>
-              </a:rPr>
-              <a:t>1套</a:t>
-            </a:r>
-          </a:p>
-        </p:txBody>
-      </p:sp>
-      <p:sp>
-        <p:nvSpPr>
-          <p:cNvPr id="47" name="TextBox 46"/>
-          <p:cNvSpPr txBox="1"/>
-          <p:nvPr/>
-        </p:nvSpPr>
-        <p:spPr>
-          <a:xfrm>
-            <a:off x="1066800" y="4924425"/>
-            <a:ext cx="4597400" cy="196850"/>
-          </a:xfrm>
-          <a:prstGeom prst="rect">
-            <a:avLst/>
-          </a:prstGeom>
-          <a:noFill/>
-        </p:spPr>
-        <p:txBody>
-          <a:bodyPr wrap="square" anchor="t" lIns="0" tIns="0" rIns="0" bIns="0">
-            <a:noAutofit/>
-          </a:bodyPr>
-          <a:lstStyle/>
-          <a:p>
-            <a:pPr algn="l" marL="0" indent="0">
-              <a:lnSpc>
-                <a:spcPts val="1350"/>
-              </a:lnSpc>
-              <a:buNone/>
-            </a:pPr>
-            <a:r>
-              <a:rPr lang="zh-CN" altLang="en-US" sz="900" b="0">
-                <a:solidFill>
-                  <a:srgbClr val="3D3D3D"/>
-                </a:solidFill>
-                <a:latin typeface="微软雅黑"/>
-                <a:ea typeface="微软雅黑"/>
-                <a:cs typeface="微软雅黑"/>
-              </a:rPr>
-              <a:t>构建方法、集成流程与接口规范，可在**内推广、后续课题复用</a:t>
-            </a:r>
-          </a:p>
-        </p:txBody>
-      </p:sp>
-      <p:sp>
-        <p:nvSpPr>
-          <p:cNvPr id="48" name="Rectangle 47"/>
-          <p:cNvSpPr/>
-          <p:nvPr/>
-        </p:nvSpPr>
-        <p:spPr>
-          <a:xfrm>
-            <a:off x="406400" y="5435600"/>
-            <a:ext cx="5842000" cy="914400"/>
-          </a:xfrm>
-          <a:prstGeom prst="rect">
-            <a:avLst/>
-          </a:prstGeom>
-          <a:solidFill>
-            <a:srgbClr val="FFFFFF"/>
-          </a:solidFill>
-          <a:ln w="6350">
-            <a:solidFill>
-              <a:srgbClr val="E9E9E9"/>
-            </a:solidFill>
-            <a:round/>
-          </a:ln>
-        </p:spPr>
-        <p:txBody>
-          <a:bodyPr rtlCol="0" anchor="ctr" lIns="0" rIns="0" tIns="0" bIns="0"/>
-          <a:lstStyle/>
-          <a:p>
-            <a:pPr algn="ctr"/>
-          </a:p>
-        </p:txBody>
-      </p:sp>
-      <p:sp>
-        <p:nvSpPr>
-          <p:cNvPr id="49" name="Rectangle 48"/>
-          <p:cNvSpPr/>
-          <p:nvPr/>
-        </p:nvSpPr>
-        <p:spPr>
-          <a:xfrm>
-            <a:off x="406400" y="5435600"/>
-            <a:ext cx="19050" cy="914400"/>
-          </a:xfrm>
-          <a:prstGeom prst="rect">
-            <a:avLst/>
-          </a:prstGeom>
-          <a:solidFill>
-            <a:srgbClr val="C00000"/>
-          </a:solidFill>
-          <a:ln>
-            <a:noFill/>
-          </a:ln>
-        </p:spPr>
-        <p:txBody>
-          <a:bodyPr rtlCol="0" anchor="ctr" lIns="0" rIns="0" tIns="0" bIns="0"/>
-          <a:lstStyle/>
-          <a:p>
-            <a:pPr algn="ctr"/>
-          </a:p>
-        </p:txBody>
-      </p:sp>
-      <p:sp>
-        <p:nvSpPr>
-          <p:cNvPr id="50" name="Oval 49"/>
-          <p:cNvSpPr/>
-          <p:nvPr/>
-        </p:nvSpPr>
-        <p:spPr>
-          <a:xfrm>
-            <a:off x="558800" y="5715000"/>
-            <a:ext cx="355600" cy="355600"/>
-          </a:xfrm>
-          <a:prstGeom prst="ellipse">
-            <a:avLst/>
-          </a:prstGeom>
-          <a:solidFill>
-            <a:srgbClr val="F5F5F5"/>
-          </a:solidFill>
-          <a:ln>
-            <a:noFill/>
-          </a:ln>
-        </p:spPr>
-        <p:txBody>
-          <a:bodyPr rtlCol="0" anchor="ctr" lIns="0" rIns="0" tIns="0" bIns="0"/>
-          <a:lstStyle/>
-          <a:p>
-            <a:pPr algn="ctr"/>
-          </a:p>
-        </p:txBody>
-      </p:sp>
-      <p:pic>
-        <p:nvPicPr>
-          <p:cNvPr id="51" name="Picture 50" descr="report-analytics-C00000-1_6.png"/>
-          <p:cNvPicPr>
-            <a:picLocks noChangeAspect="1"/>
-          </p:cNvPicPr>
-          <p:nvPr/>
-        </p:nvPicPr>
-        <p:blipFill>
-          <a:blip r:embed="rId7"/>
-          <a:stretch>
-            <a:fillRect/>
-          </a:stretch>
-        </p:blipFill>
-        <p:spPr>
-          <a:xfrm>
             <a:off x="641350" y="5797550"/>
             <a:ext cx="190500" cy="190500"/>
           </a:xfrm>
@@ -32025,7 +31847,7 @@
       </p:pic>
       <p:sp>
         <p:nvSpPr>
-          <p:cNvPr id="52" name="TextBox 51"/>
+          <p:cNvPr id="46" name="TextBox 45"/>
           <p:cNvSpPr txBox="1"/>
           <p:nvPr/>
         </p:nvSpPr>
@@ -32060,7 +31882,7 @@
                 <a:ea typeface="微软雅黑"/>
                 <a:cs typeface="微软雅黑"/>
               </a:rPr>
-              <a:t>成果5</a:t>
+              <a:t>成果4</a:t>
             </a:r>
             <a:r>
               <a:rPr lang="zh-CN" altLang="en-US" sz="1000" b="1">
@@ -32082,14 +31904,14 @@
                 <a:ea typeface="微软雅黑"/>
                 <a:cs typeface="微软雅黑"/>
               </a:rPr>
-              <a:t>1份</a:t>
-            </a:r>
-          </a:p>
-        </p:txBody>
-      </p:sp>
-      <p:sp>
-        <p:nvSpPr>
-          <p:cNvPr id="53" name="TextBox 52"/>
+              <a:t>报告 1 份</a:t>
+            </a:r>
+          </a:p>
+        </p:txBody>
+      </p:sp>
+      <p:sp>
+        <p:nvSpPr>
+          <p:cNvPr id="47" name="TextBox 46"/>
           <p:cNvSpPr txBox="1"/>
           <p:nvPr/>
         </p:nvSpPr>
@@ -32131,7 +31953,7 @@
       </p:sp>
       <p:sp>
         <p:nvSpPr>
-          <p:cNvPr id="54" name="TextBox 53"/>
+          <p:cNvPr id="48" name="TextBox 47"/>
           <p:cNvSpPr txBox="1"/>
           <p:nvPr/>
         </p:nvSpPr>
@@ -32173,7 +31995,7 @@
       </p:sp>
       <p:sp>
         <p:nvSpPr>
-          <p:cNvPr id="55" name="Rectangle 54"/>
+          <p:cNvPr id="49" name="Rectangle 48"/>
           <p:cNvSpPr/>
           <p:nvPr/>
         </p:nvSpPr>
@@ -32202,7 +32024,7 @@
       </p:sp>
       <p:sp>
         <p:nvSpPr>
-          <p:cNvPr id="56" name="TextBox 55"/>
+          <p:cNvPr id="50" name="TextBox 49"/>
           <p:cNvSpPr txBox="1"/>
           <p:nvPr/>
         </p:nvSpPr>
@@ -32255,7 +32077,7 @@
       </p:sp>
       <p:sp>
         <p:nvSpPr>
-          <p:cNvPr id="57" name="TextBox 56"/>
+          <p:cNvPr id="51" name="TextBox 50"/>
           <p:cNvSpPr txBox="1"/>
           <p:nvPr/>
         </p:nvSpPr>
@@ -32297,7 +32119,7 @@
       </p:sp>
       <p:sp>
         <p:nvSpPr>
-          <p:cNvPr id="58" name="TextBox 57"/>
+          <p:cNvPr id="52" name="TextBox 51"/>
           <p:cNvSpPr txBox="1"/>
           <p:nvPr/>
         </p:nvSpPr>
@@ -32339,7 +32161,7 @@
       </p:sp>
       <p:sp>
         <p:nvSpPr>
-          <p:cNvPr id="59" name="Rectangle 58"/>
+          <p:cNvPr id="53" name="Rectangle 52"/>
           <p:cNvSpPr/>
           <p:nvPr/>
         </p:nvSpPr>
@@ -32368,7 +32190,7 @@
       </p:sp>
       <p:sp>
         <p:nvSpPr>
-          <p:cNvPr id="60" name="TextBox 59"/>
+          <p:cNvPr id="54" name="TextBox 53"/>
           <p:cNvSpPr txBox="1"/>
           <p:nvPr/>
         </p:nvSpPr>
@@ -32421,7 +32243,7 @@
       </p:sp>
       <p:sp>
         <p:nvSpPr>
-          <p:cNvPr id="61" name="TextBox 60"/>
+          <p:cNvPr id="55" name="TextBox 54"/>
           <p:cNvSpPr txBox="1"/>
           <p:nvPr/>
         </p:nvSpPr>
@@ -32463,7 +32285,7 @@
       </p:sp>
       <p:sp>
         <p:nvSpPr>
-          <p:cNvPr id="62" name="TextBox 61"/>
+          <p:cNvPr id="56" name="TextBox 55"/>
           <p:cNvSpPr txBox="1"/>
           <p:nvPr/>
         </p:nvSpPr>
@@ -32505,7 +32327,7 @@
       </p:sp>
       <p:sp>
         <p:nvSpPr>
-          <p:cNvPr id="63" name="Rectangle 62"/>
+          <p:cNvPr id="57" name="Rectangle 56"/>
           <p:cNvSpPr/>
           <p:nvPr/>
         </p:nvSpPr>
@@ -32534,7 +32356,7 @@
       </p:sp>
       <p:sp>
         <p:nvSpPr>
-          <p:cNvPr id="64" name="TextBox 63"/>
+          <p:cNvPr id="58" name="TextBox 57"/>
           <p:cNvSpPr txBox="1"/>
           <p:nvPr/>
         </p:nvSpPr>
@@ -32587,7 +32409,7 @@
       </p:sp>
       <p:sp>
         <p:nvSpPr>
-          <p:cNvPr id="65" name="TextBox 64"/>
+          <p:cNvPr id="59" name="TextBox 58"/>
           <p:cNvSpPr txBox="1"/>
           <p:nvPr/>
         </p:nvSpPr>
@@ -32629,7 +32451,7 @@
       </p:sp>
       <p:sp>
         <p:nvSpPr>
-          <p:cNvPr id="66" name="TextBox 65"/>
+          <p:cNvPr id="60" name="TextBox 59"/>
           <p:cNvSpPr txBox="1"/>
           <p:nvPr/>
         </p:nvSpPr>
@@ -36243,7 +36065,7 @@
         <p:spPr>
           <a:xfrm>
             <a:off x="469900" y="2362200"/>
-            <a:ext cx="558800" cy="304800"/>
+            <a:ext cx="558800" cy="355600"/>
           </a:xfrm>
           <a:prstGeom prst="rect">
             <a:avLst/>
@@ -36285,7 +36107,7 @@
         <p:spPr>
           <a:xfrm>
             <a:off x="1155700" y="2362200"/>
-            <a:ext cx="1752600" cy="304800"/>
+            <a:ext cx="1752600" cy="355600"/>
           </a:xfrm>
           <a:prstGeom prst="rect">
             <a:avLst/>
@@ -36327,7 +36149,7 @@
         <p:spPr>
           <a:xfrm>
             <a:off x="3035300" y="2362200"/>
-            <a:ext cx="660400" cy="304800"/>
+            <a:ext cx="660400" cy="355600"/>
           </a:xfrm>
           <a:prstGeom prst="rect">
             <a:avLst/>
@@ -36369,7 +36191,7 @@
         <p:spPr>
           <a:xfrm>
             <a:off x="3822700" y="2362200"/>
-            <a:ext cx="1854200" cy="304800"/>
+            <a:ext cx="1854200" cy="355600"/>
           </a:xfrm>
           <a:prstGeom prst="rect">
             <a:avLst/>
@@ -36410,7 +36232,7 @@
         </p:nvCxnSpPr>
         <p:spPr>
           <a:xfrm>
-            <a:off x="406400" y="2667000"/>
+            <a:off x="406400" y="2717800"/>
             <a:ext cx="5334000" cy="0"/>
           </a:xfrm>
           <a:prstGeom prst="line">
@@ -36432,8 +36254,8 @@
         </p:nvSpPr>
         <p:spPr>
           <a:xfrm>
-            <a:off x="469900" y="2667000"/>
-            <a:ext cx="558800" cy="304800"/>
+            <a:off x="469900" y="2717800"/>
+            <a:ext cx="558800" cy="355600"/>
           </a:xfrm>
           <a:prstGeom prst="rect">
             <a:avLst/>
@@ -36474,8 +36296,8 @@
         </p:nvSpPr>
         <p:spPr>
           <a:xfrm>
-            <a:off x="1155700" y="2667000"/>
-            <a:ext cx="1752600" cy="304800"/>
+            <a:off x="1155700" y="2717800"/>
+            <a:ext cx="1752600" cy="355600"/>
           </a:xfrm>
           <a:prstGeom prst="rect">
             <a:avLst/>
@@ -36516,8 +36338,8 @@
         </p:nvSpPr>
         <p:spPr>
           <a:xfrm>
-            <a:off x="3035300" y="2667000"/>
-            <a:ext cx="660400" cy="304800"/>
+            <a:off x="3035300" y="2717800"/>
+            <a:ext cx="660400" cy="355600"/>
           </a:xfrm>
           <a:prstGeom prst="rect">
             <a:avLst/>
@@ -36558,8 +36380,8 @@
         </p:nvSpPr>
         <p:spPr>
           <a:xfrm>
-            <a:off x="3822700" y="2667000"/>
-            <a:ext cx="1854200" cy="304800"/>
+            <a:off x="3822700" y="2717800"/>
+            <a:ext cx="1854200" cy="355600"/>
           </a:xfrm>
           <a:prstGeom prst="rect">
             <a:avLst/>
@@ -36600,7 +36422,7 @@
         </p:nvCxnSpPr>
         <p:spPr>
           <a:xfrm>
-            <a:off x="406400" y="2971800"/>
+            <a:off x="406400" y="3073400"/>
             <a:ext cx="5334000" cy="0"/>
           </a:xfrm>
           <a:prstGeom prst="line">
@@ -36622,8 +36444,8 @@
         </p:nvSpPr>
         <p:spPr>
           <a:xfrm>
-            <a:off x="469900" y="2971800"/>
-            <a:ext cx="558800" cy="304800"/>
+            <a:off x="469900" y="3073400"/>
+            <a:ext cx="558800" cy="355600"/>
           </a:xfrm>
           <a:prstGeom prst="rect">
             <a:avLst/>
@@ -36664,8 +36486,8 @@
         </p:nvSpPr>
         <p:spPr>
           <a:xfrm>
-            <a:off x="1155700" y="2971800"/>
-            <a:ext cx="1752600" cy="304800"/>
+            <a:off x="1155700" y="3073400"/>
+            <a:ext cx="1752600" cy="355600"/>
           </a:xfrm>
           <a:prstGeom prst="rect">
             <a:avLst/>
@@ -36706,8 +36528,8 @@
         </p:nvSpPr>
         <p:spPr>
           <a:xfrm>
-            <a:off x="3035300" y="2971800"/>
-            <a:ext cx="660400" cy="304800"/>
+            <a:off x="3035300" y="3073400"/>
+            <a:ext cx="660400" cy="355600"/>
           </a:xfrm>
           <a:prstGeom prst="rect">
             <a:avLst/>
@@ -36748,8 +36570,8 @@
         </p:nvSpPr>
         <p:spPr>
           <a:xfrm>
-            <a:off x="3822700" y="2971800"/>
-            <a:ext cx="1854200" cy="304800"/>
+            <a:off x="3822700" y="3073400"/>
+            <a:ext cx="1854200" cy="355600"/>
           </a:xfrm>
           <a:prstGeom prst="rect">
             <a:avLst/>
@@ -36790,7 +36612,7 @@
         </p:nvCxnSpPr>
         <p:spPr>
           <a:xfrm>
-            <a:off x="406400" y="3276600"/>
+            <a:off x="406400" y="3429000"/>
             <a:ext cx="5334000" cy="0"/>
           </a:xfrm>
           <a:prstGeom prst="line">
@@ -36812,7 +36634,7 @@
         </p:nvSpPr>
         <p:spPr>
           <a:xfrm>
-            <a:off x="406400" y="3429000"/>
+            <a:off x="406400" y="3581400"/>
             <a:ext cx="5334000" cy="228600"/>
           </a:xfrm>
           <a:prstGeom prst="rect">
@@ -36854,7 +36676,7 @@
         </p:nvCxnSpPr>
         <p:spPr>
           <a:xfrm>
-            <a:off x="406400" y="3708400"/>
+            <a:off x="406400" y="3860800"/>
             <a:ext cx="5334000" cy="0"/>
           </a:xfrm>
           <a:prstGeom prst="line">
@@ -36876,8 +36698,8 @@
         </p:nvSpPr>
         <p:spPr>
           <a:xfrm>
-            <a:off x="469900" y="3708400"/>
-            <a:ext cx="3746500" cy="279400"/>
+            <a:off x="469900" y="3860800"/>
+            <a:ext cx="3746500" cy="340360"/>
           </a:xfrm>
           <a:prstGeom prst="rect">
             <a:avLst/>
@@ -36905,7 +36727,7 @@
                 <a:ea typeface="微软雅黑"/>
                 <a:cs typeface="微软雅黑"/>
               </a:rPr>
-              <a:t>多智能体协同运行与调度引擎</a:t>
+              <a:t>多智能体协同运行、调度引擎／列车级数字样机</a:t>
             </a:r>
           </a:p>
         </p:txBody>
@@ -36918,8 +36740,8 @@
         </p:nvSpPr>
         <p:spPr>
           <a:xfrm>
-            <a:off x="4216400" y="3708400"/>
-            <a:ext cx="1460500" cy="279400"/>
+            <a:off x="4216400" y="3860800"/>
+            <a:ext cx="1460500" cy="340360"/>
           </a:xfrm>
           <a:prstGeom prst="rect">
             <a:avLst/>
@@ -36947,7 +36769,7 @@
                 <a:ea typeface="微软雅黑"/>
                 <a:cs typeface="微软雅黑"/>
               </a:rPr>
-              <a:t>软件 1 套</a:t>
+              <a:t>系统 1 套</a:t>
             </a:r>
           </a:p>
         </p:txBody>
@@ -36960,7 +36782,7 @@
         </p:nvCxnSpPr>
         <p:spPr>
           <a:xfrm>
-            <a:off x="406400" y="3987800"/>
+            <a:off x="406400" y="4201160"/>
             <a:ext cx="5334000" cy="0"/>
           </a:xfrm>
           <a:prstGeom prst="line">
@@ -36982,8 +36804,8 @@
         </p:nvSpPr>
         <p:spPr>
           <a:xfrm>
-            <a:off x="469900" y="3987800"/>
-            <a:ext cx="3746500" cy="279400"/>
+            <a:off x="469900" y="4201160"/>
+            <a:ext cx="3746500" cy="340360"/>
           </a:xfrm>
           <a:prstGeom prst="rect">
             <a:avLst/>
@@ -37024,8 +36846,8 @@
         </p:nvSpPr>
         <p:spPr>
           <a:xfrm>
-            <a:off x="4216400" y="3987800"/>
-            <a:ext cx="1460500" cy="279400"/>
+            <a:off x="4216400" y="4201160"/>
+            <a:ext cx="1460500" cy="340360"/>
           </a:xfrm>
           <a:prstGeom prst="rect">
             <a:avLst/>
@@ -37066,7 +36888,7 @@
         </p:nvCxnSpPr>
         <p:spPr>
           <a:xfrm>
-            <a:off x="406400" y="4267200"/>
+            <a:off x="406400" y="4541520"/>
             <a:ext cx="5334000" cy="0"/>
           </a:xfrm>
           <a:prstGeom prst="line">
@@ -37088,8 +36910,8 @@
         </p:nvSpPr>
         <p:spPr>
           <a:xfrm>
-            <a:off x="469900" y="4267200"/>
-            <a:ext cx="3746500" cy="279400"/>
+            <a:off x="469900" y="4541520"/>
+            <a:ext cx="3746500" cy="340360"/>
           </a:xfrm>
           <a:prstGeom prst="rect">
             <a:avLst/>
@@ -37117,7 +36939,7 @@
                 <a:ea typeface="微软雅黑"/>
                 <a:cs typeface="微软雅黑"/>
               </a:rPr>
-              <a:t>列车级数字样机</a:t>
+              <a:t>列车级数字样机构建方法体系与技术规范</a:t>
             </a:r>
           </a:p>
         </p:txBody>
@@ -37130,8 +36952,8 @@
         </p:nvSpPr>
         <p:spPr>
           <a:xfrm>
-            <a:off x="4216400" y="4267200"/>
-            <a:ext cx="1460500" cy="279400"/>
+            <a:off x="4216400" y="4541520"/>
+            <a:ext cx="1460500" cy="340360"/>
           </a:xfrm>
           <a:prstGeom prst="rect">
             <a:avLst/>
@@ -37159,7 +36981,7 @@
                 <a:ea typeface="微软雅黑"/>
                 <a:cs typeface="微软雅黑"/>
               </a:rPr>
-              <a:t>系统 1 套</a:t>
+              <a:t>规范 1 套</a:t>
             </a:r>
           </a:p>
         </p:txBody>
@@ -37172,7 +36994,7 @@
         </p:nvCxnSpPr>
         <p:spPr>
           <a:xfrm>
-            <a:off x="406400" y="4546600"/>
+            <a:off x="406400" y="4881880"/>
             <a:ext cx="5334000" cy="0"/>
           </a:xfrm>
           <a:prstGeom prst="line">
@@ -37194,8 +37016,8 @@
         </p:nvSpPr>
         <p:spPr>
           <a:xfrm>
-            <a:off x="469900" y="4546600"/>
-            <a:ext cx="3746500" cy="279400"/>
+            <a:off x="469900" y="4881880"/>
+            <a:ext cx="3746500" cy="340360"/>
           </a:xfrm>
           <a:prstGeom prst="rect">
             <a:avLst/>
@@ -37223,7 +37045,7 @@
                 <a:ea typeface="微软雅黑"/>
                 <a:cs typeface="微软雅黑"/>
               </a:rPr>
-              <a:t>列车级数字样机构建方法体系与技术规范</a:t>
+              <a:t>示范应用与验证报告</a:t>
             </a:r>
           </a:p>
         </p:txBody>
@@ -37236,8 +37058,8 @@
         </p:nvSpPr>
         <p:spPr>
           <a:xfrm>
-            <a:off x="4216400" y="4546600"/>
-            <a:ext cx="1460500" cy="279400"/>
+            <a:off x="4216400" y="4881880"/>
+            <a:ext cx="1460500" cy="340360"/>
           </a:xfrm>
           <a:prstGeom prst="rect">
             <a:avLst/>
@@ -37265,7 +37087,7 @@
                 <a:ea typeface="微软雅黑"/>
                 <a:cs typeface="微软雅黑"/>
               </a:rPr>
-              <a:t>规范 1 套</a:t>
+              <a:t>报告 1 份</a:t>
             </a:r>
           </a:p>
         </p:txBody>
@@ -37278,7 +37100,7 @@
         </p:nvCxnSpPr>
         <p:spPr>
           <a:xfrm>
-            <a:off x="406400" y="4826000"/>
+            <a:off x="406400" y="5222240"/>
             <a:ext cx="5334000" cy="0"/>
           </a:xfrm>
           <a:prstGeom prst="line">
@@ -37300,8 +37122,8 @@
         </p:nvSpPr>
         <p:spPr>
           <a:xfrm>
-            <a:off x="469900" y="4826000"/>
-            <a:ext cx="3746500" cy="279400"/>
+            <a:off x="469900" y="5222240"/>
+            <a:ext cx="3746500" cy="340360"/>
           </a:xfrm>
           <a:prstGeom prst="rect">
             <a:avLst/>
@@ -37329,7 +37151,7 @@
                 <a:ea typeface="微软雅黑"/>
                 <a:cs typeface="微软雅黑"/>
               </a:rPr>
-              <a:t>示范应用与验证报告</a:t>
+              <a:t>知识产权与标准</a:t>
             </a:r>
           </a:p>
         </p:txBody>
@@ -37342,8 +37164,8 @@
         </p:nvSpPr>
         <p:spPr>
           <a:xfrm>
-            <a:off x="4216400" y="4826000"/>
-            <a:ext cx="1460500" cy="279400"/>
+            <a:off x="4216400" y="5222240"/>
+            <a:ext cx="1460500" cy="340360"/>
           </a:xfrm>
           <a:prstGeom prst="rect">
             <a:avLst/>
@@ -37371,7 +37193,7 @@
                 <a:ea typeface="微软雅黑"/>
                 <a:cs typeface="微软雅黑"/>
               </a:rPr>
-              <a:t>报告 1 份</a:t>
+              <a:t>专利 4 · 论文 2 · 标准 2</a:t>
             </a:r>
           </a:p>
         </p:txBody>
@@ -37384,7 +37206,7 @@
         </p:nvCxnSpPr>
         <p:spPr>
           <a:xfrm>
-            <a:off x="406400" y="5105400"/>
+            <a:off x="406400" y="5562600"/>
             <a:ext cx="5334000" cy="0"/>
           </a:xfrm>
           <a:prstGeom prst="line">
@@ -37406,8 +37228,8 @@
         </p:nvSpPr>
         <p:spPr>
           <a:xfrm>
-            <a:off x="469900" y="5105400"/>
-            <a:ext cx="3746500" cy="279400"/>
+            <a:off x="406400" y="5715000"/>
+            <a:ext cx="5334000" cy="228600"/>
           </a:xfrm>
           <a:prstGeom prst="rect">
             <a:avLst/>
@@ -37422,12 +37244,12 @@
           <a:p>
             <a:pPr algn="l" marL="0" indent="0">
               <a:lnSpc>
-                <a:spcPts val="1400"/>
-              </a:lnSpc>
-              <a:buNone/>
-            </a:pPr>
-            <a:r>
-              <a:rPr lang="zh-CN" altLang="en-US" sz="1000" b="0">
+                <a:spcPts val="1550"/>
+              </a:lnSpc>
+              <a:buNone/>
+            </a:pPr>
+            <a:r>
+              <a:rPr lang="zh-CN" altLang="en-US" sz="1200" b="1">
                 <a:solidFill>
                   <a:srgbClr val="1A1A1A"/>
                 </a:solidFill>
@@ -37435,7 +37257,7 @@
                 <a:ea typeface="微软雅黑"/>
                 <a:cs typeface="微软雅黑"/>
               </a:rPr>
-              <a:t>知识产权与标准</a:t>
+              <a:t>预计经费</a:t>
             </a:r>
           </a:p>
         </p:txBody>
@@ -37448,8 +37270,8 @@
         </p:nvSpPr>
         <p:spPr>
           <a:xfrm>
-            <a:off x="4216400" y="5105400"/>
-            <a:ext cx="1460500" cy="279400"/>
+            <a:off x="1143000" y="5715000"/>
+            <a:ext cx="4597400" cy="228600"/>
           </a:xfrm>
           <a:prstGeom prst="rect">
             <a:avLst/>
@@ -37462,14 +37284,241 @@
           </a:bodyPr>
           <a:lstStyle/>
           <a:p>
-            <a:pPr algn="r" marL="0" indent="0">
+            <a:pPr algn="l" marL="0" indent="0">
               <a:lnSpc>
                 <a:spcPts val="1300"/>
               </a:lnSpc>
               <a:buNone/>
             </a:pPr>
             <a:r>
-              <a:rPr lang="zh-CN" altLang="en-US" sz="900" b="0">
+              <a:rPr lang="zh-CN" altLang="en-US" sz="950" b="1">
+                <a:solidFill>
+                  <a:srgbClr val="8C8C8C"/>
+                </a:solidFill>
+                <a:latin typeface="微软雅黑"/>
+                <a:ea typeface="微软雅黑"/>
+                <a:cs typeface="微软雅黑"/>
+              </a:rPr>
+              <a:t>总预算 100 万元</a:t>
+            </a:r>
+          </a:p>
+        </p:txBody>
+      </p:sp>
+      <p:sp>
+        <p:nvSpPr>
+          <p:cNvPr id="42" name="Rectangle 41"/>
+          <p:cNvSpPr/>
+          <p:nvPr/>
+        </p:nvSpPr>
+        <p:spPr>
+          <a:xfrm>
+            <a:off x="406400" y="6007100"/>
+            <a:ext cx="2635250" cy="127000"/>
+          </a:xfrm>
+          <a:prstGeom prst="rect">
+            <a:avLst/>
+          </a:prstGeom>
+          <a:solidFill>
+            <a:srgbClr val="C00000"/>
+          </a:solidFill>
+          <a:ln>
+            <a:noFill/>
+          </a:ln>
+        </p:spPr>
+        <p:txBody>
+          <a:bodyPr rtlCol="0" anchor="ctr" lIns="0" rIns="0" tIns="0" bIns="0"/>
+          <a:lstStyle/>
+          <a:p>
+            <a:pPr algn="ctr"/>
+          </a:p>
+        </p:txBody>
+      </p:sp>
+      <p:sp>
+        <p:nvSpPr>
+          <p:cNvPr id="43" name="Rectangle 42"/>
+          <p:cNvSpPr/>
+          <p:nvPr/>
+        </p:nvSpPr>
+        <p:spPr>
+          <a:xfrm>
+            <a:off x="3054350" y="6007100"/>
+            <a:ext cx="1581150" cy="127000"/>
+          </a:xfrm>
+          <a:prstGeom prst="rect">
+            <a:avLst/>
+          </a:prstGeom>
+          <a:solidFill>
+            <a:srgbClr val="D86060"/>
+          </a:solidFill>
+          <a:ln>
+            <a:noFill/>
+          </a:ln>
+        </p:spPr>
+        <p:txBody>
+          <a:bodyPr rtlCol="0" anchor="ctr" lIns="0" rIns="0" tIns="0" bIns="0"/>
+          <a:lstStyle/>
+          <a:p>
+            <a:pPr algn="ctr"/>
+          </a:p>
+        </p:txBody>
+      </p:sp>
+      <p:sp>
+        <p:nvSpPr>
+          <p:cNvPr id="44" name="Rectangle 43"/>
+          <p:cNvSpPr/>
+          <p:nvPr/>
+        </p:nvSpPr>
+        <p:spPr>
+          <a:xfrm>
+            <a:off x="4648200" y="6007100"/>
+            <a:ext cx="263525" cy="127000"/>
+          </a:xfrm>
+          <a:prstGeom prst="rect">
+            <a:avLst/>
+          </a:prstGeom>
+          <a:solidFill>
+            <a:srgbClr val="B8B8B8"/>
+          </a:solidFill>
+          <a:ln>
+            <a:noFill/>
+          </a:ln>
+        </p:spPr>
+        <p:txBody>
+          <a:bodyPr rtlCol="0" anchor="ctr" lIns="0" rIns="0" tIns="0" bIns="0"/>
+          <a:lstStyle/>
+          <a:p>
+            <a:pPr algn="ctr"/>
+          </a:p>
+        </p:txBody>
+      </p:sp>
+      <p:sp>
+        <p:nvSpPr>
+          <p:cNvPr id="45" name="Rectangle 44"/>
+          <p:cNvSpPr/>
+          <p:nvPr/>
+        </p:nvSpPr>
+        <p:spPr>
+          <a:xfrm>
+            <a:off x="4924425" y="6007100"/>
+            <a:ext cx="263525" cy="127000"/>
+          </a:xfrm>
+          <a:prstGeom prst="rect">
+            <a:avLst/>
+          </a:prstGeom>
+          <a:solidFill>
+            <a:srgbClr val="C8C8C8"/>
+          </a:solidFill>
+          <a:ln>
+            <a:noFill/>
+          </a:ln>
+        </p:spPr>
+        <p:txBody>
+          <a:bodyPr rtlCol="0" anchor="ctr" lIns="0" rIns="0" tIns="0" bIns="0"/>
+          <a:lstStyle/>
+          <a:p>
+            <a:pPr algn="ctr"/>
+          </a:p>
+        </p:txBody>
+      </p:sp>
+      <p:sp>
+        <p:nvSpPr>
+          <p:cNvPr id="46" name="Rectangle 45"/>
+          <p:cNvSpPr/>
+          <p:nvPr/>
+        </p:nvSpPr>
+        <p:spPr>
+          <a:xfrm>
+            <a:off x="5200650" y="6007100"/>
+            <a:ext cx="263525" cy="127000"/>
+          </a:xfrm>
+          <a:prstGeom prst="rect">
+            <a:avLst/>
+          </a:prstGeom>
+          <a:solidFill>
+            <a:srgbClr val="D8D8D8"/>
+          </a:solidFill>
+          <a:ln>
+            <a:noFill/>
+          </a:ln>
+        </p:spPr>
+        <p:txBody>
+          <a:bodyPr rtlCol="0" anchor="ctr" lIns="0" rIns="0" tIns="0" bIns="0"/>
+          <a:lstStyle/>
+          <a:p>
+            <a:pPr algn="ctr"/>
+          </a:p>
+        </p:txBody>
+      </p:sp>
+      <p:sp>
+        <p:nvSpPr>
+          <p:cNvPr id="47" name="Rectangle 46"/>
+          <p:cNvSpPr/>
+          <p:nvPr/>
+        </p:nvSpPr>
+        <p:spPr>
+          <a:xfrm>
+            <a:off x="5476875" y="6007100"/>
+            <a:ext cx="263525" cy="127000"/>
+          </a:xfrm>
+          <a:prstGeom prst="rect">
+            <a:avLst/>
+          </a:prstGeom>
+          <a:solidFill>
+            <a:srgbClr val="E6E6E6"/>
+          </a:solidFill>
+          <a:ln>
+            <a:noFill/>
+          </a:ln>
+        </p:spPr>
+        <p:txBody>
+          <a:bodyPr rtlCol="0" anchor="ctr" lIns="0" rIns="0" tIns="0" bIns="0"/>
+          <a:lstStyle/>
+          <a:p>
+            <a:pPr algn="ctr"/>
+          </a:p>
+        </p:txBody>
+      </p:sp>
+      <p:sp>
+        <p:nvSpPr>
+          <p:cNvPr id="48" name="TextBox 47"/>
+          <p:cNvSpPr txBox="1"/>
+          <p:nvPr/>
+        </p:nvSpPr>
+        <p:spPr>
+          <a:xfrm>
+            <a:off x="406400" y="6172200"/>
+            <a:ext cx="5334000" cy="177800"/>
+          </a:xfrm>
+          <a:prstGeom prst="rect">
+            <a:avLst/>
+          </a:prstGeom>
+          <a:noFill/>
+        </p:spPr>
+        <p:txBody>
+          <a:bodyPr wrap="none" anchor="t" lIns="0" tIns="0" rIns="0" bIns="0">
+            <a:noAutofit/>
+          </a:bodyPr>
+          <a:lstStyle/>
+          <a:p>
+            <a:pPr algn="l" marL="0" indent="0">
+              <a:lnSpc>
+                <a:spcPts val="1300"/>
+              </a:lnSpc>
+              <a:buNone/>
+            </a:pPr>
+            <a:r>
+              <a:rPr lang="zh-CN" altLang="en-US" sz="850" b="1">
+                <a:solidFill>
+                  <a:srgbClr val="1A1A1A"/>
+                </a:solidFill>
+                <a:latin typeface="微软雅黑"/>
+                <a:ea typeface="微软雅黑"/>
+                <a:cs typeface="微软雅黑"/>
+              </a:rPr>
+              <a:t>直接投入 50</a:t>
+            </a:r>
+            <a:r>
+              <a:rPr lang="zh-CN" altLang="en-US" sz="850" b="0">
                 <a:solidFill>
                   <a:srgbClr val="666666"/>
                 </a:solidFill>
@@ -37477,21 +37526,85 @@
                 <a:ea typeface="微软雅黑"/>
                 <a:cs typeface="微软雅黑"/>
               </a:rPr>
-              <a:t>专利 4 · 论文 2 · 标准 2</a:t>
+              <a:t>　算力服务器 40 · 工作站 10　　</a:t>
+            </a:r>
+            <a:r>
+              <a:rPr lang="zh-CN" altLang="en-US" sz="850" b="1">
+                <a:solidFill>
+                  <a:srgbClr val="1A1A1A"/>
+                </a:solidFill>
+                <a:latin typeface="微软雅黑"/>
+                <a:ea typeface="微软雅黑"/>
+                <a:cs typeface="微软雅黑"/>
+              </a:rPr>
+              <a:t>人员 30</a:t>
+            </a:r>
+            <a:r>
+              <a:rPr lang="zh-CN" altLang="en-US" sz="850" b="0">
+                <a:solidFill>
+                  <a:srgbClr val="666666"/>
+                </a:solidFill>
+                <a:latin typeface="微软雅黑"/>
+                <a:ea typeface="微软雅黑"/>
+                <a:cs typeface="微软雅黑"/>
+              </a:rPr>
+              <a:t>　　折旧／外协／成果／其他 各 5</a:t>
+            </a:r>
+          </a:p>
+        </p:txBody>
+      </p:sp>
+      <p:sp>
+        <p:nvSpPr>
+          <p:cNvPr id="49" name="TextBox 48"/>
+          <p:cNvSpPr txBox="1"/>
+          <p:nvPr/>
+        </p:nvSpPr>
+        <p:spPr>
+          <a:xfrm>
+            <a:off x="5994400" y="2082800"/>
+            <a:ext cx="5791200" cy="228600"/>
+          </a:xfrm>
+          <a:prstGeom prst="rect">
+            <a:avLst/>
+          </a:prstGeom>
+          <a:noFill/>
+        </p:spPr>
+        <p:txBody>
+          <a:bodyPr wrap="none" anchor="ctr" lIns="0" tIns="0" rIns="0" bIns="0">
+            <a:noAutofit/>
+          </a:bodyPr>
+          <a:lstStyle/>
+          <a:p>
+            <a:pPr algn="l" marL="0" indent="0">
+              <a:lnSpc>
+                <a:spcPts val="1550"/>
+              </a:lnSpc>
+              <a:buNone/>
+            </a:pPr>
+            <a:r>
+              <a:rPr lang="zh-CN" altLang="en-US" sz="1200" b="1">
+                <a:solidFill>
+                  <a:srgbClr val="1A1A1A"/>
+                </a:solidFill>
+                <a:latin typeface="微软雅黑"/>
+                <a:ea typeface="微软雅黑"/>
+                <a:cs typeface="微软雅黑"/>
+              </a:rPr>
+              <a:t>项目子课题与本课题边界</a:t>
             </a:r>
           </a:p>
         </p:txBody>
       </p:sp>
       <p:cxnSp>
         <p:nvCxnSpPr>
-          <p:cNvPr id="42" name="Connector 41"/>
+          <p:cNvPr id="50" name="Connector 49"/>
           <p:cNvCxnSpPr/>
           <p:nvPr/>
         </p:nvCxnSpPr>
         <p:spPr>
           <a:xfrm>
-            <a:off x="406400" y="5384800"/>
-            <a:ext cx="5334000" cy="0"/>
+            <a:off x="5994400" y="2362200"/>
+            <a:ext cx="5791200" cy="0"/>
           </a:xfrm>
           <a:prstGeom prst="line">
             <a:avLst/>
@@ -37506,14 +37619,14 @@
       </p:cxnSp>
       <p:sp>
         <p:nvSpPr>
-          <p:cNvPr id="43" name="TextBox 42"/>
-          <p:cNvSpPr txBox="1"/>
-          <p:nvPr/>
-        </p:nvSpPr>
-        <p:spPr>
-          <a:xfrm>
-            <a:off x="406400" y="5537200"/>
-            <a:ext cx="5334000" cy="228600"/>
+          <p:cNvPr id="51" name="TextBox 50"/>
+          <p:cNvSpPr txBox="1"/>
+          <p:nvPr/>
+        </p:nvSpPr>
+        <p:spPr>
+          <a:xfrm>
+            <a:off x="5994400" y="2362200"/>
+            <a:ext cx="533400" cy="613833"/>
           </a:xfrm>
           <a:prstGeom prst="rect">
             <a:avLst/>
@@ -37526,14 +37639,56 @@
           </a:bodyPr>
           <a:lstStyle/>
           <a:p>
+            <a:pPr algn="ctr" marL="0" indent="0">
+              <a:lnSpc>
+                <a:spcPts val="1700"/>
+              </a:lnSpc>
+              <a:buNone/>
+            </a:pPr>
+            <a:r>
+              <a:rPr lang="zh-CN" altLang="en-US" sz="1300" b="1">
+                <a:solidFill>
+                  <a:srgbClr val="1A1A1A"/>
+                </a:solidFill>
+                <a:latin typeface="Consolas"/>
+                <a:ea typeface="微软雅黑"/>
+                <a:cs typeface="Consolas"/>
+              </a:rPr>
+              <a:t>7.1</a:t>
+            </a:r>
+          </a:p>
+        </p:txBody>
+      </p:sp>
+      <p:sp>
+        <p:nvSpPr>
+          <p:cNvPr id="52" name="TextBox 51"/>
+          <p:cNvSpPr txBox="1"/>
+          <p:nvPr/>
+        </p:nvSpPr>
+        <p:spPr>
+          <a:xfrm>
+            <a:off x="6654800" y="2459567"/>
+            <a:ext cx="4064000" cy="203200"/>
+          </a:xfrm>
+          <a:prstGeom prst="rect">
+            <a:avLst/>
+          </a:prstGeom>
+          <a:noFill/>
+        </p:spPr>
+        <p:txBody>
+          <a:bodyPr wrap="none" anchor="t" lIns="0" tIns="0" rIns="0" bIns="0">
+            <a:noAutofit/>
+          </a:bodyPr>
+          <a:lstStyle/>
+          <a:p>
             <a:pPr algn="l" marL="0" indent="0">
               <a:lnSpc>
-                <a:spcPts val="1550"/>
-              </a:lnSpc>
-              <a:buNone/>
-            </a:pPr>
-            <a:r>
-              <a:rPr lang="zh-CN" altLang="en-US" sz="1200" b="1">
+                <a:spcPts val="1600"/>
+              </a:lnSpc>
+              <a:buNone/>
+            </a:pPr>
+            <a:r>
+              <a:rPr lang="zh-CN" altLang="en-US" sz="1050" b="1">
                 <a:solidFill>
                   <a:srgbClr val="1A1A1A"/>
                 </a:solidFill>
@@ -37541,21 +37696,85 @@
                 <a:ea typeface="微软雅黑"/>
                 <a:cs typeface="微软雅黑"/>
               </a:rPr>
-              <a:t>预计经费</a:t>
-            </a:r>
-          </a:p>
-        </p:txBody>
-      </p:sp>
-      <p:sp>
-        <p:nvSpPr>
-          <p:cNvPr id="44" name="TextBox 43"/>
-          <p:cNvSpPr txBox="1"/>
-          <p:nvPr/>
-        </p:nvSpPr>
-        <p:spPr>
-          <a:xfrm>
-            <a:off x="1143000" y="5537200"/>
-            <a:ext cx="4597400" cy="228600"/>
+              <a:t>高质量数据集</a:t>
+            </a:r>
+          </a:p>
+        </p:txBody>
+      </p:sp>
+      <p:sp>
+        <p:nvSpPr>
+          <p:cNvPr id="53" name="TextBox 52"/>
+          <p:cNvSpPr txBox="1"/>
+          <p:nvPr/>
+        </p:nvSpPr>
+        <p:spPr>
+          <a:xfrm>
+            <a:off x="6654800" y="2700867"/>
+            <a:ext cx="4978400" cy="190500"/>
+          </a:xfrm>
+          <a:prstGeom prst="rect">
+            <a:avLst/>
+          </a:prstGeom>
+          <a:noFill/>
+        </p:spPr>
+        <p:txBody>
+          <a:bodyPr wrap="square" anchor="t" lIns="0" tIns="0" rIns="0" bIns="0">
+            <a:noAutofit/>
+          </a:bodyPr>
+          <a:lstStyle/>
+          <a:p>
+            <a:pPr algn="l" marL="0" indent="0">
+              <a:lnSpc>
+                <a:spcPts val="1400"/>
+              </a:lnSpc>
+              <a:buNone/>
+            </a:pPr>
+            <a:r>
+              <a:rPr lang="zh-CN" altLang="en-US" sz="950" b="0">
+                <a:solidFill>
+                  <a:srgbClr val="666666"/>
+                </a:solidFill>
+                <a:latin typeface="微软雅黑"/>
+                <a:ea typeface="微软雅黑"/>
+                <a:cs typeface="微软雅黑"/>
+              </a:rPr>
+              <a:t>用其数据规范与接口，不重复建库</a:t>
+            </a:r>
+          </a:p>
+        </p:txBody>
+      </p:sp>
+      <p:cxnSp>
+        <p:nvCxnSpPr>
+          <p:cNvPr id="54" name="Connector 53"/>
+          <p:cNvCxnSpPr/>
+          <p:nvPr/>
+        </p:nvCxnSpPr>
+        <p:spPr>
+          <a:xfrm>
+            <a:off x="5994400" y="2976033"/>
+            <a:ext cx="5791200" cy="0"/>
+          </a:xfrm>
+          <a:prstGeom prst="line">
+            <a:avLst/>
+          </a:prstGeom>
+          <a:ln w="6350">
+            <a:solidFill>
+              <a:srgbClr val="E9E9E9"/>
+            </a:solidFill>
+            <a:round/>
+          </a:ln>
+        </p:spPr>
+      </p:cxnSp>
+      <p:sp>
+        <p:nvSpPr>
+          <p:cNvPr id="55" name="TextBox 54"/>
+          <p:cNvSpPr txBox="1"/>
+          <p:nvPr/>
+        </p:nvSpPr>
+        <p:spPr>
+          <a:xfrm>
+            <a:off x="5994400" y="2976033"/>
+            <a:ext cx="533400" cy="613833"/>
           </a:xfrm>
           <a:prstGeom prst="rect">
             <a:avLst/>
@@ -37568,36 +37787,171 @@
           </a:bodyPr>
           <a:lstStyle/>
           <a:p>
+            <a:pPr algn="ctr" marL="0" indent="0">
+              <a:lnSpc>
+                <a:spcPts val="1700"/>
+              </a:lnSpc>
+              <a:buNone/>
+            </a:pPr>
+            <a:r>
+              <a:rPr lang="zh-CN" altLang="en-US" sz="1300" b="1">
+                <a:solidFill>
+                  <a:srgbClr val="1A1A1A"/>
+                </a:solidFill>
+                <a:latin typeface="Consolas"/>
+                <a:ea typeface="微软雅黑"/>
+                <a:cs typeface="Consolas"/>
+              </a:rPr>
+              <a:t>7.2</a:t>
+            </a:r>
+          </a:p>
+        </p:txBody>
+      </p:sp>
+      <p:sp>
+        <p:nvSpPr>
+          <p:cNvPr id="56" name="TextBox 55"/>
+          <p:cNvSpPr txBox="1"/>
+          <p:nvPr/>
+        </p:nvSpPr>
+        <p:spPr>
+          <a:xfrm>
+            <a:off x="6654800" y="3073400"/>
+            <a:ext cx="4064000" cy="203200"/>
+          </a:xfrm>
+          <a:prstGeom prst="rect">
+            <a:avLst/>
+          </a:prstGeom>
+          <a:noFill/>
+        </p:spPr>
+        <p:txBody>
+          <a:bodyPr wrap="none" anchor="t" lIns="0" tIns="0" rIns="0" bIns="0">
+            <a:noAutofit/>
+          </a:bodyPr>
+          <a:lstStyle/>
+          <a:p>
             <a:pPr algn="l" marL="0" indent="0">
               <a:lnSpc>
-                <a:spcPts val="1300"/>
-              </a:lnSpc>
-              <a:buNone/>
-            </a:pPr>
-            <a:r>
-              <a:rPr lang="zh-CN" altLang="en-US" sz="950" b="1">
-                <a:solidFill>
-                  <a:srgbClr val="8C8C8C"/>
-                </a:solidFill>
-                <a:latin typeface="微软雅黑"/>
-                <a:ea typeface="微软雅黑"/>
-                <a:cs typeface="微软雅黑"/>
-              </a:rPr>
-              <a:t>总预算 100 万元</a:t>
-            </a:r>
-          </a:p>
-        </p:txBody>
-      </p:sp>
-      <p:sp>
-        <p:nvSpPr>
-          <p:cNvPr id="45" name="Rectangle 44"/>
+                <a:spcPts val="1600"/>
+              </a:lnSpc>
+              <a:buNone/>
+            </a:pPr>
+            <a:r>
+              <a:rPr lang="zh-CN" altLang="en-US" sz="1050" b="1">
+                <a:solidFill>
+                  <a:srgbClr val="1A1A1A"/>
+                </a:solidFill>
+                <a:latin typeface="微软雅黑"/>
+                <a:ea typeface="微软雅黑"/>
+                <a:cs typeface="微软雅黑"/>
+              </a:rPr>
+              <a:t>多物理域建模与仿真智能体</a:t>
+            </a:r>
+          </a:p>
+        </p:txBody>
+      </p:sp>
+      <p:sp>
+        <p:nvSpPr>
+          <p:cNvPr id="57" name="TextBox 56"/>
+          <p:cNvSpPr txBox="1"/>
+          <p:nvPr/>
+        </p:nvSpPr>
+        <p:spPr>
+          <a:xfrm>
+            <a:off x="6654800" y="3314700"/>
+            <a:ext cx="4978400" cy="190500"/>
+          </a:xfrm>
+          <a:prstGeom prst="rect">
+            <a:avLst/>
+          </a:prstGeom>
+          <a:noFill/>
+        </p:spPr>
+        <p:txBody>
+          <a:bodyPr wrap="square" anchor="t" lIns="0" tIns="0" rIns="0" bIns="0">
+            <a:noAutofit/>
+          </a:bodyPr>
+          <a:lstStyle/>
+          <a:p>
+            <a:pPr algn="l" marL="0" indent="0">
+              <a:lnSpc>
+                <a:spcPts val="1400"/>
+              </a:lnSpc>
+              <a:buNone/>
+            </a:pPr>
+            <a:r>
+              <a:rPr lang="zh-CN" altLang="en-US" sz="950" b="0">
+                <a:solidFill>
+                  <a:srgbClr val="666666"/>
+                </a:solidFill>
+                <a:latin typeface="微软雅黑"/>
+                <a:ea typeface="微软雅黑"/>
+                <a:cs typeface="微软雅黑"/>
+              </a:rPr>
+              <a:t>只建验证必需的智能体</a:t>
+            </a:r>
+          </a:p>
+        </p:txBody>
+      </p:sp>
+      <p:cxnSp>
+        <p:nvCxnSpPr>
+          <p:cNvPr id="58" name="Connector 57"/>
+          <p:cNvCxnSpPr/>
+          <p:nvPr/>
+        </p:nvCxnSpPr>
+        <p:spPr>
+          <a:xfrm>
+            <a:off x="5994400" y="3589867"/>
+            <a:ext cx="5791200" cy="0"/>
+          </a:xfrm>
+          <a:prstGeom prst="line">
+            <a:avLst/>
+          </a:prstGeom>
+          <a:ln w="6350">
+            <a:solidFill>
+              <a:srgbClr val="E9E9E9"/>
+            </a:solidFill>
+            <a:round/>
+          </a:ln>
+        </p:spPr>
+      </p:cxnSp>
+      <p:sp>
+        <p:nvSpPr>
+          <p:cNvPr id="59" name="Rectangle 58"/>
           <p:cNvSpPr/>
           <p:nvPr/>
         </p:nvSpPr>
         <p:spPr>
           <a:xfrm>
-            <a:off x="406400" y="5829300"/>
-            <a:ext cx="2635250" cy="127000"/>
+            <a:off x="5994400" y="3589867"/>
+            <a:ext cx="5791200" cy="791633"/>
+          </a:xfrm>
+          <a:prstGeom prst="rect">
+            <a:avLst/>
+          </a:prstGeom>
+          <a:solidFill>
+            <a:srgbClr val="FCF2F2"/>
+          </a:solidFill>
+          <a:ln>
+            <a:noFill/>
+          </a:ln>
+        </p:spPr>
+        <p:txBody>
+          <a:bodyPr rtlCol="0" anchor="ctr" lIns="0" rIns="0" tIns="0" bIns="0"/>
+          <a:lstStyle/>
+          <a:p>
+            <a:pPr algn="ctr"/>
+          </a:p>
+        </p:txBody>
+      </p:sp>
+      <p:sp>
+        <p:nvSpPr>
+          <p:cNvPr id="60" name="Rectangle 59"/>
+          <p:cNvSpPr/>
+          <p:nvPr/>
+        </p:nvSpPr>
+        <p:spPr>
+          <a:xfrm>
+            <a:off x="5994400" y="3589867"/>
+            <a:ext cx="533400" cy="791633"/>
           </a:xfrm>
           <a:prstGeom prst="rect">
             <a:avLst/>
@@ -37610,168 +37964,41 @@
           </a:ln>
         </p:spPr>
         <p:txBody>
-          <a:bodyPr rtlCol="0" anchor="ctr" lIns="0" rIns="0" tIns="0" bIns="0"/>
-          <a:lstStyle/>
-          <a:p>
-            <a:pPr algn="ctr"/>
-          </a:p>
-        </p:txBody>
-      </p:sp>
-      <p:sp>
-        <p:nvSpPr>
-          <p:cNvPr id="46" name="Rectangle 45"/>
-          <p:cNvSpPr/>
-          <p:nvPr/>
-        </p:nvSpPr>
-        <p:spPr>
-          <a:xfrm>
-            <a:off x="3054350" y="5829300"/>
-            <a:ext cx="1581150" cy="127000"/>
-          </a:xfrm>
-          <a:prstGeom prst="rect">
-            <a:avLst/>
-          </a:prstGeom>
-          <a:solidFill>
-            <a:srgbClr val="D86060"/>
-          </a:solidFill>
-          <a:ln>
-            <a:noFill/>
-          </a:ln>
-        </p:spPr>
-        <p:txBody>
-          <a:bodyPr rtlCol="0" anchor="ctr" lIns="0" rIns="0" tIns="0" bIns="0"/>
-          <a:lstStyle/>
-          <a:p>
-            <a:pPr algn="ctr"/>
-          </a:p>
-        </p:txBody>
-      </p:sp>
-      <p:sp>
-        <p:nvSpPr>
-          <p:cNvPr id="47" name="Rectangle 46"/>
-          <p:cNvSpPr/>
-          <p:nvPr/>
-        </p:nvSpPr>
-        <p:spPr>
-          <a:xfrm>
-            <a:off x="4648200" y="5829300"/>
-            <a:ext cx="263525" cy="127000"/>
-          </a:xfrm>
-          <a:prstGeom prst="rect">
-            <a:avLst/>
-          </a:prstGeom>
-          <a:solidFill>
-            <a:srgbClr val="B8B8B8"/>
-          </a:solidFill>
-          <a:ln>
-            <a:noFill/>
-          </a:ln>
-        </p:spPr>
-        <p:txBody>
-          <a:bodyPr rtlCol="0" anchor="ctr" lIns="0" rIns="0" tIns="0" bIns="0"/>
-          <a:lstStyle/>
-          <a:p>
-            <a:pPr algn="ctr"/>
-          </a:p>
-        </p:txBody>
-      </p:sp>
-      <p:sp>
-        <p:nvSpPr>
-          <p:cNvPr id="48" name="Rectangle 47"/>
-          <p:cNvSpPr/>
-          <p:nvPr/>
-        </p:nvSpPr>
-        <p:spPr>
-          <a:xfrm>
-            <a:off x="4924425" y="5829300"/>
-            <a:ext cx="263525" cy="127000"/>
-          </a:xfrm>
-          <a:prstGeom prst="rect">
-            <a:avLst/>
-          </a:prstGeom>
-          <a:solidFill>
-            <a:srgbClr val="C8C8C8"/>
-          </a:solidFill>
-          <a:ln>
-            <a:noFill/>
-          </a:ln>
-        </p:spPr>
-        <p:txBody>
-          <a:bodyPr rtlCol="0" anchor="ctr" lIns="0" rIns="0" tIns="0" bIns="0"/>
-          <a:lstStyle/>
-          <a:p>
-            <a:pPr algn="ctr"/>
-          </a:p>
-        </p:txBody>
-      </p:sp>
-      <p:sp>
-        <p:nvSpPr>
-          <p:cNvPr id="49" name="Rectangle 48"/>
-          <p:cNvSpPr/>
-          <p:nvPr/>
-        </p:nvSpPr>
-        <p:spPr>
-          <a:xfrm>
-            <a:off x="5200650" y="5829300"/>
-            <a:ext cx="263525" cy="127000"/>
-          </a:xfrm>
-          <a:prstGeom prst="rect">
-            <a:avLst/>
-          </a:prstGeom>
-          <a:solidFill>
-            <a:srgbClr val="D8D8D8"/>
-          </a:solidFill>
-          <a:ln>
-            <a:noFill/>
-          </a:ln>
-        </p:spPr>
-        <p:txBody>
-          <a:bodyPr rtlCol="0" anchor="ctr" lIns="0" rIns="0" tIns="0" bIns="0"/>
-          <a:lstStyle/>
-          <a:p>
-            <a:pPr algn="ctr"/>
-          </a:p>
-        </p:txBody>
-      </p:sp>
-      <p:sp>
-        <p:nvSpPr>
-          <p:cNvPr id="50" name="Rectangle 49"/>
-          <p:cNvSpPr/>
-          <p:nvPr/>
-        </p:nvSpPr>
-        <p:spPr>
-          <a:xfrm>
-            <a:off x="5476875" y="5829300"/>
-            <a:ext cx="263525" cy="127000"/>
-          </a:xfrm>
-          <a:prstGeom prst="rect">
-            <a:avLst/>
-          </a:prstGeom>
-          <a:solidFill>
-            <a:srgbClr val="E6E6E6"/>
-          </a:solidFill>
-          <a:ln>
-            <a:noFill/>
-          </a:ln>
-        </p:spPr>
-        <p:txBody>
-          <a:bodyPr rtlCol="0" anchor="ctr" lIns="0" rIns="0" tIns="0" bIns="0"/>
-          <a:lstStyle/>
-          <a:p>
-            <a:pPr algn="ctr"/>
-          </a:p>
-        </p:txBody>
-      </p:sp>
-      <p:sp>
-        <p:nvSpPr>
-          <p:cNvPr id="51" name="TextBox 50"/>
-          <p:cNvSpPr txBox="1"/>
-          <p:nvPr/>
-        </p:nvSpPr>
-        <p:spPr>
-          <a:xfrm>
-            <a:off x="406400" y="5994400"/>
-            <a:ext cx="5334000" cy="177800"/>
+          <a:bodyPr rtlCol="0" anchor="ctr" lIns="0" rIns="0" tIns="0" bIns="0" wrap="none">
+            <a:noAutofit/>
+          </a:bodyPr>
+          <a:lstStyle/>
+          <a:p>
+            <a:pPr algn="ctr" marL="0" indent="0">
+              <a:lnSpc>
+                <a:spcPts val="1700"/>
+              </a:lnSpc>
+              <a:buNone/>
+            </a:pPr>
+            <a:r>
+              <a:rPr lang="zh-CN" altLang="en-US" sz="1300" b="1">
+                <a:solidFill>
+                  <a:srgbClr val="FFFFFF"/>
+                </a:solidFill>
+                <a:latin typeface="Consolas"/>
+                <a:ea typeface="微软雅黑"/>
+                <a:cs typeface="Consolas"/>
+              </a:rPr>
+              <a:t>7.3</a:t>
+            </a:r>
+          </a:p>
+        </p:txBody>
+      </p:sp>
+      <p:sp>
+        <p:nvSpPr>
+          <p:cNvPr id="61" name="TextBox 60"/>
+          <p:cNvSpPr txBox="1"/>
+          <p:nvPr/>
+        </p:nvSpPr>
+        <p:spPr>
+          <a:xfrm>
+            <a:off x="6654800" y="3687233"/>
+            <a:ext cx="4064000" cy="203200"/>
           </a:xfrm>
           <a:prstGeom prst="rect">
             <a:avLst/>
@@ -37786,187 +38013,6 @@
           <a:p>
             <a:pPr algn="l" marL="0" indent="0">
               <a:lnSpc>
-                <a:spcPts val="1300"/>
-              </a:lnSpc>
-              <a:buNone/>
-            </a:pPr>
-            <a:r>
-              <a:rPr lang="zh-CN" altLang="en-US" sz="850" b="1">
-                <a:solidFill>
-                  <a:srgbClr val="1A1A1A"/>
-                </a:solidFill>
-                <a:latin typeface="微软雅黑"/>
-                <a:ea typeface="微软雅黑"/>
-                <a:cs typeface="微软雅黑"/>
-              </a:rPr>
-              <a:t>直接投入 50</a:t>
-            </a:r>
-            <a:r>
-              <a:rPr lang="zh-CN" altLang="en-US" sz="850" b="0">
-                <a:solidFill>
-                  <a:srgbClr val="666666"/>
-                </a:solidFill>
-                <a:latin typeface="微软雅黑"/>
-                <a:ea typeface="微软雅黑"/>
-                <a:cs typeface="微软雅黑"/>
-              </a:rPr>
-              <a:t>　算力服务器 40 · 工作站 10　　</a:t>
-            </a:r>
-            <a:r>
-              <a:rPr lang="zh-CN" altLang="en-US" sz="850" b="1">
-                <a:solidFill>
-                  <a:srgbClr val="1A1A1A"/>
-                </a:solidFill>
-                <a:latin typeface="微软雅黑"/>
-                <a:ea typeface="微软雅黑"/>
-                <a:cs typeface="微软雅黑"/>
-              </a:rPr>
-              <a:t>人员 30</a:t>
-            </a:r>
-            <a:r>
-              <a:rPr lang="zh-CN" altLang="en-US" sz="850" b="0">
-                <a:solidFill>
-                  <a:srgbClr val="666666"/>
-                </a:solidFill>
-                <a:latin typeface="微软雅黑"/>
-                <a:ea typeface="微软雅黑"/>
-                <a:cs typeface="微软雅黑"/>
-              </a:rPr>
-              <a:t>　　折旧／外协／成果／其他 各 5</a:t>
-            </a:r>
-          </a:p>
-        </p:txBody>
-      </p:sp>
-      <p:sp>
-        <p:nvSpPr>
-          <p:cNvPr id="52" name="TextBox 51"/>
-          <p:cNvSpPr txBox="1"/>
-          <p:nvPr/>
-        </p:nvSpPr>
-        <p:spPr>
-          <a:xfrm>
-            <a:off x="5994400" y="2082800"/>
-            <a:ext cx="5791200" cy="228600"/>
-          </a:xfrm>
-          <a:prstGeom prst="rect">
-            <a:avLst/>
-          </a:prstGeom>
-          <a:noFill/>
-        </p:spPr>
-        <p:txBody>
-          <a:bodyPr wrap="none" anchor="ctr" lIns="0" tIns="0" rIns="0" bIns="0">
-            <a:noAutofit/>
-          </a:bodyPr>
-          <a:lstStyle/>
-          <a:p>
-            <a:pPr algn="l" marL="0" indent="0">
-              <a:lnSpc>
-                <a:spcPts val="1550"/>
-              </a:lnSpc>
-              <a:buNone/>
-            </a:pPr>
-            <a:r>
-              <a:rPr lang="zh-CN" altLang="en-US" sz="1200" b="1">
-                <a:solidFill>
-                  <a:srgbClr val="1A1A1A"/>
-                </a:solidFill>
-                <a:latin typeface="微软雅黑"/>
-                <a:ea typeface="微软雅黑"/>
-                <a:cs typeface="微软雅黑"/>
-              </a:rPr>
-              <a:t>项目子课题与本课题边界</a:t>
-            </a:r>
-          </a:p>
-        </p:txBody>
-      </p:sp>
-      <p:cxnSp>
-        <p:nvCxnSpPr>
-          <p:cNvPr id="53" name="Connector 52"/>
-          <p:cNvCxnSpPr/>
-          <p:nvPr/>
-        </p:nvCxnSpPr>
-        <p:spPr>
-          <a:xfrm>
-            <a:off x="5994400" y="2362200"/>
-            <a:ext cx="5791200" cy="0"/>
-          </a:xfrm>
-          <a:prstGeom prst="line">
-            <a:avLst/>
-          </a:prstGeom>
-          <a:ln w="6350">
-            <a:solidFill>
-              <a:srgbClr val="E9E9E9"/>
-            </a:solidFill>
-            <a:round/>
-          </a:ln>
-        </p:spPr>
-      </p:cxnSp>
-      <p:sp>
-        <p:nvSpPr>
-          <p:cNvPr id="54" name="TextBox 53"/>
-          <p:cNvSpPr txBox="1"/>
-          <p:nvPr/>
-        </p:nvSpPr>
-        <p:spPr>
-          <a:xfrm>
-            <a:off x="5994400" y="2362200"/>
-            <a:ext cx="533400" cy="584200"/>
-          </a:xfrm>
-          <a:prstGeom prst="rect">
-            <a:avLst/>
-          </a:prstGeom>
-          <a:noFill/>
-        </p:spPr>
-        <p:txBody>
-          <a:bodyPr wrap="none" anchor="ctr" lIns="0" tIns="0" rIns="0" bIns="0">
-            <a:noAutofit/>
-          </a:bodyPr>
-          <a:lstStyle/>
-          <a:p>
-            <a:pPr algn="ctr" marL="0" indent="0">
-              <a:lnSpc>
-                <a:spcPts val="1700"/>
-              </a:lnSpc>
-              <a:buNone/>
-            </a:pPr>
-            <a:r>
-              <a:rPr lang="zh-CN" altLang="en-US" sz="1300" b="1">
-                <a:solidFill>
-                  <a:srgbClr val="1A1A1A"/>
-                </a:solidFill>
-                <a:latin typeface="Consolas"/>
-                <a:ea typeface="微软雅黑"/>
-                <a:cs typeface="Consolas"/>
-              </a:rPr>
-              <a:t>7.1</a:t>
-            </a:r>
-          </a:p>
-        </p:txBody>
-      </p:sp>
-      <p:sp>
-        <p:nvSpPr>
-          <p:cNvPr id="55" name="TextBox 54"/>
-          <p:cNvSpPr txBox="1"/>
-          <p:nvPr/>
-        </p:nvSpPr>
-        <p:spPr>
-          <a:xfrm>
-            <a:off x="6654800" y="2444750"/>
-            <a:ext cx="4064000" cy="203200"/>
-          </a:xfrm>
-          <a:prstGeom prst="rect">
-            <a:avLst/>
-          </a:prstGeom>
-          <a:noFill/>
-        </p:spPr>
-        <p:txBody>
-          <a:bodyPr wrap="none" anchor="t" lIns="0" tIns="0" rIns="0" bIns="0">
-            <a:noAutofit/>
-          </a:bodyPr>
-          <a:lstStyle/>
-          <a:p>
-            <a:pPr algn="l" marL="0" indent="0">
-              <a:lnSpc>
                 <a:spcPts val="1600"/>
               </a:lnSpc>
               <a:buNone/>
@@ -37974,229 +38020,17 @@
             <a:r>
               <a:rPr lang="zh-CN" altLang="en-US" sz="1050" b="1">
                 <a:solidFill>
-                  <a:srgbClr val="1A1A1A"/>
-                </a:solidFill>
-                <a:latin typeface="微软雅黑"/>
-                <a:ea typeface="微软雅黑"/>
-                <a:cs typeface="微软雅黑"/>
-              </a:rPr>
-              <a:t>高质量数据集</a:t>
-            </a:r>
-          </a:p>
-        </p:txBody>
-      </p:sp>
-      <p:sp>
-        <p:nvSpPr>
-          <p:cNvPr id="56" name="TextBox 55"/>
-          <p:cNvSpPr txBox="1"/>
-          <p:nvPr/>
-        </p:nvSpPr>
-        <p:spPr>
-          <a:xfrm>
-            <a:off x="6654800" y="2686050"/>
-            <a:ext cx="4978400" cy="190500"/>
-          </a:xfrm>
-          <a:prstGeom prst="rect">
-            <a:avLst/>
-          </a:prstGeom>
-          <a:noFill/>
-        </p:spPr>
-        <p:txBody>
-          <a:bodyPr wrap="square" anchor="t" lIns="0" tIns="0" rIns="0" bIns="0">
-            <a:noAutofit/>
-          </a:bodyPr>
-          <a:lstStyle/>
-          <a:p>
-            <a:pPr algn="l" marL="0" indent="0">
-              <a:lnSpc>
-                <a:spcPts val="1400"/>
-              </a:lnSpc>
-              <a:buNone/>
-            </a:pPr>
-            <a:r>
-              <a:rPr lang="zh-CN" altLang="en-US" sz="950" b="0">
-                <a:solidFill>
-                  <a:srgbClr val="666666"/>
-                </a:solidFill>
-                <a:latin typeface="微软雅黑"/>
-                <a:ea typeface="微软雅黑"/>
-                <a:cs typeface="微软雅黑"/>
-              </a:rPr>
-              <a:t>用其数据规范与接口，不重复建库</a:t>
-            </a:r>
-          </a:p>
-        </p:txBody>
-      </p:sp>
-      <p:cxnSp>
-        <p:nvCxnSpPr>
-          <p:cNvPr id="57" name="Connector 56"/>
-          <p:cNvCxnSpPr/>
-          <p:nvPr/>
-        </p:nvCxnSpPr>
-        <p:spPr>
-          <a:xfrm>
-            <a:off x="5994400" y="2946400"/>
-            <a:ext cx="5791200" cy="0"/>
-          </a:xfrm>
-          <a:prstGeom prst="line">
-            <a:avLst/>
-          </a:prstGeom>
-          <a:ln w="6350">
-            <a:solidFill>
-              <a:srgbClr val="E9E9E9"/>
-            </a:solidFill>
-            <a:round/>
-          </a:ln>
-        </p:spPr>
-      </p:cxnSp>
-      <p:sp>
-        <p:nvSpPr>
-          <p:cNvPr id="58" name="TextBox 57"/>
-          <p:cNvSpPr txBox="1"/>
-          <p:nvPr/>
-        </p:nvSpPr>
-        <p:spPr>
-          <a:xfrm>
-            <a:off x="5994400" y="2946400"/>
-            <a:ext cx="533400" cy="584200"/>
-          </a:xfrm>
-          <a:prstGeom prst="rect">
-            <a:avLst/>
-          </a:prstGeom>
-          <a:noFill/>
-        </p:spPr>
-        <p:txBody>
-          <a:bodyPr wrap="none" anchor="ctr" lIns="0" tIns="0" rIns="0" bIns="0">
-            <a:noAutofit/>
-          </a:bodyPr>
-          <a:lstStyle/>
-          <a:p>
-            <a:pPr algn="ctr" marL="0" indent="0">
-              <a:lnSpc>
-                <a:spcPts val="1700"/>
-              </a:lnSpc>
-              <a:buNone/>
-            </a:pPr>
-            <a:r>
-              <a:rPr lang="zh-CN" altLang="en-US" sz="1300" b="1">
-                <a:solidFill>
-                  <a:srgbClr val="1A1A1A"/>
-                </a:solidFill>
-                <a:latin typeface="Consolas"/>
-                <a:ea typeface="微软雅黑"/>
-                <a:cs typeface="Consolas"/>
-              </a:rPr>
-              <a:t>7.2</a:t>
-            </a:r>
-          </a:p>
-        </p:txBody>
-      </p:sp>
-      <p:sp>
-        <p:nvSpPr>
-          <p:cNvPr id="59" name="TextBox 58"/>
-          <p:cNvSpPr txBox="1"/>
-          <p:nvPr/>
-        </p:nvSpPr>
-        <p:spPr>
-          <a:xfrm>
-            <a:off x="6654800" y="3028950"/>
-            <a:ext cx="4064000" cy="203200"/>
-          </a:xfrm>
-          <a:prstGeom prst="rect">
-            <a:avLst/>
-          </a:prstGeom>
-          <a:noFill/>
-        </p:spPr>
-        <p:txBody>
-          <a:bodyPr wrap="none" anchor="t" lIns="0" tIns="0" rIns="0" bIns="0">
-            <a:noAutofit/>
-          </a:bodyPr>
-          <a:lstStyle/>
-          <a:p>
-            <a:pPr algn="l" marL="0" indent="0">
-              <a:lnSpc>
-                <a:spcPts val="1600"/>
-              </a:lnSpc>
-              <a:buNone/>
-            </a:pPr>
-            <a:r>
-              <a:rPr lang="zh-CN" altLang="en-US" sz="1050" b="1">
-                <a:solidFill>
-                  <a:srgbClr val="1A1A1A"/>
-                </a:solidFill>
-                <a:latin typeface="微软雅黑"/>
-                <a:ea typeface="微软雅黑"/>
-                <a:cs typeface="微软雅黑"/>
-              </a:rPr>
-              <a:t>多物理域建模与仿真智能体</a:t>
-            </a:r>
-          </a:p>
-        </p:txBody>
-      </p:sp>
-      <p:sp>
-        <p:nvSpPr>
-          <p:cNvPr id="60" name="TextBox 59"/>
-          <p:cNvSpPr txBox="1"/>
-          <p:nvPr/>
-        </p:nvSpPr>
-        <p:spPr>
-          <a:xfrm>
-            <a:off x="6654800" y="3270250"/>
-            <a:ext cx="4978400" cy="190500"/>
-          </a:xfrm>
-          <a:prstGeom prst="rect">
-            <a:avLst/>
-          </a:prstGeom>
-          <a:noFill/>
-        </p:spPr>
-        <p:txBody>
-          <a:bodyPr wrap="square" anchor="t" lIns="0" tIns="0" rIns="0" bIns="0">
-            <a:noAutofit/>
-          </a:bodyPr>
-          <a:lstStyle/>
-          <a:p>
-            <a:pPr algn="l" marL="0" indent="0">
-              <a:lnSpc>
-                <a:spcPts val="1400"/>
-              </a:lnSpc>
-              <a:buNone/>
-            </a:pPr>
-            <a:r>
-              <a:rPr lang="zh-CN" altLang="en-US" sz="950" b="0">
-                <a:solidFill>
-                  <a:srgbClr val="666666"/>
-                </a:solidFill>
-                <a:latin typeface="微软雅黑"/>
-                <a:ea typeface="微软雅黑"/>
-                <a:cs typeface="微软雅黑"/>
-              </a:rPr>
-              <a:t>只建验证必需的智能体</a:t>
-            </a:r>
-          </a:p>
-        </p:txBody>
-      </p:sp>
-      <p:cxnSp>
-        <p:nvCxnSpPr>
-          <p:cNvPr id="61" name="Connector 60"/>
-          <p:cNvCxnSpPr/>
-          <p:nvPr/>
-        </p:nvCxnSpPr>
-        <p:spPr>
-          <a:xfrm>
-            <a:off x="5994400" y="3530600"/>
-            <a:ext cx="5791200" cy="0"/>
-          </a:xfrm>
-          <a:prstGeom prst="line">
-            <a:avLst/>
-          </a:prstGeom>
-          <a:ln w="6350">
-            <a:solidFill>
-              <a:srgbClr val="E9E9E9"/>
-            </a:solidFill>
-            <a:round/>
-          </a:ln>
-        </p:spPr>
-      </p:cxnSp>
+                  <a:srgbClr val="C00000"/>
+                </a:solidFill>
+                <a:latin typeface="微软雅黑"/>
+                <a:ea typeface="微软雅黑"/>
+                <a:cs typeface="微软雅黑"/>
+              </a:rPr>
+              <a:t>协同运行与调度引擎</a:t>
+            </a:r>
+          </a:p>
+        </p:txBody>
+      </p:sp>
       <p:sp>
         <p:nvSpPr>
           <p:cNvPr id="62" name="Rectangle 61"/>
@@ -38205,125 +38039,7 @@
         </p:nvSpPr>
         <p:spPr>
           <a:xfrm>
-            <a:off x="5994400" y="3530600"/>
-            <a:ext cx="5791200" cy="762000"/>
-          </a:xfrm>
-          <a:prstGeom prst="rect">
-            <a:avLst/>
-          </a:prstGeom>
-          <a:solidFill>
-            <a:srgbClr val="FCF2F2"/>
-          </a:solidFill>
-          <a:ln>
-            <a:noFill/>
-          </a:ln>
-        </p:spPr>
-        <p:txBody>
-          <a:bodyPr rtlCol="0" anchor="ctr" lIns="0" rIns="0" tIns="0" bIns="0"/>
-          <a:lstStyle/>
-          <a:p>
-            <a:pPr algn="ctr"/>
-          </a:p>
-        </p:txBody>
-      </p:sp>
-      <p:sp>
-        <p:nvSpPr>
-          <p:cNvPr id="63" name="Rectangle 62"/>
-          <p:cNvSpPr/>
-          <p:nvPr/>
-        </p:nvSpPr>
-        <p:spPr>
-          <a:xfrm>
-            <a:off x="5994400" y="3530600"/>
-            <a:ext cx="533400" cy="762000"/>
-          </a:xfrm>
-          <a:prstGeom prst="rect">
-            <a:avLst/>
-          </a:prstGeom>
-          <a:solidFill>
-            <a:srgbClr val="C00000"/>
-          </a:solidFill>
-          <a:ln>
-            <a:noFill/>
-          </a:ln>
-        </p:spPr>
-        <p:txBody>
-          <a:bodyPr rtlCol="0" anchor="ctr" lIns="0" rIns="0" tIns="0" bIns="0" wrap="none">
-            <a:noAutofit/>
-          </a:bodyPr>
-          <a:lstStyle/>
-          <a:p>
-            <a:pPr algn="ctr" marL="0" indent="0">
-              <a:lnSpc>
-                <a:spcPts val="1700"/>
-              </a:lnSpc>
-              <a:buNone/>
-            </a:pPr>
-            <a:r>
-              <a:rPr lang="zh-CN" altLang="en-US" sz="1300" b="1">
-                <a:solidFill>
-                  <a:srgbClr val="FFFFFF"/>
-                </a:solidFill>
-                <a:latin typeface="Consolas"/>
-                <a:ea typeface="微软雅黑"/>
-                <a:cs typeface="Consolas"/>
-              </a:rPr>
-              <a:t>7.3</a:t>
-            </a:r>
-          </a:p>
-        </p:txBody>
-      </p:sp>
-      <p:sp>
-        <p:nvSpPr>
-          <p:cNvPr id="64" name="TextBox 63"/>
-          <p:cNvSpPr txBox="1"/>
-          <p:nvPr/>
-        </p:nvSpPr>
-        <p:spPr>
-          <a:xfrm>
-            <a:off x="6654800" y="3613150"/>
-            <a:ext cx="4064000" cy="203200"/>
-          </a:xfrm>
-          <a:prstGeom prst="rect">
-            <a:avLst/>
-          </a:prstGeom>
-          <a:noFill/>
-        </p:spPr>
-        <p:txBody>
-          <a:bodyPr wrap="none" anchor="t" lIns="0" tIns="0" rIns="0" bIns="0">
-            <a:noAutofit/>
-          </a:bodyPr>
-          <a:lstStyle/>
-          <a:p>
-            <a:pPr algn="l" marL="0" indent="0">
-              <a:lnSpc>
-                <a:spcPts val="1600"/>
-              </a:lnSpc>
-              <a:buNone/>
-            </a:pPr>
-            <a:r>
-              <a:rPr lang="zh-CN" altLang="en-US" sz="1050" b="1">
-                <a:solidFill>
-                  <a:srgbClr val="C00000"/>
-                </a:solidFill>
-                <a:latin typeface="微软雅黑"/>
-                <a:ea typeface="微软雅黑"/>
-                <a:cs typeface="微软雅黑"/>
-              </a:rPr>
-              <a:t>协同运行与调度引擎</a:t>
-            </a:r>
-          </a:p>
-        </p:txBody>
-      </p:sp>
-      <p:sp>
-        <p:nvSpPr>
-          <p:cNvPr id="65" name="Rectangle 64"/>
-          <p:cNvSpPr/>
-          <p:nvPr/>
-        </p:nvSpPr>
-        <p:spPr>
-          <a:xfrm>
-            <a:off x="7943850" y="3625850"/>
+            <a:off x="7943850" y="3699933"/>
             <a:ext cx="431800" cy="177800"/>
           </a:xfrm>
           <a:prstGeom prst="rect">
@@ -38367,13 +38083,13 @@
       </p:sp>
       <p:sp>
         <p:nvSpPr>
-          <p:cNvPr id="66" name="TextBox 65"/>
-          <p:cNvSpPr txBox="1"/>
-          <p:nvPr/>
-        </p:nvSpPr>
-        <p:spPr>
-          <a:xfrm>
-            <a:off x="6654800" y="3854450"/>
+          <p:cNvPr id="63" name="TextBox 62"/>
+          <p:cNvSpPr txBox="1"/>
+          <p:nvPr/>
+        </p:nvSpPr>
+        <p:spPr>
+          <a:xfrm>
+            <a:off x="6654800" y="3928533"/>
             <a:ext cx="4978400" cy="368300"/>
           </a:xfrm>
           <a:prstGeom prst="rect">
@@ -38423,13 +38139,13 @@
       </p:sp>
       <p:cxnSp>
         <p:nvCxnSpPr>
-          <p:cNvPr id="67" name="Connector 66"/>
+          <p:cNvPr id="64" name="Connector 63"/>
           <p:cNvCxnSpPr/>
           <p:nvPr/>
         </p:nvCxnSpPr>
         <p:spPr>
           <a:xfrm>
-            <a:off x="5994400" y="4292600"/>
+            <a:off x="5994400" y="4381500"/>
             <a:ext cx="5791200" cy="0"/>
           </a:xfrm>
           <a:prstGeom prst="line">
@@ -38445,14 +38161,14 @@
       </p:cxnSp>
       <p:sp>
         <p:nvSpPr>
-          <p:cNvPr id="68" name="TextBox 67"/>
-          <p:cNvSpPr txBox="1"/>
-          <p:nvPr/>
-        </p:nvSpPr>
-        <p:spPr>
-          <a:xfrm>
-            <a:off x="5994400" y="4292600"/>
-            <a:ext cx="533400" cy="584200"/>
+          <p:cNvPr id="65" name="TextBox 64"/>
+          <p:cNvSpPr txBox="1"/>
+          <p:nvPr/>
+        </p:nvSpPr>
+        <p:spPr>
+          <a:xfrm>
+            <a:off x="5994400" y="4381500"/>
+            <a:ext cx="533400" cy="613833"/>
           </a:xfrm>
           <a:prstGeom prst="rect">
             <a:avLst/>
@@ -38487,13 +38203,13 @@
       </p:sp>
       <p:sp>
         <p:nvSpPr>
-          <p:cNvPr id="69" name="TextBox 68"/>
-          <p:cNvSpPr txBox="1"/>
-          <p:nvPr/>
-        </p:nvSpPr>
-        <p:spPr>
-          <a:xfrm>
-            <a:off x="6654800" y="4375150"/>
+          <p:cNvPr id="66" name="TextBox 65"/>
+          <p:cNvSpPr txBox="1"/>
+          <p:nvPr/>
+        </p:nvSpPr>
+        <p:spPr>
+          <a:xfrm>
+            <a:off x="6654800" y="4478867"/>
             <a:ext cx="4064000" cy="203200"/>
           </a:xfrm>
           <a:prstGeom prst="rect">
@@ -38529,13 +38245,13 @@
       </p:sp>
       <p:sp>
         <p:nvSpPr>
-          <p:cNvPr id="70" name="TextBox 69"/>
-          <p:cNvSpPr txBox="1"/>
-          <p:nvPr/>
-        </p:nvSpPr>
-        <p:spPr>
-          <a:xfrm>
-            <a:off x="6654800" y="4616450"/>
+          <p:cNvPr id="67" name="TextBox 66"/>
+          <p:cNvSpPr txBox="1"/>
+          <p:nvPr/>
+        </p:nvSpPr>
+        <p:spPr>
+          <a:xfrm>
+            <a:off x="6654800" y="4720167"/>
             <a:ext cx="4978400" cy="190500"/>
           </a:xfrm>
           <a:prstGeom prst="rect">
@@ -38571,13 +38287,13 @@
       </p:sp>
       <p:cxnSp>
         <p:nvCxnSpPr>
-          <p:cNvPr id="71" name="Connector 70"/>
+          <p:cNvPr id="68" name="Connector 67"/>
           <p:cNvCxnSpPr/>
           <p:nvPr/>
         </p:nvCxnSpPr>
         <p:spPr>
           <a:xfrm>
-            <a:off x="5994400" y="4876800"/>
+            <a:off x="5994400" y="4995333"/>
             <a:ext cx="5791200" cy="0"/>
           </a:xfrm>
           <a:prstGeom prst="line">
@@ -38593,14 +38309,14 @@
       </p:cxnSp>
       <p:sp>
         <p:nvSpPr>
-          <p:cNvPr id="72" name="TextBox 71"/>
-          <p:cNvSpPr txBox="1"/>
-          <p:nvPr/>
-        </p:nvSpPr>
-        <p:spPr>
-          <a:xfrm>
-            <a:off x="5994400" y="4876800"/>
-            <a:ext cx="533400" cy="584200"/>
+          <p:cNvPr id="69" name="TextBox 68"/>
+          <p:cNvSpPr txBox="1"/>
+          <p:nvPr/>
+        </p:nvSpPr>
+        <p:spPr>
+          <a:xfrm>
+            <a:off x="5994400" y="4995333"/>
+            <a:ext cx="533400" cy="613833"/>
           </a:xfrm>
           <a:prstGeom prst="rect">
             <a:avLst/>
@@ -38635,13 +38351,13 @@
       </p:sp>
       <p:sp>
         <p:nvSpPr>
-          <p:cNvPr id="73" name="TextBox 72"/>
-          <p:cNvSpPr txBox="1"/>
-          <p:nvPr/>
-        </p:nvSpPr>
-        <p:spPr>
-          <a:xfrm>
-            <a:off x="6654800" y="4959350"/>
+          <p:cNvPr id="70" name="TextBox 69"/>
+          <p:cNvSpPr txBox="1"/>
+          <p:nvPr/>
+        </p:nvSpPr>
+        <p:spPr>
+          <a:xfrm>
+            <a:off x="6654800" y="5092700"/>
             <a:ext cx="4064000" cy="203200"/>
           </a:xfrm>
           <a:prstGeom prst="rect">
@@ -38677,13 +38393,13 @@
       </p:sp>
       <p:sp>
         <p:nvSpPr>
-          <p:cNvPr id="74" name="TextBox 73"/>
-          <p:cNvSpPr txBox="1"/>
-          <p:nvPr/>
-        </p:nvSpPr>
-        <p:spPr>
-          <a:xfrm>
-            <a:off x="6654800" y="5200650"/>
+          <p:cNvPr id="71" name="TextBox 70"/>
+          <p:cNvSpPr txBox="1"/>
+          <p:nvPr/>
+        </p:nvSpPr>
+        <p:spPr>
+          <a:xfrm>
+            <a:off x="6654800" y="5334000"/>
             <a:ext cx="4978400" cy="190500"/>
           </a:xfrm>
           <a:prstGeom prst="rect">
@@ -38719,13 +38435,13 @@
       </p:sp>
       <p:cxnSp>
         <p:nvCxnSpPr>
-          <p:cNvPr id="75" name="Connector 74"/>
+          <p:cNvPr id="72" name="Connector 71"/>
           <p:cNvCxnSpPr/>
           <p:nvPr/>
         </p:nvCxnSpPr>
         <p:spPr>
           <a:xfrm>
-            <a:off x="5994400" y="5461000"/>
+            <a:off x="5994400" y="5609167"/>
             <a:ext cx="5791200" cy="0"/>
           </a:xfrm>
           <a:prstGeom prst="line">
@@ -38741,13 +38457,13 @@
       </p:cxnSp>
       <p:cxnSp>
         <p:nvCxnSpPr>
-          <p:cNvPr id="76" name="Connector 75"/>
+          <p:cNvPr id="73" name="Connector 72"/>
           <p:cNvCxnSpPr/>
           <p:nvPr/>
         </p:nvCxnSpPr>
         <p:spPr>
           <a:xfrm>
-            <a:off x="5994400" y="5588000"/>
+            <a:off x="5994400" y="5736167"/>
             <a:ext cx="5791200" cy="0"/>
           </a:xfrm>
           <a:prstGeom prst="line">
@@ -38764,14 +38480,14 @@
       </p:cxnSp>
       <p:sp>
         <p:nvSpPr>
-          <p:cNvPr id="77" name="TextBox 76"/>
-          <p:cNvSpPr txBox="1"/>
-          <p:nvPr/>
-        </p:nvSpPr>
-        <p:spPr>
-          <a:xfrm>
-            <a:off x="5994400" y="5588000"/>
-            <a:ext cx="533400" cy="584200"/>
+          <p:cNvPr id="74" name="TextBox 73"/>
+          <p:cNvSpPr txBox="1"/>
+          <p:nvPr/>
+        </p:nvSpPr>
+        <p:spPr>
+          <a:xfrm>
+            <a:off x="5994400" y="5736167"/>
+            <a:ext cx="533400" cy="613833"/>
           </a:xfrm>
           <a:prstGeom prst="rect">
             <a:avLst/>
@@ -38806,13 +38522,13 @@
       </p:sp>
       <p:sp>
         <p:nvSpPr>
-          <p:cNvPr id="78" name="TextBox 77"/>
-          <p:cNvSpPr txBox="1"/>
-          <p:nvPr/>
-        </p:nvSpPr>
-        <p:spPr>
-          <a:xfrm>
-            <a:off x="6654800" y="5670550"/>
+          <p:cNvPr id="75" name="TextBox 74"/>
+          <p:cNvSpPr txBox="1"/>
+          <p:nvPr/>
+        </p:nvSpPr>
+        <p:spPr>
+          <a:xfrm>
+            <a:off x="6654800" y="5833533"/>
             <a:ext cx="4064000" cy="203200"/>
           </a:xfrm>
           <a:prstGeom prst="rect">
@@ -38848,13 +38564,13 @@
       </p:sp>
       <p:sp>
         <p:nvSpPr>
-          <p:cNvPr id="79" name="Rectangle 78"/>
+          <p:cNvPr id="76" name="Rectangle 75"/>
           <p:cNvSpPr/>
           <p:nvPr/>
         </p:nvSpPr>
         <p:spPr>
           <a:xfrm>
-            <a:off x="7943850" y="5683250"/>
+            <a:off x="7943850" y="5846233"/>
             <a:ext cx="533400" cy="177800"/>
           </a:xfrm>
           <a:prstGeom prst="rect">
@@ -38895,13 +38611,13 @@
       </p:sp>
       <p:sp>
         <p:nvSpPr>
-          <p:cNvPr id="80" name="TextBox 79"/>
-          <p:cNvSpPr txBox="1"/>
-          <p:nvPr/>
-        </p:nvSpPr>
-        <p:spPr>
-          <a:xfrm>
-            <a:off x="6654800" y="5911850"/>
+          <p:cNvPr id="77" name="TextBox 76"/>
+          <p:cNvSpPr txBox="1"/>
+          <p:nvPr/>
+        </p:nvSpPr>
+        <p:spPr>
+          <a:xfrm>
+            <a:off x="6654800" y="6074833"/>
             <a:ext cx="4978400" cy="190500"/>
           </a:xfrm>
           <a:prstGeom prst="rect">
@@ -38937,13 +38653,13 @@
       </p:sp>
       <p:cxnSp>
         <p:nvCxnSpPr>
-          <p:cNvPr id="81" name="Connector 80"/>
+          <p:cNvPr id="78" name="Connector 77"/>
           <p:cNvCxnSpPr/>
           <p:nvPr/>
         </p:nvCxnSpPr>
         <p:spPr>
           <a:xfrm>
-            <a:off x="5994400" y="6172200"/>
+            <a:off x="5994400" y="6350000"/>
             <a:ext cx="5791200" cy="0"/>
           </a:xfrm>
           <a:prstGeom prst="line">
@@ -49531,7 +49247,21 @@
                 <a:ea typeface="微软雅黑"/>
                 <a:cs typeface="微软雅黑"/>
               </a:rPr>
-              <a:t>✓ 多智能体协同运行与调度引擎（软件1套）</a:t>
+              <a:t>✓ 多智能体协同运行、</a:t>
+            </a:r>
+            <a:br>
+              <a:rPr lang="zh-CN" altLang="en-US" sz="900"/>
+            </a:br>
+            <a:r>
+              <a:rPr lang="zh-CN" altLang="en-US" sz="900" b="1">
+                <a:solidFill>
+                  <a:srgbClr val="B02A2A"/>
+                </a:solidFill>
+                <a:latin typeface="微软雅黑"/>
+                <a:ea typeface="微软雅黑"/>
+                <a:cs typeface="微软雅黑"/>
+              </a:rPr>
+              <a:t>调度引擎</a:t>
             </a:r>
           </a:p>
         </p:txBody>
